--- a/presentacion/TFM_BigSchool_Presentacion.pptx
+++ b/presentacion/TFM_BigSchool_Presentacion.pptx
@@ -36,6 +36,7 @@
     <p:sldId id="281" r:id="rId27"/>
     <p:sldId id="282" r:id="rId28"/>
     <p:sldId id="283" r:id="rId29"/>
+    <p:sldId id="287" r:id="rId38"/>
     <p:sldId id="284" r:id="rId30"/>
     <p:sldId id="285" r:id="rId31"/>
     <p:sldId id="286" r:id="rId32"/>
@@ -21302,7 +21303,7 @@
 </file>
 
 <file path=ppt/slides/slide29.xml><?xml version="1.0" encoding="utf-8"?>
-<p:sld xmlns:a="http://schemas.openxmlformats.org/drawingml/2006/main" xmlns:r="http://schemas.openxmlformats.org/officeDocument/2006/relationships" xmlns:p="http://schemas.openxmlformats.org/presentationml/2006/main">
+<p:sld xmlns:a="http://schemas.openxmlformats.org/drawingml/2006/main" xmlns:p="http://schemas.openxmlformats.org/presentationml/2006/main" xmlns:r="http://schemas.openxmlformats.org/officeDocument/2006/relationships">
   <p:cSld>
     <p:spTree>
       <p:nvGrpSpPr>
@@ -21310,14 +21311,7 @@
         <p:cNvGrpSpPr/>
         <p:nvPr/>
       </p:nvGrpSpPr>
-      <p:grpSpPr>
-        <a:xfrm>
-          <a:off x="0" y="0"/>
-          <a:ext cx="0" cy="0"/>
-          <a:chOff x="0" y="0"/>
-          <a:chExt cx="0" cy="0"/>
-        </a:xfrm>
-      </p:grpSpPr>
+      <p:grpSpPr/>
       <p:sp>
         <p:nvSpPr>
           <p:cNvPr id="2" name="Rectangle 1"/>
@@ -21436,7 +21430,7 @@
                 </a:solidFill>
                 <a:latin typeface="Space Grotesk"/>
               </a:rPr>
-              <a:t>Próximos pasos</a:t>
+              <a:t>Despliegue en Azure</a:t>
             </a:r>
           </a:p>
         </p:txBody>
@@ -21488,170 +21482,2230 @@
       </p:sp>
       <p:sp>
         <p:nvSpPr>
-          <p:cNvPr id="6" name="TextBox 5"/>
-          <p:cNvSpPr txBox="1"/>
-          <p:nvPr/>
-        </p:nvSpPr>
-        <p:spPr>
-          <a:xfrm>
-            <a:off x="777240" y="2103120"/>
-            <a:ext cx="10241280" cy="3108960"/>
-          </a:xfrm>
-          <a:prstGeom prst="rect">
-            <a:avLst/>
-          </a:prstGeom>
-          <a:noFill/>
-        </p:spPr>
-        <p:txBody>
-          <a:bodyPr wrap="square" lIns="0" tIns="0" rIns="0" bIns="0">
-            <a:spAutoFit/>
-          </a:bodyPr>
-          <a:lstStyle/>
-          <a:p>
-            <a:pPr>
-              <a:lnSpc>
-                <a:spcPct val="160000"/>
-              </a:lnSpc>
-              <a:spcAft>
-                <a:spcPts val="400"/>
-              </a:spcAft>
-            </a:pPr>
-            <a:r>
-              <a:rPr sz="1650" b="1">
+          <p:cNvPr id="6" name="Rounded Rectangle 5"/>
+          <p:cNvSpPr/>
+          <p:nvPr/>
+        </p:nvSpPr>
+        <p:spPr>
+          <a:xfrm>
+            <a:off x="685800" y="1874519"/>
+            <a:ext cx="3429000" cy="713232"/>
+          </a:xfrm>
+          <a:prstGeom prst="roundRect">
+            <a:avLst>
+              <a:gd name="adj" fmla="val 6000"/>
+            </a:avLst>
+          </a:prstGeom>
+          <a:solidFill>
+            <a:srgbClr val="101318"/>
+          </a:solidFill>
+          <a:ln w="12700">
+            <a:solidFill>
+              <a:srgbClr val="1D222B"/>
+            </a:solidFill>
+          </a:ln>
+          <a:effectLst/>
+        </p:spPr>
+        <p:style>
+          <a:lnRef idx="1">
+            <a:schemeClr val="accent1"/>
+          </a:lnRef>
+          <a:fillRef idx="3">
+            <a:schemeClr val="accent1"/>
+          </a:fillRef>
+          <a:effectRef idx="2">
+            <a:schemeClr val="accent1"/>
+          </a:effectRef>
+          <a:fontRef idx="minor">
+            <a:schemeClr val="lt1"/>
+          </a:fontRef>
+        </p:style>
+        <p:txBody>
+          <a:bodyPr rtlCol="0" anchor="ctr"/>
+          <a:lstStyle/>
+          <a:p>
+            <a:pPr algn="ctr"/>
+            <a:endParaRPr/>
+          </a:p>
+        </p:txBody>
+      </p:sp>
+      <p:sp>
+        <p:nvSpPr>
+          <p:cNvPr id="7" name="TextBox 6"/>
+          <p:cNvSpPr txBox="1"/>
+          <p:nvPr/>
+        </p:nvSpPr>
+        <p:spPr>
+          <a:xfrm>
+            <a:off x="868680" y="1984247"/>
+            <a:ext cx="822960" cy="457200"/>
+          </a:xfrm>
+          <a:prstGeom prst="rect">
+            <a:avLst/>
+          </a:prstGeom>
+          <a:noFill/>
+        </p:spPr>
+        <p:txBody>
+          <a:bodyPr wrap="square" lIns="0" tIns="0" rIns="0" bIns="0" anchor="t">
+            <a:spAutoFit/>
+          </a:bodyPr>
+          <a:lstStyle/>
+          <a:p>
+            <a:pPr algn="l">
+              <a:lnSpc>
+                <a:spcPct val="115000"/>
+              </a:lnSpc>
+            </a:pPr>
+            <a:r>
+              <a:rPr sz="1500" b="1" i="0">
                 <a:solidFill>
                   <a:srgbClr val="C9A45C"/>
                 </a:solidFill>
-                <a:latin typeface="Space Grotesk"/>
-              </a:rPr>
-              <a:t>▪  </a:t>
-            </a:r>
-            <a:r>
-              <a:rPr sz="1650">
-                <a:solidFill>
-                  <a:srgbClr val="99A0AB"/>
-                </a:solidFill>
-                <a:latin typeface="Space Grotesk"/>
-              </a:rPr>
-              <a:t>Vista consolidada multi-cartera y multi-moneda</a:t>
-            </a:r>
-          </a:p>
-          <a:p>
-            <a:pPr>
-              <a:lnSpc>
-                <a:spcPct val="160000"/>
-              </a:lnSpc>
-              <a:spcAft>
-                <a:spcPts val="400"/>
-              </a:spcAft>
-            </a:pPr>
-            <a:r>
-              <a:rPr sz="1650" b="1">
+                <a:latin typeface="JetBrains Mono"/>
+              </a:rPr>
+              <a:t>RG</a:t>
+            </a:r>
+          </a:p>
+        </p:txBody>
+      </p:sp>
+      <p:sp>
+        <p:nvSpPr>
+          <p:cNvPr id="8" name="TextBox 7"/>
+          <p:cNvSpPr txBox="1"/>
+          <p:nvPr/>
+        </p:nvSpPr>
+        <p:spPr>
+          <a:xfrm>
+            <a:off x="1645920" y="1947671"/>
+            <a:ext cx="1965960" cy="548640"/>
+          </a:xfrm>
+          <a:prstGeom prst="rect">
+            <a:avLst/>
+          </a:prstGeom>
+          <a:noFill/>
+        </p:spPr>
+        <p:txBody>
+          <a:bodyPr wrap="square" lIns="0" tIns="0" rIns="0" bIns="0" anchor="t">
+            <a:spAutoFit/>
+          </a:bodyPr>
+          <a:lstStyle/>
+          <a:p>
+            <a:pPr algn="l">
+              <a:lnSpc>
+                <a:spcPct val="105000"/>
+              </a:lnSpc>
+            </a:pPr>
+            <a:r>
+              <a:rPr sz="1150" b="0" i="0">
+                <a:solidFill>
+                  <a:srgbClr val="E7E9ED"/>
+                </a:solidFill>
+                <a:latin typeface="Space Grotesk"/>
+              </a:rPr>
+              <a:t>Resource Group en Azure (cuenta Eural)</a:t>
+            </a:r>
+          </a:p>
+        </p:txBody>
+      </p:sp>
+      <p:sp>
+        <p:nvSpPr>
+          <p:cNvPr id="9" name="Oval 8"/>
+          <p:cNvSpPr/>
+          <p:nvPr/>
+        </p:nvSpPr>
+        <p:spPr>
+          <a:xfrm>
+            <a:off x="3657600" y="2084831"/>
+            <a:ext cx="292608" cy="292608"/>
+          </a:xfrm>
+          <a:prstGeom prst="ellipse">
+            <a:avLst/>
+          </a:prstGeom>
+          <a:solidFill>
+            <a:srgbClr val="10261B"/>
+          </a:solidFill>
+          <a:ln w="12700">
+            <a:solidFill>
+              <a:srgbClr val="4FBF87"/>
+            </a:solidFill>
+          </a:ln>
+          <a:effectLst/>
+        </p:spPr>
+        <p:style>
+          <a:lnRef idx="1">
+            <a:schemeClr val="accent1"/>
+          </a:lnRef>
+          <a:fillRef idx="3">
+            <a:schemeClr val="accent1"/>
+          </a:fillRef>
+          <a:effectRef idx="2">
+            <a:schemeClr val="accent1"/>
+          </a:effectRef>
+          <a:fontRef idx="minor">
+            <a:schemeClr val="lt1"/>
+          </a:fontRef>
+        </p:style>
+        <p:txBody>
+          <a:bodyPr lIns="0" tIns="0" rIns="0" bIns="0" rtlCol="0" anchor="ctr"/>
+          <a:lstStyle/>
+          <a:p>
+            <a:pPr algn="ctr"/>
+            <a:r>
+              <a:rPr sz="1300" b="1">
+                <a:solidFill>
+                  <a:srgbClr val="4FBF87"/>
+                </a:solidFill>
+                <a:latin typeface="Space Grotesk"/>
+              </a:rPr>
+              <a:t>✓</a:t>
+            </a:r>
+          </a:p>
+        </p:txBody>
+      </p:sp>
+      <p:sp>
+        <p:nvSpPr>
+          <p:cNvPr id="10" name="Rounded Rectangle 9"/>
+          <p:cNvSpPr/>
+          <p:nvPr/>
+        </p:nvSpPr>
+        <p:spPr>
+          <a:xfrm>
+            <a:off x="4279392" y="1874519"/>
+            <a:ext cx="3429000" cy="713232"/>
+          </a:xfrm>
+          <a:prstGeom prst="roundRect">
+            <a:avLst>
+              <a:gd name="adj" fmla="val 6000"/>
+            </a:avLst>
+          </a:prstGeom>
+          <a:solidFill>
+            <a:srgbClr val="101318"/>
+          </a:solidFill>
+          <a:ln w="12700">
+            <a:solidFill>
+              <a:srgbClr val="1D222B"/>
+            </a:solidFill>
+          </a:ln>
+          <a:effectLst/>
+        </p:spPr>
+        <p:style>
+          <a:lnRef idx="1">
+            <a:schemeClr val="accent1"/>
+          </a:lnRef>
+          <a:fillRef idx="3">
+            <a:schemeClr val="accent1"/>
+          </a:fillRef>
+          <a:effectRef idx="2">
+            <a:schemeClr val="accent1"/>
+          </a:effectRef>
+          <a:fontRef idx="minor">
+            <a:schemeClr val="lt1"/>
+          </a:fontRef>
+        </p:style>
+        <p:txBody>
+          <a:bodyPr rtlCol="0" anchor="ctr"/>
+          <a:lstStyle/>
+          <a:p>
+            <a:pPr algn="ctr"/>
+            <a:endParaRPr/>
+          </a:p>
+        </p:txBody>
+      </p:sp>
+      <p:sp>
+        <p:nvSpPr>
+          <p:cNvPr id="11" name="TextBox 10"/>
+          <p:cNvSpPr txBox="1"/>
+          <p:nvPr/>
+        </p:nvSpPr>
+        <p:spPr>
+          <a:xfrm>
+            <a:off x="4462272" y="1984247"/>
+            <a:ext cx="822960" cy="457200"/>
+          </a:xfrm>
+          <a:prstGeom prst="rect">
+            <a:avLst/>
+          </a:prstGeom>
+          <a:noFill/>
+        </p:spPr>
+        <p:txBody>
+          <a:bodyPr wrap="square" lIns="0" tIns="0" rIns="0" bIns="0" anchor="t">
+            <a:spAutoFit/>
+          </a:bodyPr>
+          <a:lstStyle/>
+          <a:p>
+            <a:pPr algn="l">
+              <a:lnSpc>
+                <a:spcPct val="115000"/>
+              </a:lnSpc>
+            </a:pPr>
+            <a:r>
+              <a:rPr sz="1500" b="1" i="0">
                 <a:solidFill>
                   <a:srgbClr val="C9A45C"/>
                 </a:solidFill>
-                <a:latin typeface="Space Grotesk"/>
-              </a:rPr>
-              <a:t>▪  </a:t>
-            </a:r>
-            <a:r>
-              <a:rPr sz="1650">
-                <a:solidFill>
-                  <a:srgbClr val="99A0AB"/>
-                </a:solidFill>
-                <a:latin typeface="Space Grotesk"/>
-              </a:rPr>
-              <a:t>Notificaciones push (PWA)</a:t>
-            </a:r>
-          </a:p>
-          <a:p>
-            <a:pPr>
-              <a:lnSpc>
-                <a:spcPct val="160000"/>
-              </a:lnSpc>
-              <a:spcAft>
-                <a:spcPts val="400"/>
-              </a:spcAft>
-            </a:pPr>
-            <a:r>
-              <a:rPr sz="1650" b="1">
+                <a:latin typeface="JetBrains Mono"/>
+              </a:rPr>
+              <a:t>ENV</a:t>
+            </a:r>
+          </a:p>
+        </p:txBody>
+      </p:sp>
+      <p:sp>
+        <p:nvSpPr>
+          <p:cNvPr id="12" name="TextBox 11"/>
+          <p:cNvSpPr txBox="1"/>
+          <p:nvPr/>
+        </p:nvSpPr>
+        <p:spPr>
+          <a:xfrm>
+            <a:off x="5239512" y="1947671"/>
+            <a:ext cx="1965960" cy="548640"/>
+          </a:xfrm>
+          <a:prstGeom prst="rect">
+            <a:avLst/>
+          </a:prstGeom>
+          <a:noFill/>
+        </p:spPr>
+        <p:txBody>
+          <a:bodyPr wrap="square" lIns="0" tIns="0" rIns="0" bIns="0" anchor="t">
+            <a:spAutoFit/>
+          </a:bodyPr>
+          <a:lstStyle/>
+          <a:p>
+            <a:pPr algn="l">
+              <a:lnSpc>
+                <a:spcPct val="105000"/>
+              </a:lnSpc>
+            </a:pPr>
+            <a:r>
+              <a:rPr sz="1150" b="0" i="0">
+                <a:solidFill>
+                  <a:srgbClr val="E7E9ED"/>
+                </a:solidFill>
+                <a:latin typeface="Space Grotesk"/>
+              </a:rPr>
+              <a:t>Container Apps Environment (North Europe)</a:t>
+            </a:r>
+          </a:p>
+        </p:txBody>
+      </p:sp>
+      <p:sp>
+        <p:nvSpPr>
+          <p:cNvPr id="13" name="Oval 12"/>
+          <p:cNvSpPr/>
+          <p:nvPr/>
+        </p:nvSpPr>
+        <p:spPr>
+          <a:xfrm>
+            <a:off x="7251192" y="2084831"/>
+            <a:ext cx="292608" cy="292608"/>
+          </a:xfrm>
+          <a:prstGeom prst="ellipse">
+            <a:avLst/>
+          </a:prstGeom>
+          <a:solidFill>
+            <a:srgbClr val="10261B"/>
+          </a:solidFill>
+          <a:ln w="12700">
+            <a:solidFill>
+              <a:srgbClr val="4FBF87"/>
+            </a:solidFill>
+          </a:ln>
+          <a:effectLst/>
+        </p:spPr>
+        <p:style>
+          <a:lnRef idx="1">
+            <a:schemeClr val="accent1"/>
+          </a:lnRef>
+          <a:fillRef idx="3">
+            <a:schemeClr val="accent1"/>
+          </a:fillRef>
+          <a:effectRef idx="2">
+            <a:schemeClr val="accent1"/>
+          </a:effectRef>
+          <a:fontRef idx="minor">
+            <a:schemeClr val="lt1"/>
+          </a:fontRef>
+        </p:style>
+        <p:txBody>
+          <a:bodyPr lIns="0" tIns="0" rIns="0" bIns="0" rtlCol="0" anchor="ctr"/>
+          <a:lstStyle/>
+          <a:p>
+            <a:pPr algn="ctr"/>
+            <a:r>
+              <a:rPr sz="1300" b="1">
+                <a:solidFill>
+                  <a:srgbClr val="4FBF87"/>
+                </a:solidFill>
+                <a:latin typeface="Space Grotesk"/>
+              </a:rPr>
+              <a:t>✓</a:t>
+            </a:r>
+          </a:p>
+        </p:txBody>
+      </p:sp>
+      <p:sp>
+        <p:nvSpPr>
+          <p:cNvPr id="14" name="Rounded Rectangle 13"/>
+          <p:cNvSpPr/>
+          <p:nvPr/>
+        </p:nvSpPr>
+        <p:spPr>
+          <a:xfrm>
+            <a:off x="7872984" y="1874519"/>
+            <a:ext cx="3429000" cy="713232"/>
+          </a:xfrm>
+          <a:prstGeom prst="roundRect">
+            <a:avLst>
+              <a:gd name="adj" fmla="val 6000"/>
+            </a:avLst>
+          </a:prstGeom>
+          <a:solidFill>
+            <a:srgbClr val="101318"/>
+          </a:solidFill>
+          <a:ln w="12700">
+            <a:solidFill>
+              <a:srgbClr val="1D222B"/>
+            </a:solidFill>
+          </a:ln>
+          <a:effectLst/>
+        </p:spPr>
+        <p:style>
+          <a:lnRef idx="1">
+            <a:schemeClr val="accent1"/>
+          </a:lnRef>
+          <a:fillRef idx="3">
+            <a:schemeClr val="accent1"/>
+          </a:fillRef>
+          <a:effectRef idx="2">
+            <a:schemeClr val="accent1"/>
+          </a:effectRef>
+          <a:fontRef idx="minor">
+            <a:schemeClr val="lt1"/>
+          </a:fontRef>
+        </p:style>
+        <p:txBody>
+          <a:bodyPr rtlCol="0" anchor="ctr"/>
+          <a:lstStyle/>
+          <a:p>
+            <a:pPr algn="ctr"/>
+            <a:endParaRPr/>
+          </a:p>
+        </p:txBody>
+      </p:sp>
+      <p:sp>
+        <p:nvSpPr>
+          <p:cNvPr id="15" name="TextBox 14"/>
+          <p:cNvSpPr txBox="1"/>
+          <p:nvPr/>
+        </p:nvSpPr>
+        <p:spPr>
+          <a:xfrm>
+            <a:off x="8055864" y="1984247"/>
+            <a:ext cx="822960" cy="457200"/>
+          </a:xfrm>
+          <a:prstGeom prst="rect">
+            <a:avLst/>
+          </a:prstGeom>
+          <a:noFill/>
+        </p:spPr>
+        <p:txBody>
+          <a:bodyPr wrap="square" lIns="0" tIns="0" rIns="0" bIns="0" anchor="t">
+            <a:spAutoFit/>
+          </a:bodyPr>
+          <a:lstStyle/>
+          <a:p>
+            <a:pPr algn="l">
+              <a:lnSpc>
+                <a:spcPct val="115000"/>
+              </a:lnSpc>
+            </a:pPr>
+            <a:r>
+              <a:rPr sz="1500" b="1" i="0">
                 <a:solidFill>
                   <a:srgbClr val="C9A45C"/>
                 </a:solidFill>
-                <a:latin typeface="Space Grotesk"/>
-              </a:rPr>
-              <a:t>▪  </a:t>
-            </a:r>
-            <a:r>
-              <a:rPr sz="1650">
-                <a:solidFill>
-                  <a:srgbClr val="99A0AB"/>
-                </a:solidFill>
-                <a:latin typeface="Space Grotesk"/>
-              </a:rPr>
-              <a:t>Fuentes adicionales de análisis con IA (noticias, feeds automáticos)</a:t>
-            </a:r>
-          </a:p>
-          <a:p>
-            <a:pPr>
-              <a:lnSpc>
-                <a:spcPct val="160000"/>
-              </a:lnSpc>
-              <a:spcAft>
-                <a:spcPts val="400"/>
-              </a:spcAft>
-            </a:pPr>
-            <a:r>
-              <a:rPr sz="1650" b="1">
+                <a:latin typeface="JetBrains Mono"/>
+              </a:rPr>
+              <a:t>API</a:t>
+            </a:r>
+          </a:p>
+        </p:txBody>
+      </p:sp>
+      <p:sp>
+        <p:nvSpPr>
+          <p:cNvPr id="16" name="TextBox 15"/>
+          <p:cNvSpPr txBox="1"/>
+          <p:nvPr/>
+        </p:nvSpPr>
+        <p:spPr>
+          <a:xfrm>
+            <a:off x="8833104" y="1947671"/>
+            <a:ext cx="1965960" cy="548640"/>
+          </a:xfrm>
+          <a:prstGeom prst="rect">
+            <a:avLst/>
+          </a:prstGeom>
+          <a:noFill/>
+        </p:spPr>
+        <p:txBody>
+          <a:bodyPr wrap="square" lIns="0" tIns="0" rIns="0" bIns="0" anchor="t">
+            <a:spAutoFit/>
+          </a:bodyPr>
+          <a:lstStyle/>
+          <a:p>
+            <a:pPr algn="l">
+              <a:lnSpc>
+                <a:spcPct val="105000"/>
+              </a:lnSpc>
+            </a:pPr>
+            <a:r>
+              <a:rPr sz="1150" b="0" i="0">
+                <a:solidFill>
+                  <a:srgbClr val="E7E9ED"/>
+                </a:solidFill>
+                <a:latin typeface="Space Grotesk"/>
+              </a:rPr>
+              <a:t>Backend FastAPI + Uvicorn</a:t>
+            </a:r>
+          </a:p>
+        </p:txBody>
+      </p:sp>
+      <p:sp>
+        <p:nvSpPr>
+          <p:cNvPr id="17" name="Oval 16"/>
+          <p:cNvSpPr/>
+          <p:nvPr/>
+        </p:nvSpPr>
+        <p:spPr>
+          <a:xfrm>
+            <a:off x="10844784" y="2084831"/>
+            <a:ext cx="292608" cy="292608"/>
+          </a:xfrm>
+          <a:prstGeom prst="ellipse">
+            <a:avLst/>
+          </a:prstGeom>
+          <a:solidFill>
+            <a:srgbClr val="10261B"/>
+          </a:solidFill>
+          <a:ln w="12700">
+            <a:solidFill>
+              <a:srgbClr val="4FBF87"/>
+            </a:solidFill>
+          </a:ln>
+          <a:effectLst/>
+        </p:spPr>
+        <p:style>
+          <a:lnRef idx="1">
+            <a:schemeClr val="accent1"/>
+          </a:lnRef>
+          <a:fillRef idx="3">
+            <a:schemeClr val="accent1"/>
+          </a:fillRef>
+          <a:effectRef idx="2">
+            <a:schemeClr val="accent1"/>
+          </a:effectRef>
+          <a:fontRef idx="minor">
+            <a:schemeClr val="lt1"/>
+          </a:fontRef>
+        </p:style>
+        <p:txBody>
+          <a:bodyPr lIns="0" tIns="0" rIns="0" bIns="0" rtlCol="0" anchor="ctr"/>
+          <a:lstStyle/>
+          <a:p>
+            <a:pPr algn="ctr"/>
+            <a:r>
+              <a:rPr sz="1300" b="1">
+                <a:solidFill>
+                  <a:srgbClr val="4FBF87"/>
+                </a:solidFill>
+                <a:latin typeface="Space Grotesk"/>
+              </a:rPr>
+              <a:t>✓</a:t>
+            </a:r>
+          </a:p>
+        </p:txBody>
+      </p:sp>
+      <p:sp>
+        <p:nvSpPr>
+          <p:cNvPr id="18" name="Rounded Rectangle 17"/>
+          <p:cNvSpPr/>
+          <p:nvPr/>
+        </p:nvSpPr>
+        <p:spPr>
+          <a:xfrm>
+            <a:off x="685800" y="2734055"/>
+            <a:ext cx="3429000" cy="713232"/>
+          </a:xfrm>
+          <a:prstGeom prst="roundRect">
+            <a:avLst>
+              <a:gd name="adj" fmla="val 6000"/>
+            </a:avLst>
+          </a:prstGeom>
+          <a:solidFill>
+            <a:srgbClr val="101318"/>
+          </a:solidFill>
+          <a:ln w="12700">
+            <a:solidFill>
+              <a:srgbClr val="1D222B"/>
+            </a:solidFill>
+          </a:ln>
+          <a:effectLst/>
+        </p:spPr>
+        <p:style>
+          <a:lnRef idx="1">
+            <a:schemeClr val="accent1"/>
+          </a:lnRef>
+          <a:fillRef idx="3">
+            <a:schemeClr val="accent1"/>
+          </a:fillRef>
+          <a:effectRef idx="2">
+            <a:schemeClr val="accent1"/>
+          </a:effectRef>
+          <a:fontRef idx="minor">
+            <a:schemeClr val="lt1"/>
+          </a:fontRef>
+        </p:style>
+        <p:txBody>
+          <a:bodyPr rtlCol="0" anchor="ctr"/>
+          <a:lstStyle/>
+          <a:p>
+            <a:pPr algn="ctr"/>
+            <a:endParaRPr/>
+          </a:p>
+        </p:txBody>
+      </p:sp>
+      <p:sp>
+        <p:nvSpPr>
+          <p:cNvPr id="19" name="TextBox 18"/>
+          <p:cNvSpPr txBox="1"/>
+          <p:nvPr/>
+        </p:nvSpPr>
+        <p:spPr>
+          <a:xfrm>
+            <a:off x="868680" y="2843783"/>
+            <a:ext cx="822960" cy="457200"/>
+          </a:xfrm>
+          <a:prstGeom prst="rect">
+            <a:avLst/>
+          </a:prstGeom>
+          <a:noFill/>
+        </p:spPr>
+        <p:txBody>
+          <a:bodyPr wrap="square" lIns="0" tIns="0" rIns="0" bIns="0" anchor="t">
+            <a:spAutoFit/>
+          </a:bodyPr>
+          <a:lstStyle/>
+          <a:p>
+            <a:pPr algn="l">
+              <a:lnSpc>
+                <a:spcPct val="115000"/>
+              </a:lnSpc>
+            </a:pPr>
+            <a:r>
+              <a:rPr sz="1500" b="1" i="0">
                 <a:solidFill>
                   <a:srgbClr val="C9A45C"/>
                 </a:solidFill>
-                <a:latin typeface="Space Grotesk"/>
-              </a:rPr>
-              <a:t>▪  </a:t>
-            </a:r>
-            <a:r>
-              <a:rPr sz="1650">
-                <a:solidFill>
-                  <a:srgbClr val="99A0AB"/>
-                </a:solidFill>
-                <a:latin typeface="Space Grotesk"/>
-              </a:rPr>
-              <a:t>Roles y permisos adicionales según necesidades reales de uso</a:t>
-            </a:r>
-          </a:p>
-          <a:p>
-            <a:pPr>
-              <a:lnSpc>
-                <a:spcPct val="160000"/>
-              </a:lnSpc>
-              <a:spcAft>
-                <a:spcPts val="400"/>
-              </a:spcAft>
-            </a:pPr>
-            <a:r>
-              <a:rPr sz="1650" b="1">
+                <a:latin typeface="JetBrains Mono"/>
+              </a:rPr>
+              <a:t>CEL</a:t>
+            </a:r>
+          </a:p>
+        </p:txBody>
+      </p:sp>
+      <p:sp>
+        <p:nvSpPr>
+          <p:cNvPr id="20" name="TextBox 19"/>
+          <p:cNvSpPr txBox="1"/>
+          <p:nvPr/>
+        </p:nvSpPr>
+        <p:spPr>
+          <a:xfrm>
+            <a:off x="1645920" y="2807207"/>
+            <a:ext cx="1965960" cy="548640"/>
+          </a:xfrm>
+          <a:prstGeom prst="rect">
+            <a:avLst/>
+          </a:prstGeom>
+          <a:noFill/>
+        </p:spPr>
+        <p:txBody>
+          <a:bodyPr wrap="square" lIns="0" tIns="0" rIns="0" bIns="0" anchor="t">
+            <a:spAutoFit/>
+          </a:bodyPr>
+          <a:lstStyle/>
+          <a:p>
+            <a:pPr algn="l">
+              <a:lnSpc>
+                <a:spcPct val="105000"/>
+              </a:lnSpc>
+            </a:pPr>
+            <a:r>
+              <a:rPr sz="1150" b="0" i="0">
+                <a:solidFill>
+                  <a:srgbClr val="E7E9ED"/>
+                </a:solidFill>
+                <a:latin typeface="Space Grotesk"/>
+              </a:rPr>
+              <a:t>Worker Celery (script dedicado)</a:t>
+            </a:r>
+          </a:p>
+        </p:txBody>
+      </p:sp>
+      <p:sp>
+        <p:nvSpPr>
+          <p:cNvPr id="21" name="Oval 20"/>
+          <p:cNvSpPr/>
+          <p:nvPr/>
+        </p:nvSpPr>
+        <p:spPr>
+          <a:xfrm>
+            <a:off x="3657600" y="2944367"/>
+            <a:ext cx="292608" cy="292608"/>
+          </a:xfrm>
+          <a:prstGeom prst="ellipse">
+            <a:avLst/>
+          </a:prstGeom>
+          <a:solidFill>
+            <a:srgbClr val="10261B"/>
+          </a:solidFill>
+          <a:ln w="12700">
+            <a:solidFill>
+              <a:srgbClr val="4FBF87"/>
+            </a:solidFill>
+          </a:ln>
+          <a:effectLst/>
+        </p:spPr>
+        <p:style>
+          <a:lnRef idx="1">
+            <a:schemeClr val="accent1"/>
+          </a:lnRef>
+          <a:fillRef idx="3">
+            <a:schemeClr val="accent1"/>
+          </a:fillRef>
+          <a:effectRef idx="2">
+            <a:schemeClr val="accent1"/>
+          </a:effectRef>
+          <a:fontRef idx="minor">
+            <a:schemeClr val="lt1"/>
+          </a:fontRef>
+        </p:style>
+        <p:txBody>
+          <a:bodyPr lIns="0" tIns="0" rIns="0" bIns="0" rtlCol="0" anchor="ctr"/>
+          <a:lstStyle/>
+          <a:p>
+            <a:pPr algn="ctr"/>
+            <a:r>
+              <a:rPr sz="1300" b="1">
+                <a:solidFill>
+                  <a:srgbClr val="4FBF87"/>
+                </a:solidFill>
+                <a:latin typeface="Space Grotesk"/>
+              </a:rPr>
+              <a:t>✓</a:t>
+            </a:r>
+          </a:p>
+        </p:txBody>
+      </p:sp>
+      <p:sp>
+        <p:nvSpPr>
+          <p:cNvPr id="22" name="Rounded Rectangle 21"/>
+          <p:cNvSpPr/>
+          <p:nvPr/>
+        </p:nvSpPr>
+        <p:spPr>
+          <a:xfrm>
+            <a:off x="4279392" y="2734055"/>
+            <a:ext cx="3429000" cy="713232"/>
+          </a:xfrm>
+          <a:prstGeom prst="roundRect">
+            <a:avLst>
+              <a:gd name="adj" fmla="val 6000"/>
+            </a:avLst>
+          </a:prstGeom>
+          <a:solidFill>
+            <a:srgbClr val="101318"/>
+          </a:solidFill>
+          <a:ln w="12700">
+            <a:solidFill>
+              <a:srgbClr val="1D222B"/>
+            </a:solidFill>
+          </a:ln>
+          <a:effectLst/>
+        </p:spPr>
+        <p:style>
+          <a:lnRef idx="1">
+            <a:schemeClr val="accent1"/>
+          </a:lnRef>
+          <a:fillRef idx="3">
+            <a:schemeClr val="accent1"/>
+          </a:fillRef>
+          <a:effectRef idx="2">
+            <a:schemeClr val="accent1"/>
+          </a:effectRef>
+          <a:fontRef idx="minor">
+            <a:schemeClr val="lt1"/>
+          </a:fontRef>
+        </p:style>
+        <p:txBody>
+          <a:bodyPr rtlCol="0" anchor="ctr"/>
+          <a:lstStyle/>
+          <a:p>
+            <a:pPr algn="ctr"/>
+            <a:endParaRPr/>
+          </a:p>
+        </p:txBody>
+      </p:sp>
+      <p:sp>
+        <p:nvSpPr>
+          <p:cNvPr id="23" name="TextBox 22"/>
+          <p:cNvSpPr txBox="1"/>
+          <p:nvPr/>
+        </p:nvSpPr>
+        <p:spPr>
+          <a:xfrm>
+            <a:off x="4462272" y="2843783"/>
+            <a:ext cx="822960" cy="457200"/>
+          </a:xfrm>
+          <a:prstGeom prst="rect">
+            <a:avLst/>
+          </a:prstGeom>
+          <a:noFill/>
+        </p:spPr>
+        <p:txBody>
+          <a:bodyPr wrap="square" lIns="0" tIns="0" rIns="0" bIns="0" anchor="t">
+            <a:spAutoFit/>
+          </a:bodyPr>
+          <a:lstStyle/>
+          <a:p>
+            <a:pPr algn="l">
+              <a:lnSpc>
+                <a:spcPct val="115000"/>
+              </a:lnSpc>
+            </a:pPr>
+            <a:r>
+              <a:rPr sz="1500" b="1" i="0">
                 <a:solidFill>
                   <a:srgbClr val="C9A45C"/>
                 </a:solidFill>
-                <a:latin typeface="Space Grotesk"/>
-              </a:rPr>
-              <a:t>▪  </a:t>
-            </a:r>
-            <a:r>
-              <a:rPr sz="1650">
-                <a:solidFill>
-                  <a:srgbClr val="99A0AB"/>
-                </a:solidFill>
-                <a:latin typeface="Space Grotesk"/>
-              </a:rPr>
-              <a:t>Generación automática de tipos frontend/backend desde OpenAPI</a:t>
-            </a:r>
-          </a:p>
-        </p:txBody>
-      </p:sp>
-      <p:sp>
-        <p:nvSpPr>
-          <p:cNvPr id="7" name="TextBox 6"/>
+                <a:latin typeface="JetBrains Mono"/>
+              </a:rPr>
+              <a:t>WEB</a:t>
+            </a:r>
+          </a:p>
+        </p:txBody>
+      </p:sp>
+      <p:sp>
+        <p:nvSpPr>
+          <p:cNvPr id="24" name="TextBox 23"/>
+          <p:cNvSpPr txBox="1"/>
+          <p:nvPr/>
+        </p:nvSpPr>
+        <p:spPr>
+          <a:xfrm>
+            <a:off x="5239512" y="2807207"/>
+            <a:ext cx="1965960" cy="548640"/>
+          </a:xfrm>
+          <a:prstGeom prst="rect">
+            <a:avLst/>
+          </a:prstGeom>
+          <a:noFill/>
+        </p:spPr>
+        <p:txBody>
+          <a:bodyPr wrap="square" lIns="0" tIns="0" rIns="0" bIns="0" anchor="t">
+            <a:spAutoFit/>
+          </a:bodyPr>
+          <a:lstStyle/>
+          <a:p>
+            <a:pPr algn="l">
+              <a:lnSpc>
+                <a:spcPct val="105000"/>
+              </a:lnSpc>
+            </a:pPr>
+            <a:r>
+              <a:rPr sz="1150" b="0" i="0">
+                <a:solidFill>
+                  <a:srgbClr val="E7E9ED"/>
+                </a:solidFill>
+                <a:latin typeface="Space Grotesk"/>
+              </a:rPr>
+              <a:t>Frontend Nginx (build estático)</a:t>
+            </a:r>
+          </a:p>
+        </p:txBody>
+      </p:sp>
+      <p:sp>
+        <p:nvSpPr>
+          <p:cNvPr id="25" name="Oval 24"/>
+          <p:cNvSpPr/>
+          <p:nvPr/>
+        </p:nvSpPr>
+        <p:spPr>
+          <a:xfrm>
+            <a:off x="7251192" y="2944367"/>
+            <a:ext cx="292608" cy="292608"/>
+          </a:xfrm>
+          <a:prstGeom prst="ellipse">
+            <a:avLst/>
+          </a:prstGeom>
+          <a:solidFill>
+            <a:srgbClr val="10261B"/>
+          </a:solidFill>
+          <a:ln w="12700">
+            <a:solidFill>
+              <a:srgbClr val="4FBF87"/>
+            </a:solidFill>
+          </a:ln>
+          <a:effectLst/>
+        </p:spPr>
+        <p:style>
+          <a:lnRef idx="1">
+            <a:schemeClr val="accent1"/>
+          </a:lnRef>
+          <a:fillRef idx="3">
+            <a:schemeClr val="accent1"/>
+          </a:fillRef>
+          <a:effectRef idx="2">
+            <a:schemeClr val="accent1"/>
+          </a:effectRef>
+          <a:fontRef idx="minor">
+            <a:schemeClr val="lt1"/>
+          </a:fontRef>
+        </p:style>
+        <p:txBody>
+          <a:bodyPr lIns="0" tIns="0" rIns="0" bIns="0" rtlCol="0" anchor="ctr"/>
+          <a:lstStyle/>
+          <a:p>
+            <a:pPr algn="ctr"/>
+            <a:r>
+              <a:rPr sz="1300" b="1">
+                <a:solidFill>
+                  <a:srgbClr val="4FBF87"/>
+                </a:solidFill>
+                <a:latin typeface="Space Grotesk"/>
+              </a:rPr>
+              <a:t>✓</a:t>
+            </a:r>
+          </a:p>
+        </p:txBody>
+      </p:sp>
+      <p:sp>
+        <p:nvSpPr>
+          <p:cNvPr id="26" name="Rounded Rectangle 25"/>
+          <p:cNvSpPr/>
+          <p:nvPr/>
+        </p:nvSpPr>
+        <p:spPr>
+          <a:xfrm>
+            <a:off x="7872984" y="2734055"/>
+            <a:ext cx="3429000" cy="713232"/>
+          </a:xfrm>
+          <a:prstGeom prst="roundRect">
+            <a:avLst>
+              <a:gd name="adj" fmla="val 6000"/>
+            </a:avLst>
+          </a:prstGeom>
+          <a:solidFill>
+            <a:srgbClr val="101318"/>
+          </a:solidFill>
+          <a:ln w="12700">
+            <a:solidFill>
+              <a:srgbClr val="1D222B"/>
+            </a:solidFill>
+          </a:ln>
+          <a:effectLst/>
+        </p:spPr>
+        <p:style>
+          <a:lnRef idx="1">
+            <a:schemeClr val="accent1"/>
+          </a:lnRef>
+          <a:fillRef idx="3">
+            <a:schemeClr val="accent1"/>
+          </a:fillRef>
+          <a:effectRef idx="2">
+            <a:schemeClr val="accent1"/>
+          </a:effectRef>
+          <a:fontRef idx="minor">
+            <a:schemeClr val="lt1"/>
+          </a:fontRef>
+        </p:style>
+        <p:txBody>
+          <a:bodyPr rtlCol="0" anchor="ctr"/>
+          <a:lstStyle/>
+          <a:p>
+            <a:pPr algn="ctr"/>
+            <a:endParaRPr/>
+          </a:p>
+        </p:txBody>
+      </p:sp>
+      <p:sp>
+        <p:nvSpPr>
+          <p:cNvPr id="27" name="TextBox 26"/>
+          <p:cNvSpPr txBox="1"/>
+          <p:nvPr/>
+        </p:nvSpPr>
+        <p:spPr>
+          <a:xfrm>
+            <a:off x="8055864" y="2843783"/>
+            <a:ext cx="822960" cy="457200"/>
+          </a:xfrm>
+          <a:prstGeom prst="rect">
+            <a:avLst/>
+          </a:prstGeom>
+          <a:noFill/>
+        </p:spPr>
+        <p:txBody>
+          <a:bodyPr wrap="square" lIns="0" tIns="0" rIns="0" bIns="0" anchor="t">
+            <a:spAutoFit/>
+          </a:bodyPr>
+          <a:lstStyle/>
+          <a:p>
+            <a:pPr algn="l">
+              <a:lnSpc>
+                <a:spcPct val="115000"/>
+              </a:lnSpc>
+            </a:pPr>
+            <a:r>
+              <a:rPr sz="1500" b="1" i="0">
+                <a:solidFill>
+                  <a:srgbClr val="C9A45C"/>
+                </a:solidFill>
+                <a:latin typeface="JetBrains Mono"/>
+              </a:rPr>
+              <a:t>PG</a:t>
+            </a:r>
+          </a:p>
+        </p:txBody>
+      </p:sp>
+      <p:sp>
+        <p:nvSpPr>
+          <p:cNvPr id="28" name="TextBox 27"/>
+          <p:cNvSpPr txBox="1"/>
+          <p:nvPr/>
+        </p:nvSpPr>
+        <p:spPr>
+          <a:xfrm>
+            <a:off x="8833104" y="2807207"/>
+            <a:ext cx="1965960" cy="548640"/>
+          </a:xfrm>
+          <a:prstGeom prst="rect">
+            <a:avLst/>
+          </a:prstGeom>
+          <a:noFill/>
+        </p:spPr>
+        <p:txBody>
+          <a:bodyPr wrap="square" lIns="0" tIns="0" rIns="0" bIns="0" anchor="t">
+            <a:spAutoFit/>
+          </a:bodyPr>
+          <a:lstStyle/>
+          <a:p>
+            <a:pPr algn="l">
+              <a:lnSpc>
+                <a:spcPct val="105000"/>
+              </a:lnSpc>
+            </a:pPr>
+            <a:r>
+              <a:rPr sz="1150" b="0" i="0">
+                <a:solidFill>
+                  <a:srgbClr val="E7E9ED"/>
+                </a:solidFill>
+                <a:latin typeface="Space Grotesk"/>
+              </a:rPr>
+              <a:t>PostgreSQL 16 Flexible Server</a:t>
+            </a:r>
+          </a:p>
+        </p:txBody>
+      </p:sp>
+      <p:sp>
+        <p:nvSpPr>
+          <p:cNvPr id="29" name="Oval 28"/>
+          <p:cNvSpPr/>
+          <p:nvPr/>
+        </p:nvSpPr>
+        <p:spPr>
+          <a:xfrm>
+            <a:off x="10844784" y="2944367"/>
+            <a:ext cx="292608" cy="292608"/>
+          </a:xfrm>
+          <a:prstGeom prst="ellipse">
+            <a:avLst/>
+          </a:prstGeom>
+          <a:solidFill>
+            <a:srgbClr val="10261B"/>
+          </a:solidFill>
+          <a:ln w="12700">
+            <a:solidFill>
+              <a:srgbClr val="4FBF87"/>
+            </a:solidFill>
+          </a:ln>
+          <a:effectLst/>
+        </p:spPr>
+        <p:style>
+          <a:lnRef idx="1">
+            <a:schemeClr val="accent1"/>
+          </a:lnRef>
+          <a:fillRef idx="3">
+            <a:schemeClr val="accent1"/>
+          </a:fillRef>
+          <a:effectRef idx="2">
+            <a:schemeClr val="accent1"/>
+          </a:effectRef>
+          <a:fontRef idx="minor">
+            <a:schemeClr val="lt1"/>
+          </a:fontRef>
+        </p:style>
+        <p:txBody>
+          <a:bodyPr lIns="0" tIns="0" rIns="0" bIns="0" rtlCol="0" anchor="ctr"/>
+          <a:lstStyle/>
+          <a:p>
+            <a:pPr algn="ctr"/>
+            <a:r>
+              <a:rPr sz="1300" b="1">
+                <a:solidFill>
+                  <a:srgbClr val="4FBF87"/>
+                </a:solidFill>
+                <a:latin typeface="Space Grotesk"/>
+              </a:rPr>
+              <a:t>✓</a:t>
+            </a:r>
+          </a:p>
+        </p:txBody>
+      </p:sp>
+      <p:sp>
+        <p:nvSpPr>
+          <p:cNvPr id="30" name="Rounded Rectangle 29"/>
+          <p:cNvSpPr/>
+          <p:nvPr/>
+        </p:nvSpPr>
+        <p:spPr>
+          <a:xfrm>
+            <a:off x="685800" y="3593591"/>
+            <a:ext cx="3429000" cy="713232"/>
+          </a:xfrm>
+          <a:prstGeom prst="roundRect">
+            <a:avLst>
+              <a:gd name="adj" fmla="val 6000"/>
+            </a:avLst>
+          </a:prstGeom>
+          <a:solidFill>
+            <a:srgbClr val="101318"/>
+          </a:solidFill>
+          <a:ln w="12700">
+            <a:solidFill>
+              <a:srgbClr val="1D222B"/>
+            </a:solidFill>
+          </a:ln>
+          <a:effectLst/>
+        </p:spPr>
+        <p:style>
+          <a:lnRef idx="1">
+            <a:schemeClr val="accent1"/>
+          </a:lnRef>
+          <a:fillRef idx="3">
+            <a:schemeClr val="accent1"/>
+          </a:fillRef>
+          <a:effectRef idx="2">
+            <a:schemeClr val="accent1"/>
+          </a:effectRef>
+          <a:fontRef idx="minor">
+            <a:schemeClr val="lt1"/>
+          </a:fontRef>
+        </p:style>
+        <p:txBody>
+          <a:bodyPr rtlCol="0" anchor="ctr"/>
+          <a:lstStyle/>
+          <a:p>
+            <a:pPr algn="ctr"/>
+            <a:endParaRPr/>
+          </a:p>
+        </p:txBody>
+      </p:sp>
+      <p:sp>
+        <p:nvSpPr>
+          <p:cNvPr id="31" name="TextBox 30"/>
+          <p:cNvSpPr txBox="1"/>
+          <p:nvPr/>
+        </p:nvSpPr>
+        <p:spPr>
+          <a:xfrm>
+            <a:off x="868680" y="3703319"/>
+            <a:ext cx="822960" cy="457200"/>
+          </a:xfrm>
+          <a:prstGeom prst="rect">
+            <a:avLst/>
+          </a:prstGeom>
+          <a:noFill/>
+        </p:spPr>
+        <p:txBody>
+          <a:bodyPr wrap="square" lIns="0" tIns="0" rIns="0" bIns="0" anchor="t">
+            <a:spAutoFit/>
+          </a:bodyPr>
+          <a:lstStyle/>
+          <a:p>
+            <a:pPr algn="l">
+              <a:lnSpc>
+                <a:spcPct val="115000"/>
+              </a:lnSpc>
+            </a:pPr>
+            <a:r>
+              <a:rPr sz="1500" b="1" i="0">
+                <a:solidFill>
+                  <a:srgbClr val="C9A45C"/>
+                </a:solidFill>
+                <a:latin typeface="JetBrains Mono"/>
+              </a:rPr>
+              <a:t>REDIS</a:t>
+            </a:r>
+          </a:p>
+        </p:txBody>
+      </p:sp>
+      <p:sp>
+        <p:nvSpPr>
+          <p:cNvPr id="32" name="TextBox 31"/>
+          <p:cNvSpPr txBox="1"/>
+          <p:nvPr/>
+        </p:nvSpPr>
+        <p:spPr>
+          <a:xfrm>
+            <a:off x="1645920" y="3666743"/>
+            <a:ext cx="1965960" cy="548640"/>
+          </a:xfrm>
+          <a:prstGeom prst="rect">
+            <a:avLst/>
+          </a:prstGeom>
+          <a:noFill/>
+        </p:spPr>
+        <p:txBody>
+          <a:bodyPr wrap="square" lIns="0" tIns="0" rIns="0" bIns="0" anchor="t">
+            <a:spAutoFit/>
+          </a:bodyPr>
+          <a:lstStyle/>
+          <a:p>
+            <a:pPr algn="l">
+              <a:lnSpc>
+                <a:spcPct val="105000"/>
+              </a:lnSpc>
+            </a:pPr>
+            <a:r>
+              <a:rPr sz="1150" b="0" i="0">
+                <a:solidFill>
+                  <a:srgbClr val="E7E9ED"/>
+                </a:solidFill>
+                <a:latin typeface="Space Grotesk"/>
+              </a:rPr>
+              <a:t>Redis gestionado (Upstash, free tier)</a:t>
+            </a:r>
+          </a:p>
+        </p:txBody>
+      </p:sp>
+      <p:sp>
+        <p:nvSpPr>
+          <p:cNvPr id="33" name="Oval 32"/>
+          <p:cNvSpPr/>
+          <p:nvPr/>
+        </p:nvSpPr>
+        <p:spPr>
+          <a:xfrm>
+            <a:off x="3657600" y="3803903"/>
+            <a:ext cx="292608" cy="292608"/>
+          </a:xfrm>
+          <a:prstGeom prst="ellipse">
+            <a:avLst/>
+          </a:prstGeom>
+          <a:solidFill>
+            <a:srgbClr val="10261B"/>
+          </a:solidFill>
+          <a:ln w="12700">
+            <a:solidFill>
+              <a:srgbClr val="4FBF87"/>
+            </a:solidFill>
+          </a:ln>
+          <a:effectLst/>
+        </p:spPr>
+        <p:style>
+          <a:lnRef idx="1">
+            <a:schemeClr val="accent1"/>
+          </a:lnRef>
+          <a:fillRef idx="3">
+            <a:schemeClr val="accent1"/>
+          </a:fillRef>
+          <a:effectRef idx="2">
+            <a:schemeClr val="accent1"/>
+          </a:effectRef>
+          <a:fontRef idx="minor">
+            <a:schemeClr val="lt1"/>
+          </a:fontRef>
+        </p:style>
+        <p:txBody>
+          <a:bodyPr lIns="0" tIns="0" rIns="0" bIns="0" rtlCol="0" anchor="ctr"/>
+          <a:lstStyle/>
+          <a:p>
+            <a:pPr algn="ctr"/>
+            <a:r>
+              <a:rPr sz="1300" b="1">
+                <a:solidFill>
+                  <a:srgbClr val="4FBF87"/>
+                </a:solidFill>
+                <a:latin typeface="Space Grotesk"/>
+              </a:rPr>
+              <a:t>✓</a:t>
+            </a:r>
+          </a:p>
+        </p:txBody>
+      </p:sp>
+      <p:sp>
+        <p:nvSpPr>
+          <p:cNvPr id="34" name="Rounded Rectangle 33"/>
+          <p:cNvSpPr/>
+          <p:nvPr/>
+        </p:nvSpPr>
+        <p:spPr>
+          <a:xfrm>
+            <a:off x="4279392" y="3593591"/>
+            <a:ext cx="3429000" cy="713232"/>
+          </a:xfrm>
+          <a:prstGeom prst="roundRect">
+            <a:avLst>
+              <a:gd name="adj" fmla="val 6000"/>
+            </a:avLst>
+          </a:prstGeom>
+          <a:solidFill>
+            <a:srgbClr val="101318"/>
+          </a:solidFill>
+          <a:ln w="12700">
+            <a:solidFill>
+              <a:srgbClr val="1D222B"/>
+            </a:solidFill>
+          </a:ln>
+          <a:effectLst/>
+        </p:spPr>
+        <p:style>
+          <a:lnRef idx="1">
+            <a:schemeClr val="accent1"/>
+          </a:lnRef>
+          <a:fillRef idx="3">
+            <a:schemeClr val="accent1"/>
+          </a:fillRef>
+          <a:effectRef idx="2">
+            <a:schemeClr val="accent1"/>
+          </a:effectRef>
+          <a:fontRef idx="minor">
+            <a:schemeClr val="lt1"/>
+          </a:fontRef>
+        </p:style>
+        <p:txBody>
+          <a:bodyPr rtlCol="0" anchor="ctr"/>
+          <a:lstStyle/>
+          <a:p>
+            <a:pPr algn="ctr"/>
+            <a:endParaRPr/>
+          </a:p>
+        </p:txBody>
+      </p:sp>
+      <p:sp>
+        <p:nvSpPr>
+          <p:cNvPr id="35" name="TextBox 34"/>
+          <p:cNvSpPr txBox="1"/>
+          <p:nvPr/>
+        </p:nvSpPr>
+        <p:spPr>
+          <a:xfrm>
+            <a:off x="4462272" y="3703319"/>
+            <a:ext cx="822960" cy="457200"/>
+          </a:xfrm>
+          <a:prstGeom prst="rect">
+            <a:avLst/>
+          </a:prstGeom>
+          <a:noFill/>
+        </p:spPr>
+        <p:txBody>
+          <a:bodyPr wrap="square" lIns="0" tIns="0" rIns="0" bIns="0" anchor="t">
+            <a:spAutoFit/>
+          </a:bodyPr>
+          <a:lstStyle/>
+          <a:p>
+            <a:pPr algn="l">
+              <a:lnSpc>
+                <a:spcPct val="115000"/>
+              </a:lnSpc>
+            </a:pPr>
+            <a:r>
+              <a:rPr sz="1500" b="1" i="0">
+                <a:solidFill>
+                  <a:srgbClr val="C9A45C"/>
+                </a:solidFill>
+                <a:latin typeface="JetBrains Mono"/>
+              </a:rPr>
+              <a:t>GHCR</a:t>
+            </a:r>
+          </a:p>
+        </p:txBody>
+      </p:sp>
+      <p:sp>
+        <p:nvSpPr>
+          <p:cNvPr id="36" name="TextBox 35"/>
+          <p:cNvSpPr txBox="1"/>
+          <p:nvPr/>
+        </p:nvSpPr>
+        <p:spPr>
+          <a:xfrm>
+            <a:off x="5239512" y="3666743"/>
+            <a:ext cx="1965960" cy="548640"/>
+          </a:xfrm>
+          <a:prstGeom prst="rect">
+            <a:avLst/>
+          </a:prstGeom>
+          <a:noFill/>
+        </p:spPr>
+        <p:txBody>
+          <a:bodyPr wrap="square" lIns="0" tIns="0" rIns="0" bIns="0" anchor="t">
+            <a:spAutoFit/>
+          </a:bodyPr>
+          <a:lstStyle/>
+          <a:p>
+            <a:pPr algn="l">
+              <a:lnSpc>
+                <a:spcPct val="105000"/>
+              </a:lnSpc>
+            </a:pPr>
+            <a:r>
+              <a:rPr sz="1150" b="0" i="0">
+                <a:solidFill>
+                  <a:srgbClr val="E7E9ED"/>
+                </a:solidFill>
+                <a:latin typeface="Space Grotesk"/>
+              </a:rPr>
+              <a:t>Imágenes Docker públicas</a:t>
+            </a:r>
+          </a:p>
+        </p:txBody>
+      </p:sp>
+      <p:sp>
+        <p:nvSpPr>
+          <p:cNvPr id="37" name="Oval 36"/>
+          <p:cNvSpPr/>
+          <p:nvPr/>
+        </p:nvSpPr>
+        <p:spPr>
+          <a:xfrm>
+            <a:off x="7251192" y="3803903"/>
+            <a:ext cx="292608" cy="292608"/>
+          </a:xfrm>
+          <a:prstGeom prst="ellipse">
+            <a:avLst/>
+          </a:prstGeom>
+          <a:solidFill>
+            <a:srgbClr val="10261B"/>
+          </a:solidFill>
+          <a:ln w="12700">
+            <a:solidFill>
+              <a:srgbClr val="4FBF87"/>
+            </a:solidFill>
+          </a:ln>
+          <a:effectLst/>
+        </p:spPr>
+        <p:style>
+          <a:lnRef idx="1">
+            <a:schemeClr val="accent1"/>
+          </a:lnRef>
+          <a:fillRef idx="3">
+            <a:schemeClr val="accent1"/>
+          </a:fillRef>
+          <a:effectRef idx="2">
+            <a:schemeClr val="accent1"/>
+          </a:effectRef>
+          <a:fontRef idx="minor">
+            <a:schemeClr val="lt1"/>
+          </a:fontRef>
+        </p:style>
+        <p:txBody>
+          <a:bodyPr lIns="0" tIns="0" rIns="0" bIns="0" rtlCol="0" anchor="ctr"/>
+          <a:lstStyle/>
+          <a:p>
+            <a:pPr algn="ctr"/>
+            <a:r>
+              <a:rPr sz="1300" b="1">
+                <a:solidFill>
+                  <a:srgbClr val="4FBF87"/>
+                </a:solidFill>
+                <a:latin typeface="Space Grotesk"/>
+              </a:rPr>
+              <a:t>✓</a:t>
+            </a:r>
+          </a:p>
+        </p:txBody>
+      </p:sp>
+      <p:sp>
+        <p:nvSpPr>
+          <p:cNvPr id="38" name="Rounded Rectangle 37"/>
+          <p:cNvSpPr/>
+          <p:nvPr/>
+        </p:nvSpPr>
+        <p:spPr>
+          <a:xfrm>
+            <a:off x="7872984" y="3593591"/>
+            <a:ext cx="3429000" cy="713232"/>
+          </a:xfrm>
+          <a:prstGeom prst="roundRect">
+            <a:avLst>
+              <a:gd name="adj" fmla="val 6000"/>
+            </a:avLst>
+          </a:prstGeom>
+          <a:solidFill>
+            <a:srgbClr val="101318"/>
+          </a:solidFill>
+          <a:ln w="12700">
+            <a:solidFill>
+              <a:srgbClr val="1D222B"/>
+            </a:solidFill>
+          </a:ln>
+          <a:effectLst/>
+        </p:spPr>
+        <p:style>
+          <a:lnRef idx="1">
+            <a:schemeClr val="accent1"/>
+          </a:lnRef>
+          <a:fillRef idx="3">
+            <a:schemeClr val="accent1"/>
+          </a:fillRef>
+          <a:effectRef idx="2">
+            <a:schemeClr val="accent1"/>
+          </a:effectRef>
+          <a:fontRef idx="minor">
+            <a:schemeClr val="lt1"/>
+          </a:fontRef>
+        </p:style>
+        <p:txBody>
+          <a:bodyPr rtlCol="0" anchor="ctr"/>
+          <a:lstStyle/>
+          <a:p>
+            <a:pPr algn="ctr"/>
+            <a:endParaRPr/>
+          </a:p>
+        </p:txBody>
+      </p:sp>
+      <p:sp>
+        <p:nvSpPr>
+          <p:cNvPr id="39" name="TextBox 38"/>
+          <p:cNvSpPr txBox="1"/>
+          <p:nvPr/>
+        </p:nvSpPr>
+        <p:spPr>
+          <a:xfrm>
+            <a:off x="8055864" y="3703319"/>
+            <a:ext cx="822960" cy="457200"/>
+          </a:xfrm>
+          <a:prstGeom prst="rect">
+            <a:avLst/>
+          </a:prstGeom>
+          <a:noFill/>
+        </p:spPr>
+        <p:txBody>
+          <a:bodyPr wrap="square" lIns="0" tIns="0" rIns="0" bIns="0" anchor="t">
+            <a:spAutoFit/>
+          </a:bodyPr>
+          <a:lstStyle/>
+          <a:p>
+            <a:pPr algn="l">
+              <a:lnSpc>
+                <a:spcPct val="115000"/>
+              </a:lnSpc>
+            </a:pPr>
+            <a:r>
+              <a:rPr sz="1500" b="1" i="0">
+                <a:solidFill>
+                  <a:srgbClr val="C9A45C"/>
+                </a:solidFill>
+                <a:latin typeface="JetBrains Mono"/>
+              </a:rPr>
+              <a:t>TLS</a:t>
+            </a:r>
+          </a:p>
+        </p:txBody>
+      </p:sp>
+      <p:sp>
+        <p:nvSpPr>
+          <p:cNvPr id="40" name="TextBox 39"/>
+          <p:cNvSpPr txBox="1"/>
+          <p:nvPr/>
+        </p:nvSpPr>
+        <p:spPr>
+          <a:xfrm>
+            <a:off x="8833104" y="3666743"/>
+            <a:ext cx="1965960" cy="548640"/>
+          </a:xfrm>
+          <a:prstGeom prst="rect">
+            <a:avLst/>
+          </a:prstGeom>
+          <a:noFill/>
+        </p:spPr>
+        <p:txBody>
+          <a:bodyPr wrap="square" lIns="0" tIns="0" rIns="0" bIns="0" anchor="t">
+            <a:spAutoFit/>
+          </a:bodyPr>
+          <a:lstStyle/>
+          <a:p>
+            <a:pPr algn="l">
+              <a:lnSpc>
+                <a:spcPct val="105000"/>
+              </a:lnSpc>
+            </a:pPr>
+            <a:r>
+              <a:rPr sz="1150" b="0" i="0">
+                <a:solidFill>
+                  <a:srgbClr val="E7E9ED"/>
+                </a:solidFill>
+                <a:latin typeface="Space Grotesk"/>
+              </a:rPr>
+              <a:t>HTTPS en todos los servicios</a:t>
+            </a:r>
+          </a:p>
+        </p:txBody>
+      </p:sp>
+      <p:sp>
+        <p:nvSpPr>
+          <p:cNvPr id="41" name="Oval 40"/>
+          <p:cNvSpPr/>
+          <p:nvPr/>
+        </p:nvSpPr>
+        <p:spPr>
+          <a:xfrm>
+            <a:off x="10844784" y="3803903"/>
+            <a:ext cx="292608" cy="292608"/>
+          </a:xfrm>
+          <a:prstGeom prst="ellipse">
+            <a:avLst/>
+          </a:prstGeom>
+          <a:solidFill>
+            <a:srgbClr val="10261B"/>
+          </a:solidFill>
+          <a:ln w="12700">
+            <a:solidFill>
+              <a:srgbClr val="4FBF87"/>
+            </a:solidFill>
+          </a:ln>
+          <a:effectLst/>
+        </p:spPr>
+        <p:style>
+          <a:lnRef idx="1">
+            <a:schemeClr val="accent1"/>
+          </a:lnRef>
+          <a:fillRef idx="3">
+            <a:schemeClr val="accent1"/>
+          </a:fillRef>
+          <a:effectRef idx="2">
+            <a:schemeClr val="accent1"/>
+          </a:effectRef>
+          <a:fontRef idx="minor">
+            <a:schemeClr val="lt1"/>
+          </a:fontRef>
+        </p:style>
+        <p:txBody>
+          <a:bodyPr lIns="0" tIns="0" rIns="0" bIns="0" rtlCol="0" anchor="ctr"/>
+          <a:lstStyle/>
+          <a:p>
+            <a:pPr algn="ctr"/>
+            <a:r>
+              <a:rPr sz="1300" b="1">
+                <a:solidFill>
+                  <a:srgbClr val="4FBF87"/>
+                </a:solidFill>
+                <a:latin typeface="Space Grotesk"/>
+              </a:rPr>
+              <a:t>✓</a:t>
+            </a:r>
+          </a:p>
+        </p:txBody>
+      </p:sp>
+      <p:sp>
+        <p:nvSpPr>
+          <p:cNvPr id="42" name="Rounded Rectangle 41"/>
+          <p:cNvSpPr/>
+          <p:nvPr/>
+        </p:nvSpPr>
+        <p:spPr>
+          <a:xfrm>
+            <a:off x="685800" y="4453127"/>
+            <a:ext cx="3429000" cy="713232"/>
+          </a:xfrm>
+          <a:prstGeom prst="roundRect">
+            <a:avLst>
+              <a:gd name="adj" fmla="val 6000"/>
+            </a:avLst>
+          </a:prstGeom>
+          <a:solidFill>
+            <a:srgbClr val="101318"/>
+          </a:solidFill>
+          <a:ln w="12700">
+            <a:solidFill>
+              <a:srgbClr val="1D222B"/>
+            </a:solidFill>
+          </a:ln>
+          <a:effectLst/>
+        </p:spPr>
+        <p:style>
+          <a:lnRef idx="1">
+            <a:schemeClr val="accent1"/>
+          </a:lnRef>
+          <a:fillRef idx="3">
+            <a:schemeClr val="accent1"/>
+          </a:fillRef>
+          <a:effectRef idx="2">
+            <a:schemeClr val="accent1"/>
+          </a:effectRef>
+          <a:fontRef idx="minor">
+            <a:schemeClr val="lt1"/>
+          </a:fontRef>
+        </p:style>
+        <p:txBody>
+          <a:bodyPr rtlCol="0" anchor="ctr"/>
+          <a:lstStyle/>
+          <a:p>
+            <a:pPr algn="ctr"/>
+            <a:endParaRPr/>
+          </a:p>
+        </p:txBody>
+      </p:sp>
+      <p:sp>
+        <p:nvSpPr>
+          <p:cNvPr id="43" name="TextBox 42"/>
+          <p:cNvSpPr txBox="1"/>
+          <p:nvPr/>
+        </p:nvSpPr>
+        <p:spPr>
+          <a:xfrm>
+            <a:off x="868680" y="4562855"/>
+            <a:ext cx="822960" cy="457200"/>
+          </a:xfrm>
+          <a:prstGeom prst="rect">
+            <a:avLst/>
+          </a:prstGeom>
+          <a:noFill/>
+        </p:spPr>
+        <p:txBody>
+          <a:bodyPr wrap="square" lIns="0" tIns="0" rIns="0" bIns="0" anchor="t">
+            <a:spAutoFit/>
+          </a:bodyPr>
+          <a:lstStyle/>
+          <a:p>
+            <a:pPr algn="l">
+              <a:lnSpc>
+                <a:spcPct val="115000"/>
+              </a:lnSpc>
+            </a:pPr>
+            <a:r>
+              <a:rPr sz="1500" b="1" i="0">
+                <a:solidFill>
+                  <a:srgbClr val="C9A45C"/>
+                </a:solidFill>
+                <a:latin typeface="JetBrains Mono"/>
+              </a:rPr>
+              <a:t>CSRF</a:t>
+            </a:r>
+          </a:p>
+        </p:txBody>
+      </p:sp>
+      <p:sp>
+        <p:nvSpPr>
+          <p:cNvPr id="44" name="TextBox 43"/>
+          <p:cNvSpPr txBox="1"/>
+          <p:nvPr/>
+        </p:nvSpPr>
+        <p:spPr>
+          <a:xfrm>
+            <a:off x="1645920" y="4526279"/>
+            <a:ext cx="1965960" cy="548640"/>
+          </a:xfrm>
+          <a:prstGeom prst="rect">
+            <a:avLst/>
+          </a:prstGeom>
+          <a:noFill/>
+        </p:spPr>
+        <p:txBody>
+          <a:bodyPr wrap="square" lIns="0" tIns="0" rIns="0" bIns="0" anchor="t">
+            <a:spAutoFit/>
+          </a:bodyPr>
+          <a:lstStyle/>
+          <a:p>
+            <a:pPr algn="l">
+              <a:lnSpc>
+                <a:spcPct val="105000"/>
+              </a:lnSpc>
+            </a:pPr>
+            <a:r>
+              <a:rPr sz="1150" b="0" i="0">
+                <a:solidFill>
+                  <a:srgbClr val="E7E9ED"/>
+                </a:solidFill>
+                <a:latin typeface="Space Grotesk"/>
+              </a:rPr>
+              <a:t>Token CSRF en body de login (dominios cruzados)</a:t>
+            </a:r>
+          </a:p>
+        </p:txBody>
+      </p:sp>
+      <p:sp>
+        <p:nvSpPr>
+          <p:cNvPr id="45" name="Oval 44"/>
+          <p:cNvSpPr/>
+          <p:nvPr/>
+        </p:nvSpPr>
+        <p:spPr>
+          <a:xfrm>
+            <a:off x="3657600" y="4663439"/>
+            <a:ext cx="292608" cy="292608"/>
+          </a:xfrm>
+          <a:prstGeom prst="ellipse">
+            <a:avLst/>
+          </a:prstGeom>
+          <a:solidFill>
+            <a:srgbClr val="10261B"/>
+          </a:solidFill>
+          <a:ln w="12700">
+            <a:solidFill>
+              <a:srgbClr val="4FBF87"/>
+            </a:solidFill>
+          </a:ln>
+          <a:effectLst/>
+        </p:spPr>
+        <p:style>
+          <a:lnRef idx="1">
+            <a:schemeClr val="accent1"/>
+          </a:lnRef>
+          <a:fillRef idx="3">
+            <a:schemeClr val="accent1"/>
+          </a:fillRef>
+          <a:effectRef idx="2">
+            <a:schemeClr val="accent1"/>
+          </a:effectRef>
+          <a:fontRef idx="minor">
+            <a:schemeClr val="lt1"/>
+          </a:fontRef>
+        </p:style>
+        <p:txBody>
+          <a:bodyPr lIns="0" tIns="0" rIns="0" bIns="0" rtlCol="0" anchor="ctr"/>
+          <a:lstStyle/>
+          <a:p>
+            <a:pPr algn="ctr"/>
+            <a:r>
+              <a:rPr sz="1300" b="1">
+                <a:solidFill>
+                  <a:srgbClr val="4FBF87"/>
+                </a:solidFill>
+                <a:latin typeface="Space Grotesk"/>
+              </a:rPr>
+              <a:t>✓</a:t>
+            </a:r>
+          </a:p>
+        </p:txBody>
+      </p:sp>
+      <p:sp>
+        <p:nvSpPr>
+          <p:cNvPr id="46" name="Rounded Rectangle 45"/>
+          <p:cNvSpPr/>
+          <p:nvPr/>
+        </p:nvSpPr>
+        <p:spPr>
+          <a:xfrm>
+            <a:off x="4279392" y="4453127"/>
+            <a:ext cx="3429000" cy="713232"/>
+          </a:xfrm>
+          <a:prstGeom prst="roundRect">
+            <a:avLst>
+              <a:gd name="adj" fmla="val 6000"/>
+            </a:avLst>
+          </a:prstGeom>
+          <a:solidFill>
+            <a:srgbClr val="101318"/>
+          </a:solidFill>
+          <a:ln w="12700">
+            <a:solidFill>
+              <a:srgbClr val="1D222B"/>
+            </a:solidFill>
+          </a:ln>
+          <a:effectLst/>
+        </p:spPr>
+        <p:style>
+          <a:lnRef idx="1">
+            <a:schemeClr val="accent1"/>
+          </a:lnRef>
+          <a:fillRef idx="3">
+            <a:schemeClr val="accent1"/>
+          </a:fillRef>
+          <a:effectRef idx="2">
+            <a:schemeClr val="accent1"/>
+          </a:effectRef>
+          <a:fontRef idx="minor">
+            <a:schemeClr val="lt1"/>
+          </a:fontRef>
+        </p:style>
+        <p:txBody>
+          <a:bodyPr rtlCol="0" anchor="ctr"/>
+          <a:lstStyle/>
+          <a:p>
+            <a:pPr algn="ctr"/>
+            <a:endParaRPr/>
+          </a:p>
+        </p:txBody>
+      </p:sp>
+      <p:sp>
+        <p:nvSpPr>
+          <p:cNvPr id="47" name="TextBox 46"/>
+          <p:cNvSpPr txBox="1"/>
+          <p:nvPr/>
+        </p:nvSpPr>
+        <p:spPr>
+          <a:xfrm>
+            <a:off x="4462272" y="4562855"/>
+            <a:ext cx="822960" cy="457200"/>
+          </a:xfrm>
+          <a:prstGeom prst="rect">
+            <a:avLst/>
+          </a:prstGeom>
+          <a:noFill/>
+        </p:spPr>
+        <p:txBody>
+          <a:bodyPr wrap="square" lIns="0" tIns="0" rIns="0" bIns="0" anchor="t">
+            <a:spAutoFit/>
+          </a:bodyPr>
+          <a:lstStyle/>
+          <a:p>
+            <a:pPr algn="l">
+              <a:lnSpc>
+                <a:spcPct val="115000"/>
+              </a:lnSpc>
+            </a:pPr>
+            <a:r>
+              <a:rPr sz="1500" b="1" i="0">
+                <a:solidFill>
+                  <a:srgbClr val="C9A45C"/>
+                </a:solidFill>
+                <a:latin typeface="JetBrains Mono"/>
+              </a:rPr>
+              <a:t>MAN</a:t>
+            </a:r>
+          </a:p>
+        </p:txBody>
+      </p:sp>
+      <p:sp>
+        <p:nvSpPr>
+          <p:cNvPr id="48" name="TextBox 47"/>
+          <p:cNvSpPr txBox="1"/>
+          <p:nvPr/>
+        </p:nvSpPr>
+        <p:spPr>
+          <a:xfrm>
+            <a:off x="5239512" y="4526279"/>
+            <a:ext cx="1965960" cy="548640"/>
+          </a:xfrm>
+          <a:prstGeom prst="rect">
+            <a:avLst/>
+          </a:prstGeom>
+          <a:noFill/>
+        </p:spPr>
+        <p:txBody>
+          <a:bodyPr wrap="square" lIns="0" tIns="0" rIns="0" bIns="0" anchor="t">
+            <a:spAutoFit/>
+          </a:bodyPr>
+          <a:lstStyle/>
+          <a:p>
+            <a:pPr algn="l">
+              <a:lnSpc>
+                <a:spcPct val="105000"/>
+              </a:lnSpc>
+            </a:pPr>
+            <a:r>
+              <a:rPr sz="1150" b="0" i="0">
+                <a:solidFill>
+                  <a:srgbClr val="E7E9ED"/>
+                </a:solidFill>
+                <a:latin typeface="Space Grotesk"/>
+              </a:rPr>
+              <a:t>Despliegue manual, sin CI/CD (Spec 00d §5)</a:t>
+            </a:r>
+          </a:p>
+        </p:txBody>
+      </p:sp>
+      <p:sp>
+        <p:nvSpPr>
+          <p:cNvPr id="49" name="Oval 48"/>
+          <p:cNvSpPr/>
+          <p:nvPr/>
+        </p:nvSpPr>
+        <p:spPr>
+          <a:xfrm>
+            <a:off x="7251192" y="4663439"/>
+            <a:ext cx="292608" cy="292608"/>
+          </a:xfrm>
+          <a:prstGeom prst="ellipse">
+            <a:avLst/>
+          </a:prstGeom>
+          <a:solidFill>
+            <a:srgbClr val="10261B"/>
+          </a:solidFill>
+          <a:ln w="12700">
+            <a:solidFill>
+              <a:srgbClr val="4FBF87"/>
+            </a:solidFill>
+          </a:ln>
+          <a:effectLst/>
+        </p:spPr>
+        <p:style>
+          <a:lnRef idx="1">
+            <a:schemeClr val="accent1"/>
+          </a:lnRef>
+          <a:fillRef idx="3">
+            <a:schemeClr val="accent1"/>
+          </a:fillRef>
+          <a:effectRef idx="2">
+            <a:schemeClr val="accent1"/>
+          </a:effectRef>
+          <a:fontRef idx="minor">
+            <a:schemeClr val="lt1"/>
+          </a:fontRef>
+        </p:style>
+        <p:txBody>
+          <a:bodyPr lIns="0" tIns="0" rIns="0" bIns="0" rtlCol="0" anchor="ctr"/>
+          <a:lstStyle/>
+          <a:p>
+            <a:pPr algn="ctr"/>
+            <a:r>
+              <a:rPr sz="1300" b="1">
+                <a:solidFill>
+                  <a:srgbClr val="4FBF87"/>
+                </a:solidFill>
+                <a:latin typeface="Space Grotesk"/>
+              </a:rPr>
+              <a:t>✓</a:t>
+            </a:r>
+          </a:p>
+        </p:txBody>
+      </p:sp>
+      <p:sp>
+        <p:nvSpPr>
+          <p:cNvPr id="50" name="Rounded Rectangle 49"/>
+          <p:cNvSpPr/>
+          <p:nvPr/>
+        </p:nvSpPr>
+        <p:spPr>
+          <a:xfrm>
+            <a:off x="7872984" y="4453127"/>
+            <a:ext cx="3429000" cy="713232"/>
+          </a:xfrm>
+          <a:prstGeom prst="roundRect">
+            <a:avLst>
+              <a:gd name="adj" fmla="val 6000"/>
+            </a:avLst>
+          </a:prstGeom>
+          <a:solidFill>
+            <a:srgbClr val="101318"/>
+          </a:solidFill>
+          <a:ln w="12700">
+            <a:solidFill>
+              <a:srgbClr val="1D222B"/>
+            </a:solidFill>
+          </a:ln>
+          <a:effectLst/>
+        </p:spPr>
+        <p:style>
+          <a:lnRef idx="1">
+            <a:schemeClr val="accent1"/>
+          </a:lnRef>
+          <a:fillRef idx="3">
+            <a:schemeClr val="accent1"/>
+          </a:fillRef>
+          <a:effectRef idx="2">
+            <a:schemeClr val="accent1"/>
+          </a:effectRef>
+          <a:fontRef idx="minor">
+            <a:schemeClr val="lt1"/>
+          </a:fontRef>
+        </p:style>
+        <p:txBody>
+          <a:bodyPr rtlCol="0" anchor="ctr"/>
+          <a:lstStyle/>
+          <a:p>
+            <a:pPr algn="ctr"/>
+            <a:endParaRPr/>
+          </a:p>
+        </p:txBody>
+      </p:sp>
+      <p:sp>
+        <p:nvSpPr>
+          <p:cNvPr id="51" name="TextBox 50"/>
+          <p:cNvSpPr txBox="1"/>
+          <p:nvPr/>
+        </p:nvSpPr>
+        <p:spPr>
+          <a:xfrm>
+            <a:off x="8055864" y="4562855"/>
+            <a:ext cx="822960" cy="457200"/>
+          </a:xfrm>
+          <a:prstGeom prst="rect">
+            <a:avLst/>
+          </a:prstGeom>
+          <a:noFill/>
+        </p:spPr>
+        <p:txBody>
+          <a:bodyPr wrap="square" lIns="0" tIns="0" rIns="0" bIns="0" anchor="t">
+            <a:spAutoFit/>
+          </a:bodyPr>
+          <a:lstStyle/>
+          <a:p>
+            <a:pPr algn="l">
+              <a:lnSpc>
+                <a:spcPct val="115000"/>
+              </a:lnSpc>
+            </a:pPr>
+            <a:r>
+              <a:rPr sz="1500" b="1" i="0">
+                <a:solidFill>
+                  <a:srgbClr val="C9A45C"/>
+                </a:solidFill>
+                <a:latin typeface="JetBrains Mono"/>
+              </a:rPr>
+              <a:t>€</a:t>
+            </a:r>
+          </a:p>
+        </p:txBody>
+      </p:sp>
+      <p:sp>
+        <p:nvSpPr>
+          <p:cNvPr id="52" name="TextBox 51"/>
+          <p:cNvSpPr txBox="1"/>
+          <p:nvPr/>
+        </p:nvSpPr>
+        <p:spPr>
+          <a:xfrm>
+            <a:off x="8833104" y="4526279"/>
+            <a:ext cx="1965960" cy="548640"/>
+          </a:xfrm>
+          <a:prstGeom prst="rect">
+            <a:avLst/>
+          </a:prstGeom>
+          <a:noFill/>
+        </p:spPr>
+        <p:txBody>
+          <a:bodyPr wrap="square" lIns="0" tIns="0" rIns="0" bIns="0" anchor="t">
+            <a:spAutoFit/>
+          </a:bodyPr>
+          <a:lstStyle/>
+          <a:p>
+            <a:pPr algn="l">
+              <a:lnSpc>
+                <a:spcPct val="105000"/>
+              </a:lnSpc>
+            </a:pPr>
+            <a:r>
+              <a:rPr sz="1150" b="0" i="0">
+                <a:solidFill>
+                  <a:srgbClr val="E7E9ED"/>
+                </a:solidFill>
+                <a:latin typeface="Space Grotesk"/>
+              </a:rPr>
+              <a:t>~20-21 €/mes</a:t>
+            </a:r>
+          </a:p>
+        </p:txBody>
+      </p:sp>
+      <p:sp>
+        <p:nvSpPr>
+          <p:cNvPr id="53" name="Oval 52"/>
+          <p:cNvSpPr/>
+          <p:nvPr/>
+        </p:nvSpPr>
+        <p:spPr>
+          <a:xfrm>
+            <a:off x="10844784" y="4663439"/>
+            <a:ext cx="292608" cy="292608"/>
+          </a:xfrm>
+          <a:prstGeom prst="ellipse">
+            <a:avLst/>
+          </a:prstGeom>
+          <a:solidFill>
+            <a:srgbClr val="10261B"/>
+          </a:solidFill>
+          <a:ln w="12700">
+            <a:solidFill>
+              <a:srgbClr val="4FBF87"/>
+            </a:solidFill>
+          </a:ln>
+          <a:effectLst/>
+        </p:spPr>
+        <p:style>
+          <a:lnRef idx="1">
+            <a:schemeClr val="accent1"/>
+          </a:lnRef>
+          <a:fillRef idx="3">
+            <a:schemeClr val="accent1"/>
+          </a:fillRef>
+          <a:effectRef idx="2">
+            <a:schemeClr val="accent1"/>
+          </a:effectRef>
+          <a:fontRef idx="minor">
+            <a:schemeClr val="lt1"/>
+          </a:fontRef>
+        </p:style>
+        <p:txBody>
+          <a:bodyPr lIns="0" tIns="0" rIns="0" bIns="0" rtlCol="0" anchor="ctr"/>
+          <a:lstStyle/>
+          <a:p>
+            <a:pPr algn="ctr"/>
+            <a:r>
+              <a:rPr sz="1300" b="1">
+                <a:solidFill>
+                  <a:srgbClr val="4FBF87"/>
+                </a:solidFill>
+                <a:latin typeface="Space Grotesk"/>
+              </a:rPr>
+              <a:t>✓</a:t>
+            </a:r>
+          </a:p>
+        </p:txBody>
+      </p:sp>
+      <p:sp>
+        <p:nvSpPr>
+          <p:cNvPr id="54" name="TextBox 53"/>
+          <p:cNvSpPr txBox="1"/>
+          <p:nvPr/>
+        </p:nvSpPr>
+        <p:spPr>
+          <a:xfrm>
+            <a:off x="685800" y="5358383"/>
+            <a:ext cx="10241280" cy="365760"/>
+          </a:xfrm>
+          <a:prstGeom prst="rect">
+            <a:avLst/>
+          </a:prstGeom>
+          <a:noFill/>
+        </p:spPr>
+        <p:txBody>
+          <a:bodyPr wrap="square" lIns="0" tIns="0" rIns="0" bIns="0" anchor="t">
+            <a:spAutoFit/>
+          </a:bodyPr>
+          <a:lstStyle/>
+          <a:p>
+            <a:pPr algn="l">
+              <a:lnSpc>
+                <a:spcPct val="115000"/>
+              </a:lnSpc>
+            </a:pPr>
+            <a:r>
+              <a:rPr sz="1150" b="0" i="0">
+                <a:solidFill>
+                  <a:srgbClr val="5C6472"/>
+                </a:solidFill>
+                <a:latin typeface="JetBrains Mono"/>
+              </a:rPr>
+              <a:t>Bug real resuelto en producción: la cookie CSRF era invisible entre frontend y backend (subdominios distintos) — runbook completo en Changeset C09.</a:t>
+            </a:r>
+          </a:p>
+        </p:txBody>
+      </p:sp>
+      <p:sp>
+        <p:nvSpPr>
+          <p:cNvPr id="55" name="TextBox 54"/>
           <p:cNvSpPr txBox="1"/>
           <p:nvPr/>
         </p:nvSpPr>
@@ -21690,7 +23744,7 @@
       </p:sp>
       <p:sp>
         <p:nvSpPr>
-          <p:cNvPr id="8" name="TextBox 7"/>
+          <p:cNvPr id="56" name="TextBox 55"/>
           <p:cNvSpPr txBox="1"/>
           <p:nvPr/>
         </p:nvSpPr>
@@ -21729,7 +23783,7 @@
       </p:sp>
       <p:sp>
         <p:nvSpPr>
-          <p:cNvPr id="9" name="TextBox 8"/>
+          <p:cNvPr id="57" name="TextBox 56"/>
           <p:cNvSpPr txBox="1"/>
           <p:nvPr/>
         </p:nvSpPr>
@@ -21768,7 +23822,7 @@
       </p:sp>
       <p:sp>
         <p:nvSpPr>
-          <p:cNvPr id="10" name="Rectangle 9"/>
+          <p:cNvPr id="58" name="Rectangle 57"/>
           <p:cNvSpPr/>
           <p:nvPr/>
         </p:nvSpPr>
@@ -22309,7 +24363,7 @@
                 </a:solidFill>
                 <a:latin typeface="JetBrains Mono"/>
               </a:rPr>
-              <a:t>CIERRE</a:t>
+              <a:t>08 · ESTADO ACTUAL</a:t>
             </a:r>
           </a:p>
         </p:txBody>
@@ -22348,7 +24402,7 @@
                 </a:solidFill>
                 <a:latin typeface="Space Grotesk"/>
               </a:rPr>
-              <a:t>En resumen</a:t>
+              <a:t>Próximos pasos</a:t>
             </a:r>
           </a:p>
         </p:txBody>
@@ -22407,7 +24461,7 @@
         <p:spPr>
           <a:xfrm>
             <a:off x="777240" y="2103120"/>
-            <a:ext cx="10241280" cy="3291840"/>
+            <a:ext cx="10241280" cy="3108960"/>
           </a:xfrm>
           <a:prstGeom prst="rect">
             <a:avLst/>
@@ -22422,14 +24476,14 @@
           <a:p>
             <a:pPr>
               <a:lnSpc>
-                <a:spcPct val="145000"/>
+                <a:spcPct val="160000"/>
               </a:lnSpc>
               <a:spcAft>
                 <a:spcPts val="400"/>
               </a:spcAft>
             </a:pPr>
             <a:r>
-              <a:rPr sz="1550" b="1">
+              <a:rPr sz="1650" b="1">
                 <a:solidFill>
                   <a:srgbClr val="C9A45C"/>
                 </a:solidFill>
@@ -22438,35 +24492,26 @@
               <a:t>▪  </a:t>
             </a:r>
             <a:r>
-              <a:rPr sz="1550" b="1">
-                <a:solidFill>
-                  <a:srgbClr val="E7E9ED"/>
-                </a:solidFill>
-                <a:latin typeface="Space Grotesk"/>
-              </a:rPr>
-              <a:t>Todo en un solo lugar.</a:t>
-            </a:r>
-            <a:r>
-              <a:rPr sz="1550">
+              <a:rPr sz="1650">
                 <a:solidFill>
                   <a:srgbClr val="99A0AB"/>
                 </a:solidFill>
                 <a:latin typeface="Space Grotesk"/>
               </a:rPr>
-              <a:t> cartera, indicadores, alertas e informes conectados</a:t>
+              <a:t>Vista consolidada multi-cartera y multi-moneda</a:t>
             </a:r>
           </a:p>
           <a:p>
             <a:pPr>
               <a:lnSpc>
-                <a:spcPct val="145000"/>
+                <a:spcPct val="160000"/>
               </a:lnSpc>
               <a:spcAft>
                 <a:spcPts val="400"/>
               </a:spcAft>
             </a:pPr>
             <a:r>
-              <a:rPr sz="1550" b="1">
+              <a:rPr sz="1650" b="1">
                 <a:solidFill>
                   <a:srgbClr val="C9A45C"/>
                 </a:solidFill>
@@ -22475,35 +24520,26 @@
               <a:t>▪  </a:t>
             </a:r>
             <a:r>
-              <a:rPr sz="1550" b="1">
-                <a:solidFill>
-                  <a:srgbClr val="E7E9ED"/>
-                </a:solidFill>
-                <a:latin typeface="Space Grotesk"/>
-              </a:rPr>
-              <a:t>Resiliencia de datos.</a:t>
-            </a:r>
-            <a:r>
-              <a:rPr sz="1550">
+              <a:rPr sz="1650">
                 <a:solidFill>
                   <a:srgbClr val="99A0AB"/>
                 </a:solidFill>
                 <a:latin typeface="Space Grotesk"/>
               </a:rPr>
-              <a:t> un hub técnico con cascada de proveedores que nunca falla en silencio</a:t>
+              <a:t>Notificaciones push (PWA)</a:t>
             </a:r>
           </a:p>
           <a:p>
             <a:pPr>
               <a:lnSpc>
-                <a:spcPct val="145000"/>
+                <a:spcPct val="160000"/>
               </a:lnSpc>
               <a:spcAft>
                 <a:spcPts val="400"/>
               </a:spcAft>
             </a:pPr>
             <a:r>
-              <a:rPr sz="1550" b="1">
+              <a:rPr sz="1650" b="1">
                 <a:solidFill>
                   <a:srgbClr val="C9A45C"/>
                 </a:solidFill>
@@ -22512,35 +24548,26 @@
               <a:t>▪  </a:t>
             </a:r>
             <a:r>
-              <a:rPr sz="1550" b="1">
-                <a:solidFill>
-                  <a:srgbClr val="E7E9ED"/>
-                </a:solidFill>
-                <a:latin typeface="Space Grotesk"/>
-              </a:rPr>
-              <a:t>IA aplicada de verdad.</a:t>
-            </a:r>
-            <a:r>
-              <a:rPr sz="1550">
+              <a:rPr sz="1650">
                 <a:solidFill>
                   <a:srgbClr val="99A0AB"/>
                 </a:solidFill>
                 <a:latin typeface="Space Grotesk"/>
               </a:rPr>
-              <a:t> extracción real de señales financieras, con proveedores intercambiables</a:t>
+              <a:t>Fuentes adicionales de análisis con IA (noticias, feeds automáticos)</a:t>
             </a:r>
           </a:p>
           <a:p>
             <a:pPr>
               <a:lnSpc>
-                <a:spcPct val="145000"/>
+                <a:spcPct val="160000"/>
               </a:lnSpc>
               <a:spcAft>
                 <a:spcPts val="400"/>
               </a:spcAft>
             </a:pPr>
             <a:r>
-              <a:rPr sz="1550" b="1">
+              <a:rPr sz="1650" b="1">
                 <a:solidFill>
                   <a:srgbClr val="C9A45C"/>
                 </a:solidFill>
@@ -22549,35 +24576,26 @@
               <a:t>▪  </a:t>
             </a:r>
             <a:r>
-              <a:rPr sz="1550" b="1">
-                <a:solidFill>
-                  <a:srgbClr val="E7E9ED"/>
-                </a:solidFill>
-                <a:latin typeface="Space Grotesk"/>
-              </a:rPr>
-              <a:t>Administración robusta.</a:t>
-            </a:r>
-            <a:r>
-              <a:rPr sz="1550">
+              <a:rPr sz="1650">
                 <a:solidFill>
                   <a:srgbClr val="99A0AB"/>
                 </a:solidFill>
                 <a:latin typeface="Space Grotesk"/>
               </a:rPr>
-              <a:t> roles y permisos granulares, control total del hub sin tocar código</a:t>
+              <a:t>Roles y permisos adicionales según necesidades reales de uso</a:t>
             </a:r>
           </a:p>
           <a:p>
             <a:pPr>
               <a:lnSpc>
-                <a:spcPct val="145000"/>
+                <a:spcPct val="160000"/>
               </a:lnSpc>
               <a:spcAft>
                 <a:spcPts val="400"/>
               </a:spcAft>
             </a:pPr>
             <a:r>
-              <a:rPr sz="1550" b="1">
+              <a:rPr sz="1650" b="1">
                 <a:solidFill>
                   <a:srgbClr val="C9A45C"/>
                 </a:solidFill>
@@ -22586,22 +24604,13 @@
               <a:t>▪  </a:t>
             </a:r>
             <a:r>
-              <a:rPr sz="1550" b="1">
-                <a:solidFill>
-                  <a:srgbClr val="E7E9ED"/>
-                </a:solidFill>
-                <a:latin typeface="Space Grotesk"/>
-              </a:rPr>
-              <a:t>Arquitectura sin deuda técnica.</a:t>
-            </a:r>
-            <a:r>
-              <a:rPr sz="1550">
+              <a:rPr sz="1650">
                 <a:solidFill>
                   <a:srgbClr val="99A0AB"/>
                 </a:solidFill>
                 <a:latin typeface="Space Grotesk"/>
               </a:rPr>
-              <a:t> estándares web, stack aburrido y fiable, todo documentado en specs</a:t>
+              <a:t>Generación automática de tipos frontend/backend desde OpenAPI</a:t>
             </a:r>
           </a:p>
         </p:txBody>
@@ -22679,7 +24688,7 @@
                 </a:solidFill>
                 <a:latin typeface="JetBrains Mono"/>
               </a:rPr>
-              <a:t>CIERRE</a:t>
+              <a:t>08 · ESTADO ACTUAL</a:t>
             </a:r>
           </a:p>
         </p:txBody>
@@ -22777,6 +24786,569 @@
 </file>
 
 <file path=ppt/slides/slide31.xml><?xml version="1.0" encoding="utf-8"?>
+<p:sld xmlns:a="http://schemas.openxmlformats.org/drawingml/2006/main" xmlns:r="http://schemas.openxmlformats.org/officeDocument/2006/relationships" xmlns:p="http://schemas.openxmlformats.org/presentationml/2006/main">
+  <p:cSld>
+    <p:spTree>
+      <p:nvGrpSpPr>
+        <p:cNvPr id="1" name=""/>
+        <p:cNvGrpSpPr/>
+        <p:nvPr/>
+      </p:nvGrpSpPr>
+      <p:grpSpPr>
+        <a:xfrm>
+          <a:off x="0" y="0"/>
+          <a:ext cx="0" cy="0"/>
+          <a:chOff x="0" y="0"/>
+          <a:chExt cx="0" cy="0"/>
+        </a:xfrm>
+      </p:grpSpPr>
+      <p:sp>
+        <p:nvSpPr>
+          <p:cNvPr id="2" name="Rectangle 1"/>
+          <p:cNvSpPr/>
+          <p:nvPr/>
+        </p:nvSpPr>
+        <p:spPr>
+          <a:xfrm>
+            <a:off x="0" y="0"/>
+            <a:ext cx="12191695" cy="6858000"/>
+          </a:xfrm>
+          <a:prstGeom prst="rect">
+            <a:avLst/>
+          </a:prstGeom>
+          <a:solidFill>
+            <a:srgbClr val="08090B"/>
+          </a:solidFill>
+          <a:ln>
+            <a:noFill/>
+          </a:ln>
+          <a:effectLst/>
+        </p:spPr>
+        <p:style>
+          <a:lnRef idx="1">
+            <a:schemeClr val="accent1"/>
+          </a:lnRef>
+          <a:fillRef idx="3">
+            <a:schemeClr val="accent1"/>
+          </a:fillRef>
+          <a:effectRef idx="2">
+            <a:schemeClr val="accent1"/>
+          </a:effectRef>
+          <a:fontRef idx="minor">
+            <a:schemeClr val="lt1"/>
+          </a:fontRef>
+        </p:style>
+        <p:txBody>
+          <a:bodyPr rtlCol="0" anchor="ctr"/>
+          <a:lstStyle/>
+          <a:p>
+            <a:pPr algn="ctr"/>
+            <a:endParaRPr/>
+          </a:p>
+        </p:txBody>
+      </p:sp>
+      <p:sp>
+        <p:nvSpPr>
+          <p:cNvPr id="3" name="TextBox 2"/>
+          <p:cNvSpPr txBox="1"/>
+          <p:nvPr/>
+        </p:nvSpPr>
+        <p:spPr>
+          <a:xfrm>
+            <a:off x="685800" y="457200"/>
+            <a:ext cx="10789920" cy="365760"/>
+          </a:xfrm>
+          <a:prstGeom prst="rect">
+            <a:avLst/>
+          </a:prstGeom>
+          <a:noFill/>
+        </p:spPr>
+        <p:txBody>
+          <a:bodyPr wrap="square" lIns="0" tIns="0" rIns="0" bIns="0" anchor="t">
+            <a:spAutoFit/>
+          </a:bodyPr>
+          <a:lstStyle/>
+          <a:p>
+            <a:pPr algn="l">
+              <a:lnSpc>
+                <a:spcPct val="115000"/>
+              </a:lnSpc>
+            </a:pPr>
+            <a:r>
+              <a:rPr sz="1300" b="1" i="0">
+                <a:solidFill>
+                  <a:srgbClr val="C9A45C"/>
+                </a:solidFill>
+                <a:latin typeface="JetBrains Mono"/>
+              </a:rPr>
+              <a:t>CIERRE</a:t>
+            </a:r>
+          </a:p>
+        </p:txBody>
+      </p:sp>
+      <p:sp>
+        <p:nvSpPr>
+          <p:cNvPr id="4" name="TextBox 3"/>
+          <p:cNvSpPr txBox="1"/>
+          <p:nvPr/>
+        </p:nvSpPr>
+        <p:spPr>
+          <a:xfrm>
+            <a:off x="685800" y="786384"/>
+            <a:ext cx="10789920" cy="731520"/>
+          </a:xfrm>
+          <a:prstGeom prst="rect">
+            <a:avLst/>
+          </a:prstGeom>
+          <a:noFill/>
+        </p:spPr>
+        <p:txBody>
+          <a:bodyPr wrap="square" lIns="0" tIns="0" rIns="0" bIns="0" anchor="t">
+            <a:spAutoFit/>
+          </a:bodyPr>
+          <a:lstStyle/>
+          <a:p>
+            <a:pPr algn="l">
+              <a:lnSpc>
+                <a:spcPct val="115000"/>
+              </a:lnSpc>
+            </a:pPr>
+            <a:r>
+              <a:rPr sz="3000" b="1" i="0">
+                <a:solidFill>
+                  <a:srgbClr val="E7E9ED"/>
+                </a:solidFill>
+                <a:latin typeface="Space Grotesk"/>
+              </a:rPr>
+              <a:t>En resumen</a:t>
+            </a:r>
+          </a:p>
+        </p:txBody>
+      </p:sp>
+      <p:sp>
+        <p:nvSpPr>
+          <p:cNvPr id="5" name="Rectangle 4"/>
+          <p:cNvSpPr/>
+          <p:nvPr/>
+        </p:nvSpPr>
+        <p:spPr>
+          <a:xfrm>
+            <a:off x="685800" y="1444752"/>
+            <a:ext cx="502920" cy="38100"/>
+          </a:xfrm>
+          <a:prstGeom prst="rect">
+            <a:avLst/>
+          </a:prstGeom>
+          <a:solidFill>
+            <a:srgbClr val="C9A45C"/>
+          </a:solidFill>
+          <a:ln>
+            <a:noFill/>
+          </a:ln>
+          <a:effectLst/>
+        </p:spPr>
+        <p:style>
+          <a:lnRef idx="1">
+            <a:schemeClr val="accent1"/>
+          </a:lnRef>
+          <a:fillRef idx="3">
+            <a:schemeClr val="accent1"/>
+          </a:fillRef>
+          <a:effectRef idx="2">
+            <a:schemeClr val="accent1"/>
+          </a:effectRef>
+          <a:fontRef idx="minor">
+            <a:schemeClr val="lt1"/>
+          </a:fontRef>
+        </p:style>
+        <p:txBody>
+          <a:bodyPr rtlCol="0" anchor="ctr"/>
+          <a:lstStyle/>
+          <a:p>
+            <a:pPr algn="ctr"/>
+            <a:endParaRPr/>
+          </a:p>
+        </p:txBody>
+      </p:sp>
+      <p:sp>
+        <p:nvSpPr>
+          <p:cNvPr id="6" name="TextBox 5"/>
+          <p:cNvSpPr txBox="1"/>
+          <p:nvPr/>
+        </p:nvSpPr>
+        <p:spPr>
+          <a:xfrm>
+            <a:off x="777240" y="2103120"/>
+            <a:ext cx="10241280" cy="3291840"/>
+          </a:xfrm>
+          <a:prstGeom prst="rect">
+            <a:avLst/>
+          </a:prstGeom>
+          <a:noFill/>
+        </p:spPr>
+        <p:txBody>
+          <a:bodyPr wrap="square" lIns="0" tIns="0" rIns="0" bIns="0">
+            <a:spAutoFit/>
+          </a:bodyPr>
+          <a:lstStyle/>
+          <a:p>
+            <a:pPr>
+              <a:lnSpc>
+                <a:spcPct val="145000"/>
+              </a:lnSpc>
+              <a:spcAft>
+                <a:spcPts val="400"/>
+              </a:spcAft>
+            </a:pPr>
+            <a:r>
+              <a:rPr sz="1550" b="1">
+                <a:solidFill>
+                  <a:srgbClr val="C9A45C"/>
+                </a:solidFill>
+                <a:latin typeface="Space Grotesk"/>
+              </a:rPr>
+              <a:t>▪  </a:t>
+            </a:r>
+            <a:r>
+              <a:rPr sz="1550" b="1">
+                <a:solidFill>
+                  <a:srgbClr val="E7E9ED"/>
+                </a:solidFill>
+                <a:latin typeface="Space Grotesk"/>
+              </a:rPr>
+              <a:t>Todo en un solo lugar.</a:t>
+            </a:r>
+            <a:r>
+              <a:rPr sz="1550">
+                <a:solidFill>
+                  <a:srgbClr val="99A0AB"/>
+                </a:solidFill>
+                <a:latin typeface="Space Grotesk"/>
+              </a:rPr>
+              <a:t> cartera, indicadores, alertas e informes conectados</a:t>
+            </a:r>
+          </a:p>
+          <a:p>
+            <a:pPr>
+              <a:lnSpc>
+                <a:spcPct val="145000"/>
+              </a:lnSpc>
+              <a:spcAft>
+                <a:spcPts val="400"/>
+              </a:spcAft>
+            </a:pPr>
+            <a:r>
+              <a:rPr sz="1550" b="1">
+                <a:solidFill>
+                  <a:srgbClr val="C9A45C"/>
+                </a:solidFill>
+                <a:latin typeface="Space Grotesk"/>
+              </a:rPr>
+              <a:t>▪  </a:t>
+            </a:r>
+            <a:r>
+              <a:rPr sz="1550" b="1">
+                <a:solidFill>
+                  <a:srgbClr val="E7E9ED"/>
+                </a:solidFill>
+                <a:latin typeface="Space Grotesk"/>
+              </a:rPr>
+              <a:t>Resiliencia de datos.</a:t>
+            </a:r>
+            <a:r>
+              <a:rPr sz="1550">
+                <a:solidFill>
+                  <a:srgbClr val="99A0AB"/>
+                </a:solidFill>
+                <a:latin typeface="Space Grotesk"/>
+              </a:rPr>
+              <a:t> un hub técnico con cascada de proveedores que nunca falla en silencio</a:t>
+            </a:r>
+          </a:p>
+          <a:p>
+            <a:pPr>
+              <a:lnSpc>
+                <a:spcPct val="145000"/>
+              </a:lnSpc>
+              <a:spcAft>
+                <a:spcPts val="400"/>
+              </a:spcAft>
+            </a:pPr>
+            <a:r>
+              <a:rPr sz="1550" b="1">
+                <a:solidFill>
+                  <a:srgbClr val="C9A45C"/>
+                </a:solidFill>
+                <a:latin typeface="Space Grotesk"/>
+              </a:rPr>
+              <a:t>▪  </a:t>
+            </a:r>
+            <a:r>
+              <a:rPr sz="1550" b="1">
+                <a:solidFill>
+                  <a:srgbClr val="E7E9ED"/>
+                </a:solidFill>
+                <a:latin typeface="Space Grotesk"/>
+              </a:rPr>
+              <a:t>IA aplicada de verdad.</a:t>
+            </a:r>
+            <a:r>
+              <a:rPr sz="1550">
+                <a:solidFill>
+                  <a:srgbClr val="99A0AB"/>
+                </a:solidFill>
+                <a:latin typeface="Space Grotesk"/>
+              </a:rPr>
+              <a:t> extracción real de señales financieras, con proveedores intercambiables</a:t>
+            </a:r>
+          </a:p>
+          <a:p>
+            <a:pPr>
+              <a:lnSpc>
+                <a:spcPct val="145000"/>
+              </a:lnSpc>
+              <a:spcAft>
+                <a:spcPts val="400"/>
+              </a:spcAft>
+            </a:pPr>
+            <a:r>
+              <a:rPr sz="1550" b="1">
+                <a:solidFill>
+                  <a:srgbClr val="C9A45C"/>
+                </a:solidFill>
+                <a:latin typeface="Space Grotesk"/>
+              </a:rPr>
+              <a:t>▪  </a:t>
+            </a:r>
+            <a:r>
+              <a:rPr sz="1550" b="1">
+                <a:solidFill>
+                  <a:srgbClr val="E7E9ED"/>
+                </a:solidFill>
+                <a:latin typeface="Space Grotesk"/>
+              </a:rPr>
+              <a:t>Administración robusta.</a:t>
+            </a:r>
+            <a:r>
+              <a:rPr sz="1550">
+                <a:solidFill>
+                  <a:srgbClr val="99A0AB"/>
+                </a:solidFill>
+                <a:latin typeface="Space Grotesk"/>
+              </a:rPr>
+              <a:t> roles y permisos granulares, control total del hub sin tocar código</a:t>
+            </a:r>
+          </a:p>
+          <a:p>
+            <a:pPr>
+              <a:lnSpc>
+                <a:spcPct val="145000"/>
+              </a:lnSpc>
+              <a:spcAft>
+                <a:spcPts val="400"/>
+              </a:spcAft>
+            </a:pPr>
+            <a:r>
+              <a:rPr sz="1550" b="1">
+                <a:solidFill>
+                  <a:srgbClr val="C9A45C"/>
+                </a:solidFill>
+                <a:latin typeface="Space Grotesk"/>
+              </a:rPr>
+              <a:t>▪  </a:t>
+            </a:r>
+            <a:r>
+              <a:rPr sz="1550" b="1">
+                <a:solidFill>
+                  <a:srgbClr val="E7E9ED"/>
+                </a:solidFill>
+                <a:latin typeface="Space Grotesk"/>
+              </a:rPr>
+              <a:t>Arquitectura sin deuda técnica.</a:t>
+            </a:r>
+            <a:r>
+              <a:rPr sz="1550">
+                <a:solidFill>
+                  <a:srgbClr val="99A0AB"/>
+                </a:solidFill>
+                <a:latin typeface="Space Grotesk"/>
+              </a:rPr>
+              <a:t> estándares web, stack aburrido y fiable, todo documentado en specs</a:t>
+            </a:r>
+          </a:p>
+        </p:txBody>
+      </p:sp>
+      <p:sp>
+        <p:nvSpPr>
+          <p:cNvPr id="7" name="TextBox 6"/>
+          <p:cNvSpPr txBox="1"/>
+          <p:nvPr/>
+        </p:nvSpPr>
+        <p:spPr>
+          <a:xfrm>
+            <a:off x="685800" y="6473952"/>
+            <a:ext cx="5486400" cy="274320"/>
+          </a:xfrm>
+          <a:prstGeom prst="rect">
+            <a:avLst/>
+          </a:prstGeom>
+          <a:noFill/>
+        </p:spPr>
+        <p:txBody>
+          <a:bodyPr wrap="square" lIns="0" tIns="0" rIns="0" bIns="0" anchor="t">
+            <a:spAutoFit/>
+          </a:bodyPr>
+          <a:lstStyle/>
+          <a:p>
+            <a:pPr algn="l">
+              <a:lnSpc>
+                <a:spcPct val="115000"/>
+              </a:lnSpc>
+            </a:pPr>
+            <a:r>
+              <a:rPr sz="850" b="0" i="0">
+                <a:solidFill>
+                  <a:srgbClr val="5C6472"/>
+                </a:solidFill>
+                <a:latin typeface="JetBrains Mono"/>
+              </a:rPr>
+              <a:t>TFM BIGSCHOOL · GESTIÓN DE CARTERA FINANCIERA CON IA</a:t>
+            </a:r>
+          </a:p>
+        </p:txBody>
+      </p:sp>
+      <p:sp>
+        <p:nvSpPr>
+          <p:cNvPr id="8" name="TextBox 7"/>
+          <p:cNvSpPr txBox="1"/>
+          <p:nvPr/>
+        </p:nvSpPr>
+        <p:spPr>
+          <a:xfrm>
+            <a:off x="5943600" y="6473952"/>
+            <a:ext cx="4389120" cy="274320"/>
+          </a:xfrm>
+          <a:prstGeom prst="rect">
+            <a:avLst/>
+          </a:prstGeom>
+          <a:noFill/>
+        </p:spPr>
+        <p:txBody>
+          <a:bodyPr wrap="square" lIns="0" tIns="0" rIns="0" bIns="0" anchor="t">
+            <a:spAutoFit/>
+          </a:bodyPr>
+          <a:lstStyle/>
+          <a:p>
+            <a:pPr algn="r">
+              <a:lnSpc>
+                <a:spcPct val="115000"/>
+              </a:lnSpc>
+            </a:pPr>
+            <a:r>
+              <a:rPr sz="850" b="0" i="0">
+                <a:solidFill>
+                  <a:srgbClr val="5C6472"/>
+                </a:solidFill>
+                <a:latin typeface="JetBrains Mono"/>
+              </a:rPr>
+              <a:t>CIERRE</a:t>
+            </a:r>
+          </a:p>
+        </p:txBody>
+      </p:sp>
+      <p:sp>
+        <p:nvSpPr>
+          <p:cNvPr id="9" name="TextBox 8"/>
+          <p:cNvSpPr txBox="1"/>
+          <p:nvPr/>
+        </p:nvSpPr>
+        <p:spPr>
+          <a:xfrm>
+            <a:off x="11475720" y="6473952"/>
+            <a:ext cx="548640" cy="274320"/>
+          </a:xfrm>
+          <a:prstGeom prst="rect">
+            <a:avLst/>
+          </a:prstGeom>
+          <a:noFill/>
+        </p:spPr>
+        <p:txBody>
+          <a:bodyPr wrap="square" lIns="0" tIns="0" rIns="0" bIns="0" anchor="t">
+            <a:spAutoFit/>
+          </a:bodyPr>
+          <a:lstStyle/>
+          <a:p>
+            <a:pPr algn="r">
+              <a:lnSpc>
+                <a:spcPct val="115000"/>
+              </a:lnSpc>
+            </a:pPr>
+            <a:r>
+              <a:rPr sz="850" b="0" i="0">
+                <a:solidFill>
+                  <a:srgbClr val="C9A45C"/>
+                </a:solidFill>
+                <a:latin typeface="JetBrains Mono"/>
+              </a:rPr>
+              <a:t>30</a:t>
+            </a:r>
+          </a:p>
+        </p:txBody>
+      </p:sp>
+      <p:sp>
+        <p:nvSpPr>
+          <p:cNvPr id="10" name="Rectangle 9"/>
+          <p:cNvSpPr/>
+          <p:nvPr/>
+        </p:nvSpPr>
+        <p:spPr>
+          <a:xfrm>
+            <a:off x="685800" y="6400800"/>
+            <a:ext cx="10817352" cy="9525"/>
+          </a:xfrm>
+          <a:prstGeom prst="rect">
+            <a:avLst/>
+          </a:prstGeom>
+          <a:solidFill>
+            <a:srgbClr val="1D222B"/>
+          </a:solidFill>
+          <a:ln>
+            <a:noFill/>
+          </a:ln>
+          <a:effectLst/>
+        </p:spPr>
+        <p:style>
+          <a:lnRef idx="1">
+            <a:schemeClr val="accent1"/>
+          </a:lnRef>
+          <a:fillRef idx="3">
+            <a:schemeClr val="accent1"/>
+          </a:fillRef>
+          <a:effectRef idx="2">
+            <a:schemeClr val="accent1"/>
+          </a:effectRef>
+          <a:fontRef idx="minor">
+            <a:schemeClr val="lt1"/>
+          </a:fontRef>
+        </p:style>
+        <p:txBody>
+          <a:bodyPr rtlCol="0" anchor="ctr"/>
+          <a:lstStyle/>
+          <a:p>
+            <a:pPr algn="ctr"/>
+            <a:endParaRPr/>
+          </a:p>
+        </p:txBody>
+      </p:sp>
+    </p:spTree>
+  </p:cSld>
+  <p:clrMapOvr>
+    <a:masterClrMapping/>
+  </p:clrMapOvr>
+</p:sld>
+</file>
+
+<file path=ppt/slides/slide32.xml><?xml version="1.0" encoding="utf-8"?>
 <p:sld xmlns:a="http://schemas.openxmlformats.org/drawingml/2006/main" xmlns:r="http://schemas.openxmlformats.org/officeDocument/2006/relationships" xmlns:p="http://schemas.openxmlformats.org/presentationml/2006/main">
   <p:cSld>
     <p:spTree>

--- a/presentacion/TFM_BigSchool_Presentacion.pptx
+++ b/presentacion/TFM_BigSchool_Presentacion.pptx
@@ -39,6 +39,17 @@
     <p:sldId id="287" r:id="rId38"/>
     <p:sldId id="284" r:id="rId30"/>
     <p:sldId id="285" r:id="rId31"/>
+    <p:sldId id="288" r:id="rId39"/>
+    <p:sldId id="289" r:id="rId40"/>
+    <p:sldId id="290" r:id="rId41"/>
+    <p:sldId id="291" r:id="rId42"/>
+    <p:sldId id="292" r:id="rId43"/>
+    <p:sldId id="293" r:id="rId44"/>
+    <p:sldId id="294" r:id="rId45"/>
+    <p:sldId id="295" r:id="rId46"/>
+    <p:sldId id="296" r:id="rId47"/>
+    <p:sldId id="297" r:id="rId48"/>
+    <p:sldId id="298" r:id="rId49"/>
     <p:sldId id="286" r:id="rId32"/>
   </p:sldIdLst>
   <p:sldSz cx="12192000" cy="6858000"/>
@@ -2033,6 +2044,216 @@
           <a:p>
             <a:r>
               <a:t>- Por que el catalogo de indicadores y el catalogo de roles son YAML y no tablas de admin editables -- decision v1 de simplicidad, documentada como extension natural futura.</a:t>
+            </a:r>
+          </a:p>
+        </p:txBody>
+      </p:sp>
+      <p:sp>
+        <p:nvSpPr>
+          <p:cNvPr id="4" name="Slide Number Placeholder 3"/>
+          <p:cNvSpPr>
+            <a:spLocks noGrp="1"/>
+          </p:cNvSpPr>
+          <p:nvPr>
+            <p:ph type="sldNum" sz="quarter" idx="5"/>
+          </p:nvPr>
+        </p:nvSpPr>
+        <p:spPr/>
+      </p:sp>
+    </p:spTree>
+  </p:cSld>
+  <p:clrMapOvr>
+    <a:masterClrMapping/>
+  </p:clrMapOvr>
+</p:notes>
+</file>
+
+<file path=ppt/notesSlides/notesSlide32.xml><?xml version="1.0" encoding="utf-8"?>
+<p:notes xmlns:a="http://schemas.openxmlformats.org/drawingml/2006/main" xmlns:p="http://schemas.openxmlformats.org/presentationml/2006/main" xmlns:r="http://schemas.openxmlformats.org/officeDocument/2006/relationships">
+  <p:cSld>
+    <p:spTree>
+      <p:nvGrpSpPr>
+        <p:cNvPr id="1" name=""/>
+        <p:cNvGrpSpPr/>
+        <p:nvPr/>
+      </p:nvGrpSpPr>
+      <p:grpSpPr>
+        <a:xfrm>
+          <a:off x="0" y="0"/>
+          <a:ext cx="0" cy="0"/>
+          <a:chOff x="0" y="0"/>
+          <a:chExt cx="0" cy="0"/>
+        </a:xfrm>
+      </p:grpSpPr>
+      <p:sp>
+        <p:nvSpPr>
+          <p:cNvPr id="2" name="Slide Image Placeholder 1"/>
+          <p:cNvSpPr>
+            <a:spLocks noGrp="1" noRot="1" noChangeAspect="1"/>
+          </p:cNvSpPr>
+          <p:nvPr>
+            <p:ph type="sldImg" idx="2"/>
+          </p:nvPr>
+        </p:nvSpPr>
+        <p:spPr/>
+      </p:sp>
+      <p:sp>
+        <p:nvSpPr>
+          <p:cNvPr id="3" name="Notes Placeholder 2"/>
+          <p:cNvSpPr>
+            <a:spLocks noGrp="1"/>
+          </p:cNvSpPr>
+          <p:nvPr>
+            <p:ph type="body" sz="quarter" idx="3"/>
+          </p:nvPr>
+        </p:nvSpPr>
+        <p:spPr/>
+        <p:txBody>
+          <a:bodyPr/>
+          <a:lstStyle/>
+          <a:p>
+            <a:r>
+              <a:t>Captura tomada en vivo contra https://portfolio-ia-frontend...azurecontainerapps.io. El campo Email se reutiliza como nombre visible del invitado (Spec D01).</a:t>
+            </a:r>
+          </a:p>
+        </p:txBody>
+      </p:sp>
+      <p:sp>
+        <p:nvSpPr>
+          <p:cNvPr id="4" name="Slide Number Placeholder 3"/>
+          <p:cNvSpPr>
+            <a:spLocks noGrp="1"/>
+          </p:cNvSpPr>
+          <p:nvPr>
+            <p:ph type="sldNum" sz="quarter" idx="5"/>
+          </p:nvPr>
+        </p:nvSpPr>
+        <p:spPr/>
+      </p:sp>
+    </p:spTree>
+  </p:cSld>
+  <p:clrMapOvr>
+    <a:masterClrMapping/>
+  </p:clrMapOvr>
+</p:notes>
+</file>
+
+<file path=ppt/notesSlides/notesSlide33.xml><?xml version="1.0" encoding="utf-8"?>
+<p:notes xmlns:a="http://schemas.openxmlformats.org/drawingml/2006/main" xmlns:p="http://schemas.openxmlformats.org/presentationml/2006/main" xmlns:r="http://schemas.openxmlformats.org/officeDocument/2006/relationships">
+  <p:cSld>
+    <p:spTree>
+      <p:nvGrpSpPr>
+        <p:cNvPr id="1" name=""/>
+        <p:cNvGrpSpPr/>
+        <p:nvPr/>
+      </p:nvGrpSpPr>
+      <p:grpSpPr>
+        <a:xfrm>
+          <a:off x="0" y="0"/>
+          <a:ext cx="0" cy="0"/>
+          <a:chOff x="0" y="0"/>
+          <a:chExt cx="0" cy="0"/>
+        </a:xfrm>
+      </p:grpSpPr>
+      <p:sp>
+        <p:nvSpPr>
+          <p:cNvPr id="2" name="Slide Image Placeholder 1"/>
+          <p:cNvSpPr>
+            <a:spLocks noGrp="1" noRot="1" noChangeAspect="1"/>
+          </p:cNvSpPr>
+          <p:nvPr>
+            <p:ph type="sldImg" idx="2"/>
+          </p:nvPr>
+        </p:nvSpPr>
+        <p:spPr/>
+      </p:sp>
+      <p:sp>
+        <p:nvSpPr>
+          <p:cNvPr id="3" name="Notes Placeholder 2"/>
+          <p:cNvSpPr>
+            <a:spLocks noGrp="1"/>
+          </p:cNvSpPr>
+          <p:nvPr>
+            <p:ph type="body" sz="quarter" idx="3"/>
+          </p:nvPr>
+        </p:nvSpPr>
+        <p:spPr/>
+        <p:txBody>
+          <a:bodyPr/>
+          <a:lstStyle/>
+          <a:p>
+            <a:r>
+              <a:t>Esta es probablemente la captura mas potente del recorrido invitado: numeros reales, no simulados, obtenidos de la cascada del bloque 03.</a:t>
+            </a:r>
+          </a:p>
+        </p:txBody>
+      </p:sp>
+      <p:sp>
+        <p:nvSpPr>
+          <p:cNvPr id="4" name="Slide Number Placeholder 3"/>
+          <p:cNvSpPr>
+            <a:spLocks noGrp="1"/>
+          </p:cNvSpPr>
+          <p:nvPr>
+            <p:ph type="sldNum" sz="quarter" idx="5"/>
+          </p:nvPr>
+        </p:nvSpPr>
+        <p:spPr/>
+      </p:sp>
+    </p:spTree>
+  </p:cSld>
+  <p:clrMapOvr>
+    <a:masterClrMapping/>
+  </p:clrMapOvr>
+</p:notes>
+</file>
+
+<file path=ppt/notesSlides/notesSlide34.xml><?xml version="1.0" encoding="utf-8"?>
+<p:notes xmlns:a="http://schemas.openxmlformats.org/drawingml/2006/main" xmlns:p="http://schemas.openxmlformats.org/presentationml/2006/main" xmlns:r="http://schemas.openxmlformats.org/officeDocument/2006/relationships">
+  <p:cSld>
+    <p:spTree>
+      <p:nvGrpSpPr>
+        <p:cNvPr id="1" name=""/>
+        <p:cNvGrpSpPr/>
+        <p:nvPr/>
+      </p:nvGrpSpPr>
+      <p:grpSpPr>
+        <a:xfrm>
+          <a:off x="0" y="0"/>
+          <a:ext cx="0" cy="0"/>
+          <a:chOff x="0" y="0"/>
+          <a:chExt cx="0" cy="0"/>
+        </a:xfrm>
+      </p:grpSpPr>
+      <p:sp>
+        <p:nvSpPr>
+          <p:cNvPr id="2" name="Slide Image Placeholder 1"/>
+          <p:cNvSpPr>
+            <a:spLocks noGrp="1" noRot="1" noChangeAspect="1"/>
+          </p:cNvSpPr>
+          <p:nvPr>
+            <p:ph type="sldImg" idx="2"/>
+          </p:nvPr>
+        </p:nvSpPr>
+        <p:spPr/>
+      </p:sp>
+      <p:sp>
+        <p:nvSpPr>
+          <p:cNvPr id="3" name="Notes Placeholder 2"/>
+          <p:cNvSpPr>
+            <a:spLocks noGrp="1"/>
+          </p:cNvSpPr>
+          <p:nvPr>
+            <p:ph type="body" sz="quarter" idx="3"/>
+          </p:nvPr>
+        </p:nvSpPr>
+        <p:spPr/>
+        <p:txBody>
+          <a:bodyPr/>
+          <a:lstStyle/>
+          <a:p>
+            <a:r>
+              <a:t>Momento clave para conectar con la diapositiva de Seguridad por diseño (bloque 07): esto no es una captura preparada, es el comportamiento real del RBAC (Spec D11) contra un usuario Investor/guest intentando una operacion de administrador.</a:t>
             </a:r>
           </a:p>
         </p:txBody>
@@ -25664,6 +25885,4129 @@
 </p:sld>
 </file>
 
+<file path=ppt/slides/slide33.xml><?xml version="1.0" encoding="utf-8"?>
+<p:sld xmlns:a="http://schemas.openxmlformats.org/drawingml/2006/main" xmlns:p="http://schemas.openxmlformats.org/presentationml/2006/main" xmlns:r="http://schemas.openxmlformats.org/officeDocument/2006/relationships">
+  <p:cSld>
+    <p:spTree>
+      <p:nvGrpSpPr>
+        <p:cNvPr id="1" name=""/>
+        <p:cNvGrpSpPr/>
+        <p:nvPr/>
+      </p:nvGrpSpPr>
+      <p:grpSpPr/>
+      <p:sp>
+        <p:nvSpPr>
+          <p:cNvPr id="2" name="Rectangle 1"/>
+          <p:cNvSpPr/>
+          <p:nvPr/>
+        </p:nvSpPr>
+        <p:spPr>
+          <a:xfrm>
+            <a:off x="0" y="0"/>
+            <a:ext cx="12191695" cy="6858000"/>
+          </a:xfrm>
+          <a:prstGeom prst="rect">
+            <a:avLst/>
+          </a:prstGeom>
+          <a:solidFill>
+            <a:srgbClr val="08090B"/>
+          </a:solidFill>
+          <a:ln>
+            <a:noFill/>
+          </a:ln>
+          <a:effectLst/>
+        </p:spPr>
+        <p:style>
+          <a:lnRef idx="1">
+            <a:schemeClr val="accent1"/>
+          </a:lnRef>
+          <a:fillRef idx="3">
+            <a:schemeClr val="accent1"/>
+          </a:fillRef>
+          <a:effectRef idx="2">
+            <a:schemeClr val="accent1"/>
+          </a:effectRef>
+          <a:fontRef idx="minor">
+            <a:schemeClr val="lt1"/>
+          </a:fontRef>
+        </p:style>
+        <p:txBody>
+          <a:bodyPr rtlCol="0" anchor="ctr"/>
+          <a:lstStyle/>
+          <a:p>
+            <a:pPr algn="ctr"/>
+          </a:p>
+        </p:txBody>
+      </p:sp>
+      <p:sp>
+        <p:nvSpPr>
+          <p:cNvPr id="3" name="TextBox 2"/>
+          <p:cNvSpPr txBox="1"/>
+          <p:nvPr/>
+        </p:nvSpPr>
+        <p:spPr>
+          <a:xfrm>
+            <a:off x="822960" y="2331720"/>
+            <a:ext cx="2743200" cy="1280160"/>
+          </a:xfrm>
+          <a:prstGeom prst="rect">
+            <a:avLst/>
+          </a:prstGeom>
+          <a:noFill/>
+        </p:spPr>
+        <p:txBody>
+          <a:bodyPr wrap="square" anchor="t" lIns="0" rIns="0" tIns="0" bIns="0">
+            <a:spAutoFit/>
+          </a:bodyPr>
+          <a:lstStyle/>
+          <a:p>
+            <a:pPr algn="l">
+              <a:lnSpc>
+                <a:spcPct val="115000"/>
+              </a:lnSpc>
+            </a:pPr>
+            <a:r>
+              <a:rPr sz="9000" b="1" i="0">
+                <a:solidFill>
+                  <a:srgbClr val="2A2412"/>
+                </a:solidFill>
+                <a:latin typeface="JetBrains Mono"/>
+              </a:rPr>
+              <a:t>09</a:t>
+            </a:r>
+          </a:p>
+        </p:txBody>
+      </p:sp>
+      <p:sp>
+        <p:nvSpPr>
+          <p:cNvPr id="4" name="TextBox 3"/>
+          <p:cNvSpPr txBox="1"/>
+          <p:nvPr/>
+        </p:nvSpPr>
+        <p:spPr>
+          <a:xfrm>
+            <a:off x="868680" y="3337560"/>
+            <a:ext cx="10058400" cy="822960"/>
+          </a:xfrm>
+          <a:prstGeom prst="rect">
+            <a:avLst/>
+          </a:prstGeom>
+          <a:noFill/>
+        </p:spPr>
+        <p:txBody>
+          <a:bodyPr wrap="square" anchor="t" lIns="0" rIns="0" tIns="0" bIns="0">
+            <a:spAutoFit/>
+          </a:bodyPr>
+          <a:lstStyle/>
+          <a:p>
+            <a:pPr algn="l">
+              <a:lnSpc>
+                <a:spcPct val="115000"/>
+              </a:lnSpc>
+            </a:pPr>
+            <a:r>
+              <a:rPr sz="3200" b="1" i="0">
+                <a:solidFill>
+                  <a:srgbClr val="E7E9ED"/>
+                </a:solidFill>
+                <a:latin typeface="Space Grotesk"/>
+              </a:rPr>
+              <a:t>Recorrido funcional de la aplicación</a:t>
+            </a:r>
+          </a:p>
+        </p:txBody>
+      </p:sp>
+      <p:sp>
+        <p:nvSpPr>
+          <p:cNvPr id="5" name="Rectangle 4"/>
+          <p:cNvSpPr/>
+          <p:nvPr/>
+        </p:nvSpPr>
+        <p:spPr>
+          <a:xfrm>
+            <a:off x="886968" y="4023360"/>
+            <a:ext cx="822960" cy="38100"/>
+          </a:xfrm>
+          <a:prstGeom prst="rect">
+            <a:avLst/>
+          </a:prstGeom>
+          <a:solidFill>
+            <a:srgbClr val="C9A45C"/>
+          </a:solidFill>
+          <a:ln>
+            <a:noFill/>
+          </a:ln>
+          <a:effectLst/>
+        </p:spPr>
+        <p:style>
+          <a:lnRef idx="1">
+            <a:schemeClr val="accent1"/>
+          </a:lnRef>
+          <a:fillRef idx="3">
+            <a:schemeClr val="accent1"/>
+          </a:fillRef>
+          <a:effectRef idx="2">
+            <a:schemeClr val="accent1"/>
+          </a:effectRef>
+          <a:fontRef idx="minor">
+            <a:schemeClr val="lt1"/>
+          </a:fontRef>
+        </p:style>
+        <p:txBody>
+          <a:bodyPr rtlCol="0" anchor="ctr"/>
+          <a:lstStyle/>
+          <a:p>
+            <a:pPr algn="ctr"/>
+          </a:p>
+        </p:txBody>
+      </p:sp>
+      <p:sp>
+        <p:nvSpPr>
+          <p:cNvPr id="6" name="TextBox 5"/>
+          <p:cNvSpPr txBox="1"/>
+          <p:nvPr/>
+        </p:nvSpPr>
+        <p:spPr>
+          <a:xfrm>
+            <a:off x="886968" y="4187952"/>
+            <a:ext cx="9601200" cy="548640"/>
+          </a:xfrm>
+          <a:prstGeom prst="rect">
+            <a:avLst/>
+          </a:prstGeom>
+          <a:noFill/>
+        </p:spPr>
+        <p:txBody>
+          <a:bodyPr wrap="square" anchor="t" lIns="0" rIns="0" tIns="0" bIns="0">
+            <a:spAutoFit/>
+          </a:bodyPr>
+          <a:lstStyle/>
+          <a:p>
+            <a:pPr algn="l">
+              <a:lnSpc>
+                <a:spcPct val="115000"/>
+              </a:lnSpc>
+            </a:pPr>
+            <a:r>
+              <a:rPr sz="1450" b="0" i="0">
+                <a:solidFill>
+                  <a:srgbClr val="99A0AB"/>
+                </a:solidFill>
+                <a:latin typeface="Space Grotesk"/>
+              </a:rPr>
+              <a:t>Demo real sobre el entorno desplegado en Azure — modo invitado y modo administrador</a:t>
+            </a:r>
+          </a:p>
+        </p:txBody>
+      </p:sp>
+      <p:sp>
+        <p:nvSpPr>
+          <p:cNvPr id="7" name="TextBox 6"/>
+          <p:cNvSpPr txBox="1"/>
+          <p:nvPr/>
+        </p:nvSpPr>
+        <p:spPr>
+          <a:xfrm>
+            <a:off x="685800" y="6473952"/>
+            <a:ext cx="5486400" cy="274320"/>
+          </a:xfrm>
+          <a:prstGeom prst="rect">
+            <a:avLst/>
+          </a:prstGeom>
+          <a:noFill/>
+        </p:spPr>
+        <p:txBody>
+          <a:bodyPr wrap="square" anchor="t" lIns="0" rIns="0" tIns="0" bIns="0">
+            <a:spAutoFit/>
+          </a:bodyPr>
+          <a:lstStyle/>
+          <a:p>
+            <a:pPr algn="l">
+              <a:lnSpc>
+                <a:spcPct val="115000"/>
+              </a:lnSpc>
+            </a:pPr>
+            <a:r>
+              <a:rPr sz="850" b="0" i="0">
+                <a:solidFill>
+                  <a:srgbClr val="5C6472"/>
+                </a:solidFill>
+                <a:latin typeface="JetBrains Mono"/>
+              </a:rPr>
+              <a:t>TFM BIGSCHOOL · GESTIÓN DE CARTERA FINANCIERA CON IA</a:t>
+            </a:r>
+          </a:p>
+        </p:txBody>
+      </p:sp>
+      <p:sp>
+        <p:nvSpPr>
+          <p:cNvPr id="8" name="TextBox 7"/>
+          <p:cNvSpPr txBox="1"/>
+          <p:nvPr/>
+        </p:nvSpPr>
+        <p:spPr>
+          <a:xfrm>
+            <a:off x="5943600" y="6473952"/>
+            <a:ext cx="4389120" cy="274320"/>
+          </a:xfrm>
+          <a:prstGeom prst="rect">
+            <a:avLst/>
+          </a:prstGeom>
+          <a:noFill/>
+        </p:spPr>
+        <p:txBody>
+          <a:bodyPr wrap="square" anchor="t" lIns="0" rIns="0" tIns="0" bIns="0">
+            <a:spAutoFit/>
+          </a:bodyPr>
+          <a:lstStyle/>
+          <a:p>
+            <a:pPr algn="r">
+              <a:lnSpc>
+                <a:spcPct val="115000"/>
+              </a:lnSpc>
+            </a:pPr>
+            <a:r>
+              <a:rPr sz="850" b="0" i="0">
+                <a:solidFill>
+                  <a:srgbClr val="5C6472"/>
+                </a:solidFill>
+                <a:latin typeface="JetBrains Mono"/>
+              </a:rPr>
+              <a:t>09 · RECORRIDO — INVITADO</a:t>
+            </a:r>
+          </a:p>
+        </p:txBody>
+      </p:sp>
+      <p:sp>
+        <p:nvSpPr>
+          <p:cNvPr id="9" name="TextBox 8"/>
+          <p:cNvSpPr txBox="1"/>
+          <p:nvPr/>
+        </p:nvSpPr>
+        <p:spPr>
+          <a:xfrm>
+            <a:off x="11475720" y="6473952"/>
+            <a:ext cx="548640" cy="274320"/>
+          </a:xfrm>
+          <a:prstGeom prst="rect">
+            <a:avLst/>
+          </a:prstGeom>
+          <a:noFill/>
+        </p:spPr>
+        <p:txBody>
+          <a:bodyPr wrap="square" anchor="t" lIns="0" rIns="0" tIns="0" bIns="0">
+            <a:spAutoFit/>
+          </a:bodyPr>
+          <a:lstStyle/>
+          <a:p>
+            <a:pPr algn="r">
+              <a:lnSpc>
+                <a:spcPct val="115000"/>
+              </a:lnSpc>
+            </a:pPr>
+            <a:r>
+              <a:rPr sz="850" b="0" i="0">
+                <a:solidFill>
+                  <a:srgbClr val="C9A45C"/>
+                </a:solidFill>
+                <a:latin typeface="JetBrains Mono"/>
+              </a:rPr>
+              <a:t>32</a:t>
+            </a:r>
+          </a:p>
+        </p:txBody>
+      </p:sp>
+      <p:sp>
+        <p:nvSpPr>
+          <p:cNvPr id="10" name="Rectangle 9"/>
+          <p:cNvSpPr/>
+          <p:nvPr/>
+        </p:nvSpPr>
+        <p:spPr>
+          <a:xfrm>
+            <a:off x="685800" y="6400800"/>
+            <a:ext cx="10817352" cy="9525"/>
+          </a:xfrm>
+          <a:prstGeom prst="rect">
+            <a:avLst/>
+          </a:prstGeom>
+          <a:solidFill>
+            <a:srgbClr val="1D222B"/>
+          </a:solidFill>
+          <a:ln>
+            <a:noFill/>
+          </a:ln>
+          <a:effectLst/>
+        </p:spPr>
+        <p:style>
+          <a:lnRef idx="1">
+            <a:schemeClr val="accent1"/>
+          </a:lnRef>
+          <a:fillRef idx="3">
+            <a:schemeClr val="accent1"/>
+          </a:fillRef>
+          <a:effectRef idx="2">
+            <a:schemeClr val="accent1"/>
+          </a:effectRef>
+          <a:fontRef idx="minor">
+            <a:schemeClr val="lt1"/>
+          </a:fontRef>
+        </p:style>
+        <p:txBody>
+          <a:bodyPr rtlCol="0" anchor="ctr"/>
+          <a:lstStyle/>
+          <a:p>
+            <a:pPr algn="ctr"/>
+          </a:p>
+        </p:txBody>
+      </p:sp>
+    </p:spTree>
+  </p:cSld>
+  <p:clrMapOvr>
+    <a:masterClrMapping/>
+  </p:clrMapOvr>
+</p:sld>
+</file>
+
+<file path=ppt/slides/slide34.xml><?xml version="1.0" encoding="utf-8"?>
+<p:sld xmlns:a="http://schemas.openxmlformats.org/drawingml/2006/main" xmlns:p="http://schemas.openxmlformats.org/presentationml/2006/main" xmlns:r="http://schemas.openxmlformats.org/officeDocument/2006/relationships">
+  <p:cSld>
+    <p:spTree>
+      <p:nvGrpSpPr>
+        <p:cNvPr id="1" name=""/>
+        <p:cNvGrpSpPr/>
+        <p:nvPr/>
+      </p:nvGrpSpPr>
+      <p:grpSpPr/>
+      <p:sp>
+        <p:nvSpPr>
+          <p:cNvPr id="2" name="Rectangle 1"/>
+          <p:cNvSpPr/>
+          <p:nvPr/>
+        </p:nvSpPr>
+        <p:spPr>
+          <a:xfrm>
+            <a:off x="0" y="0"/>
+            <a:ext cx="12191695" cy="6858000"/>
+          </a:xfrm>
+          <a:prstGeom prst="rect">
+            <a:avLst/>
+          </a:prstGeom>
+          <a:solidFill>
+            <a:srgbClr val="08090B"/>
+          </a:solidFill>
+          <a:ln>
+            <a:noFill/>
+          </a:ln>
+          <a:effectLst/>
+        </p:spPr>
+        <p:style>
+          <a:lnRef idx="1">
+            <a:schemeClr val="accent1"/>
+          </a:lnRef>
+          <a:fillRef idx="3">
+            <a:schemeClr val="accent1"/>
+          </a:fillRef>
+          <a:effectRef idx="2">
+            <a:schemeClr val="accent1"/>
+          </a:effectRef>
+          <a:fontRef idx="minor">
+            <a:schemeClr val="lt1"/>
+          </a:fontRef>
+        </p:style>
+        <p:txBody>
+          <a:bodyPr rtlCol="0" anchor="ctr"/>
+          <a:lstStyle/>
+          <a:p>
+            <a:pPr algn="ctr"/>
+          </a:p>
+        </p:txBody>
+      </p:sp>
+      <p:sp>
+        <p:nvSpPr>
+          <p:cNvPr id="3" name="TextBox 2"/>
+          <p:cNvSpPr txBox="1"/>
+          <p:nvPr/>
+        </p:nvSpPr>
+        <p:spPr>
+          <a:xfrm>
+            <a:off x="685800" y="411480"/>
+            <a:ext cx="10789920" cy="320040"/>
+          </a:xfrm>
+          <a:prstGeom prst="rect">
+            <a:avLst/>
+          </a:prstGeom>
+          <a:noFill/>
+        </p:spPr>
+        <p:txBody>
+          <a:bodyPr wrap="square" anchor="t" lIns="0" rIns="0" tIns="0" bIns="0">
+            <a:spAutoFit/>
+          </a:bodyPr>
+          <a:lstStyle/>
+          <a:p>
+            <a:pPr algn="l">
+              <a:lnSpc>
+                <a:spcPct val="115000"/>
+              </a:lnSpc>
+            </a:pPr>
+            <a:r>
+              <a:rPr sz="1250" b="1" i="0">
+                <a:solidFill>
+                  <a:srgbClr val="C9A45C"/>
+                </a:solidFill>
+                <a:latin typeface="JetBrains Mono"/>
+              </a:rPr>
+              <a:t>09 · RECORRIDO — INVITADO</a:t>
+            </a:r>
+          </a:p>
+        </p:txBody>
+      </p:sp>
+      <p:sp>
+        <p:nvSpPr>
+          <p:cNvPr id="4" name="TextBox 3"/>
+          <p:cNvSpPr txBox="1"/>
+          <p:nvPr/>
+        </p:nvSpPr>
+        <p:spPr>
+          <a:xfrm>
+            <a:off x="685800" y="704088"/>
+            <a:ext cx="10789920" cy="548640"/>
+          </a:xfrm>
+          <a:prstGeom prst="rect">
+            <a:avLst/>
+          </a:prstGeom>
+          <a:noFill/>
+        </p:spPr>
+        <p:txBody>
+          <a:bodyPr wrap="square" anchor="t" lIns="0" rIns="0" tIns="0" bIns="0">
+            <a:spAutoFit/>
+          </a:bodyPr>
+          <a:lstStyle/>
+          <a:p>
+            <a:pPr algn="l">
+              <a:lnSpc>
+                <a:spcPct val="115000"/>
+              </a:lnSpc>
+            </a:pPr>
+            <a:r>
+              <a:rPr sz="2400" b="1" i="0">
+                <a:solidFill>
+                  <a:srgbClr val="E7E9ED"/>
+                </a:solidFill>
+                <a:latin typeface="Space Grotesk"/>
+              </a:rPr>
+              <a:t>Acceso sin fricción: modo invitado</a:t>
+            </a:r>
+          </a:p>
+        </p:txBody>
+      </p:sp>
+      <p:sp>
+        <p:nvSpPr>
+          <p:cNvPr id="5" name="Rectangle 4"/>
+          <p:cNvSpPr/>
+          <p:nvPr/>
+        </p:nvSpPr>
+        <p:spPr>
+          <a:xfrm>
+            <a:off x="685800" y="1197864"/>
+            <a:ext cx="457200" cy="38100"/>
+          </a:xfrm>
+          <a:prstGeom prst="rect">
+            <a:avLst/>
+          </a:prstGeom>
+          <a:solidFill>
+            <a:srgbClr val="C9A45C"/>
+          </a:solidFill>
+          <a:ln>
+            <a:noFill/>
+          </a:ln>
+          <a:effectLst/>
+        </p:spPr>
+        <p:style>
+          <a:lnRef idx="1">
+            <a:schemeClr val="accent1"/>
+          </a:lnRef>
+          <a:fillRef idx="3">
+            <a:schemeClr val="accent1"/>
+          </a:fillRef>
+          <a:effectRef idx="2">
+            <a:schemeClr val="accent1"/>
+          </a:effectRef>
+          <a:fontRef idx="minor">
+            <a:schemeClr val="lt1"/>
+          </a:fontRef>
+        </p:style>
+        <p:txBody>
+          <a:bodyPr rtlCol="0" anchor="ctr"/>
+          <a:lstStyle/>
+          <a:p>
+            <a:pPr algn="ctr"/>
+          </a:p>
+        </p:txBody>
+      </p:sp>
+      <p:sp>
+        <p:nvSpPr>
+          <p:cNvPr id="6" name="Rounded Rectangle 5"/>
+          <p:cNvSpPr/>
+          <p:nvPr/>
+        </p:nvSpPr>
+        <p:spPr>
+          <a:xfrm>
+            <a:off x="609600" y="1267968"/>
+            <a:ext cx="6644640" cy="4210050"/>
+          </a:xfrm>
+          <a:prstGeom prst="roundRect">
+            <a:avLst>
+              <a:gd name="adj" fmla="val 3000"/>
+            </a:avLst>
+          </a:prstGeom>
+          <a:solidFill>
+            <a:srgbClr val="15191F"/>
+          </a:solidFill>
+          <a:ln w="15875">
+            <a:solidFill>
+              <a:srgbClr val="C9A45C"/>
+            </a:solidFill>
+          </a:ln>
+          <a:effectLst/>
+        </p:spPr>
+        <p:style>
+          <a:lnRef idx="1">
+            <a:schemeClr val="accent1"/>
+          </a:lnRef>
+          <a:fillRef idx="3">
+            <a:schemeClr val="accent1"/>
+          </a:fillRef>
+          <a:effectRef idx="2">
+            <a:schemeClr val="accent1"/>
+          </a:effectRef>
+          <a:fontRef idx="minor">
+            <a:schemeClr val="lt1"/>
+          </a:fontRef>
+        </p:style>
+        <p:txBody>
+          <a:bodyPr rtlCol="0" anchor="ctr"/>
+          <a:lstStyle/>
+          <a:p>
+            <a:pPr algn="ctr"/>
+          </a:p>
+        </p:txBody>
+      </p:sp>
+      <p:pic>
+        <p:nvPicPr>
+          <p:cNvPr id="7" name="Picture 6" descr="01-login-invitado.png"/>
+          <p:cNvPicPr>
+            <a:picLocks noChangeAspect="1"/>
+          </p:cNvPicPr>
+          <p:nvPr/>
+        </p:nvPicPr>
+        <p:blipFill>
+          <a:blip r:embed="rId2"/>
+          <a:stretch>
+            <a:fillRect/>
+          </a:stretch>
+        </p:blipFill>
+        <p:spPr>
+          <a:xfrm>
+            <a:off x="685800" y="1344168"/>
+            <a:ext cx="6492240" cy="4057650"/>
+          </a:xfrm>
+          <a:prstGeom prst="rect">
+            <a:avLst/>
+          </a:prstGeom>
+        </p:spPr>
+      </p:pic>
+      <p:sp>
+        <p:nvSpPr>
+          <p:cNvPr id="8" name="TextBox 7"/>
+          <p:cNvSpPr txBox="1"/>
+          <p:nvPr/>
+        </p:nvSpPr>
+        <p:spPr>
+          <a:xfrm>
+            <a:off x="7543800" y="1344168"/>
+            <a:ext cx="3962095" cy="4206240"/>
+          </a:xfrm>
+          <a:prstGeom prst="rect">
+            <a:avLst/>
+          </a:prstGeom>
+          <a:noFill/>
+        </p:spPr>
+        <p:txBody>
+          <a:bodyPr wrap="square" lIns="0" rIns="0" tIns="0" bIns="0">
+            <a:spAutoFit/>
+          </a:bodyPr>
+          <a:lstStyle/>
+          <a:p>
+            <a:pPr>
+              <a:lnSpc>
+                <a:spcPct val="130000"/>
+              </a:lnSpc>
+              <a:spcAft>
+                <a:spcPts val="400"/>
+              </a:spcAft>
+            </a:pPr>
+            <a:r>
+              <a:rPr sz="1350" b="1">
+                <a:solidFill>
+                  <a:srgbClr val="C9A45C"/>
+                </a:solidFill>
+                <a:latin typeface="Space Grotesk"/>
+              </a:rPr>
+              <a:t>▪  </a:t>
+            </a:r>
+            <a:r>
+              <a:rPr sz="1350" b="1">
+                <a:solidFill>
+                  <a:srgbClr val="E7E9ED"/>
+                </a:solidFill>
+                <a:latin typeface="Space Grotesk"/>
+              </a:rPr>
+              <a:t>Sin registro.</a:t>
+            </a:r>
+            <a:r>
+              <a:rPr sz="1350">
+                <a:solidFill>
+                  <a:srgbClr val="99A0AB"/>
+                </a:solidFill>
+                <a:latin typeface="Space Grotesk"/>
+              </a:rPr>
+              <a:t> cualquier visitante entra con “Continue as guest”, sin crear cuenta.</a:t>
+            </a:r>
+          </a:p>
+          <a:p>
+            <a:pPr>
+              <a:lnSpc>
+                <a:spcPct val="130000"/>
+              </a:lnSpc>
+              <a:spcAft>
+                <a:spcPts val="400"/>
+              </a:spcAft>
+            </a:pPr>
+            <a:r>
+              <a:rPr sz="1350" b="1">
+                <a:solidFill>
+                  <a:srgbClr val="C9A45C"/>
+                </a:solidFill>
+                <a:latin typeface="Space Grotesk"/>
+              </a:rPr>
+              <a:t>▪  </a:t>
+            </a:r>
+            <a:r>
+              <a:rPr sz="1350" b="1">
+                <a:solidFill>
+                  <a:srgbClr val="E7E9ED"/>
+                </a:solidFill>
+                <a:latin typeface="Space Grotesk"/>
+              </a:rPr>
+              <a:t>Usuario real del sistema.</a:t>
+            </a:r>
+            <a:r>
+              <a:rPr sz="1350">
+                <a:solidFill>
+                  <a:srgbClr val="99A0AB"/>
+                </a:solidFill>
+                <a:latin typeface="Space Grotesk"/>
+              </a:rPr>
+              <a:t> un guest recibe el rol Investor por defecto (Spec D11) con datos propios y aislados.</a:t>
+            </a:r>
+          </a:p>
+          <a:p>
+            <a:pPr>
+              <a:lnSpc>
+                <a:spcPct val="130000"/>
+              </a:lnSpc>
+              <a:spcAft>
+                <a:spcPts val="400"/>
+              </a:spcAft>
+            </a:pPr>
+            <a:r>
+              <a:rPr sz="1350" b="1">
+                <a:solidFill>
+                  <a:srgbClr val="C9A45C"/>
+                </a:solidFill>
+                <a:latin typeface="Space Grotesk"/>
+              </a:rPr>
+              <a:t>▪  </a:t>
+            </a:r>
+            <a:r>
+              <a:rPr sz="1350" b="1">
+                <a:solidFill>
+                  <a:srgbClr val="E7E9ED"/>
+                </a:solidFill>
+                <a:latin typeface="Space Grotesk"/>
+              </a:rPr>
+              <a:t>Uso previsto.</a:t>
+            </a:r>
+            <a:r>
+              <a:rPr sz="1350">
+                <a:solidFill>
+                  <a:srgbClr val="99A0AB"/>
+                </a:solidFill>
+                <a:latin typeface="Space Grotesk"/>
+              </a:rPr>
+              <a:t> demos, evaluación académica u onboarding sin fricción antes de registrarse.</a:t>
+            </a:r>
+          </a:p>
+        </p:txBody>
+      </p:sp>
+      <p:sp>
+        <p:nvSpPr>
+          <p:cNvPr id="9" name="TextBox 8"/>
+          <p:cNvSpPr txBox="1"/>
+          <p:nvPr/>
+        </p:nvSpPr>
+        <p:spPr>
+          <a:xfrm>
+            <a:off x="685800" y="6473952"/>
+            <a:ext cx="5486400" cy="274320"/>
+          </a:xfrm>
+          <a:prstGeom prst="rect">
+            <a:avLst/>
+          </a:prstGeom>
+          <a:noFill/>
+        </p:spPr>
+        <p:txBody>
+          <a:bodyPr wrap="square" anchor="t" lIns="0" rIns="0" tIns="0" bIns="0">
+            <a:spAutoFit/>
+          </a:bodyPr>
+          <a:lstStyle/>
+          <a:p>
+            <a:pPr algn="l">
+              <a:lnSpc>
+                <a:spcPct val="115000"/>
+              </a:lnSpc>
+            </a:pPr>
+            <a:r>
+              <a:rPr sz="850" b="0" i="0">
+                <a:solidFill>
+                  <a:srgbClr val="5C6472"/>
+                </a:solidFill>
+                <a:latin typeface="JetBrains Mono"/>
+              </a:rPr>
+              <a:t>TFM BIGSCHOOL · GESTIÓN DE CARTERA FINANCIERA CON IA</a:t>
+            </a:r>
+          </a:p>
+        </p:txBody>
+      </p:sp>
+      <p:sp>
+        <p:nvSpPr>
+          <p:cNvPr id="10" name="TextBox 9"/>
+          <p:cNvSpPr txBox="1"/>
+          <p:nvPr/>
+        </p:nvSpPr>
+        <p:spPr>
+          <a:xfrm>
+            <a:off x="5943600" y="6473952"/>
+            <a:ext cx="4389120" cy="274320"/>
+          </a:xfrm>
+          <a:prstGeom prst="rect">
+            <a:avLst/>
+          </a:prstGeom>
+          <a:noFill/>
+        </p:spPr>
+        <p:txBody>
+          <a:bodyPr wrap="square" anchor="t" lIns="0" rIns="0" tIns="0" bIns="0">
+            <a:spAutoFit/>
+          </a:bodyPr>
+          <a:lstStyle/>
+          <a:p>
+            <a:pPr algn="r">
+              <a:lnSpc>
+                <a:spcPct val="115000"/>
+              </a:lnSpc>
+            </a:pPr>
+            <a:r>
+              <a:rPr sz="850" b="0" i="0">
+                <a:solidFill>
+                  <a:srgbClr val="5C6472"/>
+                </a:solidFill>
+                <a:latin typeface="JetBrains Mono"/>
+              </a:rPr>
+              <a:t>09 · RECORRIDO — INVITADO</a:t>
+            </a:r>
+          </a:p>
+        </p:txBody>
+      </p:sp>
+      <p:sp>
+        <p:nvSpPr>
+          <p:cNvPr id="11" name="TextBox 10"/>
+          <p:cNvSpPr txBox="1"/>
+          <p:nvPr/>
+        </p:nvSpPr>
+        <p:spPr>
+          <a:xfrm>
+            <a:off x="11475720" y="6473952"/>
+            <a:ext cx="548640" cy="274320"/>
+          </a:xfrm>
+          <a:prstGeom prst="rect">
+            <a:avLst/>
+          </a:prstGeom>
+          <a:noFill/>
+        </p:spPr>
+        <p:txBody>
+          <a:bodyPr wrap="square" anchor="t" lIns="0" rIns="0" tIns="0" bIns="0">
+            <a:spAutoFit/>
+          </a:bodyPr>
+          <a:lstStyle/>
+          <a:p>
+            <a:pPr algn="r">
+              <a:lnSpc>
+                <a:spcPct val="115000"/>
+              </a:lnSpc>
+            </a:pPr>
+            <a:r>
+              <a:rPr sz="850" b="0" i="0">
+                <a:solidFill>
+                  <a:srgbClr val="C9A45C"/>
+                </a:solidFill>
+                <a:latin typeface="JetBrains Mono"/>
+              </a:rPr>
+              <a:t>33</a:t>
+            </a:r>
+          </a:p>
+        </p:txBody>
+      </p:sp>
+      <p:sp>
+        <p:nvSpPr>
+          <p:cNvPr id="12" name="Rectangle 11"/>
+          <p:cNvSpPr/>
+          <p:nvPr/>
+        </p:nvSpPr>
+        <p:spPr>
+          <a:xfrm>
+            <a:off x="685800" y="6400800"/>
+            <a:ext cx="10817352" cy="9525"/>
+          </a:xfrm>
+          <a:prstGeom prst="rect">
+            <a:avLst/>
+          </a:prstGeom>
+          <a:solidFill>
+            <a:srgbClr val="1D222B"/>
+          </a:solidFill>
+          <a:ln>
+            <a:noFill/>
+          </a:ln>
+          <a:effectLst/>
+        </p:spPr>
+        <p:style>
+          <a:lnRef idx="1">
+            <a:schemeClr val="accent1"/>
+          </a:lnRef>
+          <a:fillRef idx="3">
+            <a:schemeClr val="accent1"/>
+          </a:fillRef>
+          <a:effectRef idx="2">
+            <a:schemeClr val="accent1"/>
+          </a:effectRef>
+          <a:fontRef idx="minor">
+            <a:schemeClr val="lt1"/>
+          </a:fontRef>
+        </p:style>
+        <p:txBody>
+          <a:bodyPr rtlCol="0" anchor="ctr"/>
+          <a:lstStyle/>
+          <a:p>
+            <a:pPr algn="ctr"/>
+          </a:p>
+        </p:txBody>
+      </p:sp>
+    </p:spTree>
+  </p:cSld>
+  <p:clrMapOvr>
+    <a:masterClrMapping/>
+  </p:clrMapOvr>
+</p:sld>
+</file>
+
+<file path=ppt/slides/slide35.xml><?xml version="1.0" encoding="utf-8"?>
+<p:sld xmlns:a="http://schemas.openxmlformats.org/drawingml/2006/main" xmlns:p="http://schemas.openxmlformats.org/presentationml/2006/main" xmlns:r="http://schemas.openxmlformats.org/officeDocument/2006/relationships">
+  <p:cSld>
+    <p:spTree>
+      <p:nvGrpSpPr>
+        <p:cNvPr id="1" name=""/>
+        <p:cNvGrpSpPr/>
+        <p:nvPr/>
+      </p:nvGrpSpPr>
+      <p:grpSpPr/>
+      <p:sp>
+        <p:nvSpPr>
+          <p:cNvPr id="2" name="Rectangle 1"/>
+          <p:cNvSpPr/>
+          <p:nvPr/>
+        </p:nvSpPr>
+        <p:spPr>
+          <a:xfrm>
+            <a:off x="0" y="0"/>
+            <a:ext cx="12191695" cy="6858000"/>
+          </a:xfrm>
+          <a:prstGeom prst="rect">
+            <a:avLst/>
+          </a:prstGeom>
+          <a:solidFill>
+            <a:srgbClr val="08090B"/>
+          </a:solidFill>
+          <a:ln>
+            <a:noFill/>
+          </a:ln>
+          <a:effectLst/>
+        </p:spPr>
+        <p:style>
+          <a:lnRef idx="1">
+            <a:schemeClr val="accent1"/>
+          </a:lnRef>
+          <a:fillRef idx="3">
+            <a:schemeClr val="accent1"/>
+          </a:fillRef>
+          <a:effectRef idx="2">
+            <a:schemeClr val="accent1"/>
+          </a:effectRef>
+          <a:fontRef idx="minor">
+            <a:schemeClr val="lt1"/>
+          </a:fontRef>
+        </p:style>
+        <p:txBody>
+          <a:bodyPr rtlCol="0" anchor="ctr"/>
+          <a:lstStyle/>
+          <a:p>
+            <a:pPr algn="ctr"/>
+          </a:p>
+        </p:txBody>
+      </p:sp>
+      <p:sp>
+        <p:nvSpPr>
+          <p:cNvPr id="3" name="TextBox 2"/>
+          <p:cNvSpPr txBox="1"/>
+          <p:nvPr/>
+        </p:nvSpPr>
+        <p:spPr>
+          <a:xfrm>
+            <a:off x="685800" y="411480"/>
+            <a:ext cx="10789920" cy="320040"/>
+          </a:xfrm>
+          <a:prstGeom prst="rect">
+            <a:avLst/>
+          </a:prstGeom>
+          <a:noFill/>
+        </p:spPr>
+        <p:txBody>
+          <a:bodyPr wrap="square" anchor="t" lIns="0" rIns="0" tIns="0" bIns="0">
+            <a:spAutoFit/>
+          </a:bodyPr>
+          <a:lstStyle/>
+          <a:p>
+            <a:pPr algn="l">
+              <a:lnSpc>
+                <a:spcPct val="115000"/>
+              </a:lnSpc>
+            </a:pPr>
+            <a:r>
+              <a:rPr sz="1250" b="1" i="0">
+                <a:solidFill>
+                  <a:srgbClr val="C9A45C"/>
+                </a:solidFill>
+                <a:latin typeface="JetBrains Mono"/>
+              </a:rPr>
+              <a:t>09 · RECORRIDO — INVITADO</a:t>
+            </a:r>
+          </a:p>
+        </p:txBody>
+      </p:sp>
+      <p:sp>
+        <p:nvSpPr>
+          <p:cNvPr id="4" name="TextBox 3"/>
+          <p:cNvSpPr txBox="1"/>
+          <p:nvPr/>
+        </p:nvSpPr>
+        <p:spPr>
+          <a:xfrm>
+            <a:off x="685800" y="704088"/>
+            <a:ext cx="10789920" cy="548640"/>
+          </a:xfrm>
+          <a:prstGeom prst="rect">
+            <a:avLst/>
+          </a:prstGeom>
+          <a:noFill/>
+        </p:spPr>
+        <p:txBody>
+          <a:bodyPr wrap="square" anchor="t" lIns="0" rIns="0" tIns="0" bIns="0">
+            <a:spAutoFit/>
+          </a:bodyPr>
+          <a:lstStyle/>
+          <a:p>
+            <a:pPr algn="l">
+              <a:lnSpc>
+                <a:spcPct val="115000"/>
+              </a:lnSpc>
+            </a:pPr>
+            <a:r>
+              <a:rPr sz="2400" b="1" i="0">
+                <a:solidFill>
+                  <a:srgbClr val="E7E9ED"/>
+                </a:solidFill>
+                <a:latin typeface="Space Grotesk"/>
+              </a:rPr>
+              <a:t>Primera cartera en segundos</a:t>
+            </a:r>
+          </a:p>
+        </p:txBody>
+      </p:sp>
+      <p:sp>
+        <p:nvSpPr>
+          <p:cNvPr id="5" name="Rectangle 4"/>
+          <p:cNvSpPr/>
+          <p:nvPr/>
+        </p:nvSpPr>
+        <p:spPr>
+          <a:xfrm>
+            <a:off x="685800" y="1197864"/>
+            <a:ext cx="457200" cy="38100"/>
+          </a:xfrm>
+          <a:prstGeom prst="rect">
+            <a:avLst/>
+          </a:prstGeom>
+          <a:solidFill>
+            <a:srgbClr val="C9A45C"/>
+          </a:solidFill>
+          <a:ln>
+            <a:noFill/>
+          </a:ln>
+          <a:effectLst/>
+        </p:spPr>
+        <p:style>
+          <a:lnRef idx="1">
+            <a:schemeClr val="accent1"/>
+          </a:lnRef>
+          <a:fillRef idx="3">
+            <a:schemeClr val="accent1"/>
+          </a:fillRef>
+          <a:effectRef idx="2">
+            <a:schemeClr val="accent1"/>
+          </a:effectRef>
+          <a:fontRef idx="minor">
+            <a:schemeClr val="lt1"/>
+          </a:fontRef>
+        </p:style>
+        <p:txBody>
+          <a:bodyPr rtlCol="0" anchor="ctr"/>
+          <a:lstStyle/>
+          <a:p>
+            <a:pPr algn="ctr"/>
+          </a:p>
+        </p:txBody>
+      </p:sp>
+      <p:sp>
+        <p:nvSpPr>
+          <p:cNvPr id="6" name="Rounded Rectangle 5"/>
+          <p:cNvSpPr/>
+          <p:nvPr/>
+        </p:nvSpPr>
+        <p:spPr>
+          <a:xfrm>
+            <a:off x="696468" y="1267968"/>
+            <a:ext cx="5053584" cy="3215640"/>
+          </a:xfrm>
+          <a:prstGeom prst="roundRect">
+            <a:avLst>
+              <a:gd name="adj" fmla="val 3000"/>
+            </a:avLst>
+          </a:prstGeom>
+          <a:solidFill>
+            <a:srgbClr val="15191F"/>
+          </a:solidFill>
+          <a:ln w="15875">
+            <a:solidFill>
+              <a:srgbClr val="C9A45C"/>
+            </a:solidFill>
+          </a:ln>
+          <a:effectLst/>
+        </p:spPr>
+        <p:style>
+          <a:lnRef idx="1">
+            <a:schemeClr val="accent1"/>
+          </a:lnRef>
+          <a:fillRef idx="3">
+            <a:schemeClr val="accent1"/>
+          </a:fillRef>
+          <a:effectRef idx="2">
+            <a:schemeClr val="accent1"/>
+          </a:effectRef>
+          <a:fontRef idx="minor">
+            <a:schemeClr val="lt1"/>
+          </a:fontRef>
+        </p:style>
+        <p:txBody>
+          <a:bodyPr rtlCol="0" anchor="ctr"/>
+          <a:lstStyle/>
+          <a:p>
+            <a:pPr algn="ctr"/>
+          </a:p>
+        </p:txBody>
+      </p:sp>
+      <p:pic>
+        <p:nvPicPr>
+          <p:cNvPr id="7" name="Picture 6" descr="03-crear-cartera-formulario.png"/>
+          <p:cNvPicPr>
+            <a:picLocks noChangeAspect="1"/>
+          </p:cNvPicPr>
+          <p:nvPr/>
+        </p:nvPicPr>
+        <p:blipFill>
+          <a:blip r:embed="rId2"/>
+          <a:stretch>
+            <a:fillRect/>
+          </a:stretch>
+        </p:blipFill>
+        <p:spPr>
+          <a:xfrm>
+            <a:off x="772668" y="1344168"/>
+            <a:ext cx="4901184" cy="3063240"/>
+          </a:xfrm>
+          <a:prstGeom prst="rect">
+            <a:avLst/>
+          </a:prstGeom>
+        </p:spPr>
+      </p:pic>
+      <p:sp>
+        <p:nvSpPr>
+          <p:cNvPr id="8" name="TextBox 7"/>
+          <p:cNvSpPr txBox="1"/>
+          <p:nvPr/>
+        </p:nvSpPr>
+        <p:spPr>
+          <a:xfrm>
+            <a:off x="696468" y="4538472"/>
+            <a:ext cx="5053584" cy="274320"/>
+          </a:xfrm>
+          <a:prstGeom prst="rect">
+            <a:avLst/>
+          </a:prstGeom>
+          <a:noFill/>
+        </p:spPr>
+        <p:txBody>
+          <a:bodyPr wrap="square" anchor="t" lIns="0" rIns="0" tIns="0" bIns="0">
+            <a:spAutoFit/>
+          </a:bodyPr>
+          <a:lstStyle/>
+          <a:p>
+            <a:pPr algn="ctr">
+              <a:lnSpc>
+                <a:spcPct val="115000"/>
+              </a:lnSpc>
+            </a:pPr>
+            <a:r>
+              <a:rPr sz="1050" b="0" i="0">
+                <a:solidFill>
+                  <a:srgbClr val="5C6472"/>
+                </a:solidFill>
+                <a:latin typeface="JetBrains Mono"/>
+              </a:rPr>
+              <a:t>Crear cartera — nombre y moneda base</a:t>
+            </a:r>
+          </a:p>
+        </p:txBody>
+      </p:sp>
+      <p:sp>
+        <p:nvSpPr>
+          <p:cNvPr id="9" name="Rounded Rectangle 8"/>
+          <p:cNvSpPr/>
+          <p:nvPr/>
+        </p:nvSpPr>
+        <p:spPr>
+          <a:xfrm>
+            <a:off x="6091428" y="1267968"/>
+            <a:ext cx="5053584" cy="3215640"/>
+          </a:xfrm>
+          <a:prstGeom prst="roundRect">
+            <a:avLst>
+              <a:gd name="adj" fmla="val 3000"/>
+            </a:avLst>
+          </a:prstGeom>
+          <a:solidFill>
+            <a:srgbClr val="15191F"/>
+          </a:solidFill>
+          <a:ln w="15875">
+            <a:solidFill>
+              <a:srgbClr val="C9A45C"/>
+            </a:solidFill>
+          </a:ln>
+          <a:effectLst/>
+        </p:spPr>
+        <p:style>
+          <a:lnRef idx="1">
+            <a:schemeClr val="accent1"/>
+          </a:lnRef>
+          <a:fillRef idx="3">
+            <a:schemeClr val="accent1"/>
+          </a:fillRef>
+          <a:effectRef idx="2">
+            <a:schemeClr val="accent1"/>
+          </a:effectRef>
+          <a:fontRef idx="minor">
+            <a:schemeClr val="lt1"/>
+          </a:fontRef>
+        </p:style>
+        <p:txBody>
+          <a:bodyPr rtlCol="0" anchor="ctr"/>
+          <a:lstStyle/>
+          <a:p>
+            <a:pPr algn="ctr"/>
+          </a:p>
+        </p:txBody>
+      </p:sp>
+      <p:pic>
+        <p:nvPicPr>
+          <p:cNvPr id="10" name="Picture 9" descr="03-dashboard-vacio.png"/>
+          <p:cNvPicPr>
+            <a:picLocks noChangeAspect="1"/>
+          </p:cNvPicPr>
+          <p:nvPr/>
+        </p:nvPicPr>
+        <p:blipFill>
+          <a:blip r:embed="rId3"/>
+          <a:stretch>
+            <a:fillRect/>
+          </a:stretch>
+        </p:blipFill>
+        <p:spPr>
+          <a:xfrm>
+            <a:off x="6167628" y="1344168"/>
+            <a:ext cx="4901184" cy="3063240"/>
+          </a:xfrm>
+          <a:prstGeom prst="rect">
+            <a:avLst/>
+          </a:prstGeom>
+        </p:spPr>
+      </p:pic>
+      <p:sp>
+        <p:nvSpPr>
+          <p:cNvPr id="11" name="TextBox 10"/>
+          <p:cNvSpPr txBox="1"/>
+          <p:nvPr/>
+        </p:nvSpPr>
+        <p:spPr>
+          <a:xfrm>
+            <a:off x="6091428" y="4538472"/>
+            <a:ext cx="5053584" cy="274320"/>
+          </a:xfrm>
+          <a:prstGeom prst="rect">
+            <a:avLst/>
+          </a:prstGeom>
+          <a:noFill/>
+        </p:spPr>
+        <p:txBody>
+          <a:bodyPr wrap="square" anchor="t" lIns="0" rIns="0" tIns="0" bIns="0">
+            <a:spAutoFit/>
+          </a:bodyPr>
+          <a:lstStyle/>
+          <a:p>
+            <a:pPr algn="ctr">
+              <a:lnSpc>
+                <a:spcPct val="115000"/>
+              </a:lnSpc>
+            </a:pPr>
+            <a:r>
+              <a:rPr sz="1050" b="0" i="0">
+                <a:solidFill>
+                  <a:srgbClr val="5C6472"/>
+                </a:solidFill>
+                <a:latin typeface="JetBrains Mono"/>
+              </a:rPr>
+              <a:t>Dashboard vacío con KPIs a la espera del primer activo</a:t>
+            </a:r>
+          </a:p>
+        </p:txBody>
+      </p:sp>
+      <p:sp>
+        <p:nvSpPr>
+          <p:cNvPr id="12" name="TextBox 11"/>
+          <p:cNvSpPr txBox="1"/>
+          <p:nvPr/>
+        </p:nvSpPr>
+        <p:spPr>
+          <a:xfrm>
+            <a:off x="685800" y="5001768"/>
+            <a:ext cx="10607040" cy="1188720"/>
+          </a:xfrm>
+          <a:prstGeom prst="rect">
+            <a:avLst/>
+          </a:prstGeom>
+          <a:noFill/>
+        </p:spPr>
+        <p:txBody>
+          <a:bodyPr wrap="square" lIns="0" rIns="0" tIns="0" bIns="0">
+            <a:spAutoFit/>
+          </a:bodyPr>
+          <a:lstStyle/>
+          <a:p>
+            <a:pPr>
+              <a:lnSpc>
+                <a:spcPct val="125000"/>
+              </a:lnSpc>
+              <a:spcAft>
+                <a:spcPts val="400"/>
+              </a:spcAft>
+            </a:pPr>
+            <a:r>
+              <a:rPr sz="1300" b="1">
+                <a:solidFill>
+                  <a:srgbClr val="C9A45C"/>
+                </a:solidFill>
+                <a:latin typeface="Space Grotesk"/>
+              </a:rPr>
+              <a:t>▪  </a:t>
+            </a:r>
+            <a:r>
+              <a:rPr sz="1300" b="1">
+                <a:solidFill>
+                  <a:srgbClr val="E7E9ED"/>
+                </a:solidFill>
+                <a:latin typeface="Space Grotesk"/>
+              </a:rPr>
+              <a:t>Ruteo post-login inteligente.</a:t>
+            </a:r>
+            <a:r>
+              <a:rPr sz="1300">
+                <a:solidFill>
+                  <a:srgbClr val="99A0AB"/>
+                </a:solidFill>
+                <a:latin typeface="Space Grotesk"/>
+              </a:rPr>
+              <a:t> 0 carteras → formulario de creación directo (Spec D02 §10), sin pasos de más.</a:t>
+            </a:r>
+          </a:p>
+          <a:p>
+            <a:pPr>
+              <a:lnSpc>
+                <a:spcPct val="125000"/>
+              </a:lnSpc>
+              <a:spcAft>
+                <a:spcPts val="400"/>
+              </a:spcAft>
+            </a:pPr>
+            <a:r>
+              <a:rPr sz="1300" b="1">
+                <a:solidFill>
+                  <a:srgbClr val="C9A45C"/>
+                </a:solidFill>
+                <a:latin typeface="Space Grotesk"/>
+              </a:rPr>
+              <a:t>▪  </a:t>
+            </a:r>
+            <a:r>
+              <a:rPr sz="1300" b="1">
+                <a:solidFill>
+                  <a:srgbClr val="E7E9ED"/>
+                </a:solidFill>
+                <a:latin typeface="Space Grotesk"/>
+              </a:rPr>
+              <a:t>Moneda base por cartera.</a:t>
+            </a:r>
+            <a:r>
+              <a:rPr sz="1300">
+                <a:solidFill>
+                  <a:srgbClr val="99A0AB"/>
+                </a:solidFill>
+                <a:latin typeface="Space Grotesk"/>
+              </a:rPr>
+              <a:t> aquí EUR; cada cartera puede tener la suya propia.</a:t>
+            </a:r>
+          </a:p>
+          <a:p>
+            <a:pPr>
+              <a:lnSpc>
+                <a:spcPct val="125000"/>
+              </a:lnSpc>
+              <a:spcAft>
+                <a:spcPts val="400"/>
+              </a:spcAft>
+            </a:pPr>
+            <a:r>
+              <a:rPr sz="1300" b="1">
+                <a:solidFill>
+                  <a:srgbClr val="C9A45C"/>
+                </a:solidFill>
+                <a:latin typeface="Space Grotesk"/>
+              </a:rPr>
+              <a:t>▪  </a:t>
+            </a:r>
+            <a:r>
+              <a:rPr sz="1300" b="1">
+                <a:solidFill>
+                  <a:srgbClr val="E7E9ED"/>
+                </a:solidFill>
+                <a:latin typeface="Space Grotesk"/>
+              </a:rPr>
+              <a:t>Estado honesto.</a:t>
+            </a:r>
+            <a:r>
+              <a:rPr sz="1300">
+                <a:solidFill>
+                  <a:srgbClr val="99A0AB"/>
+                </a:solidFill>
+                <a:latin typeface="Space Grotesk"/>
+              </a:rPr>
+              <a:t> la franja de KPIs (TWR, CAGR, Drawdown, Volatilidad, Sharpe) muestra “se calculará al cierre” en vez de datos falsos.</a:t>
+            </a:r>
+          </a:p>
+        </p:txBody>
+      </p:sp>
+      <p:sp>
+        <p:nvSpPr>
+          <p:cNvPr id="13" name="TextBox 12"/>
+          <p:cNvSpPr txBox="1"/>
+          <p:nvPr/>
+        </p:nvSpPr>
+        <p:spPr>
+          <a:xfrm>
+            <a:off x="685800" y="6473952"/>
+            <a:ext cx="5486400" cy="274320"/>
+          </a:xfrm>
+          <a:prstGeom prst="rect">
+            <a:avLst/>
+          </a:prstGeom>
+          <a:noFill/>
+        </p:spPr>
+        <p:txBody>
+          <a:bodyPr wrap="square" anchor="t" lIns="0" rIns="0" tIns="0" bIns="0">
+            <a:spAutoFit/>
+          </a:bodyPr>
+          <a:lstStyle/>
+          <a:p>
+            <a:pPr algn="l">
+              <a:lnSpc>
+                <a:spcPct val="115000"/>
+              </a:lnSpc>
+            </a:pPr>
+            <a:r>
+              <a:rPr sz="850" b="0" i="0">
+                <a:solidFill>
+                  <a:srgbClr val="5C6472"/>
+                </a:solidFill>
+                <a:latin typeface="JetBrains Mono"/>
+              </a:rPr>
+              <a:t>TFM BIGSCHOOL · GESTIÓN DE CARTERA FINANCIERA CON IA</a:t>
+            </a:r>
+          </a:p>
+        </p:txBody>
+      </p:sp>
+      <p:sp>
+        <p:nvSpPr>
+          <p:cNvPr id="14" name="TextBox 13"/>
+          <p:cNvSpPr txBox="1"/>
+          <p:nvPr/>
+        </p:nvSpPr>
+        <p:spPr>
+          <a:xfrm>
+            <a:off x="5943600" y="6473952"/>
+            <a:ext cx="4389120" cy="274320"/>
+          </a:xfrm>
+          <a:prstGeom prst="rect">
+            <a:avLst/>
+          </a:prstGeom>
+          <a:noFill/>
+        </p:spPr>
+        <p:txBody>
+          <a:bodyPr wrap="square" anchor="t" lIns="0" rIns="0" tIns="0" bIns="0">
+            <a:spAutoFit/>
+          </a:bodyPr>
+          <a:lstStyle/>
+          <a:p>
+            <a:pPr algn="r">
+              <a:lnSpc>
+                <a:spcPct val="115000"/>
+              </a:lnSpc>
+            </a:pPr>
+            <a:r>
+              <a:rPr sz="850" b="0" i="0">
+                <a:solidFill>
+                  <a:srgbClr val="5C6472"/>
+                </a:solidFill>
+                <a:latin typeface="JetBrains Mono"/>
+              </a:rPr>
+              <a:t>09 · RECORRIDO — INVITADO</a:t>
+            </a:r>
+          </a:p>
+        </p:txBody>
+      </p:sp>
+      <p:sp>
+        <p:nvSpPr>
+          <p:cNvPr id="15" name="TextBox 14"/>
+          <p:cNvSpPr txBox="1"/>
+          <p:nvPr/>
+        </p:nvSpPr>
+        <p:spPr>
+          <a:xfrm>
+            <a:off x="11475720" y="6473952"/>
+            <a:ext cx="548640" cy="274320"/>
+          </a:xfrm>
+          <a:prstGeom prst="rect">
+            <a:avLst/>
+          </a:prstGeom>
+          <a:noFill/>
+        </p:spPr>
+        <p:txBody>
+          <a:bodyPr wrap="square" anchor="t" lIns="0" rIns="0" tIns="0" bIns="0">
+            <a:spAutoFit/>
+          </a:bodyPr>
+          <a:lstStyle/>
+          <a:p>
+            <a:pPr algn="r">
+              <a:lnSpc>
+                <a:spcPct val="115000"/>
+              </a:lnSpc>
+            </a:pPr>
+            <a:r>
+              <a:rPr sz="850" b="0" i="0">
+                <a:solidFill>
+                  <a:srgbClr val="C9A45C"/>
+                </a:solidFill>
+                <a:latin typeface="JetBrains Mono"/>
+              </a:rPr>
+              <a:t>34</a:t>
+            </a:r>
+          </a:p>
+        </p:txBody>
+      </p:sp>
+      <p:sp>
+        <p:nvSpPr>
+          <p:cNvPr id="16" name="Rectangle 15"/>
+          <p:cNvSpPr/>
+          <p:nvPr/>
+        </p:nvSpPr>
+        <p:spPr>
+          <a:xfrm>
+            <a:off x="685800" y="6400800"/>
+            <a:ext cx="10817352" cy="9525"/>
+          </a:xfrm>
+          <a:prstGeom prst="rect">
+            <a:avLst/>
+          </a:prstGeom>
+          <a:solidFill>
+            <a:srgbClr val="1D222B"/>
+          </a:solidFill>
+          <a:ln>
+            <a:noFill/>
+          </a:ln>
+          <a:effectLst/>
+        </p:spPr>
+        <p:style>
+          <a:lnRef idx="1">
+            <a:schemeClr val="accent1"/>
+          </a:lnRef>
+          <a:fillRef idx="3">
+            <a:schemeClr val="accent1"/>
+          </a:fillRef>
+          <a:effectRef idx="2">
+            <a:schemeClr val="accent1"/>
+          </a:effectRef>
+          <a:fontRef idx="minor">
+            <a:schemeClr val="lt1"/>
+          </a:fontRef>
+        </p:style>
+        <p:txBody>
+          <a:bodyPr rtlCol="0" anchor="ctr"/>
+          <a:lstStyle/>
+          <a:p>
+            <a:pPr algn="ctr"/>
+          </a:p>
+        </p:txBody>
+      </p:sp>
+    </p:spTree>
+  </p:cSld>
+  <p:clrMapOvr>
+    <a:masterClrMapping/>
+  </p:clrMapOvr>
+</p:sld>
+</file>
+
+<file path=ppt/slides/slide36.xml><?xml version="1.0" encoding="utf-8"?>
+<p:sld xmlns:a="http://schemas.openxmlformats.org/drawingml/2006/main" xmlns:p="http://schemas.openxmlformats.org/presentationml/2006/main" xmlns:r="http://schemas.openxmlformats.org/officeDocument/2006/relationships">
+  <p:cSld>
+    <p:spTree>
+      <p:nvGrpSpPr>
+        <p:cNvPr id="1" name=""/>
+        <p:cNvGrpSpPr/>
+        <p:nvPr/>
+      </p:nvGrpSpPr>
+      <p:grpSpPr/>
+      <p:sp>
+        <p:nvSpPr>
+          <p:cNvPr id="2" name="Rectangle 1"/>
+          <p:cNvSpPr/>
+          <p:nvPr/>
+        </p:nvSpPr>
+        <p:spPr>
+          <a:xfrm>
+            <a:off x="0" y="0"/>
+            <a:ext cx="12191695" cy="6858000"/>
+          </a:xfrm>
+          <a:prstGeom prst="rect">
+            <a:avLst/>
+          </a:prstGeom>
+          <a:solidFill>
+            <a:srgbClr val="08090B"/>
+          </a:solidFill>
+          <a:ln>
+            <a:noFill/>
+          </a:ln>
+          <a:effectLst/>
+        </p:spPr>
+        <p:style>
+          <a:lnRef idx="1">
+            <a:schemeClr val="accent1"/>
+          </a:lnRef>
+          <a:fillRef idx="3">
+            <a:schemeClr val="accent1"/>
+          </a:fillRef>
+          <a:effectRef idx="2">
+            <a:schemeClr val="accent1"/>
+          </a:effectRef>
+          <a:fontRef idx="minor">
+            <a:schemeClr val="lt1"/>
+          </a:fontRef>
+        </p:style>
+        <p:txBody>
+          <a:bodyPr rtlCol="0" anchor="ctr"/>
+          <a:lstStyle/>
+          <a:p>
+            <a:pPr algn="ctr"/>
+          </a:p>
+        </p:txBody>
+      </p:sp>
+      <p:sp>
+        <p:nvSpPr>
+          <p:cNvPr id="3" name="TextBox 2"/>
+          <p:cNvSpPr txBox="1"/>
+          <p:nvPr/>
+        </p:nvSpPr>
+        <p:spPr>
+          <a:xfrm>
+            <a:off x="685800" y="411480"/>
+            <a:ext cx="10789920" cy="320040"/>
+          </a:xfrm>
+          <a:prstGeom prst="rect">
+            <a:avLst/>
+          </a:prstGeom>
+          <a:noFill/>
+        </p:spPr>
+        <p:txBody>
+          <a:bodyPr wrap="square" anchor="t" lIns="0" rIns="0" tIns="0" bIns="0">
+            <a:spAutoFit/>
+          </a:bodyPr>
+          <a:lstStyle/>
+          <a:p>
+            <a:pPr algn="l">
+              <a:lnSpc>
+                <a:spcPct val="115000"/>
+              </a:lnSpc>
+            </a:pPr>
+            <a:r>
+              <a:rPr sz="1250" b="1" i="0">
+                <a:solidFill>
+                  <a:srgbClr val="C9A45C"/>
+                </a:solidFill>
+                <a:latin typeface="JetBrains Mono"/>
+              </a:rPr>
+              <a:t>09 · RECORRIDO — INVITADO</a:t>
+            </a:r>
+          </a:p>
+        </p:txBody>
+      </p:sp>
+      <p:sp>
+        <p:nvSpPr>
+          <p:cNvPr id="4" name="TextBox 3"/>
+          <p:cNvSpPr txBox="1"/>
+          <p:nvPr/>
+        </p:nvSpPr>
+        <p:spPr>
+          <a:xfrm>
+            <a:off x="685800" y="704088"/>
+            <a:ext cx="10789920" cy="548640"/>
+          </a:xfrm>
+          <a:prstGeom prst="rect">
+            <a:avLst/>
+          </a:prstGeom>
+          <a:noFill/>
+        </p:spPr>
+        <p:txBody>
+          <a:bodyPr wrap="square" anchor="t" lIns="0" rIns="0" tIns="0" bIns="0">
+            <a:spAutoFit/>
+          </a:bodyPr>
+          <a:lstStyle/>
+          <a:p>
+            <a:pPr algn="l">
+              <a:lnSpc>
+                <a:spcPct val="115000"/>
+              </a:lnSpc>
+            </a:pPr>
+            <a:r>
+              <a:rPr sz="2400" b="1" i="0">
+                <a:solidFill>
+                  <a:srgbClr val="E7E9ED"/>
+                </a:solidFill>
+                <a:latin typeface="Space Grotesk"/>
+              </a:rPr>
+              <a:t>Añadir un activo con datos de mercado reales</a:t>
+            </a:r>
+          </a:p>
+        </p:txBody>
+      </p:sp>
+      <p:sp>
+        <p:nvSpPr>
+          <p:cNvPr id="5" name="Rectangle 4"/>
+          <p:cNvSpPr/>
+          <p:nvPr/>
+        </p:nvSpPr>
+        <p:spPr>
+          <a:xfrm>
+            <a:off x="685800" y="1197864"/>
+            <a:ext cx="457200" cy="38100"/>
+          </a:xfrm>
+          <a:prstGeom prst="rect">
+            <a:avLst/>
+          </a:prstGeom>
+          <a:solidFill>
+            <a:srgbClr val="C9A45C"/>
+          </a:solidFill>
+          <a:ln>
+            <a:noFill/>
+          </a:ln>
+          <a:effectLst/>
+        </p:spPr>
+        <p:style>
+          <a:lnRef idx="1">
+            <a:schemeClr val="accent1"/>
+          </a:lnRef>
+          <a:fillRef idx="3">
+            <a:schemeClr val="accent1"/>
+          </a:fillRef>
+          <a:effectRef idx="2">
+            <a:schemeClr val="accent1"/>
+          </a:effectRef>
+          <a:fontRef idx="minor">
+            <a:schemeClr val="lt1"/>
+          </a:fontRef>
+        </p:style>
+        <p:txBody>
+          <a:bodyPr rtlCol="0" anchor="ctr"/>
+          <a:lstStyle/>
+          <a:p>
+            <a:pPr algn="ctr"/>
+          </a:p>
+        </p:txBody>
+      </p:sp>
+      <p:sp>
+        <p:nvSpPr>
+          <p:cNvPr id="6" name="Rounded Rectangle 5"/>
+          <p:cNvSpPr/>
+          <p:nvPr/>
+        </p:nvSpPr>
+        <p:spPr>
+          <a:xfrm>
+            <a:off x="696468" y="1267968"/>
+            <a:ext cx="5053584" cy="3215640"/>
+          </a:xfrm>
+          <a:prstGeom prst="roundRect">
+            <a:avLst>
+              <a:gd name="adj" fmla="val 3000"/>
+            </a:avLst>
+          </a:prstGeom>
+          <a:solidFill>
+            <a:srgbClr val="15191F"/>
+          </a:solidFill>
+          <a:ln w="15875">
+            <a:solidFill>
+              <a:srgbClr val="C9A45C"/>
+            </a:solidFill>
+          </a:ln>
+          <a:effectLst/>
+        </p:spPr>
+        <p:style>
+          <a:lnRef idx="1">
+            <a:schemeClr val="accent1"/>
+          </a:lnRef>
+          <a:fillRef idx="3">
+            <a:schemeClr val="accent1"/>
+          </a:fillRef>
+          <a:effectRef idx="2">
+            <a:schemeClr val="accent1"/>
+          </a:effectRef>
+          <a:fontRef idx="minor">
+            <a:schemeClr val="lt1"/>
+          </a:fontRef>
+        </p:style>
+        <p:txBody>
+          <a:bodyPr rtlCol="0" anchor="ctr"/>
+          <a:lstStyle/>
+          <a:p>
+            <a:pPr algn="ctr"/>
+          </a:p>
+        </p:txBody>
+      </p:sp>
+      <p:pic>
+        <p:nvPicPr>
+          <p:cNvPr id="7" name="Picture 6" descr="04-anadir-activo-formulario.png"/>
+          <p:cNvPicPr>
+            <a:picLocks noChangeAspect="1"/>
+          </p:cNvPicPr>
+          <p:nvPr/>
+        </p:nvPicPr>
+        <p:blipFill>
+          <a:blip r:embed="rId2"/>
+          <a:stretch>
+            <a:fillRect/>
+          </a:stretch>
+        </p:blipFill>
+        <p:spPr>
+          <a:xfrm>
+            <a:off x="772668" y="1344168"/>
+            <a:ext cx="4901184" cy="3063240"/>
+          </a:xfrm>
+          <a:prstGeom prst="rect">
+            <a:avLst/>
+          </a:prstGeom>
+        </p:spPr>
+      </p:pic>
+      <p:sp>
+        <p:nvSpPr>
+          <p:cNvPr id="8" name="TextBox 7"/>
+          <p:cNvSpPr txBox="1"/>
+          <p:nvPr/>
+        </p:nvSpPr>
+        <p:spPr>
+          <a:xfrm>
+            <a:off x="696468" y="4538472"/>
+            <a:ext cx="5053584" cy="274320"/>
+          </a:xfrm>
+          <a:prstGeom prst="rect">
+            <a:avLst/>
+          </a:prstGeom>
+          <a:noFill/>
+        </p:spPr>
+        <p:txBody>
+          <a:bodyPr wrap="square" anchor="t" lIns="0" rIns="0" tIns="0" bIns="0">
+            <a:spAutoFit/>
+          </a:bodyPr>
+          <a:lstStyle/>
+          <a:p>
+            <a:pPr algn="ctr">
+              <a:lnSpc>
+                <a:spcPct val="115000"/>
+              </a:lnSpc>
+            </a:pPr>
+            <a:r>
+              <a:rPr sz="1050" b="0" i="0">
+                <a:solidFill>
+                  <a:srgbClr val="5C6472"/>
+                </a:solidFill>
+                <a:latin typeface="JetBrains Mono"/>
+              </a:rPr>
+              <a:t>Formulario de alta con buscador de ticker</a:t>
+            </a:r>
+          </a:p>
+        </p:txBody>
+      </p:sp>
+      <p:sp>
+        <p:nvSpPr>
+          <p:cNvPr id="9" name="Rounded Rectangle 8"/>
+          <p:cNvSpPr/>
+          <p:nvPr/>
+        </p:nvSpPr>
+        <p:spPr>
+          <a:xfrm>
+            <a:off x="6091428" y="1267968"/>
+            <a:ext cx="5053584" cy="3215640"/>
+          </a:xfrm>
+          <a:prstGeom prst="roundRect">
+            <a:avLst>
+              <a:gd name="adj" fmla="val 3000"/>
+            </a:avLst>
+          </a:prstGeom>
+          <a:solidFill>
+            <a:srgbClr val="15191F"/>
+          </a:solidFill>
+          <a:ln w="15875">
+            <a:solidFill>
+              <a:srgbClr val="C9A45C"/>
+            </a:solidFill>
+          </a:ln>
+          <a:effectLst/>
+        </p:spPr>
+        <p:style>
+          <a:lnRef idx="1">
+            <a:schemeClr val="accent1"/>
+          </a:lnRef>
+          <a:fillRef idx="3">
+            <a:schemeClr val="accent1"/>
+          </a:fillRef>
+          <a:effectRef idx="2">
+            <a:schemeClr val="accent1"/>
+          </a:effectRef>
+          <a:fontRef idx="minor">
+            <a:schemeClr val="lt1"/>
+          </a:fontRef>
+        </p:style>
+        <p:txBody>
+          <a:bodyPr rtlCol="0" anchor="ctr"/>
+          <a:lstStyle/>
+          <a:p>
+            <a:pPr algn="ctr"/>
+          </a:p>
+        </p:txBody>
+      </p:sp>
+      <p:pic>
+        <p:nvPicPr>
+          <p:cNvPr id="10" name="Picture 9" descr="05-anadir-activo-busqueda.png"/>
+          <p:cNvPicPr>
+            <a:picLocks noChangeAspect="1"/>
+          </p:cNvPicPr>
+          <p:nvPr/>
+        </p:nvPicPr>
+        <p:blipFill>
+          <a:blip r:embed="rId3"/>
+          <a:stretch>
+            <a:fillRect/>
+          </a:stretch>
+        </p:blipFill>
+        <p:spPr>
+          <a:xfrm>
+            <a:off x="6167628" y="1344168"/>
+            <a:ext cx="4901184" cy="3063240"/>
+          </a:xfrm>
+          <a:prstGeom prst="rect">
+            <a:avLst/>
+          </a:prstGeom>
+        </p:spPr>
+      </p:pic>
+      <p:sp>
+        <p:nvSpPr>
+          <p:cNvPr id="11" name="TextBox 10"/>
+          <p:cNvSpPr txBox="1"/>
+          <p:nvPr/>
+        </p:nvSpPr>
+        <p:spPr>
+          <a:xfrm>
+            <a:off x="6091428" y="4538472"/>
+            <a:ext cx="5053584" cy="274320"/>
+          </a:xfrm>
+          <a:prstGeom prst="rect">
+            <a:avLst/>
+          </a:prstGeom>
+          <a:noFill/>
+        </p:spPr>
+        <p:txBody>
+          <a:bodyPr wrap="square" anchor="t" lIns="0" rIns="0" tIns="0" bIns="0">
+            <a:spAutoFit/>
+          </a:bodyPr>
+          <a:lstStyle/>
+          <a:p>
+            <a:pPr algn="ctr">
+              <a:lnSpc>
+                <a:spcPct val="115000"/>
+              </a:lnSpc>
+            </a:pPr>
+            <a:r>
+              <a:rPr sz="1050" b="0" i="0">
+                <a:solidFill>
+                  <a:srgbClr val="5C6472"/>
+                </a:solidFill>
+                <a:latin typeface="JetBrains Mono"/>
+              </a:rPr>
+              <a:t>Autocompletado en vivo contra la cascada de proveedores</a:t>
+            </a:r>
+          </a:p>
+        </p:txBody>
+      </p:sp>
+      <p:sp>
+        <p:nvSpPr>
+          <p:cNvPr id="12" name="TextBox 11"/>
+          <p:cNvSpPr txBox="1"/>
+          <p:nvPr/>
+        </p:nvSpPr>
+        <p:spPr>
+          <a:xfrm>
+            <a:off x="685800" y="5001768"/>
+            <a:ext cx="10607040" cy="1188720"/>
+          </a:xfrm>
+          <a:prstGeom prst="rect">
+            <a:avLst/>
+          </a:prstGeom>
+          <a:noFill/>
+        </p:spPr>
+        <p:txBody>
+          <a:bodyPr wrap="square" lIns="0" rIns="0" tIns="0" bIns="0">
+            <a:spAutoFit/>
+          </a:bodyPr>
+          <a:lstStyle/>
+          <a:p>
+            <a:pPr>
+              <a:lnSpc>
+                <a:spcPct val="125000"/>
+              </a:lnSpc>
+              <a:spcAft>
+                <a:spcPts val="400"/>
+              </a:spcAft>
+            </a:pPr>
+            <a:r>
+              <a:rPr sz="1300" b="1">
+                <a:solidFill>
+                  <a:srgbClr val="C9A45C"/>
+                </a:solidFill>
+                <a:latin typeface="Space Grotesk"/>
+              </a:rPr>
+              <a:t>▪  </a:t>
+            </a:r>
+            <a:r>
+              <a:rPr sz="1300" b="1">
+                <a:solidFill>
+                  <a:srgbClr val="E7E9ED"/>
+                </a:solidFill>
+                <a:latin typeface="Space Grotesk"/>
+              </a:rPr>
+              <a:t>Búsqueda en vivo.</a:t>
+            </a:r>
+            <a:r>
+              <a:rPr sz="1300">
+                <a:solidFill>
+                  <a:srgbClr val="99A0AB"/>
+                </a:solidFill>
+                <a:latin typeface="Space Grotesk"/>
+              </a:rPr>
+              <a:t> el campo de ticker llama al primer proveedor de la cascada (Twelve Data) en tiempo real (Spec D12 §5.5).</a:t>
+            </a:r>
+          </a:p>
+          <a:p>
+            <a:pPr>
+              <a:lnSpc>
+                <a:spcPct val="125000"/>
+              </a:lnSpc>
+              <a:spcAft>
+                <a:spcPts val="400"/>
+              </a:spcAft>
+            </a:pPr>
+            <a:r>
+              <a:rPr sz="1300" b="1">
+                <a:solidFill>
+                  <a:srgbClr val="C9A45C"/>
+                </a:solidFill>
+                <a:latin typeface="Space Grotesk"/>
+              </a:rPr>
+              <a:t>▪  </a:t>
+            </a:r>
+            <a:r>
+              <a:rPr sz="1300" b="1">
+                <a:solidFill>
+                  <a:srgbClr val="E7E9ED"/>
+                </a:solidFill>
+                <a:latin typeface="Space Grotesk"/>
+              </a:rPr>
+              <a:t>Alta + primer lote en un solo paso.</a:t>
+            </a:r>
+            <a:r>
+              <a:rPr sz="1300">
+                <a:solidFill>
+                  <a:srgbClr val="99A0AB"/>
+                </a:solidFill>
+                <a:latin typeface="Space Grotesk"/>
+              </a:rPr>
+              <a:t> se registra el activo y su primera compra juntos.</a:t>
+            </a:r>
+          </a:p>
+          <a:p>
+            <a:pPr>
+              <a:lnSpc>
+                <a:spcPct val="125000"/>
+              </a:lnSpc>
+              <a:spcAft>
+                <a:spcPts val="400"/>
+              </a:spcAft>
+            </a:pPr>
+            <a:r>
+              <a:rPr sz="1300" b="1">
+                <a:solidFill>
+                  <a:srgbClr val="C9A45C"/>
+                </a:solidFill>
+                <a:latin typeface="Space Grotesk"/>
+              </a:rPr>
+              <a:t>▪  </a:t>
+            </a:r>
+            <a:r>
+              <a:rPr sz="1300">
+                <a:solidFill>
+                  <a:srgbClr val="99A0AB"/>
+                </a:solidFill>
+                <a:latin typeface="Space Grotesk"/>
+              </a:rPr>
+              <a:t>Esta captura corresponde al entorno de Azure en producción — no es un mock ni datos de prueba.</a:t>
+            </a:r>
+          </a:p>
+        </p:txBody>
+      </p:sp>
+      <p:sp>
+        <p:nvSpPr>
+          <p:cNvPr id="13" name="TextBox 12"/>
+          <p:cNvSpPr txBox="1"/>
+          <p:nvPr/>
+        </p:nvSpPr>
+        <p:spPr>
+          <a:xfrm>
+            <a:off x="685800" y="6473952"/>
+            <a:ext cx="5486400" cy="274320"/>
+          </a:xfrm>
+          <a:prstGeom prst="rect">
+            <a:avLst/>
+          </a:prstGeom>
+          <a:noFill/>
+        </p:spPr>
+        <p:txBody>
+          <a:bodyPr wrap="square" anchor="t" lIns="0" rIns="0" tIns="0" bIns="0">
+            <a:spAutoFit/>
+          </a:bodyPr>
+          <a:lstStyle/>
+          <a:p>
+            <a:pPr algn="l">
+              <a:lnSpc>
+                <a:spcPct val="115000"/>
+              </a:lnSpc>
+            </a:pPr>
+            <a:r>
+              <a:rPr sz="850" b="0" i="0">
+                <a:solidFill>
+                  <a:srgbClr val="5C6472"/>
+                </a:solidFill>
+                <a:latin typeface="JetBrains Mono"/>
+              </a:rPr>
+              <a:t>TFM BIGSCHOOL · GESTIÓN DE CARTERA FINANCIERA CON IA</a:t>
+            </a:r>
+          </a:p>
+        </p:txBody>
+      </p:sp>
+      <p:sp>
+        <p:nvSpPr>
+          <p:cNvPr id="14" name="TextBox 13"/>
+          <p:cNvSpPr txBox="1"/>
+          <p:nvPr/>
+        </p:nvSpPr>
+        <p:spPr>
+          <a:xfrm>
+            <a:off x="5943600" y="6473952"/>
+            <a:ext cx="4389120" cy="274320"/>
+          </a:xfrm>
+          <a:prstGeom prst="rect">
+            <a:avLst/>
+          </a:prstGeom>
+          <a:noFill/>
+        </p:spPr>
+        <p:txBody>
+          <a:bodyPr wrap="square" anchor="t" lIns="0" rIns="0" tIns="0" bIns="0">
+            <a:spAutoFit/>
+          </a:bodyPr>
+          <a:lstStyle/>
+          <a:p>
+            <a:pPr algn="r">
+              <a:lnSpc>
+                <a:spcPct val="115000"/>
+              </a:lnSpc>
+            </a:pPr>
+            <a:r>
+              <a:rPr sz="850" b="0" i="0">
+                <a:solidFill>
+                  <a:srgbClr val="5C6472"/>
+                </a:solidFill>
+                <a:latin typeface="JetBrains Mono"/>
+              </a:rPr>
+              <a:t>09 · RECORRIDO — INVITADO</a:t>
+            </a:r>
+          </a:p>
+        </p:txBody>
+      </p:sp>
+      <p:sp>
+        <p:nvSpPr>
+          <p:cNvPr id="15" name="TextBox 14"/>
+          <p:cNvSpPr txBox="1"/>
+          <p:nvPr/>
+        </p:nvSpPr>
+        <p:spPr>
+          <a:xfrm>
+            <a:off x="11475720" y="6473952"/>
+            <a:ext cx="548640" cy="274320"/>
+          </a:xfrm>
+          <a:prstGeom prst="rect">
+            <a:avLst/>
+          </a:prstGeom>
+          <a:noFill/>
+        </p:spPr>
+        <p:txBody>
+          <a:bodyPr wrap="square" anchor="t" lIns="0" rIns="0" tIns="0" bIns="0">
+            <a:spAutoFit/>
+          </a:bodyPr>
+          <a:lstStyle/>
+          <a:p>
+            <a:pPr algn="r">
+              <a:lnSpc>
+                <a:spcPct val="115000"/>
+              </a:lnSpc>
+            </a:pPr>
+            <a:r>
+              <a:rPr sz="850" b="0" i="0">
+                <a:solidFill>
+                  <a:srgbClr val="C9A45C"/>
+                </a:solidFill>
+                <a:latin typeface="JetBrains Mono"/>
+              </a:rPr>
+              <a:t>35</a:t>
+            </a:r>
+          </a:p>
+        </p:txBody>
+      </p:sp>
+      <p:sp>
+        <p:nvSpPr>
+          <p:cNvPr id="16" name="Rectangle 15"/>
+          <p:cNvSpPr/>
+          <p:nvPr/>
+        </p:nvSpPr>
+        <p:spPr>
+          <a:xfrm>
+            <a:off x="685800" y="6400800"/>
+            <a:ext cx="10817352" cy="9525"/>
+          </a:xfrm>
+          <a:prstGeom prst="rect">
+            <a:avLst/>
+          </a:prstGeom>
+          <a:solidFill>
+            <a:srgbClr val="1D222B"/>
+          </a:solidFill>
+          <a:ln>
+            <a:noFill/>
+          </a:ln>
+          <a:effectLst/>
+        </p:spPr>
+        <p:style>
+          <a:lnRef idx="1">
+            <a:schemeClr val="accent1"/>
+          </a:lnRef>
+          <a:fillRef idx="3">
+            <a:schemeClr val="accent1"/>
+          </a:fillRef>
+          <a:effectRef idx="2">
+            <a:schemeClr val="accent1"/>
+          </a:effectRef>
+          <a:fontRef idx="minor">
+            <a:schemeClr val="lt1"/>
+          </a:fontRef>
+        </p:style>
+        <p:txBody>
+          <a:bodyPr rtlCol="0" anchor="ctr"/>
+          <a:lstStyle/>
+          <a:p>
+            <a:pPr algn="ctr"/>
+          </a:p>
+        </p:txBody>
+      </p:sp>
+    </p:spTree>
+  </p:cSld>
+  <p:clrMapOvr>
+    <a:masterClrMapping/>
+  </p:clrMapOvr>
+</p:sld>
+</file>
+
+<file path=ppt/slides/slide37.xml><?xml version="1.0" encoding="utf-8"?>
+<p:sld xmlns:a="http://schemas.openxmlformats.org/drawingml/2006/main" xmlns:p="http://schemas.openxmlformats.org/presentationml/2006/main" xmlns:r="http://schemas.openxmlformats.org/officeDocument/2006/relationships">
+  <p:cSld>
+    <p:spTree>
+      <p:nvGrpSpPr>
+        <p:cNvPr id="1" name=""/>
+        <p:cNvGrpSpPr/>
+        <p:nvPr/>
+      </p:nvGrpSpPr>
+      <p:grpSpPr/>
+      <p:sp>
+        <p:nvSpPr>
+          <p:cNvPr id="2" name="Rectangle 1"/>
+          <p:cNvSpPr/>
+          <p:nvPr/>
+        </p:nvSpPr>
+        <p:spPr>
+          <a:xfrm>
+            <a:off x="0" y="0"/>
+            <a:ext cx="12191695" cy="6858000"/>
+          </a:xfrm>
+          <a:prstGeom prst="rect">
+            <a:avLst/>
+          </a:prstGeom>
+          <a:solidFill>
+            <a:srgbClr val="08090B"/>
+          </a:solidFill>
+          <a:ln>
+            <a:noFill/>
+          </a:ln>
+          <a:effectLst/>
+        </p:spPr>
+        <p:style>
+          <a:lnRef idx="1">
+            <a:schemeClr val="accent1"/>
+          </a:lnRef>
+          <a:fillRef idx="3">
+            <a:schemeClr val="accent1"/>
+          </a:fillRef>
+          <a:effectRef idx="2">
+            <a:schemeClr val="accent1"/>
+          </a:effectRef>
+          <a:fontRef idx="minor">
+            <a:schemeClr val="lt1"/>
+          </a:fontRef>
+        </p:style>
+        <p:txBody>
+          <a:bodyPr rtlCol="0" anchor="ctr"/>
+          <a:lstStyle/>
+          <a:p>
+            <a:pPr algn="ctr"/>
+          </a:p>
+        </p:txBody>
+      </p:sp>
+      <p:sp>
+        <p:nvSpPr>
+          <p:cNvPr id="3" name="TextBox 2"/>
+          <p:cNvSpPr txBox="1"/>
+          <p:nvPr/>
+        </p:nvSpPr>
+        <p:spPr>
+          <a:xfrm>
+            <a:off x="685800" y="411480"/>
+            <a:ext cx="10789920" cy="320040"/>
+          </a:xfrm>
+          <a:prstGeom prst="rect">
+            <a:avLst/>
+          </a:prstGeom>
+          <a:noFill/>
+        </p:spPr>
+        <p:txBody>
+          <a:bodyPr wrap="square" anchor="t" lIns="0" rIns="0" tIns="0" bIns="0">
+            <a:spAutoFit/>
+          </a:bodyPr>
+          <a:lstStyle/>
+          <a:p>
+            <a:pPr algn="l">
+              <a:lnSpc>
+                <a:spcPct val="115000"/>
+              </a:lnSpc>
+            </a:pPr>
+            <a:r>
+              <a:rPr sz="1250" b="1" i="0">
+                <a:solidFill>
+                  <a:srgbClr val="C9A45C"/>
+                </a:solidFill>
+                <a:latin typeface="JetBrains Mono"/>
+              </a:rPr>
+              <a:t>09 · RECORRIDO — INVITADO</a:t>
+            </a:r>
+          </a:p>
+        </p:txBody>
+      </p:sp>
+      <p:sp>
+        <p:nvSpPr>
+          <p:cNvPr id="4" name="TextBox 3"/>
+          <p:cNvSpPr txBox="1"/>
+          <p:nvPr/>
+        </p:nvSpPr>
+        <p:spPr>
+          <a:xfrm>
+            <a:off x="685800" y="704088"/>
+            <a:ext cx="10789920" cy="548640"/>
+          </a:xfrm>
+          <a:prstGeom prst="rect">
+            <a:avLst/>
+          </a:prstGeom>
+          <a:noFill/>
+        </p:spPr>
+        <p:txBody>
+          <a:bodyPr wrap="square" anchor="t" lIns="0" rIns="0" tIns="0" bIns="0">
+            <a:spAutoFit/>
+          </a:bodyPr>
+          <a:lstStyle/>
+          <a:p>
+            <a:pPr algn="l">
+              <a:lnSpc>
+                <a:spcPct val="115000"/>
+              </a:lnSpc>
+            </a:pPr>
+            <a:r>
+              <a:rPr sz="2400" b="1" i="0">
+                <a:solidFill>
+                  <a:srgbClr val="E7E9ED"/>
+                </a:solidFill>
+                <a:latin typeface="Space Grotesk"/>
+              </a:rPr>
+              <a:t>Activo dado de alta: AAPL con precio de mercado real</a:t>
+            </a:r>
+          </a:p>
+        </p:txBody>
+      </p:sp>
+      <p:sp>
+        <p:nvSpPr>
+          <p:cNvPr id="5" name="Rectangle 4"/>
+          <p:cNvSpPr/>
+          <p:nvPr/>
+        </p:nvSpPr>
+        <p:spPr>
+          <a:xfrm>
+            <a:off x="685800" y="1197864"/>
+            <a:ext cx="457200" cy="38100"/>
+          </a:xfrm>
+          <a:prstGeom prst="rect">
+            <a:avLst/>
+          </a:prstGeom>
+          <a:solidFill>
+            <a:srgbClr val="C9A45C"/>
+          </a:solidFill>
+          <a:ln>
+            <a:noFill/>
+          </a:ln>
+          <a:effectLst/>
+        </p:spPr>
+        <p:style>
+          <a:lnRef idx="1">
+            <a:schemeClr val="accent1"/>
+          </a:lnRef>
+          <a:fillRef idx="3">
+            <a:schemeClr val="accent1"/>
+          </a:fillRef>
+          <a:effectRef idx="2">
+            <a:schemeClr val="accent1"/>
+          </a:effectRef>
+          <a:fontRef idx="minor">
+            <a:schemeClr val="lt1"/>
+          </a:fontRef>
+        </p:style>
+        <p:txBody>
+          <a:bodyPr rtlCol="0" anchor="ctr"/>
+          <a:lstStyle/>
+          <a:p>
+            <a:pPr algn="ctr"/>
+          </a:p>
+        </p:txBody>
+      </p:sp>
+      <p:sp>
+        <p:nvSpPr>
+          <p:cNvPr id="6" name="Rounded Rectangle 5"/>
+          <p:cNvSpPr/>
+          <p:nvPr/>
+        </p:nvSpPr>
+        <p:spPr>
+          <a:xfrm>
+            <a:off x="609600" y="1267968"/>
+            <a:ext cx="6644640" cy="4210050"/>
+          </a:xfrm>
+          <a:prstGeom prst="roundRect">
+            <a:avLst>
+              <a:gd name="adj" fmla="val 3000"/>
+            </a:avLst>
+          </a:prstGeom>
+          <a:solidFill>
+            <a:srgbClr val="15191F"/>
+          </a:solidFill>
+          <a:ln w="15875">
+            <a:solidFill>
+              <a:srgbClr val="C9A45C"/>
+            </a:solidFill>
+          </a:ln>
+          <a:effectLst/>
+        </p:spPr>
+        <p:style>
+          <a:lnRef idx="1">
+            <a:schemeClr val="accent1"/>
+          </a:lnRef>
+          <a:fillRef idx="3">
+            <a:schemeClr val="accent1"/>
+          </a:fillRef>
+          <a:effectRef idx="2">
+            <a:schemeClr val="accent1"/>
+          </a:effectRef>
+          <a:fontRef idx="minor">
+            <a:schemeClr val="lt1"/>
+          </a:fontRef>
+        </p:style>
+        <p:txBody>
+          <a:bodyPr rtlCol="0" anchor="ctr"/>
+          <a:lstStyle/>
+          <a:p>
+            <a:pPr algn="ctr"/>
+          </a:p>
+        </p:txBody>
+      </p:sp>
+      <p:pic>
+        <p:nvPicPr>
+          <p:cNvPr id="7" name="Picture 6" descr="07-dashboard-con-activo.png"/>
+          <p:cNvPicPr>
+            <a:picLocks noChangeAspect="1"/>
+          </p:cNvPicPr>
+          <p:nvPr/>
+        </p:nvPicPr>
+        <p:blipFill>
+          <a:blip r:embed="rId2"/>
+          <a:stretch>
+            <a:fillRect/>
+          </a:stretch>
+        </p:blipFill>
+        <p:spPr>
+          <a:xfrm>
+            <a:off x="685800" y="1344168"/>
+            <a:ext cx="6492240" cy="4057650"/>
+          </a:xfrm>
+          <a:prstGeom prst="rect">
+            <a:avLst/>
+          </a:prstGeom>
+        </p:spPr>
+      </p:pic>
+      <p:sp>
+        <p:nvSpPr>
+          <p:cNvPr id="8" name="TextBox 7"/>
+          <p:cNvSpPr txBox="1"/>
+          <p:nvPr/>
+        </p:nvSpPr>
+        <p:spPr>
+          <a:xfrm>
+            <a:off x="7543800" y="1344168"/>
+            <a:ext cx="3962095" cy="4206240"/>
+          </a:xfrm>
+          <a:prstGeom prst="rect">
+            <a:avLst/>
+          </a:prstGeom>
+          <a:noFill/>
+        </p:spPr>
+        <p:txBody>
+          <a:bodyPr wrap="square" lIns="0" rIns="0" tIns="0" bIns="0">
+            <a:spAutoFit/>
+          </a:bodyPr>
+          <a:lstStyle/>
+          <a:p>
+            <a:pPr>
+              <a:lnSpc>
+                <a:spcPct val="130000"/>
+              </a:lnSpc>
+              <a:spcAft>
+                <a:spcPts val="400"/>
+              </a:spcAft>
+            </a:pPr>
+            <a:r>
+              <a:rPr sz="1350" b="1">
+                <a:solidFill>
+                  <a:srgbClr val="C9A45C"/>
+                </a:solidFill>
+                <a:latin typeface="Space Grotesk"/>
+              </a:rPr>
+              <a:t>▪  </a:t>
+            </a:r>
+            <a:r>
+              <a:rPr sz="1350">
+                <a:solidFill>
+                  <a:srgbClr val="99A0AB"/>
+                </a:solidFill>
+                <a:latin typeface="Space Grotesk"/>
+              </a:rPr>
+              <a:t>Apple Inc. (NASDAQ) añadido con 10 unidades a 150 USD/unidad</a:t>
+            </a:r>
+          </a:p>
+          <a:p>
+            <a:pPr>
+              <a:lnSpc>
+                <a:spcPct val="130000"/>
+              </a:lnSpc>
+              <a:spcAft>
+                <a:spcPts val="400"/>
+              </a:spcAft>
+            </a:pPr>
+            <a:r>
+              <a:rPr sz="1350" b="1">
+                <a:solidFill>
+                  <a:srgbClr val="C9A45C"/>
+                </a:solidFill>
+                <a:latin typeface="Space Grotesk"/>
+              </a:rPr>
+              <a:t>▪  </a:t>
+            </a:r>
+            <a:r>
+              <a:rPr sz="1350">
+                <a:solidFill>
+                  <a:srgbClr val="99A0AB"/>
+                </a:solidFill>
+                <a:latin typeface="Space Grotesk"/>
+              </a:rPr>
+              <a:t>El valor de mercado y el P&amp;L se recalculan con el precio vivo obtenido de la cascada</a:t>
+            </a:r>
+          </a:p>
+          <a:p>
+            <a:pPr>
+              <a:lnSpc>
+                <a:spcPct val="130000"/>
+              </a:lnSpc>
+              <a:spcAft>
+                <a:spcPts val="400"/>
+              </a:spcAft>
+            </a:pPr>
+            <a:r>
+              <a:rPr sz="1350" b="1">
+                <a:solidFill>
+                  <a:srgbClr val="C9A45C"/>
+                </a:solidFill>
+                <a:latin typeface="Space Grotesk"/>
+              </a:rPr>
+              <a:t>▪  </a:t>
+            </a:r>
+            <a:r>
+              <a:rPr sz="1350">
+                <a:solidFill>
+                  <a:srgbClr val="99A0AB"/>
+                </a:solidFill>
+                <a:latin typeface="Space Grotesk"/>
+              </a:rPr>
+              <a:t>Holdings listados en formato monoespaciado — herencia visual del tema Terminal</a:t>
+            </a:r>
+          </a:p>
+        </p:txBody>
+      </p:sp>
+      <p:sp>
+        <p:nvSpPr>
+          <p:cNvPr id="9" name="TextBox 8"/>
+          <p:cNvSpPr txBox="1"/>
+          <p:nvPr/>
+        </p:nvSpPr>
+        <p:spPr>
+          <a:xfrm>
+            <a:off x="685800" y="6473952"/>
+            <a:ext cx="5486400" cy="274320"/>
+          </a:xfrm>
+          <a:prstGeom prst="rect">
+            <a:avLst/>
+          </a:prstGeom>
+          <a:noFill/>
+        </p:spPr>
+        <p:txBody>
+          <a:bodyPr wrap="square" anchor="t" lIns="0" rIns="0" tIns="0" bIns="0">
+            <a:spAutoFit/>
+          </a:bodyPr>
+          <a:lstStyle/>
+          <a:p>
+            <a:pPr algn="l">
+              <a:lnSpc>
+                <a:spcPct val="115000"/>
+              </a:lnSpc>
+            </a:pPr>
+            <a:r>
+              <a:rPr sz="850" b="0" i="0">
+                <a:solidFill>
+                  <a:srgbClr val="5C6472"/>
+                </a:solidFill>
+                <a:latin typeface="JetBrains Mono"/>
+              </a:rPr>
+              <a:t>TFM BIGSCHOOL · GESTIÓN DE CARTERA FINANCIERA CON IA</a:t>
+            </a:r>
+          </a:p>
+        </p:txBody>
+      </p:sp>
+      <p:sp>
+        <p:nvSpPr>
+          <p:cNvPr id="10" name="TextBox 9"/>
+          <p:cNvSpPr txBox="1"/>
+          <p:nvPr/>
+        </p:nvSpPr>
+        <p:spPr>
+          <a:xfrm>
+            <a:off x="5943600" y="6473952"/>
+            <a:ext cx="4389120" cy="274320"/>
+          </a:xfrm>
+          <a:prstGeom prst="rect">
+            <a:avLst/>
+          </a:prstGeom>
+          <a:noFill/>
+        </p:spPr>
+        <p:txBody>
+          <a:bodyPr wrap="square" anchor="t" lIns="0" rIns="0" tIns="0" bIns="0">
+            <a:spAutoFit/>
+          </a:bodyPr>
+          <a:lstStyle/>
+          <a:p>
+            <a:pPr algn="r">
+              <a:lnSpc>
+                <a:spcPct val="115000"/>
+              </a:lnSpc>
+            </a:pPr>
+            <a:r>
+              <a:rPr sz="850" b="0" i="0">
+                <a:solidFill>
+                  <a:srgbClr val="5C6472"/>
+                </a:solidFill>
+                <a:latin typeface="JetBrains Mono"/>
+              </a:rPr>
+              <a:t>09 · RECORRIDO — INVITADO</a:t>
+            </a:r>
+          </a:p>
+        </p:txBody>
+      </p:sp>
+      <p:sp>
+        <p:nvSpPr>
+          <p:cNvPr id="11" name="TextBox 10"/>
+          <p:cNvSpPr txBox="1"/>
+          <p:nvPr/>
+        </p:nvSpPr>
+        <p:spPr>
+          <a:xfrm>
+            <a:off x="11475720" y="6473952"/>
+            <a:ext cx="548640" cy="274320"/>
+          </a:xfrm>
+          <a:prstGeom prst="rect">
+            <a:avLst/>
+          </a:prstGeom>
+          <a:noFill/>
+        </p:spPr>
+        <p:txBody>
+          <a:bodyPr wrap="square" anchor="t" lIns="0" rIns="0" tIns="0" bIns="0">
+            <a:spAutoFit/>
+          </a:bodyPr>
+          <a:lstStyle/>
+          <a:p>
+            <a:pPr algn="r">
+              <a:lnSpc>
+                <a:spcPct val="115000"/>
+              </a:lnSpc>
+            </a:pPr>
+            <a:r>
+              <a:rPr sz="850" b="0" i="0">
+                <a:solidFill>
+                  <a:srgbClr val="C9A45C"/>
+                </a:solidFill>
+                <a:latin typeface="JetBrains Mono"/>
+              </a:rPr>
+              <a:t>36</a:t>
+            </a:r>
+          </a:p>
+        </p:txBody>
+      </p:sp>
+      <p:sp>
+        <p:nvSpPr>
+          <p:cNvPr id="12" name="Rectangle 11"/>
+          <p:cNvSpPr/>
+          <p:nvPr/>
+        </p:nvSpPr>
+        <p:spPr>
+          <a:xfrm>
+            <a:off x="685800" y="6400800"/>
+            <a:ext cx="10817352" cy="9525"/>
+          </a:xfrm>
+          <a:prstGeom prst="rect">
+            <a:avLst/>
+          </a:prstGeom>
+          <a:solidFill>
+            <a:srgbClr val="1D222B"/>
+          </a:solidFill>
+          <a:ln>
+            <a:noFill/>
+          </a:ln>
+          <a:effectLst/>
+        </p:spPr>
+        <p:style>
+          <a:lnRef idx="1">
+            <a:schemeClr val="accent1"/>
+          </a:lnRef>
+          <a:fillRef idx="3">
+            <a:schemeClr val="accent1"/>
+          </a:fillRef>
+          <a:effectRef idx="2">
+            <a:schemeClr val="accent1"/>
+          </a:effectRef>
+          <a:fontRef idx="minor">
+            <a:schemeClr val="lt1"/>
+          </a:fontRef>
+        </p:style>
+        <p:txBody>
+          <a:bodyPr rtlCol="0" anchor="ctr"/>
+          <a:lstStyle/>
+          <a:p>
+            <a:pPr algn="ctr"/>
+          </a:p>
+        </p:txBody>
+      </p:sp>
+    </p:spTree>
+  </p:cSld>
+  <p:clrMapOvr>
+    <a:masterClrMapping/>
+  </p:clrMapOvr>
+</p:sld>
+</file>
+
+<file path=ppt/slides/slide38.xml><?xml version="1.0" encoding="utf-8"?>
+<p:sld xmlns:a="http://schemas.openxmlformats.org/drawingml/2006/main" xmlns:p="http://schemas.openxmlformats.org/presentationml/2006/main" xmlns:r="http://schemas.openxmlformats.org/officeDocument/2006/relationships">
+  <p:cSld>
+    <p:spTree>
+      <p:nvGrpSpPr>
+        <p:cNvPr id="1" name=""/>
+        <p:cNvGrpSpPr/>
+        <p:nvPr/>
+      </p:nvGrpSpPr>
+      <p:grpSpPr/>
+      <p:sp>
+        <p:nvSpPr>
+          <p:cNvPr id="2" name="Rectangle 1"/>
+          <p:cNvSpPr/>
+          <p:nvPr/>
+        </p:nvSpPr>
+        <p:spPr>
+          <a:xfrm>
+            <a:off x="0" y="0"/>
+            <a:ext cx="12191695" cy="6858000"/>
+          </a:xfrm>
+          <a:prstGeom prst="rect">
+            <a:avLst/>
+          </a:prstGeom>
+          <a:solidFill>
+            <a:srgbClr val="08090B"/>
+          </a:solidFill>
+          <a:ln>
+            <a:noFill/>
+          </a:ln>
+          <a:effectLst/>
+        </p:spPr>
+        <p:style>
+          <a:lnRef idx="1">
+            <a:schemeClr val="accent1"/>
+          </a:lnRef>
+          <a:fillRef idx="3">
+            <a:schemeClr val="accent1"/>
+          </a:fillRef>
+          <a:effectRef idx="2">
+            <a:schemeClr val="accent1"/>
+          </a:effectRef>
+          <a:fontRef idx="minor">
+            <a:schemeClr val="lt1"/>
+          </a:fontRef>
+        </p:style>
+        <p:txBody>
+          <a:bodyPr rtlCol="0" anchor="ctr"/>
+          <a:lstStyle/>
+          <a:p>
+            <a:pPr algn="ctr"/>
+          </a:p>
+        </p:txBody>
+      </p:sp>
+      <p:sp>
+        <p:nvSpPr>
+          <p:cNvPr id="3" name="TextBox 2"/>
+          <p:cNvSpPr txBox="1"/>
+          <p:nvPr/>
+        </p:nvSpPr>
+        <p:spPr>
+          <a:xfrm>
+            <a:off x="685800" y="411480"/>
+            <a:ext cx="10789920" cy="320040"/>
+          </a:xfrm>
+          <a:prstGeom prst="rect">
+            <a:avLst/>
+          </a:prstGeom>
+          <a:noFill/>
+        </p:spPr>
+        <p:txBody>
+          <a:bodyPr wrap="square" anchor="t" lIns="0" rIns="0" tIns="0" bIns="0">
+            <a:spAutoFit/>
+          </a:bodyPr>
+          <a:lstStyle/>
+          <a:p>
+            <a:pPr algn="l">
+              <a:lnSpc>
+                <a:spcPct val="115000"/>
+              </a:lnSpc>
+            </a:pPr>
+            <a:r>
+              <a:rPr sz="1250" b="1" i="0">
+                <a:solidFill>
+                  <a:srgbClr val="C9A45C"/>
+                </a:solidFill>
+                <a:latin typeface="JetBrains Mono"/>
+              </a:rPr>
+              <a:t>09 · RECORRIDO — INVITADO</a:t>
+            </a:r>
+          </a:p>
+        </p:txBody>
+      </p:sp>
+      <p:sp>
+        <p:nvSpPr>
+          <p:cNvPr id="4" name="TextBox 3"/>
+          <p:cNvSpPr txBox="1"/>
+          <p:nvPr/>
+        </p:nvSpPr>
+        <p:spPr>
+          <a:xfrm>
+            <a:off x="685800" y="704088"/>
+            <a:ext cx="10789920" cy="548640"/>
+          </a:xfrm>
+          <a:prstGeom prst="rect">
+            <a:avLst/>
+          </a:prstGeom>
+          <a:noFill/>
+        </p:spPr>
+        <p:txBody>
+          <a:bodyPr wrap="square" anchor="t" lIns="0" rIns="0" tIns="0" bIns="0">
+            <a:spAutoFit/>
+          </a:bodyPr>
+          <a:lstStyle/>
+          <a:p>
+            <a:pPr algn="l">
+              <a:lnSpc>
+                <a:spcPct val="115000"/>
+              </a:lnSpc>
+            </a:pPr>
+            <a:r>
+              <a:rPr sz="2400" b="1" i="0">
+                <a:solidFill>
+                  <a:srgbClr val="E7E9ED"/>
+                </a:solidFill>
+                <a:latin typeface="Space Grotesk"/>
+              </a:rPr>
+              <a:t>Ficha del activo: indicadores técnicos y fundamentales</a:t>
+            </a:r>
+          </a:p>
+        </p:txBody>
+      </p:sp>
+      <p:sp>
+        <p:nvSpPr>
+          <p:cNvPr id="5" name="Rectangle 4"/>
+          <p:cNvSpPr/>
+          <p:nvPr/>
+        </p:nvSpPr>
+        <p:spPr>
+          <a:xfrm>
+            <a:off x="685800" y="1197864"/>
+            <a:ext cx="457200" cy="38100"/>
+          </a:xfrm>
+          <a:prstGeom prst="rect">
+            <a:avLst/>
+          </a:prstGeom>
+          <a:solidFill>
+            <a:srgbClr val="C9A45C"/>
+          </a:solidFill>
+          <a:ln>
+            <a:noFill/>
+          </a:ln>
+          <a:effectLst/>
+        </p:spPr>
+        <p:style>
+          <a:lnRef idx="1">
+            <a:schemeClr val="accent1"/>
+          </a:lnRef>
+          <a:fillRef idx="3">
+            <a:schemeClr val="accent1"/>
+          </a:fillRef>
+          <a:effectRef idx="2">
+            <a:schemeClr val="accent1"/>
+          </a:effectRef>
+          <a:fontRef idx="minor">
+            <a:schemeClr val="lt1"/>
+          </a:fontRef>
+        </p:style>
+        <p:txBody>
+          <a:bodyPr rtlCol="0" anchor="ctr"/>
+          <a:lstStyle/>
+          <a:p>
+            <a:pPr algn="ctr"/>
+          </a:p>
+        </p:txBody>
+      </p:sp>
+      <p:sp>
+        <p:nvSpPr>
+          <p:cNvPr id="6" name="Rounded Rectangle 5"/>
+          <p:cNvSpPr/>
+          <p:nvPr/>
+        </p:nvSpPr>
+        <p:spPr>
+          <a:xfrm>
+            <a:off x="609600" y="1267968"/>
+            <a:ext cx="6644640" cy="4210050"/>
+          </a:xfrm>
+          <a:prstGeom prst="roundRect">
+            <a:avLst>
+              <a:gd name="adj" fmla="val 3000"/>
+            </a:avLst>
+          </a:prstGeom>
+          <a:solidFill>
+            <a:srgbClr val="15191F"/>
+          </a:solidFill>
+          <a:ln w="15875">
+            <a:solidFill>
+              <a:srgbClr val="C9A45C"/>
+            </a:solidFill>
+          </a:ln>
+          <a:effectLst/>
+        </p:spPr>
+        <p:style>
+          <a:lnRef idx="1">
+            <a:schemeClr val="accent1"/>
+          </a:lnRef>
+          <a:fillRef idx="3">
+            <a:schemeClr val="accent1"/>
+          </a:fillRef>
+          <a:effectRef idx="2">
+            <a:schemeClr val="accent1"/>
+          </a:effectRef>
+          <a:fontRef idx="minor">
+            <a:schemeClr val="lt1"/>
+          </a:fontRef>
+        </p:style>
+        <p:txBody>
+          <a:bodyPr rtlCol="0" anchor="ctr"/>
+          <a:lstStyle/>
+          <a:p>
+            <a:pPr algn="ctr"/>
+          </a:p>
+        </p:txBody>
+      </p:sp>
+      <p:pic>
+        <p:nvPicPr>
+          <p:cNvPr id="7" name="Picture 6" descr="08-detalle-activo.png"/>
+          <p:cNvPicPr>
+            <a:picLocks noChangeAspect="1"/>
+          </p:cNvPicPr>
+          <p:nvPr/>
+        </p:nvPicPr>
+        <p:blipFill>
+          <a:blip r:embed="rId2"/>
+          <a:stretch>
+            <a:fillRect/>
+          </a:stretch>
+        </p:blipFill>
+        <p:spPr>
+          <a:xfrm>
+            <a:off x="685800" y="1344168"/>
+            <a:ext cx="6492240" cy="4057650"/>
+          </a:xfrm>
+          <a:prstGeom prst="rect">
+            <a:avLst/>
+          </a:prstGeom>
+        </p:spPr>
+      </p:pic>
+      <p:sp>
+        <p:nvSpPr>
+          <p:cNvPr id="8" name="TextBox 7"/>
+          <p:cNvSpPr txBox="1"/>
+          <p:nvPr/>
+        </p:nvSpPr>
+        <p:spPr>
+          <a:xfrm>
+            <a:off x="7543800" y="1344168"/>
+            <a:ext cx="3962095" cy="4206240"/>
+          </a:xfrm>
+          <a:prstGeom prst="rect">
+            <a:avLst/>
+          </a:prstGeom>
+          <a:noFill/>
+        </p:spPr>
+        <p:txBody>
+          <a:bodyPr wrap="square" lIns="0" rIns="0" tIns="0" bIns="0">
+            <a:spAutoFit/>
+          </a:bodyPr>
+          <a:lstStyle/>
+          <a:p>
+            <a:pPr>
+              <a:lnSpc>
+                <a:spcPct val="130000"/>
+              </a:lnSpc>
+              <a:spcAft>
+                <a:spcPts val="400"/>
+              </a:spcAft>
+            </a:pPr>
+            <a:r>
+              <a:rPr sz="1350" b="1">
+                <a:solidFill>
+                  <a:srgbClr val="C9A45C"/>
+                </a:solidFill>
+                <a:latin typeface="Space Grotesk"/>
+              </a:rPr>
+              <a:t>▪  </a:t>
+            </a:r>
+            <a:r>
+              <a:rPr sz="1350" b="1">
+                <a:solidFill>
+                  <a:srgbClr val="E7E9ED"/>
+                </a:solidFill>
+                <a:latin typeface="Space Grotesk"/>
+              </a:rPr>
+              <a:t>Precio real en vivo.</a:t>
+            </a:r>
+            <a:r>
+              <a:rPr sz="1350">
+                <a:solidFill>
+                  <a:srgbClr val="99A0AB"/>
+                </a:solidFill>
+                <a:latin typeface="Space Grotesk"/>
+              </a:rPr>
+              <a:t> 310,66 USD → +107,11% de plusvalía no realizada sobre el coste.</a:t>
+            </a:r>
+          </a:p>
+          <a:p>
+            <a:pPr>
+              <a:lnSpc>
+                <a:spcPct val="130000"/>
+              </a:lnSpc>
+              <a:spcAft>
+                <a:spcPts val="400"/>
+              </a:spcAft>
+            </a:pPr>
+            <a:r>
+              <a:rPr sz="1350" b="1">
+                <a:solidFill>
+                  <a:srgbClr val="C9A45C"/>
+                </a:solidFill>
+                <a:latin typeface="Space Grotesk"/>
+              </a:rPr>
+              <a:t>▪  </a:t>
+            </a:r>
+            <a:r>
+              <a:rPr sz="1350" b="1">
+                <a:solidFill>
+                  <a:srgbClr val="E7E9ED"/>
+                </a:solidFill>
+                <a:latin typeface="Space Grotesk"/>
+              </a:rPr>
+              <a:t>Catálogo completo.</a:t>
+            </a:r>
+            <a:r>
+              <a:rPr sz="1350">
+                <a:solidFill>
+                  <a:srgbClr val="99A0AB"/>
+                </a:solidFill>
+                <a:latin typeface="Space Grotesk"/>
+              </a:rPr>
+              <a:t> 9 indicadores (MA200, Cruce MA50/200, MACD, RSI14, RVOL, PER, ROE, Deuda/EBITDA, Crecimiento).</a:t>
+            </a:r>
+          </a:p>
+          <a:p>
+            <a:pPr>
+              <a:lnSpc>
+                <a:spcPct val="130000"/>
+              </a:lnSpc>
+              <a:spcAft>
+                <a:spcPts val="400"/>
+              </a:spcAft>
+            </a:pPr>
+            <a:r>
+              <a:rPr sz="1350" b="1">
+                <a:solidFill>
+                  <a:srgbClr val="C9A45C"/>
+                </a:solidFill>
+                <a:latin typeface="Space Grotesk"/>
+              </a:rPr>
+              <a:t>▪  </a:t>
+            </a:r>
+            <a:r>
+              <a:rPr sz="1350" b="1">
+                <a:solidFill>
+                  <a:srgbClr val="E7E9ED"/>
+                </a:solidFill>
+                <a:latin typeface="Space Grotesk"/>
+              </a:rPr>
+              <a:t>Estado honesto.</a:t>
+            </a:r>
+            <a:r>
+              <a:rPr sz="1350">
+                <a:solidFill>
+                  <a:srgbClr val="99A0AB"/>
+                </a:solidFill>
+                <a:latin typeface="Space Grotesk"/>
+              </a:rPr>
+              <a:t> marcados con “—” hasta el próximo cierre diario, nunca un valor inventado.</a:t>
+            </a:r>
+          </a:p>
+          <a:p>
+            <a:pPr>
+              <a:lnSpc>
+                <a:spcPct val="130000"/>
+              </a:lnSpc>
+              <a:spcAft>
+                <a:spcPts val="400"/>
+              </a:spcAft>
+            </a:pPr>
+            <a:r>
+              <a:rPr sz="1350" b="1">
+                <a:solidFill>
+                  <a:srgbClr val="C9A45C"/>
+                </a:solidFill>
+                <a:latin typeface="Space Grotesk"/>
+              </a:rPr>
+              <a:t>▪  </a:t>
+            </a:r>
+            <a:r>
+              <a:rPr sz="1350">
+                <a:solidFill>
+                  <a:srgbClr val="99A0AB"/>
+                </a:solidFill>
+                <a:latin typeface="Space Grotesk"/>
+              </a:rPr>
+              <a:t>Acceso directo a lotes, niveles de precio y análisis IA desde la misma pantalla</a:t>
+            </a:r>
+          </a:p>
+        </p:txBody>
+      </p:sp>
+      <p:sp>
+        <p:nvSpPr>
+          <p:cNvPr id="9" name="TextBox 8"/>
+          <p:cNvSpPr txBox="1"/>
+          <p:nvPr/>
+        </p:nvSpPr>
+        <p:spPr>
+          <a:xfrm>
+            <a:off x="685800" y="6473952"/>
+            <a:ext cx="5486400" cy="274320"/>
+          </a:xfrm>
+          <a:prstGeom prst="rect">
+            <a:avLst/>
+          </a:prstGeom>
+          <a:noFill/>
+        </p:spPr>
+        <p:txBody>
+          <a:bodyPr wrap="square" anchor="t" lIns="0" rIns="0" tIns="0" bIns="0">
+            <a:spAutoFit/>
+          </a:bodyPr>
+          <a:lstStyle/>
+          <a:p>
+            <a:pPr algn="l">
+              <a:lnSpc>
+                <a:spcPct val="115000"/>
+              </a:lnSpc>
+            </a:pPr>
+            <a:r>
+              <a:rPr sz="850" b="0" i="0">
+                <a:solidFill>
+                  <a:srgbClr val="5C6472"/>
+                </a:solidFill>
+                <a:latin typeface="JetBrains Mono"/>
+              </a:rPr>
+              <a:t>TFM BIGSCHOOL · GESTIÓN DE CARTERA FINANCIERA CON IA</a:t>
+            </a:r>
+          </a:p>
+        </p:txBody>
+      </p:sp>
+      <p:sp>
+        <p:nvSpPr>
+          <p:cNvPr id="10" name="TextBox 9"/>
+          <p:cNvSpPr txBox="1"/>
+          <p:nvPr/>
+        </p:nvSpPr>
+        <p:spPr>
+          <a:xfrm>
+            <a:off x="5943600" y="6473952"/>
+            <a:ext cx="4389120" cy="274320"/>
+          </a:xfrm>
+          <a:prstGeom prst="rect">
+            <a:avLst/>
+          </a:prstGeom>
+          <a:noFill/>
+        </p:spPr>
+        <p:txBody>
+          <a:bodyPr wrap="square" anchor="t" lIns="0" rIns="0" tIns="0" bIns="0">
+            <a:spAutoFit/>
+          </a:bodyPr>
+          <a:lstStyle/>
+          <a:p>
+            <a:pPr algn="r">
+              <a:lnSpc>
+                <a:spcPct val="115000"/>
+              </a:lnSpc>
+            </a:pPr>
+            <a:r>
+              <a:rPr sz="850" b="0" i="0">
+                <a:solidFill>
+                  <a:srgbClr val="5C6472"/>
+                </a:solidFill>
+                <a:latin typeface="JetBrains Mono"/>
+              </a:rPr>
+              <a:t>09 · RECORRIDO — INVITADO</a:t>
+            </a:r>
+          </a:p>
+        </p:txBody>
+      </p:sp>
+      <p:sp>
+        <p:nvSpPr>
+          <p:cNvPr id="11" name="TextBox 10"/>
+          <p:cNvSpPr txBox="1"/>
+          <p:nvPr/>
+        </p:nvSpPr>
+        <p:spPr>
+          <a:xfrm>
+            <a:off x="11475720" y="6473952"/>
+            <a:ext cx="548640" cy="274320"/>
+          </a:xfrm>
+          <a:prstGeom prst="rect">
+            <a:avLst/>
+          </a:prstGeom>
+          <a:noFill/>
+        </p:spPr>
+        <p:txBody>
+          <a:bodyPr wrap="square" anchor="t" lIns="0" rIns="0" tIns="0" bIns="0">
+            <a:spAutoFit/>
+          </a:bodyPr>
+          <a:lstStyle/>
+          <a:p>
+            <a:pPr algn="r">
+              <a:lnSpc>
+                <a:spcPct val="115000"/>
+              </a:lnSpc>
+            </a:pPr>
+            <a:r>
+              <a:rPr sz="850" b="0" i="0">
+                <a:solidFill>
+                  <a:srgbClr val="C9A45C"/>
+                </a:solidFill>
+                <a:latin typeface="JetBrains Mono"/>
+              </a:rPr>
+              <a:t>37</a:t>
+            </a:r>
+          </a:p>
+        </p:txBody>
+      </p:sp>
+      <p:sp>
+        <p:nvSpPr>
+          <p:cNvPr id="12" name="Rectangle 11"/>
+          <p:cNvSpPr/>
+          <p:nvPr/>
+        </p:nvSpPr>
+        <p:spPr>
+          <a:xfrm>
+            <a:off x="685800" y="6400800"/>
+            <a:ext cx="10817352" cy="9525"/>
+          </a:xfrm>
+          <a:prstGeom prst="rect">
+            <a:avLst/>
+          </a:prstGeom>
+          <a:solidFill>
+            <a:srgbClr val="1D222B"/>
+          </a:solidFill>
+          <a:ln>
+            <a:noFill/>
+          </a:ln>
+          <a:effectLst/>
+        </p:spPr>
+        <p:style>
+          <a:lnRef idx="1">
+            <a:schemeClr val="accent1"/>
+          </a:lnRef>
+          <a:fillRef idx="3">
+            <a:schemeClr val="accent1"/>
+          </a:fillRef>
+          <a:effectRef idx="2">
+            <a:schemeClr val="accent1"/>
+          </a:effectRef>
+          <a:fontRef idx="minor">
+            <a:schemeClr val="lt1"/>
+          </a:fontRef>
+        </p:style>
+        <p:txBody>
+          <a:bodyPr rtlCol="0" anchor="ctr"/>
+          <a:lstStyle/>
+          <a:p>
+            <a:pPr algn="ctr"/>
+          </a:p>
+        </p:txBody>
+      </p:sp>
+    </p:spTree>
+  </p:cSld>
+  <p:clrMapOvr>
+    <a:masterClrMapping/>
+  </p:clrMapOvr>
+</p:sld>
+</file>
+
+<file path=ppt/slides/slide39.xml><?xml version="1.0" encoding="utf-8"?>
+<p:sld xmlns:a="http://schemas.openxmlformats.org/drawingml/2006/main" xmlns:p="http://schemas.openxmlformats.org/presentationml/2006/main" xmlns:r="http://schemas.openxmlformats.org/officeDocument/2006/relationships">
+  <p:cSld>
+    <p:spTree>
+      <p:nvGrpSpPr>
+        <p:cNvPr id="1" name=""/>
+        <p:cNvGrpSpPr/>
+        <p:nvPr/>
+      </p:nvGrpSpPr>
+      <p:grpSpPr/>
+      <p:sp>
+        <p:nvSpPr>
+          <p:cNvPr id="2" name="Rectangle 1"/>
+          <p:cNvSpPr/>
+          <p:nvPr/>
+        </p:nvSpPr>
+        <p:spPr>
+          <a:xfrm>
+            <a:off x="0" y="0"/>
+            <a:ext cx="12191695" cy="6858000"/>
+          </a:xfrm>
+          <a:prstGeom prst="rect">
+            <a:avLst/>
+          </a:prstGeom>
+          <a:solidFill>
+            <a:srgbClr val="08090B"/>
+          </a:solidFill>
+          <a:ln>
+            <a:noFill/>
+          </a:ln>
+          <a:effectLst/>
+        </p:spPr>
+        <p:style>
+          <a:lnRef idx="1">
+            <a:schemeClr val="accent1"/>
+          </a:lnRef>
+          <a:fillRef idx="3">
+            <a:schemeClr val="accent1"/>
+          </a:fillRef>
+          <a:effectRef idx="2">
+            <a:schemeClr val="accent1"/>
+          </a:effectRef>
+          <a:fontRef idx="minor">
+            <a:schemeClr val="lt1"/>
+          </a:fontRef>
+        </p:style>
+        <p:txBody>
+          <a:bodyPr rtlCol="0" anchor="ctr"/>
+          <a:lstStyle/>
+          <a:p>
+            <a:pPr algn="ctr"/>
+          </a:p>
+        </p:txBody>
+      </p:sp>
+      <p:sp>
+        <p:nvSpPr>
+          <p:cNvPr id="3" name="TextBox 2"/>
+          <p:cNvSpPr txBox="1"/>
+          <p:nvPr/>
+        </p:nvSpPr>
+        <p:spPr>
+          <a:xfrm>
+            <a:off x="685800" y="411480"/>
+            <a:ext cx="10789920" cy="320040"/>
+          </a:xfrm>
+          <a:prstGeom prst="rect">
+            <a:avLst/>
+          </a:prstGeom>
+          <a:noFill/>
+        </p:spPr>
+        <p:txBody>
+          <a:bodyPr wrap="square" anchor="t" lIns="0" rIns="0" tIns="0" bIns="0">
+            <a:spAutoFit/>
+          </a:bodyPr>
+          <a:lstStyle/>
+          <a:p>
+            <a:pPr algn="l">
+              <a:lnSpc>
+                <a:spcPct val="115000"/>
+              </a:lnSpc>
+            </a:pPr>
+            <a:r>
+              <a:rPr sz="1250" b="1" i="0">
+                <a:solidFill>
+                  <a:srgbClr val="C9A45C"/>
+                </a:solidFill>
+                <a:latin typeface="JetBrains Mono"/>
+              </a:rPr>
+              <a:t>09 · RECORRIDO — INVITADO</a:t>
+            </a:r>
+          </a:p>
+        </p:txBody>
+      </p:sp>
+      <p:sp>
+        <p:nvSpPr>
+          <p:cNvPr id="4" name="TextBox 3"/>
+          <p:cNvSpPr txBox="1"/>
+          <p:nvPr/>
+        </p:nvSpPr>
+        <p:spPr>
+          <a:xfrm>
+            <a:off x="685800" y="704088"/>
+            <a:ext cx="10789920" cy="548640"/>
+          </a:xfrm>
+          <a:prstGeom prst="rect">
+            <a:avLst/>
+          </a:prstGeom>
+          <a:noFill/>
+        </p:spPr>
+        <p:txBody>
+          <a:bodyPr wrap="square" anchor="t" lIns="0" rIns="0" tIns="0" bIns="0">
+            <a:spAutoFit/>
+          </a:bodyPr>
+          <a:lstStyle/>
+          <a:p>
+            <a:pPr algn="l">
+              <a:lnSpc>
+                <a:spcPct val="115000"/>
+              </a:lnSpc>
+            </a:pPr>
+            <a:r>
+              <a:rPr sz="2400" b="1" i="0">
+                <a:solidFill>
+                  <a:srgbClr val="E7E9ED"/>
+                </a:solidFill>
+                <a:latin typeface="Space Grotesk"/>
+              </a:rPr>
+              <a:t>Definir un nivel de precio objetivo</a:t>
+            </a:r>
+          </a:p>
+        </p:txBody>
+      </p:sp>
+      <p:sp>
+        <p:nvSpPr>
+          <p:cNvPr id="5" name="Rectangle 4"/>
+          <p:cNvSpPr/>
+          <p:nvPr/>
+        </p:nvSpPr>
+        <p:spPr>
+          <a:xfrm>
+            <a:off x="685800" y="1197864"/>
+            <a:ext cx="457200" cy="38100"/>
+          </a:xfrm>
+          <a:prstGeom prst="rect">
+            <a:avLst/>
+          </a:prstGeom>
+          <a:solidFill>
+            <a:srgbClr val="C9A45C"/>
+          </a:solidFill>
+          <a:ln>
+            <a:noFill/>
+          </a:ln>
+          <a:effectLst/>
+        </p:spPr>
+        <p:style>
+          <a:lnRef idx="1">
+            <a:schemeClr val="accent1"/>
+          </a:lnRef>
+          <a:fillRef idx="3">
+            <a:schemeClr val="accent1"/>
+          </a:fillRef>
+          <a:effectRef idx="2">
+            <a:schemeClr val="accent1"/>
+          </a:effectRef>
+          <a:fontRef idx="minor">
+            <a:schemeClr val="lt1"/>
+          </a:fontRef>
+        </p:style>
+        <p:txBody>
+          <a:bodyPr rtlCol="0" anchor="ctr"/>
+          <a:lstStyle/>
+          <a:p>
+            <a:pPr algn="ctr"/>
+          </a:p>
+        </p:txBody>
+      </p:sp>
+      <p:sp>
+        <p:nvSpPr>
+          <p:cNvPr id="6" name="Rounded Rectangle 5"/>
+          <p:cNvSpPr/>
+          <p:nvPr/>
+        </p:nvSpPr>
+        <p:spPr>
+          <a:xfrm>
+            <a:off x="696468" y="1267968"/>
+            <a:ext cx="5053584" cy="3215640"/>
+          </a:xfrm>
+          <a:prstGeom prst="roundRect">
+            <a:avLst>
+              <a:gd name="adj" fmla="val 3000"/>
+            </a:avLst>
+          </a:prstGeom>
+          <a:solidFill>
+            <a:srgbClr val="15191F"/>
+          </a:solidFill>
+          <a:ln w="15875">
+            <a:solidFill>
+              <a:srgbClr val="C9A45C"/>
+            </a:solidFill>
+          </a:ln>
+          <a:effectLst/>
+        </p:spPr>
+        <p:style>
+          <a:lnRef idx="1">
+            <a:schemeClr val="accent1"/>
+          </a:lnRef>
+          <a:fillRef idx="3">
+            <a:schemeClr val="accent1"/>
+          </a:fillRef>
+          <a:effectRef idx="2">
+            <a:schemeClr val="accent1"/>
+          </a:effectRef>
+          <a:fontRef idx="minor">
+            <a:schemeClr val="lt1"/>
+          </a:fontRef>
+        </p:style>
+        <p:txBody>
+          <a:bodyPr rtlCol="0" anchor="ctr"/>
+          <a:lstStyle/>
+          <a:p>
+            <a:pPr algn="ctr"/>
+          </a:p>
+        </p:txBody>
+      </p:sp>
+      <p:pic>
+        <p:nvPicPr>
+          <p:cNvPr id="7" name="Picture 6" descr="10-niveles-precio-completo.png"/>
+          <p:cNvPicPr>
+            <a:picLocks noChangeAspect="1"/>
+          </p:cNvPicPr>
+          <p:nvPr/>
+        </p:nvPicPr>
+        <p:blipFill>
+          <a:blip r:embed="rId2"/>
+          <a:stretch>
+            <a:fillRect/>
+          </a:stretch>
+        </p:blipFill>
+        <p:spPr>
+          <a:xfrm>
+            <a:off x="772668" y="1344168"/>
+            <a:ext cx="4901184" cy="3063240"/>
+          </a:xfrm>
+          <a:prstGeom prst="rect">
+            <a:avLst/>
+          </a:prstGeom>
+        </p:spPr>
+      </p:pic>
+      <p:sp>
+        <p:nvSpPr>
+          <p:cNvPr id="8" name="TextBox 7"/>
+          <p:cNvSpPr txBox="1"/>
+          <p:nvPr/>
+        </p:nvSpPr>
+        <p:spPr>
+          <a:xfrm>
+            <a:off x="696468" y="4538472"/>
+            <a:ext cx="5053584" cy="274320"/>
+          </a:xfrm>
+          <a:prstGeom prst="rect">
+            <a:avLst/>
+          </a:prstGeom>
+          <a:noFill/>
+        </p:spPr>
+        <p:txBody>
+          <a:bodyPr wrap="square" anchor="t" lIns="0" rIns="0" tIns="0" bIns="0">
+            <a:spAutoFit/>
+          </a:bodyPr>
+          <a:lstStyle/>
+          <a:p>
+            <a:pPr algn="ctr">
+              <a:lnSpc>
+                <a:spcPct val="115000"/>
+              </a:lnSpc>
+            </a:pPr>
+            <a:r>
+              <a:rPr sz="1050" b="0" i="0">
+                <a:solidFill>
+                  <a:srgbClr val="5C6472"/>
+                </a:solidFill>
+                <a:latin typeface="JetBrains Mono"/>
+              </a:rPr>
+              <a:t>Formulario: precio objetivo, dirección, notas</a:t>
+            </a:r>
+          </a:p>
+        </p:txBody>
+      </p:sp>
+      <p:sp>
+        <p:nvSpPr>
+          <p:cNvPr id="9" name="Rounded Rectangle 8"/>
+          <p:cNvSpPr/>
+          <p:nvPr/>
+        </p:nvSpPr>
+        <p:spPr>
+          <a:xfrm>
+            <a:off x="6091428" y="1267968"/>
+            <a:ext cx="5053584" cy="3215640"/>
+          </a:xfrm>
+          <a:prstGeom prst="roundRect">
+            <a:avLst>
+              <a:gd name="adj" fmla="val 3000"/>
+            </a:avLst>
+          </a:prstGeom>
+          <a:solidFill>
+            <a:srgbClr val="15191F"/>
+          </a:solidFill>
+          <a:ln w="15875">
+            <a:solidFill>
+              <a:srgbClr val="C9A45C"/>
+            </a:solidFill>
+          </a:ln>
+          <a:effectLst/>
+        </p:spPr>
+        <p:style>
+          <a:lnRef idx="1">
+            <a:schemeClr val="accent1"/>
+          </a:lnRef>
+          <a:fillRef idx="3">
+            <a:schemeClr val="accent1"/>
+          </a:fillRef>
+          <a:effectRef idx="2">
+            <a:schemeClr val="accent1"/>
+          </a:effectRef>
+          <a:fontRef idx="minor">
+            <a:schemeClr val="lt1"/>
+          </a:fontRef>
+        </p:style>
+        <p:txBody>
+          <a:bodyPr rtlCol="0" anchor="ctr"/>
+          <a:lstStyle/>
+          <a:p>
+            <a:pPr algn="ctr"/>
+          </a:p>
+        </p:txBody>
+      </p:sp>
+      <p:pic>
+        <p:nvPicPr>
+          <p:cNvPr id="10" name="Picture 9" descr="11-niveles-precio-guardado.png"/>
+          <p:cNvPicPr>
+            <a:picLocks noChangeAspect="1"/>
+          </p:cNvPicPr>
+          <p:nvPr/>
+        </p:nvPicPr>
+        <p:blipFill>
+          <a:blip r:embed="rId3"/>
+          <a:stretch>
+            <a:fillRect/>
+          </a:stretch>
+        </p:blipFill>
+        <p:spPr>
+          <a:xfrm>
+            <a:off x="6167628" y="1344168"/>
+            <a:ext cx="4901184" cy="3063240"/>
+          </a:xfrm>
+          <a:prstGeom prst="rect">
+            <a:avLst/>
+          </a:prstGeom>
+        </p:spPr>
+      </p:pic>
+      <p:sp>
+        <p:nvSpPr>
+          <p:cNvPr id="11" name="TextBox 10"/>
+          <p:cNvSpPr txBox="1"/>
+          <p:nvPr/>
+        </p:nvSpPr>
+        <p:spPr>
+          <a:xfrm>
+            <a:off x="6091428" y="4538472"/>
+            <a:ext cx="5053584" cy="274320"/>
+          </a:xfrm>
+          <a:prstGeom prst="rect">
+            <a:avLst/>
+          </a:prstGeom>
+          <a:noFill/>
+        </p:spPr>
+        <p:txBody>
+          <a:bodyPr wrap="square" anchor="t" lIns="0" rIns="0" tIns="0" bIns="0">
+            <a:spAutoFit/>
+          </a:bodyPr>
+          <a:lstStyle/>
+          <a:p>
+            <a:pPr algn="ctr">
+              <a:lnSpc>
+                <a:spcPct val="115000"/>
+              </a:lnSpc>
+            </a:pPr>
+            <a:r>
+              <a:rPr sz="1050" b="0" i="0">
+                <a:solidFill>
+                  <a:srgbClr val="5C6472"/>
+                </a:solidFill>
+                <a:latin typeface="JetBrains Mono"/>
+              </a:rPr>
+              <a:t>Nivel guardado — estado Active</a:t>
+            </a:r>
+          </a:p>
+        </p:txBody>
+      </p:sp>
+      <p:sp>
+        <p:nvSpPr>
+          <p:cNvPr id="12" name="TextBox 11"/>
+          <p:cNvSpPr txBox="1"/>
+          <p:nvPr/>
+        </p:nvSpPr>
+        <p:spPr>
+          <a:xfrm>
+            <a:off x="685800" y="5001768"/>
+            <a:ext cx="10607040" cy="1188720"/>
+          </a:xfrm>
+          <a:prstGeom prst="rect">
+            <a:avLst/>
+          </a:prstGeom>
+          <a:noFill/>
+        </p:spPr>
+        <p:txBody>
+          <a:bodyPr wrap="square" lIns="0" rIns="0" tIns="0" bIns="0">
+            <a:spAutoFit/>
+          </a:bodyPr>
+          <a:lstStyle/>
+          <a:p>
+            <a:pPr>
+              <a:lnSpc>
+                <a:spcPct val="125000"/>
+              </a:lnSpc>
+              <a:spcAft>
+                <a:spcPts val="400"/>
+              </a:spcAft>
+            </a:pPr>
+            <a:r>
+              <a:rPr sz="1300" b="1">
+                <a:solidFill>
+                  <a:srgbClr val="C9A45C"/>
+                </a:solidFill>
+                <a:latin typeface="Space Grotesk"/>
+              </a:rPr>
+              <a:t>▪  </a:t>
+            </a:r>
+            <a:r>
+              <a:rPr sz="1300" b="1">
+                <a:solidFill>
+                  <a:srgbClr val="E7E9ED"/>
+                </a:solidFill>
+                <a:latin typeface="Space Grotesk"/>
+              </a:rPr>
+              <a:t>Nivel de compra en 140 USD</a:t>
+            </a:r>
+            <a:r>
+              <a:rPr sz="1300">
+                <a:solidFill>
+                  <a:srgbClr val="99A0AB"/>
+                </a:solidFill>
+                <a:latin typeface="Space Grotesk"/>
+              </a:rPr>
+              <a:t> con nota libre del usuario.</a:t>
+            </a:r>
+          </a:p>
+          <a:p>
+            <a:pPr>
+              <a:lnSpc>
+                <a:spcPct val="125000"/>
+              </a:lnSpc>
+              <a:spcAft>
+                <a:spcPts val="400"/>
+              </a:spcAft>
+            </a:pPr>
+            <a:r>
+              <a:rPr sz="1300" b="1">
+                <a:solidFill>
+                  <a:srgbClr val="C9A45C"/>
+                </a:solidFill>
+                <a:latin typeface="Space Grotesk"/>
+              </a:rPr>
+              <a:t>▪  </a:t>
+            </a:r>
+            <a:r>
+              <a:rPr sz="1300" b="1">
+                <a:solidFill>
+                  <a:srgbClr val="E7E9ED"/>
+                </a:solidFill>
+                <a:latin typeface="Space Grotesk"/>
+              </a:rPr>
+              <a:t>Historial inmutable (Spec D06).</a:t>
+            </a:r>
+            <a:r>
+              <a:rPr sz="1300">
+                <a:solidFill>
+                  <a:srgbClr val="99A0AB"/>
+                </a:solidFill>
+                <a:latin typeface="Space Grotesk"/>
+              </a:rPr>
+              <a:t> cada nivel definido queda registrado; no se sobrescribe.</a:t>
+            </a:r>
+          </a:p>
+          <a:p>
+            <a:pPr>
+              <a:lnSpc>
+                <a:spcPct val="125000"/>
+              </a:lnSpc>
+              <a:spcAft>
+                <a:spcPts val="400"/>
+              </a:spcAft>
+            </a:pPr>
+            <a:r>
+              <a:rPr sz="1300" b="1">
+                <a:solidFill>
+                  <a:srgbClr val="C9A45C"/>
+                </a:solidFill>
+                <a:latin typeface="Space Grotesk"/>
+              </a:rPr>
+              <a:t>▪  </a:t>
+            </a:r>
+            <a:r>
+              <a:rPr sz="1300">
+                <a:solidFill>
+                  <a:srgbClr val="99A0AB"/>
+                </a:solidFill>
+                <a:latin typeface="Space Grotesk"/>
+              </a:rPr>
+              <a:t>El motor de alertas evaluará el cruce automáticamente en cada actualización de precio</a:t>
+            </a:r>
+          </a:p>
+        </p:txBody>
+      </p:sp>
+      <p:sp>
+        <p:nvSpPr>
+          <p:cNvPr id="13" name="TextBox 12"/>
+          <p:cNvSpPr txBox="1"/>
+          <p:nvPr/>
+        </p:nvSpPr>
+        <p:spPr>
+          <a:xfrm>
+            <a:off x="685800" y="6473952"/>
+            <a:ext cx="5486400" cy="274320"/>
+          </a:xfrm>
+          <a:prstGeom prst="rect">
+            <a:avLst/>
+          </a:prstGeom>
+          <a:noFill/>
+        </p:spPr>
+        <p:txBody>
+          <a:bodyPr wrap="square" anchor="t" lIns="0" rIns="0" tIns="0" bIns="0">
+            <a:spAutoFit/>
+          </a:bodyPr>
+          <a:lstStyle/>
+          <a:p>
+            <a:pPr algn="l">
+              <a:lnSpc>
+                <a:spcPct val="115000"/>
+              </a:lnSpc>
+            </a:pPr>
+            <a:r>
+              <a:rPr sz="850" b="0" i="0">
+                <a:solidFill>
+                  <a:srgbClr val="5C6472"/>
+                </a:solidFill>
+                <a:latin typeface="JetBrains Mono"/>
+              </a:rPr>
+              <a:t>TFM BIGSCHOOL · GESTIÓN DE CARTERA FINANCIERA CON IA</a:t>
+            </a:r>
+          </a:p>
+        </p:txBody>
+      </p:sp>
+      <p:sp>
+        <p:nvSpPr>
+          <p:cNvPr id="14" name="TextBox 13"/>
+          <p:cNvSpPr txBox="1"/>
+          <p:nvPr/>
+        </p:nvSpPr>
+        <p:spPr>
+          <a:xfrm>
+            <a:off x="5943600" y="6473952"/>
+            <a:ext cx="4389120" cy="274320"/>
+          </a:xfrm>
+          <a:prstGeom prst="rect">
+            <a:avLst/>
+          </a:prstGeom>
+          <a:noFill/>
+        </p:spPr>
+        <p:txBody>
+          <a:bodyPr wrap="square" anchor="t" lIns="0" rIns="0" tIns="0" bIns="0">
+            <a:spAutoFit/>
+          </a:bodyPr>
+          <a:lstStyle/>
+          <a:p>
+            <a:pPr algn="r">
+              <a:lnSpc>
+                <a:spcPct val="115000"/>
+              </a:lnSpc>
+            </a:pPr>
+            <a:r>
+              <a:rPr sz="850" b="0" i="0">
+                <a:solidFill>
+                  <a:srgbClr val="5C6472"/>
+                </a:solidFill>
+                <a:latin typeface="JetBrains Mono"/>
+              </a:rPr>
+              <a:t>09 · RECORRIDO — INVITADO</a:t>
+            </a:r>
+          </a:p>
+        </p:txBody>
+      </p:sp>
+      <p:sp>
+        <p:nvSpPr>
+          <p:cNvPr id="15" name="TextBox 14"/>
+          <p:cNvSpPr txBox="1"/>
+          <p:nvPr/>
+        </p:nvSpPr>
+        <p:spPr>
+          <a:xfrm>
+            <a:off x="11475720" y="6473952"/>
+            <a:ext cx="548640" cy="274320"/>
+          </a:xfrm>
+          <a:prstGeom prst="rect">
+            <a:avLst/>
+          </a:prstGeom>
+          <a:noFill/>
+        </p:spPr>
+        <p:txBody>
+          <a:bodyPr wrap="square" anchor="t" lIns="0" rIns="0" tIns="0" bIns="0">
+            <a:spAutoFit/>
+          </a:bodyPr>
+          <a:lstStyle/>
+          <a:p>
+            <a:pPr algn="r">
+              <a:lnSpc>
+                <a:spcPct val="115000"/>
+              </a:lnSpc>
+            </a:pPr>
+            <a:r>
+              <a:rPr sz="850" b="0" i="0">
+                <a:solidFill>
+                  <a:srgbClr val="C9A45C"/>
+                </a:solidFill>
+                <a:latin typeface="JetBrains Mono"/>
+              </a:rPr>
+              <a:t>38</a:t>
+            </a:r>
+          </a:p>
+        </p:txBody>
+      </p:sp>
+      <p:sp>
+        <p:nvSpPr>
+          <p:cNvPr id="16" name="Rectangle 15"/>
+          <p:cNvSpPr/>
+          <p:nvPr/>
+        </p:nvSpPr>
+        <p:spPr>
+          <a:xfrm>
+            <a:off x="685800" y="6400800"/>
+            <a:ext cx="10817352" cy="9525"/>
+          </a:xfrm>
+          <a:prstGeom prst="rect">
+            <a:avLst/>
+          </a:prstGeom>
+          <a:solidFill>
+            <a:srgbClr val="1D222B"/>
+          </a:solidFill>
+          <a:ln>
+            <a:noFill/>
+          </a:ln>
+          <a:effectLst/>
+        </p:spPr>
+        <p:style>
+          <a:lnRef idx="1">
+            <a:schemeClr val="accent1"/>
+          </a:lnRef>
+          <a:fillRef idx="3">
+            <a:schemeClr val="accent1"/>
+          </a:fillRef>
+          <a:effectRef idx="2">
+            <a:schemeClr val="accent1"/>
+          </a:effectRef>
+          <a:fontRef idx="minor">
+            <a:schemeClr val="lt1"/>
+          </a:fontRef>
+        </p:style>
+        <p:txBody>
+          <a:bodyPr rtlCol="0" anchor="ctr"/>
+          <a:lstStyle/>
+          <a:p>
+            <a:pPr algn="ctr"/>
+          </a:p>
+        </p:txBody>
+      </p:sp>
+    </p:spTree>
+  </p:cSld>
+  <p:clrMapOvr>
+    <a:masterClrMapping/>
+  </p:clrMapOvr>
+</p:sld>
+</file>
+
 <file path=ppt/slides/slide4.xml><?xml version="1.0" encoding="utf-8"?>
 <p:sld xmlns:a="http://schemas.openxmlformats.org/drawingml/2006/main" xmlns:r="http://schemas.openxmlformats.org/officeDocument/2006/relationships" xmlns:p="http://schemas.openxmlformats.org/presentationml/2006/main">
   <p:cSld>
@@ -27029,6 +31373,2624 @@
           <a:p>
             <a:pPr algn="ctr"/>
             <a:endParaRPr/>
+          </a:p>
+        </p:txBody>
+      </p:sp>
+    </p:spTree>
+  </p:cSld>
+  <p:clrMapOvr>
+    <a:masterClrMapping/>
+  </p:clrMapOvr>
+</p:sld>
+</file>
+
+<file path=ppt/slides/slide40.xml><?xml version="1.0" encoding="utf-8"?>
+<p:sld xmlns:a="http://schemas.openxmlformats.org/drawingml/2006/main" xmlns:p="http://schemas.openxmlformats.org/presentationml/2006/main" xmlns:r="http://schemas.openxmlformats.org/officeDocument/2006/relationships">
+  <p:cSld>
+    <p:spTree>
+      <p:nvGrpSpPr>
+        <p:cNvPr id="1" name=""/>
+        <p:cNvGrpSpPr/>
+        <p:nvPr/>
+      </p:nvGrpSpPr>
+      <p:grpSpPr/>
+      <p:sp>
+        <p:nvSpPr>
+          <p:cNvPr id="2" name="Rectangle 1"/>
+          <p:cNvSpPr/>
+          <p:nvPr/>
+        </p:nvSpPr>
+        <p:spPr>
+          <a:xfrm>
+            <a:off x="0" y="0"/>
+            <a:ext cx="12191695" cy="6858000"/>
+          </a:xfrm>
+          <a:prstGeom prst="rect">
+            <a:avLst/>
+          </a:prstGeom>
+          <a:solidFill>
+            <a:srgbClr val="08090B"/>
+          </a:solidFill>
+          <a:ln>
+            <a:noFill/>
+          </a:ln>
+          <a:effectLst/>
+        </p:spPr>
+        <p:style>
+          <a:lnRef idx="1">
+            <a:schemeClr val="accent1"/>
+          </a:lnRef>
+          <a:fillRef idx="3">
+            <a:schemeClr val="accent1"/>
+          </a:fillRef>
+          <a:effectRef idx="2">
+            <a:schemeClr val="accent1"/>
+          </a:effectRef>
+          <a:fontRef idx="minor">
+            <a:schemeClr val="lt1"/>
+          </a:fontRef>
+        </p:style>
+        <p:txBody>
+          <a:bodyPr rtlCol="0" anchor="ctr"/>
+          <a:lstStyle/>
+          <a:p>
+            <a:pPr algn="ctr"/>
+          </a:p>
+        </p:txBody>
+      </p:sp>
+      <p:sp>
+        <p:nvSpPr>
+          <p:cNvPr id="3" name="TextBox 2"/>
+          <p:cNvSpPr txBox="1"/>
+          <p:nvPr/>
+        </p:nvSpPr>
+        <p:spPr>
+          <a:xfrm>
+            <a:off x="685800" y="411480"/>
+            <a:ext cx="10789920" cy="320040"/>
+          </a:xfrm>
+          <a:prstGeom prst="rect">
+            <a:avLst/>
+          </a:prstGeom>
+          <a:noFill/>
+        </p:spPr>
+        <p:txBody>
+          <a:bodyPr wrap="square" anchor="t" lIns="0" rIns="0" tIns="0" bIns="0">
+            <a:spAutoFit/>
+          </a:bodyPr>
+          <a:lstStyle/>
+          <a:p>
+            <a:pPr algn="l">
+              <a:lnSpc>
+                <a:spcPct val="115000"/>
+              </a:lnSpc>
+            </a:pPr>
+            <a:r>
+              <a:rPr sz="1250" b="1" i="0">
+                <a:solidFill>
+                  <a:srgbClr val="C9A45C"/>
+                </a:solidFill>
+                <a:latin typeface="JetBrains Mono"/>
+              </a:rPr>
+              <a:t>09 · RECORRIDO — INVITADO</a:t>
+            </a:r>
+          </a:p>
+        </p:txBody>
+      </p:sp>
+      <p:sp>
+        <p:nvSpPr>
+          <p:cNvPr id="4" name="TextBox 3"/>
+          <p:cNvSpPr txBox="1"/>
+          <p:nvPr/>
+        </p:nvSpPr>
+        <p:spPr>
+          <a:xfrm>
+            <a:off x="685800" y="704088"/>
+            <a:ext cx="10789920" cy="548640"/>
+          </a:xfrm>
+          <a:prstGeom prst="rect">
+            <a:avLst/>
+          </a:prstGeom>
+          <a:noFill/>
+        </p:spPr>
+        <p:txBody>
+          <a:bodyPr wrap="square" anchor="t" lIns="0" rIns="0" tIns="0" bIns="0">
+            <a:spAutoFit/>
+          </a:bodyPr>
+          <a:lstStyle/>
+          <a:p>
+            <a:pPr algn="l">
+              <a:lnSpc>
+                <a:spcPct val="115000"/>
+              </a:lnSpc>
+            </a:pPr>
+            <a:r>
+              <a:rPr sz="2400" b="1" i="0">
+                <a:solidFill>
+                  <a:srgbClr val="E7E9ED"/>
+                </a:solidFill>
+                <a:latin typeface="Space Grotesk"/>
+              </a:rPr>
+              <a:t>Guía de indicadores y análisis con IA</a:t>
+            </a:r>
+          </a:p>
+        </p:txBody>
+      </p:sp>
+      <p:sp>
+        <p:nvSpPr>
+          <p:cNvPr id="5" name="Rectangle 4"/>
+          <p:cNvSpPr/>
+          <p:nvPr/>
+        </p:nvSpPr>
+        <p:spPr>
+          <a:xfrm>
+            <a:off x="685800" y="1197864"/>
+            <a:ext cx="457200" cy="38100"/>
+          </a:xfrm>
+          <a:prstGeom prst="rect">
+            <a:avLst/>
+          </a:prstGeom>
+          <a:solidFill>
+            <a:srgbClr val="C9A45C"/>
+          </a:solidFill>
+          <a:ln>
+            <a:noFill/>
+          </a:ln>
+          <a:effectLst/>
+        </p:spPr>
+        <p:style>
+          <a:lnRef idx="1">
+            <a:schemeClr val="accent1"/>
+          </a:lnRef>
+          <a:fillRef idx="3">
+            <a:schemeClr val="accent1"/>
+          </a:fillRef>
+          <a:effectRef idx="2">
+            <a:schemeClr val="accent1"/>
+          </a:effectRef>
+          <a:fontRef idx="minor">
+            <a:schemeClr val="lt1"/>
+          </a:fontRef>
+        </p:style>
+        <p:txBody>
+          <a:bodyPr rtlCol="0" anchor="ctr"/>
+          <a:lstStyle/>
+          <a:p>
+            <a:pPr algn="ctr"/>
+          </a:p>
+        </p:txBody>
+      </p:sp>
+      <p:sp>
+        <p:nvSpPr>
+          <p:cNvPr id="6" name="Rounded Rectangle 5"/>
+          <p:cNvSpPr/>
+          <p:nvPr/>
+        </p:nvSpPr>
+        <p:spPr>
+          <a:xfrm>
+            <a:off x="696468" y="1267968"/>
+            <a:ext cx="5053584" cy="3215640"/>
+          </a:xfrm>
+          <a:prstGeom prst="roundRect">
+            <a:avLst>
+              <a:gd name="adj" fmla="val 3000"/>
+            </a:avLst>
+          </a:prstGeom>
+          <a:solidFill>
+            <a:srgbClr val="15191F"/>
+          </a:solidFill>
+          <a:ln w="15875">
+            <a:solidFill>
+              <a:srgbClr val="C9A45C"/>
+            </a:solidFill>
+          </a:ln>
+          <a:effectLst/>
+        </p:spPr>
+        <p:style>
+          <a:lnRef idx="1">
+            <a:schemeClr val="accent1"/>
+          </a:lnRef>
+          <a:fillRef idx="3">
+            <a:schemeClr val="accent1"/>
+          </a:fillRef>
+          <a:effectRef idx="2">
+            <a:schemeClr val="accent1"/>
+          </a:effectRef>
+          <a:fontRef idx="minor">
+            <a:schemeClr val="lt1"/>
+          </a:fontRef>
+        </p:style>
+        <p:txBody>
+          <a:bodyPr rtlCol="0" anchor="ctr"/>
+          <a:lstStyle/>
+          <a:p>
+            <a:pPr algn="ctr"/>
+          </a:p>
+        </p:txBody>
+      </p:sp>
+      <p:pic>
+        <p:nvPicPr>
+          <p:cNvPr id="7" name="Picture 6" descr="13-guia-indicadores.png"/>
+          <p:cNvPicPr>
+            <a:picLocks noChangeAspect="1"/>
+          </p:cNvPicPr>
+          <p:nvPr/>
+        </p:nvPicPr>
+        <p:blipFill>
+          <a:blip r:embed="rId2"/>
+          <a:stretch>
+            <a:fillRect/>
+          </a:stretch>
+        </p:blipFill>
+        <p:spPr>
+          <a:xfrm>
+            <a:off x="772668" y="1344168"/>
+            <a:ext cx="4901184" cy="3063240"/>
+          </a:xfrm>
+          <a:prstGeom prst="rect">
+            <a:avLst/>
+          </a:prstGeom>
+        </p:spPr>
+      </p:pic>
+      <p:sp>
+        <p:nvSpPr>
+          <p:cNvPr id="8" name="TextBox 7"/>
+          <p:cNvSpPr txBox="1"/>
+          <p:nvPr/>
+        </p:nvSpPr>
+        <p:spPr>
+          <a:xfrm>
+            <a:off x="696468" y="4538472"/>
+            <a:ext cx="5053584" cy="274320"/>
+          </a:xfrm>
+          <a:prstGeom prst="rect">
+            <a:avLst/>
+          </a:prstGeom>
+          <a:noFill/>
+        </p:spPr>
+        <p:txBody>
+          <a:bodyPr wrap="square" anchor="t" lIns="0" rIns="0" tIns="0" bIns="0">
+            <a:spAutoFit/>
+          </a:bodyPr>
+          <a:lstStyle/>
+          <a:p>
+            <a:pPr algn="ctr">
+              <a:lnSpc>
+                <a:spcPct val="115000"/>
+              </a:lnSpc>
+            </a:pPr>
+            <a:r>
+              <a:rPr sz="1050" b="0" i="0">
+                <a:solidFill>
+                  <a:srgbClr val="5C6472"/>
+                </a:solidFill>
+                <a:latin typeface="JetBrains Mono"/>
+              </a:rPr>
+              <a:t>Catálogo de indicadores con rangos y semáforo</a:t>
+            </a:r>
+          </a:p>
+        </p:txBody>
+      </p:sp>
+      <p:sp>
+        <p:nvSpPr>
+          <p:cNvPr id="9" name="Rounded Rectangle 8"/>
+          <p:cNvSpPr/>
+          <p:nvPr/>
+        </p:nvSpPr>
+        <p:spPr>
+          <a:xfrm>
+            <a:off x="6091428" y="1267968"/>
+            <a:ext cx="5053584" cy="3215640"/>
+          </a:xfrm>
+          <a:prstGeom prst="roundRect">
+            <a:avLst>
+              <a:gd name="adj" fmla="val 3000"/>
+            </a:avLst>
+          </a:prstGeom>
+          <a:solidFill>
+            <a:srgbClr val="15191F"/>
+          </a:solidFill>
+          <a:ln w="15875">
+            <a:solidFill>
+              <a:srgbClr val="C9A45C"/>
+            </a:solidFill>
+          </a:ln>
+          <a:effectLst/>
+        </p:spPr>
+        <p:style>
+          <a:lnRef idx="1">
+            <a:schemeClr val="accent1"/>
+          </a:lnRef>
+          <a:fillRef idx="3">
+            <a:schemeClr val="accent1"/>
+          </a:fillRef>
+          <a:effectRef idx="2">
+            <a:schemeClr val="accent1"/>
+          </a:effectRef>
+          <a:fontRef idx="minor">
+            <a:schemeClr val="lt1"/>
+          </a:fontRef>
+        </p:style>
+        <p:txBody>
+          <a:bodyPr rtlCol="0" anchor="ctr"/>
+          <a:lstStyle/>
+          <a:p>
+            <a:pPr algn="ctr"/>
+          </a:p>
+        </p:txBody>
+      </p:sp>
+      <p:pic>
+        <p:nvPicPr>
+          <p:cNvPr id="10" name="Picture 9" descr="12-analisis-ia.png"/>
+          <p:cNvPicPr>
+            <a:picLocks noChangeAspect="1"/>
+          </p:cNvPicPr>
+          <p:nvPr/>
+        </p:nvPicPr>
+        <p:blipFill>
+          <a:blip r:embed="rId3"/>
+          <a:stretch>
+            <a:fillRect/>
+          </a:stretch>
+        </p:blipFill>
+        <p:spPr>
+          <a:xfrm>
+            <a:off x="6167628" y="1344168"/>
+            <a:ext cx="4901184" cy="3063240"/>
+          </a:xfrm>
+          <a:prstGeom prst="rect">
+            <a:avLst/>
+          </a:prstGeom>
+        </p:spPr>
+      </p:pic>
+      <p:sp>
+        <p:nvSpPr>
+          <p:cNvPr id="11" name="TextBox 10"/>
+          <p:cNvSpPr txBox="1"/>
+          <p:nvPr/>
+        </p:nvSpPr>
+        <p:spPr>
+          <a:xfrm>
+            <a:off x="6091428" y="4538472"/>
+            <a:ext cx="5053584" cy="274320"/>
+          </a:xfrm>
+          <a:prstGeom prst="rect">
+            <a:avLst/>
+          </a:prstGeom>
+          <a:noFill/>
+        </p:spPr>
+        <p:txBody>
+          <a:bodyPr wrap="square" anchor="t" lIns="0" rIns="0" tIns="0" bIns="0">
+            <a:spAutoFit/>
+          </a:bodyPr>
+          <a:lstStyle/>
+          <a:p>
+            <a:pPr algn="ctr">
+              <a:lnSpc>
+                <a:spcPct val="115000"/>
+              </a:lnSpc>
+            </a:pPr>
+            <a:r>
+              <a:rPr sz="1050" b="0" i="0">
+                <a:solidFill>
+                  <a:srgbClr val="5C6472"/>
+                </a:solidFill>
+                <a:latin typeface="JetBrains Mono"/>
+              </a:rPr>
+              <a:t>Zona de subida de informes en PDF</a:t>
+            </a:r>
+          </a:p>
+        </p:txBody>
+      </p:sp>
+      <p:sp>
+        <p:nvSpPr>
+          <p:cNvPr id="12" name="TextBox 11"/>
+          <p:cNvSpPr txBox="1"/>
+          <p:nvPr/>
+        </p:nvSpPr>
+        <p:spPr>
+          <a:xfrm>
+            <a:off x="685800" y="5001768"/>
+            <a:ext cx="10607040" cy="1188720"/>
+          </a:xfrm>
+          <a:prstGeom prst="rect">
+            <a:avLst/>
+          </a:prstGeom>
+          <a:noFill/>
+        </p:spPr>
+        <p:txBody>
+          <a:bodyPr wrap="square" lIns="0" rIns="0" tIns="0" bIns="0">
+            <a:spAutoFit/>
+          </a:bodyPr>
+          <a:lstStyle/>
+          <a:p>
+            <a:pPr>
+              <a:lnSpc>
+                <a:spcPct val="125000"/>
+              </a:lnSpc>
+              <a:spcAft>
+                <a:spcPts val="400"/>
+              </a:spcAft>
+            </a:pPr>
+            <a:r>
+              <a:rPr sz="1300" b="1">
+                <a:solidFill>
+                  <a:srgbClr val="C9A45C"/>
+                </a:solidFill>
+                <a:latin typeface="Space Grotesk"/>
+              </a:rPr>
+              <a:t>▪  </a:t>
+            </a:r>
+            <a:r>
+              <a:rPr sz="1300" b="1">
+                <a:solidFill>
+                  <a:srgbClr val="E7E9ED"/>
+                </a:solidFill>
+                <a:latin typeface="Space Grotesk"/>
+              </a:rPr>
+              <a:t>Guía 100% data-driven.</a:t>
+            </a:r>
+            <a:r>
+              <a:rPr sz="1300">
+                <a:solidFill>
+                  <a:srgbClr val="99A0AB"/>
+                </a:solidFill>
+                <a:latin typeface="Space Grotesk"/>
+              </a:rPr>
+              <a:t> fórmulas y rangos verde/amarillo/rojo por indicador, cero texto embebido en código.</a:t>
+            </a:r>
+          </a:p>
+          <a:p>
+            <a:pPr>
+              <a:lnSpc>
+                <a:spcPct val="125000"/>
+              </a:lnSpc>
+              <a:spcAft>
+                <a:spcPts val="400"/>
+              </a:spcAft>
+            </a:pPr>
+            <a:r>
+              <a:rPr sz="1300" b="1">
+                <a:solidFill>
+                  <a:srgbClr val="C9A45C"/>
+                </a:solidFill>
+                <a:latin typeface="Space Grotesk"/>
+              </a:rPr>
+              <a:t>▪  </a:t>
+            </a:r>
+            <a:r>
+              <a:rPr sz="1300" b="1">
+                <a:solidFill>
+                  <a:srgbClr val="E7E9ED"/>
+                </a:solidFill>
+                <a:latin typeface="Space Grotesk"/>
+              </a:rPr>
+              <a:t>Análisis IA.</a:t>
+            </a:r>
+            <a:r>
+              <a:rPr sz="1300">
+                <a:solidFill>
+                  <a:srgbClr val="99A0AB"/>
+                </a:solidFill>
+                <a:latin typeface="Space Grotesk"/>
+              </a:rPr>
+              <a:t> acepta PDF de hasta 20 MB; arranca vacío hasta la primera subida.</a:t>
+            </a:r>
+          </a:p>
+          <a:p>
+            <a:pPr>
+              <a:lnSpc>
+                <a:spcPct val="125000"/>
+              </a:lnSpc>
+              <a:spcAft>
+                <a:spcPts val="400"/>
+              </a:spcAft>
+            </a:pPr>
+            <a:r>
+              <a:rPr sz="1300" b="1">
+                <a:solidFill>
+                  <a:srgbClr val="C9A45C"/>
+                </a:solidFill>
+                <a:latin typeface="Space Grotesk"/>
+              </a:rPr>
+              <a:t>▪  </a:t>
+            </a:r>
+            <a:r>
+              <a:rPr sz="1300">
+                <a:solidFill>
+                  <a:srgbClr val="99A0AB"/>
+                </a:solidFill>
+                <a:latin typeface="Space Grotesk"/>
+              </a:rPr>
+              <a:t>Ambas pantallas comparten el mismo header y navegación consistente</a:t>
+            </a:r>
+          </a:p>
+        </p:txBody>
+      </p:sp>
+      <p:sp>
+        <p:nvSpPr>
+          <p:cNvPr id="13" name="TextBox 12"/>
+          <p:cNvSpPr txBox="1"/>
+          <p:nvPr/>
+        </p:nvSpPr>
+        <p:spPr>
+          <a:xfrm>
+            <a:off x="685800" y="6473952"/>
+            <a:ext cx="5486400" cy="274320"/>
+          </a:xfrm>
+          <a:prstGeom prst="rect">
+            <a:avLst/>
+          </a:prstGeom>
+          <a:noFill/>
+        </p:spPr>
+        <p:txBody>
+          <a:bodyPr wrap="square" anchor="t" lIns="0" rIns="0" tIns="0" bIns="0">
+            <a:spAutoFit/>
+          </a:bodyPr>
+          <a:lstStyle/>
+          <a:p>
+            <a:pPr algn="l">
+              <a:lnSpc>
+                <a:spcPct val="115000"/>
+              </a:lnSpc>
+            </a:pPr>
+            <a:r>
+              <a:rPr sz="850" b="0" i="0">
+                <a:solidFill>
+                  <a:srgbClr val="5C6472"/>
+                </a:solidFill>
+                <a:latin typeface="JetBrains Mono"/>
+              </a:rPr>
+              <a:t>TFM BIGSCHOOL · GESTIÓN DE CARTERA FINANCIERA CON IA</a:t>
+            </a:r>
+          </a:p>
+        </p:txBody>
+      </p:sp>
+      <p:sp>
+        <p:nvSpPr>
+          <p:cNvPr id="14" name="TextBox 13"/>
+          <p:cNvSpPr txBox="1"/>
+          <p:nvPr/>
+        </p:nvSpPr>
+        <p:spPr>
+          <a:xfrm>
+            <a:off x="5943600" y="6473952"/>
+            <a:ext cx="4389120" cy="274320"/>
+          </a:xfrm>
+          <a:prstGeom prst="rect">
+            <a:avLst/>
+          </a:prstGeom>
+          <a:noFill/>
+        </p:spPr>
+        <p:txBody>
+          <a:bodyPr wrap="square" anchor="t" lIns="0" rIns="0" tIns="0" bIns="0">
+            <a:spAutoFit/>
+          </a:bodyPr>
+          <a:lstStyle/>
+          <a:p>
+            <a:pPr algn="r">
+              <a:lnSpc>
+                <a:spcPct val="115000"/>
+              </a:lnSpc>
+            </a:pPr>
+            <a:r>
+              <a:rPr sz="850" b="0" i="0">
+                <a:solidFill>
+                  <a:srgbClr val="5C6472"/>
+                </a:solidFill>
+                <a:latin typeface="JetBrains Mono"/>
+              </a:rPr>
+              <a:t>09 · RECORRIDO — INVITADO</a:t>
+            </a:r>
+          </a:p>
+        </p:txBody>
+      </p:sp>
+      <p:sp>
+        <p:nvSpPr>
+          <p:cNvPr id="15" name="TextBox 14"/>
+          <p:cNvSpPr txBox="1"/>
+          <p:nvPr/>
+        </p:nvSpPr>
+        <p:spPr>
+          <a:xfrm>
+            <a:off x="11475720" y="6473952"/>
+            <a:ext cx="548640" cy="274320"/>
+          </a:xfrm>
+          <a:prstGeom prst="rect">
+            <a:avLst/>
+          </a:prstGeom>
+          <a:noFill/>
+        </p:spPr>
+        <p:txBody>
+          <a:bodyPr wrap="square" anchor="t" lIns="0" rIns="0" tIns="0" bIns="0">
+            <a:spAutoFit/>
+          </a:bodyPr>
+          <a:lstStyle/>
+          <a:p>
+            <a:pPr algn="r">
+              <a:lnSpc>
+                <a:spcPct val="115000"/>
+              </a:lnSpc>
+            </a:pPr>
+            <a:r>
+              <a:rPr sz="850" b="0" i="0">
+                <a:solidFill>
+                  <a:srgbClr val="C9A45C"/>
+                </a:solidFill>
+                <a:latin typeface="JetBrains Mono"/>
+              </a:rPr>
+              <a:t>39</a:t>
+            </a:r>
+          </a:p>
+        </p:txBody>
+      </p:sp>
+      <p:sp>
+        <p:nvSpPr>
+          <p:cNvPr id="16" name="Rectangle 15"/>
+          <p:cNvSpPr/>
+          <p:nvPr/>
+        </p:nvSpPr>
+        <p:spPr>
+          <a:xfrm>
+            <a:off x="685800" y="6400800"/>
+            <a:ext cx="10817352" cy="9525"/>
+          </a:xfrm>
+          <a:prstGeom prst="rect">
+            <a:avLst/>
+          </a:prstGeom>
+          <a:solidFill>
+            <a:srgbClr val="1D222B"/>
+          </a:solidFill>
+          <a:ln>
+            <a:noFill/>
+          </a:ln>
+          <a:effectLst/>
+        </p:spPr>
+        <p:style>
+          <a:lnRef idx="1">
+            <a:schemeClr val="accent1"/>
+          </a:lnRef>
+          <a:fillRef idx="3">
+            <a:schemeClr val="accent1"/>
+          </a:fillRef>
+          <a:effectRef idx="2">
+            <a:schemeClr val="accent1"/>
+          </a:effectRef>
+          <a:fontRef idx="minor">
+            <a:schemeClr val="lt1"/>
+          </a:fontRef>
+        </p:style>
+        <p:txBody>
+          <a:bodyPr rtlCol="0" anchor="ctr"/>
+          <a:lstStyle/>
+          <a:p>
+            <a:pPr algn="ctr"/>
+          </a:p>
+        </p:txBody>
+      </p:sp>
+    </p:spTree>
+  </p:cSld>
+  <p:clrMapOvr>
+    <a:masterClrMapping/>
+  </p:clrMapOvr>
+</p:sld>
+</file>
+
+<file path=ppt/slides/slide41.xml><?xml version="1.0" encoding="utf-8"?>
+<p:sld xmlns:a="http://schemas.openxmlformats.org/drawingml/2006/main" xmlns:p="http://schemas.openxmlformats.org/presentationml/2006/main" xmlns:r="http://schemas.openxmlformats.org/officeDocument/2006/relationships">
+  <p:cSld>
+    <p:spTree>
+      <p:nvGrpSpPr>
+        <p:cNvPr id="1" name=""/>
+        <p:cNvGrpSpPr/>
+        <p:nvPr/>
+      </p:nvGrpSpPr>
+      <p:grpSpPr/>
+      <p:sp>
+        <p:nvSpPr>
+          <p:cNvPr id="2" name="Rectangle 1"/>
+          <p:cNvSpPr/>
+          <p:nvPr/>
+        </p:nvSpPr>
+        <p:spPr>
+          <a:xfrm>
+            <a:off x="0" y="0"/>
+            <a:ext cx="12191695" cy="6858000"/>
+          </a:xfrm>
+          <a:prstGeom prst="rect">
+            <a:avLst/>
+          </a:prstGeom>
+          <a:solidFill>
+            <a:srgbClr val="08090B"/>
+          </a:solidFill>
+          <a:ln>
+            <a:noFill/>
+          </a:ln>
+          <a:effectLst/>
+        </p:spPr>
+        <p:style>
+          <a:lnRef idx="1">
+            <a:schemeClr val="accent1"/>
+          </a:lnRef>
+          <a:fillRef idx="3">
+            <a:schemeClr val="accent1"/>
+          </a:fillRef>
+          <a:effectRef idx="2">
+            <a:schemeClr val="accent1"/>
+          </a:effectRef>
+          <a:fontRef idx="minor">
+            <a:schemeClr val="lt1"/>
+          </a:fontRef>
+        </p:style>
+        <p:txBody>
+          <a:bodyPr rtlCol="0" anchor="ctr"/>
+          <a:lstStyle/>
+          <a:p>
+            <a:pPr algn="ctr"/>
+          </a:p>
+        </p:txBody>
+      </p:sp>
+      <p:sp>
+        <p:nvSpPr>
+          <p:cNvPr id="3" name="TextBox 2"/>
+          <p:cNvSpPr txBox="1"/>
+          <p:nvPr/>
+        </p:nvSpPr>
+        <p:spPr>
+          <a:xfrm>
+            <a:off x="685800" y="411480"/>
+            <a:ext cx="10789920" cy="320040"/>
+          </a:xfrm>
+          <a:prstGeom prst="rect">
+            <a:avLst/>
+          </a:prstGeom>
+          <a:noFill/>
+        </p:spPr>
+        <p:txBody>
+          <a:bodyPr wrap="square" anchor="t" lIns="0" rIns="0" tIns="0" bIns="0">
+            <a:spAutoFit/>
+          </a:bodyPr>
+          <a:lstStyle/>
+          <a:p>
+            <a:pPr algn="l">
+              <a:lnSpc>
+                <a:spcPct val="115000"/>
+              </a:lnSpc>
+            </a:pPr>
+            <a:r>
+              <a:rPr sz="1250" b="1" i="0">
+                <a:solidFill>
+                  <a:srgbClr val="C9A45C"/>
+                </a:solidFill>
+                <a:latin typeface="JetBrains Mono"/>
+              </a:rPr>
+              <a:t>09 · RECORRIDO — INVITADO</a:t>
+            </a:r>
+          </a:p>
+        </p:txBody>
+      </p:sp>
+      <p:sp>
+        <p:nvSpPr>
+          <p:cNvPr id="4" name="TextBox 3"/>
+          <p:cNvSpPr txBox="1"/>
+          <p:nvPr/>
+        </p:nvSpPr>
+        <p:spPr>
+          <a:xfrm>
+            <a:off x="685800" y="704088"/>
+            <a:ext cx="10789920" cy="548640"/>
+          </a:xfrm>
+          <a:prstGeom prst="rect">
+            <a:avLst/>
+          </a:prstGeom>
+          <a:noFill/>
+        </p:spPr>
+        <p:txBody>
+          <a:bodyPr wrap="square" anchor="t" lIns="0" rIns="0" tIns="0" bIns="0">
+            <a:spAutoFit/>
+          </a:bodyPr>
+          <a:lstStyle/>
+          <a:p>
+            <a:pPr algn="l">
+              <a:lnSpc>
+                <a:spcPct val="115000"/>
+              </a:lnSpc>
+            </a:pPr>
+            <a:r>
+              <a:rPr sz="2400" b="1" i="0">
+                <a:solidFill>
+                  <a:srgbClr val="E7E9ED"/>
+                </a:solidFill>
+                <a:latin typeface="Space Grotesk"/>
+              </a:rPr>
+              <a:t>Configuración: idioma, tema y datos de mercado</a:t>
+            </a:r>
+          </a:p>
+        </p:txBody>
+      </p:sp>
+      <p:sp>
+        <p:nvSpPr>
+          <p:cNvPr id="5" name="Rectangle 4"/>
+          <p:cNvSpPr/>
+          <p:nvPr/>
+        </p:nvSpPr>
+        <p:spPr>
+          <a:xfrm>
+            <a:off x="685800" y="1197864"/>
+            <a:ext cx="457200" cy="38100"/>
+          </a:xfrm>
+          <a:prstGeom prst="rect">
+            <a:avLst/>
+          </a:prstGeom>
+          <a:solidFill>
+            <a:srgbClr val="C9A45C"/>
+          </a:solidFill>
+          <a:ln>
+            <a:noFill/>
+          </a:ln>
+          <a:effectLst/>
+        </p:spPr>
+        <p:style>
+          <a:lnRef idx="1">
+            <a:schemeClr val="accent1"/>
+          </a:lnRef>
+          <a:fillRef idx="3">
+            <a:schemeClr val="accent1"/>
+          </a:fillRef>
+          <a:effectRef idx="2">
+            <a:schemeClr val="accent1"/>
+          </a:effectRef>
+          <a:fontRef idx="minor">
+            <a:schemeClr val="lt1"/>
+          </a:fontRef>
+        </p:style>
+        <p:txBody>
+          <a:bodyPr rtlCol="0" anchor="ctr"/>
+          <a:lstStyle/>
+          <a:p>
+            <a:pPr algn="ctr"/>
+          </a:p>
+        </p:txBody>
+      </p:sp>
+      <p:sp>
+        <p:nvSpPr>
+          <p:cNvPr id="6" name="Rounded Rectangle 5"/>
+          <p:cNvSpPr/>
+          <p:nvPr/>
+        </p:nvSpPr>
+        <p:spPr>
+          <a:xfrm>
+            <a:off x="696468" y="1267968"/>
+            <a:ext cx="5053584" cy="3215640"/>
+          </a:xfrm>
+          <a:prstGeom prst="roundRect">
+            <a:avLst>
+              <a:gd name="adj" fmla="val 3000"/>
+            </a:avLst>
+          </a:prstGeom>
+          <a:solidFill>
+            <a:srgbClr val="15191F"/>
+          </a:solidFill>
+          <a:ln w="15875">
+            <a:solidFill>
+              <a:srgbClr val="C9A45C"/>
+            </a:solidFill>
+          </a:ln>
+          <a:effectLst/>
+        </p:spPr>
+        <p:style>
+          <a:lnRef idx="1">
+            <a:schemeClr val="accent1"/>
+          </a:lnRef>
+          <a:fillRef idx="3">
+            <a:schemeClr val="accent1"/>
+          </a:fillRef>
+          <a:effectRef idx="2">
+            <a:schemeClr val="accent1"/>
+          </a:effectRef>
+          <a:fontRef idx="minor">
+            <a:schemeClr val="lt1"/>
+          </a:fontRef>
+        </p:style>
+        <p:txBody>
+          <a:bodyPr rtlCol="0" anchor="ctr"/>
+          <a:lstStyle/>
+          <a:p>
+            <a:pPr algn="ctr"/>
+          </a:p>
+        </p:txBody>
+      </p:sp>
+      <p:pic>
+        <p:nvPicPr>
+          <p:cNvPr id="7" name="Picture 6" descr="15-configuracion.png"/>
+          <p:cNvPicPr>
+            <a:picLocks noChangeAspect="1"/>
+          </p:cNvPicPr>
+          <p:nvPr/>
+        </p:nvPicPr>
+        <p:blipFill>
+          <a:blip r:embed="rId2"/>
+          <a:stretch>
+            <a:fillRect/>
+          </a:stretch>
+        </p:blipFill>
+        <p:spPr>
+          <a:xfrm>
+            <a:off x="772668" y="1344168"/>
+            <a:ext cx="4901184" cy="3063240"/>
+          </a:xfrm>
+          <a:prstGeom prst="rect">
+            <a:avLst/>
+          </a:prstGeom>
+        </p:spPr>
+      </p:pic>
+      <p:sp>
+        <p:nvSpPr>
+          <p:cNvPr id="8" name="TextBox 7"/>
+          <p:cNvSpPr txBox="1"/>
+          <p:nvPr/>
+        </p:nvSpPr>
+        <p:spPr>
+          <a:xfrm>
+            <a:off x="696468" y="4538472"/>
+            <a:ext cx="5053584" cy="274320"/>
+          </a:xfrm>
+          <a:prstGeom prst="rect">
+            <a:avLst/>
+          </a:prstGeom>
+          <a:noFill/>
+        </p:spPr>
+        <p:txBody>
+          <a:bodyPr wrap="square" anchor="t" lIns="0" rIns="0" tIns="0" bIns="0">
+            <a:spAutoFit/>
+          </a:bodyPr>
+          <a:lstStyle/>
+          <a:p>
+            <a:pPr algn="ctr">
+              <a:lnSpc>
+                <a:spcPct val="115000"/>
+              </a:lnSpc>
+            </a:pPr>
+            <a:r>
+              <a:rPr sz="1050" b="0" i="0">
+                <a:solidFill>
+                  <a:srgbClr val="5C6472"/>
+                </a:solidFill>
+                <a:latin typeface="JetBrains Mono"/>
+              </a:rPr>
+              <a:t>Panel de Configuración — tema Pastel (por defecto)</a:t>
+            </a:r>
+          </a:p>
+        </p:txBody>
+      </p:sp>
+      <p:sp>
+        <p:nvSpPr>
+          <p:cNvPr id="9" name="Rounded Rectangle 8"/>
+          <p:cNvSpPr/>
+          <p:nvPr/>
+        </p:nvSpPr>
+        <p:spPr>
+          <a:xfrm>
+            <a:off x="6091428" y="1267968"/>
+            <a:ext cx="5053584" cy="3215640"/>
+          </a:xfrm>
+          <a:prstGeom prst="roundRect">
+            <a:avLst>
+              <a:gd name="adj" fmla="val 3000"/>
+            </a:avLst>
+          </a:prstGeom>
+          <a:solidFill>
+            <a:srgbClr val="15191F"/>
+          </a:solidFill>
+          <a:ln w="15875">
+            <a:solidFill>
+              <a:srgbClr val="C9A45C"/>
+            </a:solidFill>
+          </a:ln>
+          <a:effectLst/>
+        </p:spPr>
+        <p:style>
+          <a:lnRef idx="1">
+            <a:schemeClr val="accent1"/>
+          </a:lnRef>
+          <a:fillRef idx="3">
+            <a:schemeClr val="accent1"/>
+          </a:fillRef>
+          <a:effectRef idx="2">
+            <a:schemeClr val="accent1"/>
+          </a:effectRef>
+          <a:fontRef idx="minor">
+            <a:schemeClr val="lt1"/>
+          </a:fontRef>
+        </p:style>
+        <p:txBody>
+          <a:bodyPr rtlCol="0" anchor="ctr"/>
+          <a:lstStyle/>
+          <a:p>
+            <a:pPr algn="ctr"/>
+          </a:p>
+        </p:txBody>
+      </p:sp>
+      <p:pic>
+        <p:nvPicPr>
+          <p:cNvPr id="10" name="Picture 9" descr="17-configuracion-tema-terminal.png"/>
+          <p:cNvPicPr>
+            <a:picLocks noChangeAspect="1"/>
+          </p:cNvPicPr>
+          <p:nvPr/>
+        </p:nvPicPr>
+        <p:blipFill>
+          <a:blip r:embed="rId3"/>
+          <a:stretch>
+            <a:fillRect/>
+          </a:stretch>
+        </p:blipFill>
+        <p:spPr>
+          <a:xfrm>
+            <a:off x="6167628" y="1344168"/>
+            <a:ext cx="4901184" cy="3063240"/>
+          </a:xfrm>
+          <a:prstGeom prst="rect">
+            <a:avLst/>
+          </a:prstGeom>
+        </p:spPr>
+      </p:pic>
+      <p:sp>
+        <p:nvSpPr>
+          <p:cNvPr id="11" name="TextBox 10"/>
+          <p:cNvSpPr txBox="1"/>
+          <p:nvPr/>
+        </p:nvSpPr>
+        <p:spPr>
+          <a:xfrm>
+            <a:off x="6091428" y="4538472"/>
+            <a:ext cx="5053584" cy="274320"/>
+          </a:xfrm>
+          <a:prstGeom prst="rect">
+            <a:avLst/>
+          </a:prstGeom>
+          <a:noFill/>
+        </p:spPr>
+        <p:txBody>
+          <a:bodyPr wrap="square" anchor="t" lIns="0" rIns="0" tIns="0" bIns="0">
+            <a:spAutoFit/>
+          </a:bodyPr>
+          <a:lstStyle/>
+          <a:p>
+            <a:pPr algn="ctr">
+              <a:lnSpc>
+                <a:spcPct val="115000"/>
+              </a:lnSpc>
+            </a:pPr>
+            <a:r>
+              <a:rPr sz="1050" b="0" i="0">
+                <a:solidFill>
+                  <a:srgbClr val="5C6472"/>
+                </a:solidFill>
+                <a:latin typeface="JetBrains Mono"/>
+              </a:rPr>
+              <a:t>Mismo panel con el tema Terminal aplicado al instante</a:t>
+            </a:r>
+          </a:p>
+        </p:txBody>
+      </p:sp>
+      <p:sp>
+        <p:nvSpPr>
+          <p:cNvPr id="12" name="TextBox 11"/>
+          <p:cNvSpPr txBox="1"/>
+          <p:nvPr/>
+        </p:nvSpPr>
+        <p:spPr>
+          <a:xfrm>
+            <a:off x="685800" y="5001768"/>
+            <a:ext cx="10607040" cy="1188720"/>
+          </a:xfrm>
+          <a:prstGeom prst="rect">
+            <a:avLst/>
+          </a:prstGeom>
+          <a:noFill/>
+        </p:spPr>
+        <p:txBody>
+          <a:bodyPr wrap="square" lIns="0" rIns="0" tIns="0" bIns="0">
+            <a:spAutoFit/>
+          </a:bodyPr>
+          <a:lstStyle/>
+          <a:p>
+            <a:pPr>
+              <a:lnSpc>
+                <a:spcPct val="125000"/>
+              </a:lnSpc>
+              <a:spcAft>
+                <a:spcPts val="400"/>
+              </a:spcAft>
+            </a:pPr>
+            <a:r>
+              <a:rPr sz="1300" b="1">
+                <a:solidFill>
+                  <a:srgbClr val="C9A45C"/>
+                </a:solidFill>
+                <a:latin typeface="Space Grotesk"/>
+              </a:rPr>
+              <a:t>▪  </a:t>
+            </a:r>
+            <a:r>
+              <a:rPr sz="1300" b="1">
+                <a:solidFill>
+                  <a:srgbClr val="E7E9ED"/>
+                </a:solidFill>
+                <a:latin typeface="Space Grotesk"/>
+              </a:rPr>
+              <a:t>7 temas visuales disponibles,</a:t>
+            </a:r>
+            <a:r>
+              <a:rPr sz="1300">
+                <a:solidFill>
+                  <a:srgbClr val="99A0AB"/>
+                </a:solidFill>
+                <a:latin typeface="Space Grotesk"/>
+              </a:rPr>
+              <a:t> incluido el propio Terminal Premium de esta presentación.</a:t>
+            </a:r>
+          </a:p>
+          <a:p>
+            <a:pPr>
+              <a:lnSpc>
+                <a:spcPct val="125000"/>
+              </a:lnSpc>
+              <a:spcAft>
+                <a:spcPts val="400"/>
+              </a:spcAft>
+            </a:pPr>
+            <a:r>
+              <a:rPr sz="1300" b="1">
+                <a:solidFill>
+                  <a:srgbClr val="C9A45C"/>
+                </a:solidFill>
+                <a:latin typeface="Space Grotesk"/>
+              </a:rPr>
+              <a:t>▪  </a:t>
+            </a:r>
+            <a:r>
+              <a:rPr sz="1300" b="1">
+                <a:solidFill>
+                  <a:srgbClr val="E7E9ED"/>
+                </a:solidFill>
+                <a:latin typeface="Space Grotesk"/>
+              </a:rPr>
+              <a:t>Cambio instantáneo.</a:t>
+            </a:r>
+            <a:r>
+              <a:rPr sz="1300">
+                <a:solidFill>
+                  <a:srgbClr val="99A0AB"/>
+                </a:solidFill>
+                <a:latin typeface="Space Grotesk"/>
+              </a:rPr>
+              <a:t> se aplica y guarda sin recargar la página.</a:t>
+            </a:r>
+          </a:p>
+          <a:p>
+            <a:pPr>
+              <a:lnSpc>
+                <a:spcPct val="125000"/>
+              </a:lnSpc>
+              <a:spcAft>
+                <a:spcPts val="400"/>
+              </a:spcAft>
+            </a:pPr>
+            <a:r>
+              <a:rPr sz="1300" b="1">
+                <a:solidFill>
+                  <a:srgbClr val="C9A45C"/>
+                </a:solidFill>
+                <a:latin typeface="Space Grotesk"/>
+              </a:rPr>
+              <a:t>▪  </a:t>
+            </a:r>
+            <a:r>
+              <a:rPr sz="1300">
+                <a:solidFill>
+                  <a:srgbClr val="99A0AB"/>
+                </a:solidFill>
+                <a:latin typeface="Space Grotesk"/>
+              </a:rPr>
+              <a:t>La sección “Data providers” (cascada) permanece invisible para este usuario — solo administradores (bloque 06)</a:t>
+            </a:r>
+          </a:p>
+        </p:txBody>
+      </p:sp>
+      <p:sp>
+        <p:nvSpPr>
+          <p:cNvPr id="13" name="TextBox 12"/>
+          <p:cNvSpPr txBox="1"/>
+          <p:nvPr/>
+        </p:nvSpPr>
+        <p:spPr>
+          <a:xfrm>
+            <a:off x="685800" y="6473952"/>
+            <a:ext cx="5486400" cy="274320"/>
+          </a:xfrm>
+          <a:prstGeom prst="rect">
+            <a:avLst/>
+          </a:prstGeom>
+          <a:noFill/>
+        </p:spPr>
+        <p:txBody>
+          <a:bodyPr wrap="square" anchor="t" lIns="0" rIns="0" tIns="0" bIns="0">
+            <a:spAutoFit/>
+          </a:bodyPr>
+          <a:lstStyle/>
+          <a:p>
+            <a:pPr algn="l">
+              <a:lnSpc>
+                <a:spcPct val="115000"/>
+              </a:lnSpc>
+            </a:pPr>
+            <a:r>
+              <a:rPr sz="850" b="0" i="0">
+                <a:solidFill>
+                  <a:srgbClr val="5C6472"/>
+                </a:solidFill>
+                <a:latin typeface="JetBrains Mono"/>
+              </a:rPr>
+              <a:t>TFM BIGSCHOOL · GESTIÓN DE CARTERA FINANCIERA CON IA</a:t>
+            </a:r>
+          </a:p>
+        </p:txBody>
+      </p:sp>
+      <p:sp>
+        <p:nvSpPr>
+          <p:cNvPr id="14" name="TextBox 13"/>
+          <p:cNvSpPr txBox="1"/>
+          <p:nvPr/>
+        </p:nvSpPr>
+        <p:spPr>
+          <a:xfrm>
+            <a:off x="5943600" y="6473952"/>
+            <a:ext cx="4389120" cy="274320"/>
+          </a:xfrm>
+          <a:prstGeom prst="rect">
+            <a:avLst/>
+          </a:prstGeom>
+          <a:noFill/>
+        </p:spPr>
+        <p:txBody>
+          <a:bodyPr wrap="square" anchor="t" lIns="0" rIns="0" tIns="0" bIns="0">
+            <a:spAutoFit/>
+          </a:bodyPr>
+          <a:lstStyle/>
+          <a:p>
+            <a:pPr algn="r">
+              <a:lnSpc>
+                <a:spcPct val="115000"/>
+              </a:lnSpc>
+            </a:pPr>
+            <a:r>
+              <a:rPr sz="850" b="0" i="0">
+                <a:solidFill>
+                  <a:srgbClr val="5C6472"/>
+                </a:solidFill>
+                <a:latin typeface="JetBrains Mono"/>
+              </a:rPr>
+              <a:t>09 · RECORRIDO — INVITADO</a:t>
+            </a:r>
+          </a:p>
+        </p:txBody>
+      </p:sp>
+      <p:sp>
+        <p:nvSpPr>
+          <p:cNvPr id="15" name="TextBox 14"/>
+          <p:cNvSpPr txBox="1"/>
+          <p:nvPr/>
+        </p:nvSpPr>
+        <p:spPr>
+          <a:xfrm>
+            <a:off x="11475720" y="6473952"/>
+            <a:ext cx="548640" cy="274320"/>
+          </a:xfrm>
+          <a:prstGeom prst="rect">
+            <a:avLst/>
+          </a:prstGeom>
+          <a:noFill/>
+        </p:spPr>
+        <p:txBody>
+          <a:bodyPr wrap="square" anchor="t" lIns="0" rIns="0" tIns="0" bIns="0">
+            <a:spAutoFit/>
+          </a:bodyPr>
+          <a:lstStyle/>
+          <a:p>
+            <a:pPr algn="r">
+              <a:lnSpc>
+                <a:spcPct val="115000"/>
+              </a:lnSpc>
+            </a:pPr>
+            <a:r>
+              <a:rPr sz="850" b="0" i="0">
+                <a:solidFill>
+                  <a:srgbClr val="C9A45C"/>
+                </a:solidFill>
+                <a:latin typeface="JetBrains Mono"/>
+              </a:rPr>
+              <a:t>40</a:t>
+            </a:r>
+          </a:p>
+        </p:txBody>
+      </p:sp>
+      <p:sp>
+        <p:nvSpPr>
+          <p:cNvPr id="16" name="Rectangle 15"/>
+          <p:cNvSpPr/>
+          <p:nvPr/>
+        </p:nvSpPr>
+        <p:spPr>
+          <a:xfrm>
+            <a:off x="685800" y="6400800"/>
+            <a:ext cx="10817352" cy="9525"/>
+          </a:xfrm>
+          <a:prstGeom prst="rect">
+            <a:avLst/>
+          </a:prstGeom>
+          <a:solidFill>
+            <a:srgbClr val="1D222B"/>
+          </a:solidFill>
+          <a:ln>
+            <a:noFill/>
+          </a:ln>
+          <a:effectLst/>
+        </p:spPr>
+        <p:style>
+          <a:lnRef idx="1">
+            <a:schemeClr val="accent1"/>
+          </a:lnRef>
+          <a:fillRef idx="3">
+            <a:schemeClr val="accent1"/>
+          </a:fillRef>
+          <a:effectRef idx="2">
+            <a:schemeClr val="accent1"/>
+          </a:effectRef>
+          <a:fontRef idx="minor">
+            <a:schemeClr val="lt1"/>
+          </a:fontRef>
+        </p:style>
+        <p:txBody>
+          <a:bodyPr rtlCol="0" anchor="ctr"/>
+          <a:lstStyle/>
+          <a:p>
+            <a:pPr algn="ctr"/>
+          </a:p>
+        </p:txBody>
+      </p:sp>
+    </p:spTree>
+  </p:cSld>
+  <p:clrMapOvr>
+    <a:masterClrMapping/>
+  </p:clrMapOvr>
+</p:sld>
+</file>
+
+<file path=ppt/slides/slide42.xml><?xml version="1.0" encoding="utf-8"?>
+<p:sld xmlns:a="http://schemas.openxmlformats.org/drawingml/2006/main" xmlns:p="http://schemas.openxmlformats.org/presentationml/2006/main" xmlns:r="http://schemas.openxmlformats.org/officeDocument/2006/relationships">
+  <p:cSld>
+    <p:spTree>
+      <p:nvGrpSpPr>
+        <p:cNvPr id="1" name=""/>
+        <p:cNvGrpSpPr/>
+        <p:nvPr/>
+      </p:nvGrpSpPr>
+      <p:grpSpPr/>
+      <p:sp>
+        <p:nvSpPr>
+          <p:cNvPr id="2" name="Rectangle 1"/>
+          <p:cNvSpPr/>
+          <p:nvPr/>
+        </p:nvSpPr>
+        <p:spPr>
+          <a:xfrm>
+            <a:off x="0" y="0"/>
+            <a:ext cx="12191695" cy="6858000"/>
+          </a:xfrm>
+          <a:prstGeom prst="rect">
+            <a:avLst/>
+          </a:prstGeom>
+          <a:solidFill>
+            <a:srgbClr val="08090B"/>
+          </a:solidFill>
+          <a:ln>
+            <a:noFill/>
+          </a:ln>
+          <a:effectLst/>
+        </p:spPr>
+        <p:style>
+          <a:lnRef idx="1">
+            <a:schemeClr val="accent1"/>
+          </a:lnRef>
+          <a:fillRef idx="3">
+            <a:schemeClr val="accent1"/>
+          </a:fillRef>
+          <a:effectRef idx="2">
+            <a:schemeClr val="accent1"/>
+          </a:effectRef>
+          <a:fontRef idx="minor">
+            <a:schemeClr val="lt1"/>
+          </a:fontRef>
+        </p:style>
+        <p:txBody>
+          <a:bodyPr rtlCol="0" anchor="ctr"/>
+          <a:lstStyle/>
+          <a:p>
+            <a:pPr algn="ctr"/>
+          </a:p>
+        </p:txBody>
+      </p:sp>
+      <p:sp>
+        <p:nvSpPr>
+          <p:cNvPr id="3" name="TextBox 2"/>
+          <p:cNvSpPr txBox="1"/>
+          <p:nvPr/>
+        </p:nvSpPr>
+        <p:spPr>
+          <a:xfrm>
+            <a:off x="685800" y="411480"/>
+            <a:ext cx="10789920" cy="320040"/>
+          </a:xfrm>
+          <a:prstGeom prst="rect">
+            <a:avLst/>
+          </a:prstGeom>
+          <a:noFill/>
+        </p:spPr>
+        <p:txBody>
+          <a:bodyPr wrap="square" anchor="t" lIns="0" rIns="0" tIns="0" bIns="0">
+            <a:spAutoFit/>
+          </a:bodyPr>
+          <a:lstStyle/>
+          <a:p>
+            <a:pPr algn="l">
+              <a:lnSpc>
+                <a:spcPct val="115000"/>
+              </a:lnSpc>
+            </a:pPr>
+            <a:r>
+              <a:rPr sz="1250" b="1" i="0">
+                <a:solidFill>
+                  <a:srgbClr val="C9A45C"/>
+                </a:solidFill>
+                <a:latin typeface="JetBrains Mono"/>
+              </a:rPr>
+              <a:t>09 · RECORRIDO — INVITADO</a:t>
+            </a:r>
+          </a:p>
+        </p:txBody>
+      </p:sp>
+      <p:sp>
+        <p:nvSpPr>
+          <p:cNvPr id="4" name="TextBox 3"/>
+          <p:cNvSpPr txBox="1"/>
+          <p:nvPr/>
+        </p:nvSpPr>
+        <p:spPr>
+          <a:xfrm>
+            <a:off x="685800" y="704088"/>
+            <a:ext cx="10789920" cy="548640"/>
+          </a:xfrm>
+          <a:prstGeom prst="rect">
+            <a:avLst/>
+          </a:prstGeom>
+          <a:noFill/>
+        </p:spPr>
+        <p:txBody>
+          <a:bodyPr wrap="square" anchor="t" lIns="0" rIns="0" tIns="0" bIns="0">
+            <a:spAutoFit/>
+          </a:bodyPr>
+          <a:lstStyle/>
+          <a:p>
+            <a:pPr algn="l">
+              <a:lnSpc>
+                <a:spcPct val="115000"/>
+              </a:lnSpc>
+            </a:pPr>
+            <a:r>
+              <a:rPr sz="2400" b="1" i="0">
+                <a:solidFill>
+                  <a:srgbClr val="E7E9ED"/>
+                </a:solidFill>
+                <a:latin typeface="Space Grotesk"/>
+              </a:rPr>
+              <a:t>RBAC en acción: el invitado no puede forzar la cascada</a:t>
+            </a:r>
+          </a:p>
+        </p:txBody>
+      </p:sp>
+      <p:sp>
+        <p:nvSpPr>
+          <p:cNvPr id="5" name="Rectangle 4"/>
+          <p:cNvSpPr/>
+          <p:nvPr/>
+        </p:nvSpPr>
+        <p:spPr>
+          <a:xfrm>
+            <a:off x="685800" y="1197864"/>
+            <a:ext cx="457200" cy="38100"/>
+          </a:xfrm>
+          <a:prstGeom prst="rect">
+            <a:avLst/>
+          </a:prstGeom>
+          <a:solidFill>
+            <a:srgbClr val="C9A45C"/>
+          </a:solidFill>
+          <a:ln>
+            <a:noFill/>
+          </a:ln>
+          <a:effectLst/>
+        </p:spPr>
+        <p:style>
+          <a:lnRef idx="1">
+            <a:schemeClr val="accent1"/>
+          </a:lnRef>
+          <a:fillRef idx="3">
+            <a:schemeClr val="accent1"/>
+          </a:fillRef>
+          <a:effectRef idx="2">
+            <a:schemeClr val="accent1"/>
+          </a:effectRef>
+          <a:fontRef idx="minor">
+            <a:schemeClr val="lt1"/>
+          </a:fontRef>
+        </p:style>
+        <p:txBody>
+          <a:bodyPr rtlCol="0" anchor="ctr"/>
+          <a:lstStyle/>
+          <a:p>
+            <a:pPr algn="ctr"/>
+          </a:p>
+        </p:txBody>
+      </p:sp>
+      <p:sp>
+        <p:nvSpPr>
+          <p:cNvPr id="6" name="Rounded Rectangle 5"/>
+          <p:cNvSpPr/>
+          <p:nvPr/>
+        </p:nvSpPr>
+        <p:spPr>
+          <a:xfrm>
+            <a:off x="609600" y="1267968"/>
+            <a:ext cx="6644640" cy="4210050"/>
+          </a:xfrm>
+          <a:prstGeom prst="roundRect">
+            <a:avLst>
+              <a:gd name="adj" fmla="val 3000"/>
+            </a:avLst>
+          </a:prstGeom>
+          <a:solidFill>
+            <a:srgbClr val="15191F"/>
+          </a:solidFill>
+          <a:ln w="15875">
+            <a:solidFill>
+              <a:srgbClr val="C9A45C"/>
+            </a:solidFill>
+          </a:ln>
+          <a:effectLst/>
+        </p:spPr>
+        <p:style>
+          <a:lnRef idx="1">
+            <a:schemeClr val="accent1"/>
+          </a:lnRef>
+          <a:fillRef idx="3">
+            <a:schemeClr val="accent1"/>
+          </a:fillRef>
+          <a:effectRef idx="2">
+            <a:schemeClr val="accent1"/>
+          </a:effectRef>
+          <a:fontRef idx="minor">
+            <a:schemeClr val="lt1"/>
+          </a:fontRef>
+        </p:style>
+        <p:txBody>
+          <a:bodyPr rtlCol="0" anchor="ctr"/>
+          <a:lstStyle/>
+          <a:p>
+            <a:pPr algn="ctr"/>
+          </a:p>
+        </p:txBody>
+      </p:sp>
+      <p:pic>
+        <p:nvPicPr>
+          <p:cNvPr id="7" name="Picture 6" descr="19-actualizacion-diaria-resultado.png"/>
+          <p:cNvPicPr>
+            <a:picLocks noChangeAspect="1"/>
+          </p:cNvPicPr>
+          <p:nvPr/>
+        </p:nvPicPr>
+        <p:blipFill>
+          <a:blip r:embed="rId2"/>
+          <a:stretch>
+            <a:fillRect/>
+          </a:stretch>
+        </p:blipFill>
+        <p:spPr>
+          <a:xfrm>
+            <a:off x="685800" y="1344168"/>
+            <a:ext cx="6492240" cy="4057650"/>
+          </a:xfrm>
+          <a:prstGeom prst="rect">
+            <a:avLst/>
+          </a:prstGeom>
+        </p:spPr>
+      </p:pic>
+      <p:sp>
+        <p:nvSpPr>
+          <p:cNvPr id="8" name="TextBox 7"/>
+          <p:cNvSpPr txBox="1"/>
+          <p:nvPr/>
+        </p:nvSpPr>
+        <p:spPr>
+          <a:xfrm>
+            <a:off x="7543800" y="1344168"/>
+            <a:ext cx="3962095" cy="4206240"/>
+          </a:xfrm>
+          <a:prstGeom prst="rect">
+            <a:avLst/>
+          </a:prstGeom>
+          <a:noFill/>
+        </p:spPr>
+        <p:txBody>
+          <a:bodyPr wrap="square" lIns="0" rIns="0" tIns="0" bIns="0">
+            <a:spAutoFit/>
+          </a:bodyPr>
+          <a:lstStyle/>
+          <a:p>
+            <a:pPr>
+              <a:lnSpc>
+                <a:spcPct val="130000"/>
+              </a:lnSpc>
+              <a:spcAft>
+                <a:spcPts val="400"/>
+              </a:spcAft>
+            </a:pPr>
+            <a:r>
+              <a:rPr sz="1350" b="1">
+                <a:solidFill>
+                  <a:srgbClr val="C9A45C"/>
+                </a:solidFill>
+                <a:latin typeface="Space Grotesk"/>
+              </a:rPr>
+              <a:t>▪  </a:t>
+            </a:r>
+            <a:r>
+              <a:rPr sz="1350" b="1">
+                <a:solidFill>
+                  <a:srgbClr val="E7E9ED"/>
+                </a:solidFill>
+                <a:latin typeface="Space Grotesk"/>
+              </a:rPr>
+              <a:t>El botón “Run daily update” es visible</a:t>
+            </a:r>
+            <a:r>
+              <a:rPr sz="1350">
+                <a:solidFill>
+                  <a:srgbClr val="99A0AB"/>
+                </a:solidFill>
+                <a:latin typeface="Space Grotesk"/>
+              </a:rPr>
+              <a:t> para cualquier usuario autenticado…</a:t>
+            </a:r>
+          </a:p>
+          <a:p>
+            <a:pPr>
+              <a:lnSpc>
+                <a:spcPct val="130000"/>
+              </a:lnSpc>
+              <a:spcAft>
+                <a:spcPts val="400"/>
+              </a:spcAft>
+            </a:pPr>
+            <a:r>
+              <a:rPr sz="1350" b="1">
+                <a:solidFill>
+                  <a:srgbClr val="C9A45C"/>
+                </a:solidFill>
+                <a:latin typeface="Space Grotesk"/>
+              </a:rPr>
+              <a:t>▪  </a:t>
+            </a:r>
+            <a:r>
+              <a:rPr sz="1350" b="1">
+                <a:solidFill>
+                  <a:srgbClr val="E7E9ED"/>
+                </a:solidFill>
+                <a:latin typeface="Space Grotesk"/>
+              </a:rPr>
+              <a:t>…pero el backend responde 403:</a:t>
+            </a:r>
+            <a:r>
+              <a:rPr sz="1350">
+                <a:solidFill>
+                  <a:srgbClr val="99A0AB"/>
+                </a:solidFill>
+                <a:latin typeface="Space Grotesk"/>
+              </a:rPr>
+              <a:t> “No tienes permisos para esta operación”.</a:t>
+            </a:r>
+          </a:p>
+          <a:p>
+            <a:pPr>
+              <a:lnSpc>
+                <a:spcPct val="130000"/>
+              </a:lnSpc>
+              <a:spcAft>
+                <a:spcPts val="400"/>
+              </a:spcAft>
+            </a:pPr>
+            <a:r>
+              <a:rPr sz="1350" b="1">
+                <a:solidFill>
+                  <a:srgbClr val="C9A45C"/>
+                </a:solidFill>
+                <a:latin typeface="Space Grotesk"/>
+              </a:rPr>
+              <a:t>▪  </a:t>
+            </a:r>
+            <a:r>
+              <a:rPr sz="1350">
+                <a:solidFill>
+                  <a:srgbClr val="99A0AB"/>
+                </a:solidFill>
+                <a:latin typeface="Space Grotesk"/>
+              </a:rPr>
+              <a:t>Prueba en vivo del patrón de defensa en profundidad del bloque 07: la interfaz no oculta el botón, el backend igual rechaza la operación</a:t>
+            </a:r>
+          </a:p>
+        </p:txBody>
+      </p:sp>
+      <p:sp>
+        <p:nvSpPr>
+          <p:cNvPr id="9" name="TextBox 8"/>
+          <p:cNvSpPr txBox="1"/>
+          <p:nvPr/>
+        </p:nvSpPr>
+        <p:spPr>
+          <a:xfrm>
+            <a:off x="685800" y="6473952"/>
+            <a:ext cx="5486400" cy="274320"/>
+          </a:xfrm>
+          <a:prstGeom prst="rect">
+            <a:avLst/>
+          </a:prstGeom>
+          <a:noFill/>
+        </p:spPr>
+        <p:txBody>
+          <a:bodyPr wrap="square" anchor="t" lIns="0" rIns="0" tIns="0" bIns="0">
+            <a:spAutoFit/>
+          </a:bodyPr>
+          <a:lstStyle/>
+          <a:p>
+            <a:pPr algn="l">
+              <a:lnSpc>
+                <a:spcPct val="115000"/>
+              </a:lnSpc>
+            </a:pPr>
+            <a:r>
+              <a:rPr sz="850" b="0" i="0">
+                <a:solidFill>
+                  <a:srgbClr val="5C6472"/>
+                </a:solidFill>
+                <a:latin typeface="JetBrains Mono"/>
+              </a:rPr>
+              <a:t>TFM BIGSCHOOL · GESTIÓN DE CARTERA FINANCIERA CON IA</a:t>
+            </a:r>
+          </a:p>
+        </p:txBody>
+      </p:sp>
+      <p:sp>
+        <p:nvSpPr>
+          <p:cNvPr id="10" name="TextBox 9"/>
+          <p:cNvSpPr txBox="1"/>
+          <p:nvPr/>
+        </p:nvSpPr>
+        <p:spPr>
+          <a:xfrm>
+            <a:off x="5943600" y="6473952"/>
+            <a:ext cx="4389120" cy="274320"/>
+          </a:xfrm>
+          <a:prstGeom prst="rect">
+            <a:avLst/>
+          </a:prstGeom>
+          <a:noFill/>
+        </p:spPr>
+        <p:txBody>
+          <a:bodyPr wrap="square" anchor="t" lIns="0" rIns="0" tIns="0" bIns="0">
+            <a:spAutoFit/>
+          </a:bodyPr>
+          <a:lstStyle/>
+          <a:p>
+            <a:pPr algn="r">
+              <a:lnSpc>
+                <a:spcPct val="115000"/>
+              </a:lnSpc>
+            </a:pPr>
+            <a:r>
+              <a:rPr sz="850" b="0" i="0">
+                <a:solidFill>
+                  <a:srgbClr val="5C6472"/>
+                </a:solidFill>
+                <a:latin typeface="JetBrains Mono"/>
+              </a:rPr>
+              <a:t>09 · RECORRIDO — INVITADO</a:t>
+            </a:r>
+          </a:p>
+        </p:txBody>
+      </p:sp>
+      <p:sp>
+        <p:nvSpPr>
+          <p:cNvPr id="11" name="TextBox 10"/>
+          <p:cNvSpPr txBox="1"/>
+          <p:nvPr/>
+        </p:nvSpPr>
+        <p:spPr>
+          <a:xfrm>
+            <a:off x="11475720" y="6473952"/>
+            <a:ext cx="548640" cy="274320"/>
+          </a:xfrm>
+          <a:prstGeom prst="rect">
+            <a:avLst/>
+          </a:prstGeom>
+          <a:noFill/>
+        </p:spPr>
+        <p:txBody>
+          <a:bodyPr wrap="square" anchor="t" lIns="0" rIns="0" tIns="0" bIns="0">
+            <a:spAutoFit/>
+          </a:bodyPr>
+          <a:lstStyle/>
+          <a:p>
+            <a:pPr algn="r">
+              <a:lnSpc>
+                <a:spcPct val="115000"/>
+              </a:lnSpc>
+            </a:pPr>
+            <a:r>
+              <a:rPr sz="850" b="0" i="0">
+                <a:solidFill>
+                  <a:srgbClr val="C9A45C"/>
+                </a:solidFill>
+                <a:latin typeface="JetBrains Mono"/>
+              </a:rPr>
+              <a:t>41</a:t>
+            </a:r>
+          </a:p>
+        </p:txBody>
+      </p:sp>
+      <p:sp>
+        <p:nvSpPr>
+          <p:cNvPr id="12" name="Rectangle 11"/>
+          <p:cNvSpPr/>
+          <p:nvPr/>
+        </p:nvSpPr>
+        <p:spPr>
+          <a:xfrm>
+            <a:off x="685800" y="6400800"/>
+            <a:ext cx="10817352" cy="9525"/>
+          </a:xfrm>
+          <a:prstGeom prst="rect">
+            <a:avLst/>
+          </a:prstGeom>
+          <a:solidFill>
+            <a:srgbClr val="1D222B"/>
+          </a:solidFill>
+          <a:ln>
+            <a:noFill/>
+          </a:ln>
+          <a:effectLst/>
+        </p:spPr>
+        <p:style>
+          <a:lnRef idx="1">
+            <a:schemeClr val="accent1"/>
+          </a:lnRef>
+          <a:fillRef idx="3">
+            <a:schemeClr val="accent1"/>
+          </a:fillRef>
+          <a:effectRef idx="2">
+            <a:schemeClr val="accent1"/>
+          </a:effectRef>
+          <a:fontRef idx="minor">
+            <a:schemeClr val="lt1"/>
+          </a:fontRef>
+        </p:style>
+        <p:txBody>
+          <a:bodyPr rtlCol="0" anchor="ctr"/>
+          <a:lstStyle/>
+          <a:p>
+            <a:pPr algn="ctr"/>
+          </a:p>
+        </p:txBody>
+      </p:sp>
+    </p:spTree>
+  </p:cSld>
+  <p:clrMapOvr>
+    <a:masterClrMapping/>
+  </p:clrMapOvr>
+</p:sld>
+</file>
+
+<file path=ppt/slides/slide43.xml><?xml version="1.0" encoding="utf-8"?>
+<p:sld xmlns:a="http://schemas.openxmlformats.org/drawingml/2006/main" xmlns:p="http://schemas.openxmlformats.org/presentationml/2006/main" xmlns:r="http://schemas.openxmlformats.org/officeDocument/2006/relationships">
+  <p:cSld>
+    <p:spTree>
+      <p:nvGrpSpPr>
+        <p:cNvPr id="1" name=""/>
+        <p:cNvGrpSpPr/>
+        <p:nvPr/>
+      </p:nvGrpSpPr>
+      <p:grpSpPr/>
+      <p:sp>
+        <p:nvSpPr>
+          <p:cNvPr id="2" name="Rectangle 1"/>
+          <p:cNvSpPr/>
+          <p:nvPr/>
+        </p:nvSpPr>
+        <p:spPr>
+          <a:xfrm>
+            <a:off x="0" y="0"/>
+            <a:ext cx="12191695" cy="6858000"/>
+          </a:xfrm>
+          <a:prstGeom prst="rect">
+            <a:avLst/>
+          </a:prstGeom>
+          <a:solidFill>
+            <a:srgbClr val="08090B"/>
+          </a:solidFill>
+          <a:ln>
+            <a:noFill/>
+          </a:ln>
+          <a:effectLst/>
+        </p:spPr>
+        <p:style>
+          <a:lnRef idx="1">
+            <a:schemeClr val="accent1"/>
+          </a:lnRef>
+          <a:fillRef idx="3">
+            <a:schemeClr val="accent1"/>
+          </a:fillRef>
+          <a:effectRef idx="2">
+            <a:schemeClr val="accent1"/>
+          </a:effectRef>
+          <a:fontRef idx="minor">
+            <a:schemeClr val="lt1"/>
+          </a:fontRef>
+        </p:style>
+        <p:txBody>
+          <a:bodyPr rtlCol="0" anchor="ctr"/>
+          <a:lstStyle/>
+          <a:p>
+            <a:pPr algn="ctr"/>
+          </a:p>
+        </p:txBody>
+      </p:sp>
+      <p:sp>
+        <p:nvSpPr>
+          <p:cNvPr id="3" name="TextBox 2"/>
+          <p:cNvSpPr txBox="1"/>
+          <p:nvPr/>
+        </p:nvSpPr>
+        <p:spPr>
+          <a:xfrm>
+            <a:off x="685800" y="411480"/>
+            <a:ext cx="10789920" cy="320040"/>
+          </a:xfrm>
+          <a:prstGeom prst="rect">
+            <a:avLst/>
+          </a:prstGeom>
+          <a:noFill/>
+        </p:spPr>
+        <p:txBody>
+          <a:bodyPr wrap="square" anchor="t" lIns="0" rIns="0" tIns="0" bIns="0">
+            <a:spAutoFit/>
+          </a:bodyPr>
+          <a:lstStyle/>
+          <a:p>
+            <a:pPr algn="l">
+              <a:lnSpc>
+                <a:spcPct val="115000"/>
+              </a:lnSpc>
+            </a:pPr>
+            <a:r>
+              <a:rPr sz="1250" b="1" i="0">
+                <a:solidFill>
+                  <a:srgbClr val="C9A45C"/>
+                </a:solidFill>
+                <a:latin typeface="JetBrains Mono"/>
+              </a:rPr>
+              <a:t>09 · RECORRIDO — INVITADO</a:t>
+            </a:r>
+          </a:p>
+        </p:txBody>
+      </p:sp>
+      <p:sp>
+        <p:nvSpPr>
+          <p:cNvPr id="4" name="TextBox 3"/>
+          <p:cNvSpPr txBox="1"/>
+          <p:nvPr/>
+        </p:nvSpPr>
+        <p:spPr>
+          <a:xfrm>
+            <a:off x="685800" y="704088"/>
+            <a:ext cx="10789920" cy="548640"/>
+          </a:xfrm>
+          <a:prstGeom prst="rect">
+            <a:avLst/>
+          </a:prstGeom>
+          <a:noFill/>
+        </p:spPr>
+        <p:txBody>
+          <a:bodyPr wrap="square" anchor="t" lIns="0" rIns="0" tIns="0" bIns="0">
+            <a:spAutoFit/>
+          </a:bodyPr>
+          <a:lstStyle/>
+          <a:p>
+            <a:pPr algn="l">
+              <a:lnSpc>
+                <a:spcPct val="115000"/>
+              </a:lnSpc>
+            </a:pPr>
+            <a:r>
+              <a:rPr sz="2400" b="1" i="0">
+                <a:solidFill>
+                  <a:srgbClr val="E7E9ED"/>
+                </a:solidFill>
+                <a:latin typeface="Space Grotesk"/>
+              </a:rPr>
+              <a:t>Panel de alertas y cierre de sesión</a:t>
+            </a:r>
+          </a:p>
+        </p:txBody>
+      </p:sp>
+      <p:sp>
+        <p:nvSpPr>
+          <p:cNvPr id="5" name="Rectangle 4"/>
+          <p:cNvSpPr/>
+          <p:nvPr/>
+        </p:nvSpPr>
+        <p:spPr>
+          <a:xfrm>
+            <a:off x="685800" y="1197864"/>
+            <a:ext cx="457200" cy="38100"/>
+          </a:xfrm>
+          <a:prstGeom prst="rect">
+            <a:avLst/>
+          </a:prstGeom>
+          <a:solidFill>
+            <a:srgbClr val="C9A45C"/>
+          </a:solidFill>
+          <a:ln>
+            <a:noFill/>
+          </a:ln>
+          <a:effectLst/>
+        </p:spPr>
+        <p:style>
+          <a:lnRef idx="1">
+            <a:schemeClr val="accent1"/>
+          </a:lnRef>
+          <a:fillRef idx="3">
+            <a:schemeClr val="accent1"/>
+          </a:fillRef>
+          <a:effectRef idx="2">
+            <a:schemeClr val="accent1"/>
+          </a:effectRef>
+          <a:fontRef idx="minor">
+            <a:schemeClr val="lt1"/>
+          </a:fontRef>
+        </p:style>
+        <p:txBody>
+          <a:bodyPr rtlCol="0" anchor="ctr"/>
+          <a:lstStyle/>
+          <a:p>
+            <a:pPr algn="ctr"/>
+          </a:p>
+        </p:txBody>
+      </p:sp>
+      <p:sp>
+        <p:nvSpPr>
+          <p:cNvPr id="6" name="Rounded Rectangle 5"/>
+          <p:cNvSpPr/>
+          <p:nvPr/>
+        </p:nvSpPr>
+        <p:spPr>
+          <a:xfrm>
+            <a:off x="696468" y="1267968"/>
+            <a:ext cx="5053584" cy="3215640"/>
+          </a:xfrm>
+          <a:prstGeom prst="roundRect">
+            <a:avLst>
+              <a:gd name="adj" fmla="val 3000"/>
+            </a:avLst>
+          </a:prstGeom>
+          <a:solidFill>
+            <a:srgbClr val="15191F"/>
+          </a:solidFill>
+          <a:ln w="15875">
+            <a:solidFill>
+              <a:srgbClr val="C9A45C"/>
+            </a:solidFill>
+          </a:ln>
+          <a:effectLst/>
+        </p:spPr>
+        <p:style>
+          <a:lnRef idx="1">
+            <a:schemeClr val="accent1"/>
+          </a:lnRef>
+          <a:fillRef idx="3">
+            <a:schemeClr val="accent1"/>
+          </a:fillRef>
+          <a:effectRef idx="2">
+            <a:schemeClr val="accent1"/>
+          </a:effectRef>
+          <a:fontRef idx="minor">
+            <a:schemeClr val="lt1"/>
+          </a:fontRef>
+        </p:style>
+        <p:txBody>
+          <a:bodyPr rtlCol="0" anchor="ctr"/>
+          <a:lstStyle/>
+          <a:p>
+            <a:pPr algn="ctr"/>
+          </a:p>
+        </p:txBody>
+      </p:sp>
+      <p:pic>
+        <p:nvPicPr>
+          <p:cNvPr id="7" name="Picture 6" descr="14-panel-alertas.png"/>
+          <p:cNvPicPr>
+            <a:picLocks noChangeAspect="1"/>
+          </p:cNvPicPr>
+          <p:nvPr/>
+        </p:nvPicPr>
+        <p:blipFill>
+          <a:blip r:embed="rId2"/>
+          <a:stretch>
+            <a:fillRect/>
+          </a:stretch>
+        </p:blipFill>
+        <p:spPr>
+          <a:xfrm>
+            <a:off x="772668" y="1344168"/>
+            <a:ext cx="4901184" cy="3063240"/>
+          </a:xfrm>
+          <a:prstGeom prst="rect">
+            <a:avLst/>
+          </a:prstGeom>
+        </p:spPr>
+      </p:pic>
+      <p:sp>
+        <p:nvSpPr>
+          <p:cNvPr id="8" name="TextBox 7"/>
+          <p:cNvSpPr txBox="1"/>
+          <p:nvPr/>
+        </p:nvSpPr>
+        <p:spPr>
+          <a:xfrm>
+            <a:off x="696468" y="4538472"/>
+            <a:ext cx="5053584" cy="274320"/>
+          </a:xfrm>
+          <a:prstGeom prst="rect">
+            <a:avLst/>
+          </a:prstGeom>
+          <a:noFill/>
+        </p:spPr>
+        <p:txBody>
+          <a:bodyPr wrap="square" anchor="t" lIns="0" rIns="0" tIns="0" bIns="0">
+            <a:spAutoFit/>
+          </a:bodyPr>
+          <a:lstStyle/>
+          <a:p>
+            <a:pPr algn="ctr">
+              <a:lnSpc>
+                <a:spcPct val="115000"/>
+              </a:lnSpc>
+            </a:pPr>
+            <a:r>
+              <a:rPr sz="1050" b="0" i="0">
+                <a:solidFill>
+                  <a:srgbClr val="5C6472"/>
+                </a:solidFill>
+                <a:latin typeface="JetBrains Mono"/>
+              </a:rPr>
+              <a:t>Panel de alertas — sin cruces activos todavía</a:t>
+            </a:r>
+          </a:p>
+        </p:txBody>
+      </p:sp>
+      <p:sp>
+        <p:nvSpPr>
+          <p:cNvPr id="9" name="Rounded Rectangle 8"/>
+          <p:cNvSpPr/>
+          <p:nvPr/>
+        </p:nvSpPr>
+        <p:spPr>
+          <a:xfrm>
+            <a:off x="6091428" y="1267968"/>
+            <a:ext cx="5053584" cy="3215640"/>
+          </a:xfrm>
+          <a:prstGeom prst="roundRect">
+            <a:avLst>
+              <a:gd name="adj" fmla="val 3000"/>
+            </a:avLst>
+          </a:prstGeom>
+          <a:solidFill>
+            <a:srgbClr val="15191F"/>
+          </a:solidFill>
+          <a:ln w="15875">
+            <a:solidFill>
+              <a:srgbClr val="C9A45C"/>
+            </a:solidFill>
+          </a:ln>
+          <a:effectLst/>
+        </p:spPr>
+        <p:style>
+          <a:lnRef idx="1">
+            <a:schemeClr val="accent1"/>
+          </a:lnRef>
+          <a:fillRef idx="3">
+            <a:schemeClr val="accent1"/>
+          </a:fillRef>
+          <a:effectRef idx="2">
+            <a:schemeClr val="accent1"/>
+          </a:effectRef>
+          <a:fontRef idx="minor">
+            <a:schemeClr val="lt1"/>
+          </a:fontRef>
+        </p:style>
+        <p:txBody>
+          <a:bodyPr rtlCol="0" anchor="ctr"/>
+          <a:lstStyle/>
+          <a:p>
+            <a:pPr algn="ctr"/>
+          </a:p>
+        </p:txBody>
+      </p:sp>
+      <p:pic>
+        <p:nvPicPr>
+          <p:cNvPr id="10" name="Picture 9" descr="16-logout-vuelta-a-login.png"/>
+          <p:cNvPicPr>
+            <a:picLocks noChangeAspect="1"/>
+          </p:cNvPicPr>
+          <p:nvPr/>
+        </p:nvPicPr>
+        <p:blipFill>
+          <a:blip r:embed="rId3"/>
+          <a:stretch>
+            <a:fillRect/>
+          </a:stretch>
+        </p:blipFill>
+        <p:spPr>
+          <a:xfrm>
+            <a:off x="6167628" y="1344168"/>
+            <a:ext cx="4901184" cy="3063240"/>
+          </a:xfrm>
+          <a:prstGeom prst="rect">
+            <a:avLst/>
+          </a:prstGeom>
+        </p:spPr>
+      </p:pic>
+      <p:sp>
+        <p:nvSpPr>
+          <p:cNvPr id="11" name="TextBox 10"/>
+          <p:cNvSpPr txBox="1"/>
+          <p:nvPr/>
+        </p:nvSpPr>
+        <p:spPr>
+          <a:xfrm>
+            <a:off x="6091428" y="4538472"/>
+            <a:ext cx="5053584" cy="274320"/>
+          </a:xfrm>
+          <a:prstGeom prst="rect">
+            <a:avLst/>
+          </a:prstGeom>
+          <a:noFill/>
+        </p:spPr>
+        <p:txBody>
+          <a:bodyPr wrap="square" anchor="t" lIns="0" rIns="0" tIns="0" bIns="0">
+            <a:spAutoFit/>
+          </a:bodyPr>
+          <a:lstStyle/>
+          <a:p>
+            <a:pPr algn="ctr">
+              <a:lnSpc>
+                <a:spcPct val="115000"/>
+              </a:lnSpc>
+            </a:pPr>
+            <a:r>
+              <a:rPr sz="1050" b="0" i="0">
+                <a:solidFill>
+                  <a:srgbClr val="5C6472"/>
+                </a:solidFill>
+                <a:latin typeface="JetBrains Mono"/>
+              </a:rPr>
+              <a:t>Logout — vuelta limpia a la pantalla de acceso</a:t>
+            </a:r>
+          </a:p>
+        </p:txBody>
+      </p:sp>
+      <p:sp>
+        <p:nvSpPr>
+          <p:cNvPr id="12" name="TextBox 11"/>
+          <p:cNvSpPr txBox="1"/>
+          <p:nvPr/>
+        </p:nvSpPr>
+        <p:spPr>
+          <a:xfrm>
+            <a:off x="685800" y="5001768"/>
+            <a:ext cx="10607040" cy="1188720"/>
+          </a:xfrm>
+          <a:prstGeom prst="rect">
+            <a:avLst/>
+          </a:prstGeom>
+          <a:noFill/>
+        </p:spPr>
+        <p:txBody>
+          <a:bodyPr wrap="square" lIns="0" rIns="0" tIns="0" bIns="0">
+            <a:spAutoFit/>
+          </a:bodyPr>
+          <a:lstStyle/>
+          <a:p>
+            <a:pPr>
+              <a:lnSpc>
+                <a:spcPct val="125000"/>
+              </a:lnSpc>
+              <a:spcAft>
+                <a:spcPts val="400"/>
+              </a:spcAft>
+            </a:pPr>
+            <a:r>
+              <a:rPr sz="1300" b="1">
+                <a:solidFill>
+                  <a:srgbClr val="C9A45C"/>
+                </a:solidFill>
+                <a:latin typeface="Space Grotesk"/>
+              </a:rPr>
+              <a:t>▪  </a:t>
+            </a:r>
+            <a:r>
+              <a:rPr sz="1300" b="1">
+                <a:solidFill>
+                  <a:srgbClr val="E7E9ED"/>
+                </a:solidFill>
+                <a:latin typeface="Space Grotesk"/>
+              </a:rPr>
+              <a:t>El panel consolida todas las alertas activadas</a:t>
+            </a:r>
+            <a:r>
+              <a:rPr sz="1300">
+                <a:solidFill>
+                  <a:srgbClr val="99A0AB"/>
+                </a:solidFill>
+                <a:latin typeface="Space Grotesk"/>
+              </a:rPr>
+              <a:t> de la cartera completa, no solo de un activo.</a:t>
+            </a:r>
+          </a:p>
+          <a:p>
+            <a:pPr>
+              <a:lnSpc>
+                <a:spcPct val="125000"/>
+              </a:lnSpc>
+              <a:spcAft>
+                <a:spcPts val="400"/>
+              </a:spcAft>
+            </a:pPr>
+            <a:r>
+              <a:rPr sz="1300" b="1">
+                <a:solidFill>
+                  <a:srgbClr val="C9A45C"/>
+                </a:solidFill>
+                <a:latin typeface="Space Grotesk"/>
+              </a:rPr>
+              <a:t>▪  </a:t>
+            </a:r>
+            <a:r>
+              <a:rPr sz="1300" b="1">
+                <a:solidFill>
+                  <a:srgbClr val="E7E9ED"/>
+                </a:solidFill>
+                <a:latin typeface="Space Grotesk"/>
+              </a:rPr>
+              <a:t>Cerrar sesión limpia el estado en memoria</a:t>
+            </a:r>
+            <a:r>
+              <a:rPr sz="1300">
+                <a:solidFill>
+                  <a:srgbClr val="99A0AB"/>
+                </a:solidFill>
+                <a:latin typeface="Space Grotesk"/>
+              </a:rPr>
+              <a:t> y redirige a /login.</a:t>
+            </a:r>
+          </a:p>
+          <a:p>
+            <a:pPr>
+              <a:lnSpc>
+                <a:spcPct val="125000"/>
+              </a:lnSpc>
+              <a:spcAft>
+                <a:spcPts val="400"/>
+              </a:spcAft>
+            </a:pPr>
+            <a:r>
+              <a:rPr sz="1300" b="1">
+                <a:solidFill>
+                  <a:srgbClr val="C9A45C"/>
+                </a:solidFill>
+                <a:latin typeface="Space Grotesk"/>
+              </a:rPr>
+              <a:t>▪  </a:t>
+            </a:r>
+            <a:r>
+              <a:rPr sz="1300">
+                <a:solidFill>
+                  <a:srgbClr val="99A0AB"/>
+                </a:solidFill>
+                <a:latin typeface="Space Grotesk"/>
+              </a:rPr>
+              <a:t>Fin del recorrido en modo invitado — continúa con el recorrido de administrador</a:t>
+            </a:r>
+          </a:p>
+        </p:txBody>
+      </p:sp>
+      <p:sp>
+        <p:nvSpPr>
+          <p:cNvPr id="13" name="TextBox 12"/>
+          <p:cNvSpPr txBox="1"/>
+          <p:nvPr/>
+        </p:nvSpPr>
+        <p:spPr>
+          <a:xfrm>
+            <a:off x="685800" y="6473952"/>
+            <a:ext cx="5486400" cy="274320"/>
+          </a:xfrm>
+          <a:prstGeom prst="rect">
+            <a:avLst/>
+          </a:prstGeom>
+          <a:noFill/>
+        </p:spPr>
+        <p:txBody>
+          <a:bodyPr wrap="square" anchor="t" lIns="0" rIns="0" tIns="0" bIns="0">
+            <a:spAutoFit/>
+          </a:bodyPr>
+          <a:lstStyle/>
+          <a:p>
+            <a:pPr algn="l">
+              <a:lnSpc>
+                <a:spcPct val="115000"/>
+              </a:lnSpc>
+            </a:pPr>
+            <a:r>
+              <a:rPr sz="850" b="0" i="0">
+                <a:solidFill>
+                  <a:srgbClr val="5C6472"/>
+                </a:solidFill>
+                <a:latin typeface="JetBrains Mono"/>
+              </a:rPr>
+              <a:t>TFM BIGSCHOOL · GESTIÓN DE CARTERA FINANCIERA CON IA</a:t>
+            </a:r>
+          </a:p>
+        </p:txBody>
+      </p:sp>
+      <p:sp>
+        <p:nvSpPr>
+          <p:cNvPr id="14" name="TextBox 13"/>
+          <p:cNvSpPr txBox="1"/>
+          <p:nvPr/>
+        </p:nvSpPr>
+        <p:spPr>
+          <a:xfrm>
+            <a:off x="5943600" y="6473952"/>
+            <a:ext cx="4389120" cy="274320"/>
+          </a:xfrm>
+          <a:prstGeom prst="rect">
+            <a:avLst/>
+          </a:prstGeom>
+          <a:noFill/>
+        </p:spPr>
+        <p:txBody>
+          <a:bodyPr wrap="square" anchor="t" lIns="0" rIns="0" tIns="0" bIns="0">
+            <a:spAutoFit/>
+          </a:bodyPr>
+          <a:lstStyle/>
+          <a:p>
+            <a:pPr algn="r">
+              <a:lnSpc>
+                <a:spcPct val="115000"/>
+              </a:lnSpc>
+            </a:pPr>
+            <a:r>
+              <a:rPr sz="850" b="0" i="0">
+                <a:solidFill>
+                  <a:srgbClr val="5C6472"/>
+                </a:solidFill>
+                <a:latin typeface="JetBrains Mono"/>
+              </a:rPr>
+              <a:t>09 · RECORRIDO — INVITADO</a:t>
+            </a:r>
+          </a:p>
+        </p:txBody>
+      </p:sp>
+      <p:sp>
+        <p:nvSpPr>
+          <p:cNvPr id="15" name="TextBox 14"/>
+          <p:cNvSpPr txBox="1"/>
+          <p:nvPr/>
+        </p:nvSpPr>
+        <p:spPr>
+          <a:xfrm>
+            <a:off x="11475720" y="6473952"/>
+            <a:ext cx="548640" cy="274320"/>
+          </a:xfrm>
+          <a:prstGeom prst="rect">
+            <a:avLst/>
+          </a:prstGeom>
+          <a:noFill/>
+        </p:spPr>
+        <p:txBody>
+          <a:bodyPr wrap="square" anchor="t" lIns="0" rIns="0" tIns="0" bIns="0">
+            <a:spAutoFit/>
+          </a:bodyPr>
+          <a:lstStyle/>
+          <a:p>
+            <a:pPr algn="r">
+              <a:lnSpc>
+                <a:spcPct val="115000"/>
+              </a:lnSpc>
+            </a:pPr>
+            <a:r>
+              <a:rPr sz="850" b="0" i="0">
+                <a:solidFill>
+                  <a:srgbClr val="C9A45C"/>
+                </a:solidFill>
+                <a:latin typeface="JetBrains Mono"/>
+              </a:rPr>
+              <a:t>42</a:t>
+            </a:r>
+          </a:p>
+        </p:txBody>
+      </p:sp>
+      <p:sp>
+        <p:nvSpPr>
+          <p:cNvPr id="16" name="Rectangle 15"/>
+          <p:cNvSpPr/>
+          <p:nvPr/>
+        </p:nvSpPr>
+        <p:spPr>
+          <a:xfrm>
+            <a:off x="685800" y="6400800"/>
+            <a:ext cx="10817352" cy="9525"/>
+          </a:xfrm>
+          <a:prstGeom prst="rect">
+            <a:avLst/>
+          </a:prstGeom>
+          <a:solidFill>
+            <a:srgbClr val="1D222B"/>
+          </a:solidFill>
+          <a:ln>
+            <a:noFill/>
+          </a:ln>
+          <a:effectLst/>
+        </p:spPr>
+        <p:style>
+          <a:lnRef idx="1">
+            <a:schemeClr val="accent1"/>
+          </a:lnRef>
+          <a:fillRef idx="3">
+            <a:schemeClr val="accent1"/>
+          </a:fillRef>
+          <a:effectRef idx="2">
+            <a:schemeClr val="accent1"/>
+          </a:effectRef>
+          <a:fontRef idx="minor">
+            <a:schemeClr val="lt1"/>
+          </a:fontRef>
+        </p:style>
+        <p:txBody>
+          <a:bodyPr rtlCol="0" anchor="ctr"/>
+          <a:lstStyle/>
+          <a:p>
+            <a:pPr algn="ctr"/>
           </a:p>
         </p:txBody>
       </p:sp>

--- a/presentacion/TFM_BigSchool_Presentacion.pptx
+++ b/presentacion/TFM_BigSchool_Presentacion.pptx
@@ -5,7 +5,7 @@
     <p:sldMasterId id="2147483648" r:id="rId1"/>
   </p:sldMasterIdLst>
   <p:notesMasterIdLst>
-    <p:notesMasterId r:id="rId33"/>
+    <p:notesMasterId r:id="rId45"/>
   </p:notesMasterIdLst>
   <p:sldIdLst>
     <p:sldId id="256" r:id="rId2"/>
@@ -36,21 +36,21 @@
     <p:sldId id="281" r:id="rId27"/>
     <p:sldId id="282" r:id="rId28"/>
     <p:sldId id="283" r:id="rId29"/>
-    <p:sldId id="287" r:id="rId38"/>
-    <p:sldId id="284" r:id="rId30"/>
-    <p:sldId id="285" r:id="rId31"/>
-    <p:sldId id="288" r:id="rId39"/>
-    <p:sldId id="289" r:id="rId40"/>
-    <p:sldId id="290" r:id="rId41"/>
-    <p:sldId id="291" r:id="rId42"/>
-    <p:sldId id="292" r:id="rId43"/>
-    <p:sldId id="293" r:id="rId44"/>
-    <p:sldId id="294" r:id="rId45"/>
-    <p:sldId id="295" r:id="rId46"/>
-    <p:sldId id="296" r:id="rId47"/>
-    <p:sldId id="297" r:id="rId48"/>
-    <p:sldId id="298" r:id="rId49"/>
-    <p:sldId id="286" r:id="rId32"/>
+    <p:sldId id="287" r:id="rId30"/>
+    <p:sldId id="284" r:id="rId31"/>
+    <p:sldId id="285" r:id="rId32"/>
+    <p:sldId id="288" r:id="rId33"/>
+    <p:sldId id="289" r:id="rId34"/>
+    <p:sldId id="290" r:id="rId35"/>
+    <p:sldId id="291" r:id="rId36"/>
+    <p:sldId id="292" r:id="rId37"/>
+    <p:sldId id="293" r:id="rId38"/>
+    <p:sldId id="294" r:id="rId39"/>
+    <p:sldId id="295" r:id="rId40"/>
+    <p:sldId id="296" r:id="rId41"/>
+    <p:sldId id="297" r:id="rId42"/>
+    <p:sldId id="298" r:id="rId43"/>
+    <p:sldId id="286" r:id="rId44"/>
   </p:sldIdLst>
   <p:sldSz cx="12192000" cy="6858000"/>
   <p:notesSz cx="6858000" cy="9144000"/>
@@ -408,7 +408,7 @@
           <a:lstStyle/>
           <a:p>
             <a:r>
-              <a:t>El incidente IDR es real (commit 961cafa): Finnhub devolvia error para un ticker indonesio sin el sufijo de mercado. En vez de parchear ese caso puntual, se diseño la cascada multi-proveedor (D12) como solucion estructural.</a:t>
+              <a:t>El incidente IDR es real (commit 961cafa): Finnhub devolvia error para un ticker indonesio sin el sufijo de mercado. En vez de parchear ese caso puntual, se diseño la cascada multi-proveedor como solucion estructural.</a:t>
             </a:r>
           </a:p>
         </p:txBody>
@@ -688,7 +688,7 @@
           <a:lstStyle/>
           <a:p>
             <a:r>
-              <a:t>Formulas clave (Spec D04): rendimiento del activo = (precio_actual - precio_compra)/precio_compra; rendimiento en moneda base incluye el tipo de cambio; el efecto FX es la diferencia entre ambos. Aislar el efecto FX es lo que separa una herramienta seria de una hoja de calculo.</a:t>
+              <a:t>Formulas clave: rendimiento del activo = (precio_actual - precio_compra)/precio_compra; rendimiento en moneda base incluye el tipo de cambio; el efecto FX es la diferencia entre ambos. Aislar el efecto FX es lo que separa una herramienta seria de una hoja de calculo.</a:t>
             </a:r>
           </a:p>
         </p:txBody>
@@ -758,7 +758,7 @@
           <a:lstStyle/>
           <a:p>
             <a:r>
-              <a:t>El catalogo data-driven (Spec D05) es el mismo patron que roles y permisos (D11): configuracion como fuente de verdad, no codigo. Los glifos triangulares resuelven accesibilidad para usuarios con daltonismo -- coincide con el tema visual Terminal Premium.</a:t>
+              <a:t>El catalogo data-driven es el mismo patron que roles y permisos: configuracion como fuente de verdad, no codigo. Los glifos triangulares resuelven accesibilidad para usuarios con daltonismo -- coincide con el tema visual Terminal Premium.</a:t>
             </a:r>
           </a:p>
         </p:txBody>
@@ -828,7 +828,7 @@
           <a:lstStyle/>
           <a:p>
             <a:r>
-              <a:t>Spec D06. Enfatizar el historial inmutable: si el usuario cambia de opinion sobre un precio objetivo, la version anterior no se pierde -- queda como registro auditable.</a:t>
+              <a:t>Enfatizar el historial inmutable: si el usuario cambia de opinion sobre un precio objetivo, la version anterior no se pierde -- queda como registro auditable.</a:t>
             </a:r>
           </a:p>
         </p:txBody>
@@ -968,7 +968,7 @@
           <a:lstStyle/>
           <a:p>
             <a:r>
-              <a:t>Spec D07. Mencionar que el frontend muestra estados honestos del trabajo (pendiente, en proceso, exito, fallo) en vez de un spinner indefinido -- construye confianza. El patron adaptador (AIProvider ABC) es el mismo principio que el hub de datos de mercado.</a:t>
+              <a:t>Mencionar que el frontend muestra estados honestos del trabajo (pendiente, en proceso, exito, fallo) en vez de un spinner indefinido -- construye confianza. El patron adaptador (AIProvider ABC) es el mismo principio que el hub de datos de mercado.</a:t>
             </a:r>
           </a:p>
         </p:txBody>
@@ -1248,7 +1248,7 @@
           <a:lstStyle/>
           <a:p>
             <a:r>
-              <a:t>Spec D11 SS6-7. Defensa en profundidad: la interfaz oculta botones que el usuario no puede usar, pero el backend rechaza (403) la operacion igual si se intenta por API directa. La garantia de 'siempre un admin' se verifica tambien en cada arranque del sistema, no solo al revocar.</a:t>
+              <a:t>Defensa en profundidad: la interfaz oculta botones que el usuario no puede usar, pero el backend rechaza (403) la operacion igual si se intenta por API directa. La garantia de 'siempre un admin' se verifica tambien en cada arranque del sistema, no solo al revocar.</a:t>
             </a:r>
           </a:p>
         </p:txBody>
@@ -1318,7 +1318,7 @@
           <a:lstStyle/>
           <a:p>
             <a:r>
-              <a:t>Este slide cierra el circulo con el bloque 3 (hub tecnico): el administrador controla en caliente el orden de la cascada sin tocar codigo ni redeploy. Las claves de API nunca son editables desde la interfaz -- se gestionan por variables de entorno (Spec 00b), decision deliberada para no montar infraestructura de secretos cifrados en v1.</a:t>
+              <a:t>Este slide cierra el circulo con el bloque 3 (hub tecnico): el administrador controla en caliente el orden de la cascada sin tocar codigo ni redeploy. Las claves de API nunca son editables desde la interfaz -- se gestionan por variables de entorno, decision deliberada para no montar infraestructura de secretos cifrados en v1.</a:t>
             </a:r>
           </a:p>
         </p:txBody>
@@ -1388,7 +1388,7 @@
           <a:lstStyle/>
           <a:p>
             <a:r>
-              <a:t>Bloque de cierre tecnico: seguridad transversal, decision de frontend sin framework, y la metodologia de especificaciones que sostiene todo el proyecto.</a:t>
+              <a:t>Bloque de cierre tecnico: seguridad transversal, decision de frontend sin framework, y la disciplina de documentar decisiones que sostiene todo el proyecto.</a:t>
             </a:r>
           </a:p>
         </p:txBody>
@@ -1528,7 +1528,7 @@
           <a:lstStyle/>
           <a:p>
             <a:r>
-              <a:t>Spec D10. Mencionar que los signals son el mismo primitivo de reactividad que React 19 (use), Vue (ref) o Svelte 5 ($state) adoptaron -- se apuesta por el estandar, no por una moda de framework concreta.</a:t>
+              <a:t>Mencionar que los signals son el mismo primitivo de reactividad que React 19 (use), Vue (ref) o Svelte 5 ($state) adoptaron -- se apuesta por el estandar, no por una moda de framework concreta.</a:t>
             </a:r>
           </a:p>
         </p:txBody>
@@ -1598,7 +1598,7 @@
           <a:lstStyle/>
           <a:p>
             <a:r>
-              <a:t>Punto fuerte para el tribunal academico: cada decision de arquitectura (por que Web Components, por que cascada sin memoria, por que RBAC uniforme) esta documentada y razonada por escrito en los specs, no solo en la cabeza del autor.</a:t>
+              <a:t>Punto fuerte para el tribunal academico: cada decision de arquitectura (por que Web Components, por que cascada sin memoria, por que RBAC uniforme) esta documentada y razonada por escrito, no solo en la cabeza del autor.</a:t>
             </a:r>
           </a:p>
         </p:txBody>
@@ -1738,7 +1738,7 @@
           <a:lstStyle/>
           <a:p>
             <a:r>
-              <a:t>12 especificaciones de dominio completas (D01-D12) mas 8 changesets de mejora incremental. Cada fila de esta tabla tiene commits, tests y documentacion verificables en el repositorio -- no es una lista de intenciones.</a:t>
+              <a:t>12 modulos funcionales completos, mas varias mejoras incrementales. Cada fila de esta tabla tiene commits, tests y documentacion verificables en el repositorio -- no es una lista de intenciones.</a:t>
             </a:r>
           </a:p>
         </p:txBody>
@@ -2018,32 +2018,7 @@
           <a:lstStyle/>
           <a:p>
             <a:r>
-              <a:t>Preguntas frecuentes previstas y respuesta corta:</a:t>
-            </a:r>
-          </a:p>
-          <a:p>
-            <a:r>
-              <a:t>- Por que Web Components y no React/Vue -- estandar W3C, cero lock-in, se explica en slide 25.</a:t>
-            </a:r>
-          </a:p>
-          <a:p>
-            <a:r>
-              <a:t>- Como decide la cascada cuando reintentar -- por rondas, solo sobre activos no resueltos, sin memoria entre ejecuciones (slide 11).</a:t>
-            </a:r>
-          </a:p>
-          <a:p>
-            <a:r>
-              <a:t>- Que pasa si fallan TODOS los proveedores -- CascadeFailureReport, notificacion al usuario, nunca se inventa un dato (slide 12).</a:t>
-            </a:r>
-          </a:p>
-          <a:p>
-            <a:r>
-              <a:t>- Como se protege que un Inversor vea datos de otro usuario -- aislamiento por ownership verificado en cada consulta, mas RBAC en el endpoint (slide 20 y 24).</a:t>
-            </a:r>
-          </a:p>
-          <a:p>
-            <a:r>
-              <a:t>- Por que el catalogo de indicadores y el catalogo de roles son YAML y no tablas de admin editables -- decision v1 de simplicidad, documentada como extension natural futura.</a:t>
+              <a:t>Captura tomada en vivo contra https://portfolio-ia-frontend...azurecontainerapps.io. El campo Email se reutiliza como nombre visible del invitado.</a:t>
             </a:r>
           </a:p>
         </p:txBody>
@@ -2069,7 +2044,7 @@
 </file>
 
 <file path=ppt/notesSlides/notesSlide32.xml><?xml version="1.0" encoding="utf-8"?>
-<p:notes xmlns:a="http://schemas.openxmlformats.org/drawingml/2006/main" xmlns:p="http://schemas.openxmlformats.org/presentationml/2006/main" xmlns:r="http://schemas.openxmlformats.org/officeDocument/2006/relationships">
+<p:notes xmlns:a="http://schemas.openxmlformats.org/drawingml/2006/main" xmlns:r="http://schemas.openxmlformats.org/officeDocument/2006/relationships" xmlns:p="http://schemas.openxmlformats.org/presentationml/2006/main">
   <p:cSld>
     <p:spTree>
       <p:nvGrpSpPr>
@@ -2113,7 +2088,7 @@
           <a:lstStyle/>
           <a:p>
             <a:r>
-              <a:t>Captura tomada en vivo contra https://portfolio-ia-frontend...azurecontainerapps.io. El campo Email se reutiliza como nombre visible del invitado (Spec D01).</a:t>
+              <a:t>Esta es probablemente la captura mas potente del recorrido invitado: numeros reales, no simulados, obtenidos de la cascada del bloque 03.</a:t>
             </a:r>
           </a:p>
         </p:txBody>
@@ -2139,7 +2114,7 @@
 </file>
 
 <file path=ppt/notesSlides/notesSlide33.xml><?xml version="1.0" encoding="utf-8"?>
-<p:notes xmlns:a="http://schemas.openxmlformats.org/drawingml/2006/main" xmlns:p="http://schemas.openxmlformats.org/presentationml/2006/main" xmlns:r="http://schemas.openxmlformats.org/officeDocument/2006/relationships">
+<p:notes xmlns:a="http://schemas.openxmlformats.org/drawingml/2006/main" xmlns:r="http://schemas.openxmlformats.org/officeDocument/2006/relationships" xmlns:p="http://schemas.openxmlformats.org/presentationml/2006/main">
   <p:cSld>
     <p:spTree>
       <p:nvGrpSpPr>
@@ -2183,7 +2158,7 @@
           <a:lstStyle/>
           <a:p>
             <a:r>
-              <a:t>Esta es probablemente la captura mas potente del recorrido invitado: numeros reales, no simulados, obtenidos de la cascada del bloque 03.</a:t>
+              <a:t>Momento clave para conectar con la diapositiva de Seguridad por diseño (bloque 07): esto no es una captura preparada, es el comportamiento real del control de roles y permisos contra un usuario Investor/guest intentando una operacion de administrador.</a:t>
             </a:r>
           </a:p>
         </p:txBody>
@@ -2209,7 +2184,7 @@
 </file>
 
 <file path=ppt/notesSlides/notesSlide34.xml><?xml version="1.0" encoding="utf-8"?>
-<p:notes xmlns:a="http://schemas.openxmlformats.org/drawingml/2006/main" xmlns:p="http://schemas.openxmlformats.org/presentationml/2006/main" xmlns:r="http://schemas.openxmlformats.org/officeDocument/2006/relationships">
+<p:notes xmlns:a="http://schemas.openxmlformats.org/drawingml/2006/main" xmlns:r="http://schemas.openxmlformats.org/officeDocument/2006/relationships" xmlns:p="http://schemas.openxmlformats.org/presentationml/2006/main">
   <p:cSld>
     <p:spTree>
       <p:nvGrpSpPr>
@@ -2253,7 +2228,32 @@
           <a:lstStyle/>
           <a:p>
             <a:r>
-              <a:t>Momento clave para conectar con la diapositiva de Seguridad por diseño (bloque 07): esto no es una captura preparada, es el comportamiento real del RBAC (Spec D11) contra un usuario Investor/guest intentando una operacion de administrador.</a:t>
+              <a:t>Preguntas frecuentes previstas y respuesta corta:</a:t>
+            </a:r>
+          </a:p>
+          <a:p>
+            <a:r>
+              <a:t>- Por que Web Components y no React/Vue -- estandar W3C, cero lock-in, se explica en slide 25.</a:t>
+            </a:r>
+          </a:p>
+          <a:p>
+            <a:r>
+              <a:t>- Como decide la cascada cuando reintentar -- por rondas, solo sobre activos no resueltos, sin memoria entre ejecuciones (slide 11).</a:t>
+            </a:r>
+          </a:p>
+          <a:p>
+            <a:r>
+              <a:t>- Que pasa si fallan TODOS los proveedores -- CascadeFailureReport, notificacion al usuario, nunca se inventa un dato (slide 12).</a:t>
+            </a:r>
+          </a:p>
+          <a:p>
+            <a:r>
+              <a:t>- Como se protege que un Inversor vea datos de otro usuario -- aislamiento por ownership verificado en cada consulta, mas RBAC en el endpoint (slide 20 y 24).</a:t>
+            </a:r>
+          </a:p>
+          <a:p>
+            <a:r>
+              <a:t>- Por que el catalogo de indicadores y el catalogo de roles son YAML y no tablas de admin editables -- decision v1 de simplicidad, documentada como extension natural futura.</a:t>
             </a:r>
           </a:p>
         </p:txBody>
@@ -2323,7 +2323,7 @@
           <a:lstStyle/>
           <a:p>
             <a:r>
-              <a:t>Contraste problema/solucion. Enfatizar: nace como TFM de uso personal, pero la arquitectura esta preparada desde el dia uno para crecer a multi-usuario -- no es una limitacion, es una decision de alcance (Spec 00a: empezar simple, crecer en complejidad).</a:t>
+              <a:t>Contraste problema/solucion. Enfatizar: nace como TFM de uso personal, pero la arquitectura esta preparada desde el dia uno para crecer a multi-usuario -- no es una limitacion, es una decision de alcance: empezar simple, crecer en complejidad.</a:t>
             </a:r>
           </a:p>
         </p:txBody>
@@ -2877,7 +2877,7 @@
           <a:p>
             <a:fld id="{5BCAD085-E8A6-8845-BD4E-CB4CCA059FC4}" type="datetimeFigureOut">
               <a:rPr lang="en-US" smtClean="0"/>
-              <a:t>7/7/2026</a:t>
+              <a:t>7/9/2026</a:t>
             </a:fld>
             <a:endParaRPr lang="en-US"/>
           </a:p>
@@ -3045,7 +3045,7 @@
           <a:p>
             <a:fld id="{5BCAD085-E8A6-8845-BD4E-CB4CCA059FC4}" type="datetimeFigureOut">
               <a:rPr lang="en-US" smtClean="0"/>
-              <a:t>7/7/2026</a:t>
+              <a:t>7/9/2026</a:t>
             </a:fld>
             <a:endParaRPr lang="en-US"/>
           </a:p>
@@ -3223,7 +3223,7 @@
           <a:p>
             <a:fld id="{5BCAD085-E8A6-8845-BD4E-CB4CCA059FC4}" type="datetimeFigureOut">
               <a:rPr lang="en-US" smtClean="0"/>
-              <a:t>7/7/2026</a:t>
+              <a:t>7/9/2026</a:t>
             </a:fld>
             <a:endParaRPr lang="en-US"/>
           </a:p>
@@ -3391,7 +3391,7 @@
           <a:p>
             <a:fld id="{5BCAD085-E8A6-8845-BD4E-CB4CCA059FC4}" type="datetimeFigureOut">
               <a:rPr lang="en-US" smtClean="0"/>
-              <a:t>7/7/2026</a:t>
+              <a:t>7/9/2026</a:t>
             </a:fld>
             <a:endParaRPr lang="en-US"/>
           </a:p>
@@ -3636,7 +3636,7 @@
           <a:p>
             <a:fld id="{5BCAD085-E8A6-8845-BD4E-CB4CCA059FC4}" type="datetimeFigureOut">
               <a:rPr lang="en-US" smtClean="0"/>
-              <a:t>7/7/2026</a:t>
+              <a:t>7/9/2026</a:t>
             </a:fld>
             <a:endParaRPr lang="en-US"/>
           </a:p>
@@ -3921,7 +3921,7 @@
           <a:p>
             <a:fld id="{5BCAD085-E8A6-8845-BD4E-CB4CCA059FC4}" type="datetimeFigureOut">
               <a:rPr lang="en-US" smtClean="0"/>
-              <a:t>7/7/2026</a:t>
+              <a:t>7/9/2026</a:t>
             </a:fld>
             <a:endParaRPr lang="en-US"/>
           </a:p>
@@ -4340,7 +4340,7 @@
           <a:p>
             <a:fld id="{5BCAD085-E8A6-8845-BD4E-CB4CCA059FC4}" type="datetimeFigureOut">
               <a:rPr lang="en-US" smtClean="0"/>
-              <a:t>7/7/2026</a:t>
+              <a:t>7/9/2026</a:t>
             </a:fld>
             <a:endParaRPr lang="en-US"/>
           </a:p>
@@ -4457,7 +4457,7 @@
           <a:p>
             <a:fld id="{5BCAD085-E8A6-8845-BD4E-CB4CCA059FC4}" type="datetimeFigureOut">
               <a:rPr lang="en-US" smtClean="0"/>
-              <a:t>7/7/2026</a:t>
+              <a:t>7/9/2026</a:t>
             </a:fld>
             <a:endParaRPr lang="en-US"/>
           </a:p>
@@ -4552,7 +4552,7 @@
           <a:p>
             <a:fld id="{5BCAD085-E8A6-8845-BD4E-CB4CCA059FC4}" type="datetimeFigureOut">
               <a:rPr lang="en-US" smtClean="0"/>
-              <a:t>7/7/2026</a:t>
+              <a:t>7/9/2026</a:t>
             </a:fld>
             <a:endParaRPr lang="en-US"/>
           </a:p>
@@ -4827,7 +4827,7 @@
           <a:p>
             <a:fld id="{5BCAD085-E8A6-8845-BD4E-CB4CCA059FC4}" type="datetimeFigureOut">
               <a:rPr lang="en-US" smtClean="0"/>
-              <a:t>7/7/2026</a:t>
+              <a:t>7/9/2026</a:t>
             </a:fld>
             <a:endParaRPr lang="en-US"/>
           </a:p>
@@ -5079,7 +5079,7 @@
           <a:p>
             <a:fld id="{5BCAD085-E8A6-8845-BD4E-CB4CCA059FC4}" type="datetimeFigureOut">
               <a:rPr lang="en-US" smtClean="0"/>
-              <a:t>7/7/2026</a:t>
+              <a:t>7/9/2026</a:t>
             </a:fld>
             <a:endParaRPr lang="en-US"/>
           </a:p>
@@ -5290,7 +5290,7 @@
           <a:p>
             <a:fld id="{5BCAD085-E8A6-8845-BD4E-CB4CCA059FC4}" type="datetimeFigureOut">
               <a:rPr lang="en-US" smtClean="0"/>
-              <a:t>7/7/2026</a:t>
+              <a:t>7/9/2026</a:t>
             </a:fld>
             <a:endParaRPr lang="en-US"/>
           </a:p>
@@ -6871,7 +6871,7 @@
                 </a:solidFill>
                 <a:latin typeface="Space Grotesk"/>
               </a:rPr>
-              <a:t>Cascada multi-proveedor (Spec D12)</a:t>
+              <a:t>Cascada multi-proveedor</a:t>
             </a:r>
           </a:p>
         </p:txBody>
@@ -14196,7 +14196,7 @@
                 </a:solidFill>
                 <a:latin typeface="Space Grotesk"/>
               </a:rPr>
-              <a:t>Roles y permisos: control de acceso granular (Spec D11)</a:t>
+              <a:t>Roles y permisos: control de acceso granular</a:t>
             </a:r>
           </a:p>
         </p:txBody>
@@ -17291,7 +17291,7 @@
                 </a:solidFill>
                 <a:latin typeface="Space Grotesk"/>
               </a:rPr>
-              <a:t>Contraseñas con hashing bcrypt; validaciones alineadas con buenas prácticas OWASP (Spec 00b)</a:t>
+              <a:t>Contraseñas con hashing bcrypt; validaciones alineadas con buenas prácticas OWASP</a:t>
             </a:r>
           </a:p>
         </p:txBody>
@@ -18224,7 +18224,7 @@
                 </a:solidFill>
                 <a:latin typeface="Space Grotesk"/>
               </a:rPr>
-              <a:t>Spec Driven Development</a:t>
+              <a:t>Documentación y trazabilidad</a:t>
             </a:r>
           </a:p>
         </p:txBody>
@@ -18320,7 +18320,7 @@
                 </a:solidFill>
                 <a:latin typeface="Space Grotesk"/>
               </a:rPr>
-              <a:t>Más de 25 especificaciones versionadas y trazables dentro del propio repositorio (carpeta specs/)</a:t>
+              <a:t>Cada decisión de arquitectura se documenta y se aprueba antes de implementarse</a:t>
             </a:r>
           </a:p>
           <a:p>
@@ -18348,7 +18348,7 @@
                 </a:solidFill>
                 <a:latin typeface="Space Grotesk"/>
               </a:rPr>
-              <a:t>Ninguna funcionalidad se construye sin un spec aprobado previamente</a:t>
+              <a:t>Ninguna funcionalidad se construye por improvisación: primero se diseña, después se codifica</a:t>
             </a:r>
           </a:p>
           <a:p>
@@ -18376,7 +18376,7 @@
                 </a:solidFill>
                 <a:latin typeface="Space Grotesk"/>
               </a:rPr>
-              <a:t>Trazabilidad completa: decisión de diseño → especificación → commit → test</a:t>
+              <a:t>Trazabilidad completa: decisión de diseño → commit → test</a:t>
             </a:r>
           </a:p>
         </p:txBody>
@@ -19080,7 +19080,7 @@
                 </a:solidFill>
                 <a:latin typeface="Space Grotesk"/>
               </a:rPr>
-              <a:t>Especificaciones implementadas</a:t>
+              <a:t>Funcionalidades implementadas</a:t>
             </a:r>
           </a:p>
         </p:txBody>
@@ -19213,7 +19213,7 @@
                 </a:solidFill>
                 <a:latin typeface="JetBrains Mono"/>
               </a:rPr>
-              <a:t>D01</a:t>
+              <a:t>01</a:t>
             </a:r>
           </a:p>
         </p:txBody>
@@ -19395,7 +19395,7 @@
                 </a:solidFill>
                 <a:latin typeface="JetBrains Mono"/>
               </a:rPr>
-              <a:t>D02</a:t>
+              <a:t>02</a:t>
             </a:r>
           </a:p>
         </p:txBody>
@@ -19577,7 +19577,7 @@
                 </a:solidFill>
                 <a:latin typeface="JetBrains Mono"/>
               </a:rPr>
-              <a:t>D03</a:t>
+              <a:t>03</a:t>
             </a:r>
           </a:p>
         </p:txBody>
@@ -19759,7 +19759,7 @@
                 </a:solidFill>
                 <a:latin typeface="JetBrains Mono"/>
               </a:rPr>
-              <a:t>D04</a:t>
+              <a:t>04</a:t>
             </a:r>
           </a:p>
         </p:txBody>
@@ -19941,7 +19941,7 @@
                 </a:solidFill>
                 <a:latin typeface="JetBrains Mono"/>
               </a:rPr>
-              <a:t>D05</a:t>
+              <a:t>05</a:t>
             </a:r>
           </a:p>
         </p:txBody>
@@ -20123,7 +20123,7 @@
                 </a:solidFill>
                 <a:latin typeface="JetBrains Mono"/>
               </a:rPr>
-              <a:t>D06</a:t>
+              <a:t>06</a:t>
             </a:r>
           </a:p>
         </p:txBody>
@@ -20305,7 +20305,7 @@
                 </a:solidFill>
                 <a:latin typeface="JetBrains Mono"/>
               </a:rPr>
-              <a:t>D07</a:t>
+              <a:t>07</a:t>
             </a:r>
           </a:p>
         </p:txBody>
@@ -20487,7 +20487,7 @@
                 </a:solidFill>
                 <a:latin typeface="JetBrains Mono"/>
               </a:rPr>
-              <a:t>D08</a:t>
+              <a:t>08</a:t>
             </a:r>
           </a:p>
         </p:txBody>
@@ -20669,7 +20669,7 @@
                 </a:solidFill>
                 <a:latin typeface="JetBrains Mono"/>
               </a:rPr>
-              <a:t>D09</a:t>
+              <a:t>09</a:t>
             </a:r>
           </a:p>
         </p:txBody>
@@ -20851,7 +20851,7 @@
                 </a:solidFill>
                 <a:latin typeface="JetBrains Mono"/>
               </a:rPr>
-              <a:t>D10</a:t>
+              <a:t>10</a:t>
             </a:r>
           </a:p>
         </p:txBody>
@@ -21033,7 +21033,7 @@
                 </a:solidFill>
                 <a:latin typeface="JetBrains Mono"/>
               </a:rPr>
-              <a:t>D11</a:t>
+              <a:t>11</a:t>
             </a:r>
           </a:p>
         </p:txBody>
@@ -21215,7 +21215,7 @@
                 </a:solidFill>
                 <a:latin typeface="JetBrains Mono"/>
               </a:rPr>
-              <a:t>D12</a:t>
+              <a:t>12</a:t>
             </a:r>
           </a:p>
         </p:txBody>
@@ -21348,7 +21348,7 @@
                 </a:solidFill>
                 <a:latin typeface="JetBrains Mono"/>
               </a:rPr>
-              <a:t>+ 8 changesets incrementales (C01–C08): roles y permisos, cascada multi-proveedor, edición de análisis, rediseño Terminal Premium, dashboard con KPIs</a:t>
+              <a:t>+ múltiples mejoras incrementales: roles y permisos, cascada multi-proveedor, edición de análisis, rediseño Terminal Premium, dashboard con KPIs</a:t>
             </a:r>
           </a:p>
         </p:txBody>
@@ -21524,7 +21524,7 @@
 </file>
 
 <file path=ppt/slides/slide29.xml><?xml version="1.0" encoding="utf-8"?>
-<p:sld xmlns:a="http://schemas.openxmlformats.org/drawingml/2006/main" xmlns:p="http://schemas.openxmlformats.org/presentationml/2006/main" xmlns:r="http://schemas.openxmlformats.org/officeDocument/2006/relationships">
+<p:sld xmlns:a="http://schemas.openxmlformats.org/drawingml/2006/main" xmlns:r="http://schemas.openxmlformats.org/officeDocument/2006/relationships" xmlns:p="http://schemas.openxmlformats.org/presentationml/2006/main">
   <p:cSld>
     <p:spTree>
       <p:nvGrpSpPr>
@@ -21532,7 +21532,14 @@
         <p:cNvGrpSpPr/>
         <p:nvPr/>
       </p:nvGrpSpPr>
-      <p:grpSpPr/>
+      <p:grpSpPr>
+        <a:xfrm>
+          <a:off x="0" y="0"/>
+          <a:ext cx="0" cy="0"/>
+          <a:chOff x="0" y="0"/>
+          <a:chExt cx="0" cy="0"/>
+        </a:xfrm>
+      </p:grpSpPr>
       <p:sp>
         <p:nvSpPr>
           <p:cNvPr id="2" name="Rectangle 1"/>
@@ -23643,7 +23650,7 @@
                 </a:solidFill>
                 <a:latin typeface="Space Grotesk"/>
               </a:rPr>
-              <a:t>Despliegue manual, sin CI/CD (Spec 00d §5)</a:t>
+              <a:t>Despliegue manual, sin CI/CD</a:t>
             </a:r>
           </a:p>
         </p:txBody>
@@ -23705,188 +23712,6 @@
       </p:sp>
       <p:sp>
         <p:nvSpPr>
-          <p:cNvPr id="50" name="Rounded Rectangle 49"/>
-          <p:cNvSpPr/>
-          <p:nvPr/>
-        </p:nvSpPr>
-        <p:spPr>
-          <a:xfrm>
-            <a:off x="7872984" y="4453127"/>
-            <a:ext cx="3429000" cy="713232"/>
-          </a:xfrm>
-          <a:prstGeom prst="roundRect">
-            <a:avLst>
-              <a:gd name="adj" fmla="val 6000"/>
-            </a:avLst>
-          </a:prstGeom>
-          <a:solidFill>
-            <a:srgbClr val="101318"/>
-          </a:solidFill>
-          <a:ln w="12700">
-            <a:solidFill>
-              <a:srgbClr val="1D222B"/>
-            </a:solidFill>
-          </a:ln>
-          <a:effectLst/>
-        </p:spPr>
-        <p:style>
-          <a:lnRef idx="1">
-            <a:schemeClr val="accent1"/>
-          </a:lnRef>
-          <a:fillRef idx="3">
-            <a:schemeClr val="accent1"/>
-          </a:fillRef>
-          <a:effectRef idx="2">
-            <a:schemeClr val="accent1"/>
-          </a:effectRef>
-          <a:fontRef idx="minor">
-            <a:schemeClr val="lt1"/>
-          </a:fontRef>
-        </p:style>
-        <p:txBody>
-          <a:bodyPr rtlCol="0" anchor="ctr"/>
-          <a:lstStyle/>
-          <a:p>
-            <a:pPr algn="ctr"/>
-            <a:endParaRPr/>
-          </a:p>
-        </p:txBody>
-      </p:sp>
-      <p:sp>
-        <p:nvSpPr>
-          <p:cNvPr id="51" name="TextBox 50"/>
-          <p:cNvSpPr txBox="1"/>
-          <p:nvPr/>
-        </p:nvSpPr>
-        <p:spPr>
-          <a:xfrm>
-            <a:off x="8055864" y="4562855"/>
-            <a:ext cx="822960" cy="457200"/>
-          </a:xfrm>
-          <a:prstGeom prst="rect">
-            <a:avLst/>
-          </a:prstGeom>
-          <a:noFill/>
-        </p:spPr>
-        <p:txBody>
-          <a:bodyPr wrap="square" lIns="0" tIns="0" rIns="0" bIns="0" anchor="t">
-            <a:spAutoFit/>
-          </a:bodyPr>
-          <a:lstStyle/>
-          <a:p>
-            <a:pPr algn="l">
-              <a:lnSpc>
-                <a:spcPct val="115000"/>
-              </a:lnSpc>
-            </a:pPr>
-            <a:r>
-              <a:rPr sz="1500" b="1" i="0">
-                <a:solidFill>
-                  <a:srgbClr val="C9A45C"/>
-                </a:solidFill>
-                <a:latin typeface="JetBrains Mono"/>
-              </a:rPr>
-              <a:t>€</a:t>
-            </a:r>
-          </a:p>
-        </p:txBody>
-      </p:sp>
-      <p:sp>
-        <p:nvSpPr>
-          <p:cNvPr id="52" name="TextBox 51"/>
-          <p:cNvSpPr txBox="1"/>
-          <p:nvPr/>
-        </p:nvSpPr>
-        <p:spPr>
-          <a:xfrm>
-            <a:off x="8833104" y="4526279"/>
-            <a:ext cx="1965960" cy="548640"/>
-          </a:xfrm>
-          <a:prstGeom prst="rect">
-            <a:avLst/>
-          </a:prstGeom>
-          <a:noFill/>
-        </p:spPr>
-        <p:txBody>
-          <a:bodyPr wrap="square" lIns="0" tIns="0" rIns="0" bIns="0" anchor="t">
-            <a:spAutoFit/>
-          </a:bodyPr>
-          <a:lstStyle/>
-          <a:p>
-            <a:pPr algn="l">
-              <a:lnSpc>
-                <a:spcPct val="105000"/>
-              </a:lnSpc>
-            </a:pPr>
-            <a:r>
-              <a:rPr sz="1150" b="0" i="0">
-                <a:solidFill>
-                  <a:srgbClr val="E7E9ED"/>
-                </a:solidFill>
-                <a:latin typeface="Space Grotesk"/>
-              </a:rPr>
-              <a:t>~20-21 €/mes</a:t>
-            </a:r>
-          </a:p>
-        </p:txBody>
-      </p:sp>
-      <p:sp>
-        <p:nvSpPr>
-          <p:cNvPr id="53" name="Oval 52"/>
-          <p:cNvSpPr/>
-          <p:nvPr/>
-        </p:nvSpPr>
-        <p:spPr>
-          <a:xfrm>
-            <a:off x="10844784" y="4663439"/>
-            <a:ext cx="292608" cy="292608"/>
-          </a:xfrm>
-          <a:prstGeom prst="ellipse">
-            <a:avLst/>
-          </a:prstGeom>
-          <a:solidFill>
-            <a:srgbClr val="10261B"/>
-          </a:solidFill>
-          <a:ln w="12700">
-            <a:solidFill>
-              <a:srgbClr val="4FBF87"/>
-            </a:solidFill>
-          </a:ln>
-          <a:effectLst/>
-        </p:spPr>
-        <p:style>
-          <a:lnRef idx="1">
-            <a:schemeClr val="accent1"/>
-          </a:lnRef>
-          <a:fillRef idx="3">
-            <a:schemeClr val="accent1"/>
-          </a:fillRef>
-          <a:effectRef idx="2">
-            <a:schemeClr val="accent1"/>
-          </a:effectRef>
-          <a:fontRef idx="minor">
-            <a:schemeClr val="lt1"/>
-          </a:fontRef>
-        </p:style>
-        <p:txBody>
-          <a:bodyPr lIns="0" tIns="0" rIns="0" bIns="0" rtlCol="0" anchor="ctr"/>
-          <a:lstStyle/>
-          <a:p>
-            <a:pPr algn="ctr"/>
-            <a:r>
-              <a:rPr sz="1300" b="1">
-                <a:solidFill>
-                  <a:srgbClr val="4FBF87"/>
-                </a:solidFill>
-                <a:latin typeface="Space Grotesk"/>
-              </a:rPr>
-              <a:t>✓</a:t>
-            </a:r>
-          </a:p>
-        </p:txBody>
-      </p:sp>
-      <p:sp>
-        <p:nvSpPr>
           <p:cNvPr id="54" name="TextBox 53"/>
           <p:cNvSpPr txBox="1"/>
           <p:nvPr/>
@@ -23919,7 +23744,7 @@
                 </a:solidFill>
                 <a:latin typeface="JetBrains Mono"/>
               </a:rPr>
-              <a:t>Bug real resuelto en producción: la cookie CSRF era invisible entre frontend y backend (subdominios distintos) — runbook completo en Changeset C09.</a:t>
+              <a:t>Bug real resuelto en producción: la cookie CSRF era invisible entre frontend y backend por estar en subdominios distintos.</a:t>
             </a:r>
           </a:p>
         </p:txBody>
@@ -25394,7 +25219,7 @@
                 </a:solidFill>
                 <a:latin typeface="Space Grotesk"/>
               </a:rPr>
-              <a:t> estándares web, stack aburrido y fiable, todo documentado en specs</a:t>
+              <a:t> estándares web, stack aburrido y fiable, todo documentado y trazable</a:t>
             </a:r>
           </a:p>
         </p:txBody>
@@ -25633,14 +25458,92 @@
       </p:sp>
       <p:sp>
         <p:nvSpPr>
-          <p:cNvPr id="3" name="Rectangle 2"/>
+          <p:cNvPr id="3" name="TextBox 2"/>
+          <p:cNvSpPr txBox="1"/>
+          <p:nvPr/>
+        </p:nvSpPr>
+        <p:spPr>
+          <a:xfrm>
+            <a:off x="822960" y="2331720"/>
+            <a:ext cx="2743200" cy="1280160"/>
+          </a:xfrm>
+          <a:prstGeom prst="rect">
+            <a:avLst/>
+          </a:prstGeom>
+          <a:noFill/>
+        </p:spPr>
+        <p:txBody>
+          <a:bodyPr wrap="square" lIns="0" tIns="0" rIns="0" bIns="0" anchor="t">
+            <a:spAutoFit/>
+          </a:bodyPr>
+          <a:lstStyle/>
+          <a:p>
+            <a:pPr algn="l">
+              <a:lnSpc>
+                <a:spcPct val="115000"/>
+              </a:lnSpc>
+            </a:pPr>
+            <a:r>
+              <a:rPr sz="9000" b="1" i="0">
+                <a:solidFill>
+                  <a:srgbClr val="2A2412"/>
+                </a:solidFill>
+                <a:latin typeface="JetBrains Mono"/>
+              </a:rPr>
+              <a:t>09</a:t>
+            </a:r>
+          </a:p>
+        </p:txBody>
+      </p:sp>
+      <p:sp>
+        <p:nvSpPr>
+          <p:cNvPr id="4" name="TextBox 3"/>
+          <p:cNvSpPr txBox="1"/>
+          <p:nvPr/>
+        </p:nvSpPr>
+        <p:spPr>
+          <a:xfrm>
+            <a:off x="868680" y="3337560"/>
+            <a:ext cx="10058400" cy="822960"/>
+          </a:xfrm>
+          <a:prstGeom prst="rect">
+            <a:avLst/>
+          </a:prstGeom>
+          <a:noFill/>
+        </p:spPr>
+        <p:txBody>
+          <a:bodyPr wrap="square" lIns="0" tIns="0" rIns="0" bIns="0" anchor="t">
+            <a:spAutoFit/>
+          </a:bodyPr>
+          <a:lstStyle/>
+          <a:p>
+            <a:pPr algn="l">
+              <a:lnSpc>
+                <a:spcPct val="115000"/>
+              </a:lnSpc>
+            </a:pPr>
+            <a:r>
+              <a:rPr sz="3200" b="1" i="0">
+                <a:solidFill>
+                  <a:srgbClr val="E7E9ED"/>
+                </a:solidFill>
+                <a:latin typeface="Space Grotesk"/>
+              </a:rPr>
+              <a:t>Recorrido funcional de la aplicación</a:t>
+            </a:r>
+          </a:p>
+        </p:txBody>
+      </p:sp>
+      <p:sp>
+        <p:nvSpPr>
+          <p:cNvPr id="5" name="Rectangle 4"/>
           <p:cNvSpPr/>
           <p:nvPr/>
         </p:nvSpPr>
         <p:spPr>
           <a:xfrm>
-            <a:off x="0" y="0"/>
-            <a:ext cx="164592" cy="6858000"/>
+            <a:off x="886968" y="4023360"/>
+            <a:ext cx="822960" cy="38100"/>
           </a:xfrm>
           <a:prstGeom prst="rect">
             <a:avLst/>
@@ -25678,14 +25581,14 @@
       </p:sp>
       <p:sp>
         <p:nvSpPr>
-          <p:cNvPr id="4" name="TextBox 3"/>
-          <p:cNvSpPr txBox="1"/>
-          <p:nvPr/>
-        </p:nvSpPr>
-        <p:spPr>
-          <a:xfrm>
-            <a:off x="822960" y="2560320"/>
-            <a:ext cx="9144000" cy="1097280"/>
+          <p:cNvPr id="6" name="TextBox 5"/>
+          <p:cNvSpPr txBox="1"/>
+          <p:nvPr/>
+        </p:nvSpPr>
+        <p:spPr>
+          <a:xfrm>
+            <a:off x="886968" y="4187952"/>
+            <a:ext cx="9601200" cy="548640"/>
           </a:xfrm>
           <a:prstGeom prst="rect">
             <a:avLst/>
@@ -25704,33 +25607,150 @@
               </a:lnSpc>
             </a:pPr>
             <a:r>
-              <a:rPr sz="5400" b="1" i="0">
-                <a:solidFill>
-                  <a:srgbClr val="E7E9ED"/>
-                </a:solidFill>
-                <a:latin typeface="Space Grotesk"/>
-              </a:rPr>
-              <a:t>Gracias</a:t>
-            </a:r>
-          </a:p>
-        </p:txBody>
-      </p:sp>
-      <p:sp>
-        <p:nvSpPr>
-          <p:cNvPr id="5" name="Rectangle 4"/>
+              <a:rPr sz="1450" b="0" i="0">
+                <a:solidFill>
+                  <a:srgbClr val="99A0AB"/>
+                </a:solidFill>
+                <a:latin typeface="Space Grotesk"/>
+              </a:rPr>
+              <a:t>Demo real sobre el entorno desplegado en Azure — modo invitado y modo administrador</a:t>
+            </a:r>
+          </a:p>
+        </p:txBody>
+      </p:sp>
+      <p:sp>
+        <p:nvSpPr>
+          <p:cNvPr id="7" name="TextBox 6"/>
+          <p:cNvSpPr txBox="1"/>
+          <p:nvPr/>
+        </p:nvSpPr>
+        <p:spPr>
+          <a:xfrm>
+            <a:off x="685800" y="6473952"/>
+            <a:ext cx="5486400" cy="274320"/>
+          </a:xfrm>
+          <a:prstGeom prst="rect">
+            <a:avLst/>
+          </a:prstGeom>
+          <a:noFill/>
+        </p:spPr>
+        <p:txBody>
+          <a:bodyPr wrap="square" lIns="0" tIns="0" rIns="0" bIns="0" anchor="t">
+            <a:spAutoFit/>
+          </a:bodyPr>
+          <a:lstStyle/>
+          <a:p>
+            <a:pPr algn="l">
+              <a:lnSpc>
+                <a:spcPct val="115000"/>
+              </a:lnSpc>
+            </a:pPr>
+            <a:r>
+              <a:rPr sz="850" b="0" i="0">
+                <a:solidFill>
+                  <a:srgbClr val="5C6472"/>
+                </a:solidFill>
+                <a:latin typeface="JetBrains Mono"/>
+              </a:rPr>
+              <a:t>TFM BIGSCHOOL · GESTIÓN DE CARTERA FINANCIERA CON IA</a:t>
+            </a:r>
+          </a:p>
+        </p:txBody>
+      </p:sp>
+      <p:sp>
+        <p:nvSpPr>
+          <p:cNvPr id="8" name="TextBox 7"/>
+          <p:cNvSpPr txBox="1"/>
+          <p:nvPr/>
+        </p:nvSpPr>
+        <p:spPr>
+          <a:xfrm>
+            <a:off x="5943600" y="6473952"/>
+            <a:ext cx="4389120" cy="274320"/>
+          </a:xfrm>
+          <a:prstGeom prst="rect">
+            <a:avLst/>
+          </a:prstGeom>
+          <a:noFill/>
+        </p:spPr>
+        <p:txBody>
+          <a:bodyPr wrap="square" lIns="0" tIns="0" rIns="0" bIns="0" anchor="t">
+            <a:spAutoFit/>
+          </a:bodyPr>
+          <a:lstStyle/>
+          <a:p>
+            <a:pPr algn="r">
+              <a:lnSpc>
+                <a:spcPct val="115000"/>
+              </a:lnSpc>
+            </a:pPr>
+            <a:r>
+              <a:rPr sz="850" b="0" i="0">
+                <a:solidFill>
+                  <a:srgbClr val="5C6472"/>
+                </a:solidFill>
+                <a:latin typeface="JetBrains Mono"/>
+              </a:rPr>
+              <a:t>09 · RECORRIDO — INVITADO</a:t>
+            </a:r>
+          </a:p>
+        </p:txBody>
+      </p:sp>
+      <p:sp>
+        <p:nvSpPr>
+          <p:cNvPr id="9" name="TextBox 8"/>
+          <p:cNvSpPr txBox="1"/>
+          <p:nvPr/>
+        </p:nvSpPr>
+        <p:spPr>
+          <a:xfrm>
+            <a:off x="11475720" y="6473952"/>
+            <a:ext cx="548640" cy="274320"/>
+          </a:xfrm>
+          <a:prstGeom prst="rect">
+            <a:avLst/>
+          </a:prstGeom>
+          <a:noFill/>
+        </p:spPr>
+        <p:txBody>
+          <a:bodyPr wrap="square" lIns="0" tIns="0" rIns="0" bIns="0" anchor="t">
+            <a:spAutoFit/>
+          </a:bodyPr>
+          <a:lstStyle/>
+          <a:p>
+            <a:pPr algn="r">
+              <a:lnSpc>
+                <a:spcPct val="115000"/>
+              </a:lnSpc>
+            </a:pPr>
+            <a:r>
+              <a:rPr sz="850" b="0" i="0">
+                <a:solidFill>
+                  <a:srgbClr val="C9A45C"/>
+                </a:solidFill>
+                <a:latin typeface="JetBrains Mono"/>
+              </a:rPr>
+              <a:t>32</a:t>
+            </a:r>
+          </a:p>
+        </p:txBody>
+      </p:sp>
+      <p:sp>
+        <p:nvSpPr>
+          <p:cNvPr id="10" name="Rectangle 9"/>
           <p:cNvSpPr/>
           <p:nvPr/>
         </p:nvSpPr>
         <p:spPr>
           <a:xfrm>
-            <a:off x="868680" y="3520440"/>
-            <a:ext cx="1005840" cy="38100"/>
+            <a:off x="685800" y="6400800"/>
+            <a:ext cx="10817352" cy="9525"/>
           </a:xfrm>
           <a:prstGeom prst="rect">
             <a:avLst/>
           </a:prstGeom>
           <a:solidFill>
-            <a:srgbClr val="C9A45C"/>
+            <a:srgbClr val="1D222B"/>
           </a:solidFill>
           <a:ln>
             <a:noFill/>
@@ -25757,123 +25777,6 @@
           <a:p>
             <a:pPr algn="ctr"/>
             <a:endParaRPr/>
-          </a:p>
-        </p:txBody>
-      </p:sp>
-      <p:sp>
-        <p:nvSpPr>
-          <p:cNvPr id="6" name="TextBox 5"/>
-          <p:cNvSpPr txBox="1"/>
-          <p:nvPr/>
-        </p:nvSpPr>
-        <p:spPr>
-          <a:xfrm>
-            <a:off x="822960" y="3749039"/>
-            <a:ext cx="9144000" cy="457200"/>
-          </a:xfrm>
-          <a:prstGeom prst="rect">
-            <a:avLst/>
-          </a:prstGeom>
-          <a:noFill/>
-        </p:spPr>
-        <p:txBody>
-          <a:bodyPr wrap="square" lIns="0" tIns="0" rIns="0" bIns="0" anchor="t">
-            <a:spAutoFit/>
-          </a:bodyPr>
-          <a:lstStyle/>
-          <a:p>
-            <a:pPr algn="l">
-              <a:lnSpc>
-                <a:spcPct val="115000"/>
-              </a:lnSpc>
-            </a:pPr>
-            <a:r>
-              <a:rPr sz="1700" b="0" i="0">
-                <a:solidFill>
-                  <a:srgbClr val="99A0AB"/>
-                </a:solidFill>
-                <a:latin typeface="Space Grotesk"/>
-              </a:rPr>
-              <a:t>Preguntas y discusión</a:t>
-            </a:r>
-          </a:p>
-        </p:txBody>
-      </p:sp>
-      <p:sp>
-        <p:nvSpPr>
-          <p:cNvPr id="7" name="TextBox 6"/>
-          <p:cNvSpPr txBox="1"/>
-          <p:nvPr/>
-        </p:nvSpPr>
-        <p:spPr>
-          <a:xfrm>
-            <a:off x="822960" y="5806440"/>
-            <a:ext cx="5486400" cy="365760"/>
-          </a:xfrm>
-          <a:prstGeom prst="rect">
-            <a:avLst/>
-          </a:prstGeom>
-          <a:noFill/>
-        </p:spPr>
-        <p:txBody>
-          <a:bodyPr wrap="square" lIns="0" tIns="0" rIns="0" bIns="0" anchor="t">
-            <a:spAutoFit/>
-          </a:bodyPr>
-          <a:lstStyle/>
-          <a:p>
-            <a:pPr algn="l">
-              <a:lnSpc>
-                <a:spcPct val="115000"/>
-              </a:lnSpc>
-            </a:pPr>
-            <a:r>
-              <a:rPr sz="1400" b="1" i="0">
-                <a:solidFill>
-                  <a:srgbClr val="E7E9ED"/>
-                </a:solidFill>
-                <a:latin typeface="Space Grotesk"/>
-              </a:rPr>
-              <a:t>Romer Cepeda</a:t>
-            </a:r>
-          </a:p>
-        </p:txBody>
-      </p:sp>
-      <p:sp>
-        <p:nvSpPr>
-          <p:cNvPr id="8" name="TextBox 7"/>
-          <p:cNvSpPr txBox="1"/>
-          <p:nvPr/>
-        </p:nvSpPr>
-        <p:spPr>
-          <a:xfrm>
-            <a:off x="822960" y="6108192"/>
-            <a:ext cx="5486400" cy="320040"/>
-          </a:xfrm>
-          <a:prstGeom prst="rect">
-            <a:avLst/>
-          </a:prstGeom>
-          <a:noFill/>
-        </p:spPr>
-        <p:txBody>
-          <a:bodyPr wrap="square" lIns="0" tIns="0" rIns="0" bIns="0" anchor="t">
-            <a:spAutoFit/>
-          </a:bodyPr>
-          <a:lstStyle/>
-          <a:p>
-            <a:pPr algn="l">
-              <a:lnSpc>
-                <a:spcPct val="115000"/>
-              </a:lnSpc>
-            </a:pPr>
-            <a:r>
-              <a:rPr sz="1100" b="0" i="0">
-                <a:solidFill>
-                  <a:srgbClr val="5C6472"/>
-                </a:solidFill>
-                <a:latin typeface="JetBrains Mono"/>
-              </a:rPr>
-              <a:t>github.com/romercepeda/TFM_BigSchool</a:t>
-            </a:r>
           </a:p>
         </p:txBody>
       </p:sp>
@@ -25886,7 +25789,7 @@
 </file>
 
 <file path=ppt/slides/slide33.xml><?xml version="1.0" encoding="utf-8"?>
-<p:sld xmlns:a="http://schemas.openxmlformats.org/drawingml/2006/main" xmlns:p="http://schemas.openxmlformats.org/presentationml/2006/main" xmlns:r="http://schemas.openxmlformats.org/officeDocument/2006/relationships">
+<p:sld xmlns:a="http://schemas.openxmlformats.org/drawingml/2006/main" xmlns:r="http://schemas.openxmlformats.org/officeDocument/2006/relationships" xmlns:p="http://schemas.openxmlformats.org/presentationml/2006/main">
   <p:cSld>
     <p:spTree>
       <p:nvGrpSpPr>
@@ -25894,7 +25797,14 @@
         <p:cNvGrpSpPr/>
         <p:nvPr/>
       </p:nvGrpSpPr>
-      <p:grpSpPr/>
+      <p:grpSpPr>
+        <a:xfrm>
+          <a:off x="0" y="0"/>
+          <a:ext cx="0" cy="0"/>
+          <a:chOff x="0" y="0"/>
+          <a:chExt cx="0" cy="0"/>
+        </a:xfrm>
+      </p:grpSpPr>
       <p:sp>
         <p:nvSpPr>
           <p:cNvPr id="2" name="Rectangle 1"/>
@@ -25936,6 +25846,7 @@
           <a:lstStyle/>
           <a:p>
             <a:pPr algn="ctr"/>
+            <a:endParaRPr/>
           </a:p>
         </p:txBody>
       </p:sp>
@@ -25947,16 +25858,16 @@
         </p:nvSpPr>
         <p:spPr>
           <a:xfrm>
-            <a:off x="822960" y="2331720"/>
-            <a:ext cx="2743200" cy="1280160"/>
-          </a:xfrm>
-          <a:prstGeom prst="rect">
-            <a:avLst/>
-          </a:prstGeom>
-          <a:noFill/>
-        </p:spPr>
-        <p:txBody>
-          <a:bodyPr wrap="square" anchor="t" lIns="0" rIns="0" tIns="0" bIns="0">
+            <a:off x="685800" y="411480"/>
+            <a:ext cx="10789920" cy="320040"/>
+          </a:xfrm>
+          <a:prstGeom prst="rect">
+            <a:avLst/>
+          </a:prstGeom>
+          <a:noFill/>
+        </p:spPr>
+        <p:txBody>
+          <a:bodyPr wrap="square" lIns="0" tIns="0" rIns="0" bIns="0" anchor="t">
             <a:spAutoFit/>
           </a:bodyPr>
           <a:lstStyle/>
@@ -25967,13 +25878,13 @@
               </a:lnSpc>
             </a:pPr>
             <a:r>
-              <a:rPr sz="9000" b="1" i="0">
-                <a:solidFill>
-                  <a:srgbClr val="2A2412"/>
+              <a:rPr sz="1250" b="1" i="0">
+                <a:solidFill>
+                  <a:srgbClr val="C9A45C"/>
                 </a:solidFill>
                 <a:latin typeface="JetBrains Mono"/>
               </a:rPr>
-              <a:t>09</a:t>
+              <a:t>09 · RECORRIDO — INVITADO</a:t>
             </a:r>
           </a:p>
         </p:txBody>
@@ -25986,16 +25897,16 @@
         </p:nvSpPr>
         <p:spPr>
           <a:xfrm>
-            <a:off x="868680" y="3337560"/>
-            <a:ext cx="10058400" cy="822960"/>
-          </a:xfrm>
-          <a:prstGeom prst="rect">
-            <a:avLst/>
-          </a:prstGeom>
-          <a:noFill/>
-        </p:spPr>
-        <p:txBody>
-          <a:bodyPr wrap="square" anchor="t" lIns="0" rIns="0" tIns="0" bIns="0">
+            <a:off x="685800" y="704088"/>
+            <a:ext cx="10789920" cy="548640"/>
+          </a:xfrm>
+          <a:prstGeom prst="rect">
+            <a:avLst/>
+          </a:prstGeom>
+          <a:noFill/>
+        </p:spPr>
+        <p:txBody>
+          <a:bodyPr wrap="square" lIns="0" tIns="0" rIns="0" bIns="0" anchor="t">
             <a:spAutoFit/>
           </a:bodyPr>
           <a:lstStyle/>
@@ -26006,13 +25917,13 @@
               </a:lnSpc>
             </a:pPr>
             <a:r>
-              <a:rPr sz="3200" b="1" i="0">
+              <a:rPr sz="2400" b="1" i="0">
                 <a:solidFill>
                   <a:srgbClr val="E7E9ED"/>
                 </a:solidFill>
                 <a:latin typeface="Space Grotesk"/>
               </a:rPr>
-              <a:t>Recorrido funcional de la aplicación</a:t>
+              <a:t>Acceso sin fricción: modo invitado</a:t>
             </a:r>
           </a:p>
         </p:txBody>
@@ -26025,8 +25936,8 @@
         </p:nvSpPr>
         <p:spPr>
           <a:xfrm>
-            <a:off x="886968" y="4023360"/>
-            <a:ext cx="822960" cy="38100"/>
+            <a:off x="685800" y="1197864"/>
+            <a:ext cx="457200" cy="38100"/>
           </a:xfrm>
           <a:prstGeom prst="rect">
             <a:avLst/>
@@ -26058,51 +25969,220 @@
           <a:lstStyle/>
           <a:p>
             <a:pPr algn="ctr"/>
-          </a:p>
-        </p:txBody>
-      </p:sp>
-      <p:sp>
-        <p:nvSpPr>
-          <p:cNvPr id="6" name="TextBox 5"/>
-          <p:cNvSpPr txBox="1"/>
-          <p:nvPr/>
-        </p:nvSpPr>
-        <p:spPr>
-          <a:xfrm>
-            <a:off x="886968" y="4187952"/>
-            <a:ext cx="9601200" cy="548640"/>
-          </a:xfrm>
-          <a:prstGeom prst="rect">
-            <a:avLst/>
-          </a:prstGeom>
-          <a:noFill/>
-        </p:spPr>
-        <p:txBody>
-          <a:bodyPr wrap="square" anchor="t" lIns="0" rIns="0" tIns="0" bIns="0">
-            <a:spAutoFit/>
-          </a:bodyPr>
-          <a:lstStyle/>
-          <a:p>
-            <a:pPr algn="l">
-              <a:lnSpc>
-                <a:spcPct val="115000"/>
-              </a:lnSpc>
-            </a:pPr>
-            <a:r>
-              <a:rPr sz="1450" b="0" i="0">
+            <a:endParaRPr/>
+          </a:p>
+        </p:txBody>
+      </p:sp>
+      <p:sp>
+        <p:nvSpPr>
+          <p:cNvPr id="6" name="Rounded Rectangle 5"/>
+          <p:cNvSpPr/>
+          <p:nvPr/>
+        </p:nvSpPr>
+        <p:spPr>
+          <a:xfrm>
+            <a:off x="609600" y="1267968"/>
+            <a:ext cx="6644640" cy="4210050"/>
+          </a:xfrm>
+          <a:prstGeom prst="roundRect">
+            <a:avLst>
+              <a:gd name="adj" fmla="val 3000"/>
+            </a:avLst>
+          </a:prstGeom>
+          <a:solidFill>
+            <a:srgbClr val="15191F"/>
+          </a:solidFill>
+          <a:ln w="15875">
+            <a:solidFill>
+              <a:srgbClr val="C9A45C"/>
+            </a:solidFill>
+          </a:ln>
+          <a:effectLst/>
+        </p:spPr>
+        <p:style>
+          <a:lnRef idx="1">
+            <a:schemeClr val="accent1"/>
+          </a:lnRef>
+          <a:fillRef idx="3">
+            <a:schemeClr val="accent1"/>
+          </a:fillRef>
+          <a:effectRef idx="2">
+            <a:schemeClr val="accent1"/>
+          </a:effectRef>
+          <a:fontRef idx="minor">
+            <a:schemeClr val="lt1"/>
+          </a:fontRef>
+        </p:style>
+        <p:txBody>
+          <a:bodyPr rtlCol="0" anchor="ctr"/>
+          <a:lstStyle/>
+          <a:p>
+            <a:pPr algn="ctr"/>
+            <a:endParaRPr/>
+          </a:p>
+        </p:txBody>
+      </p:sp>
+      <p:pic>
+        <p:nvPicPr>
+          <p:cNvPr id="7" name="Picture 6" descr="01-login-invitado.png"/>
+          <p:cNvPicPr>
+            <a:picLocks noChangeAspect="1"/>
+          </p:cNvPicPr>
+          <p:nvPr/>
+        </p:nvPicPr>
+        <p:blipFill>
+          <a:blip r:embed="rId3"/>
+          <a:stretch>
+            <a:fillRect/>
+          </a:stretch>
+        </p:blipFill>
+        <p:spPr>
+          <a:xfrm>
+            <a:off x="685800" y="1344168"/>
+            <a:ext cx="6492240" cy="4057650"/>
+          </a:xfrm>
+          <a:prstGeom prst="rect">
+            <a:avLst/>
+          </a:prstGeom>
+        </p:spPr>
+      </p:pic>
+      <p:sp>
+        <p:nvSpPr>
+          <p:cNvPr id="8" name="TextBox 7"/>
+          <p:cNvSpPr txBox="1"/>
+          <p:nvPr/>
+        </p:nvSpPr>
+        <p:spPr>
+          <a:xfrm>
+            <a:off x="7543800" y="1344168"/>
+            <a:ext cx="3962095" cy="4206240"/>
+          </a:xfrm>
+          <a:prstGeom prst="rect">
+            <a:avLst/>
+          </a:prstGeom>
+          <a:noFill/>
+        </p:spPr>
+        <p:txBody>
+          <a:bodyPr wrap="square" lIns="0" tIns="0" rIns="0" bIns="0">
+            <a:spAutoFit/>
+          </a:bodyPr>
+          <a:lstStyle/>
+          <a:p>
+            <a:pPr>
+              <a:lnSpc>
+                <a:spcPct val="130000"/>
+              </a:lnSpc>
+              <a:spcAft>
+                <a:spcPts val="400"/>
+              </a:spcAft>
+            </a:pPr>
+            <a:r>
+              <a:rPr sz="1350" b="1">
+                <a:solidFill>
+                  <a:srgbClr val="C9A45C"/>
+                </a:solidFill>
+                <a:latin typeface="Space Grotesk"/>
+              </a:rPr>
+              <a:t>▪  </a:t>
+            </a:r>
+            <a:r>
+              <a:rPr sz="1350" b="1">
+                <a:solidFill>
+                  <a:srgbClr val="E7E9ED"/>
+                </a:solidFill>
+                <a:latin typeface="Space Grotesk"/>
+              </a:rPr>
+              <a:t>Sin registro.</a:t>
+            </a:r>
+            <a:r>
+              <a:rPr sz="1350">
                 <a:solidFill>
                   <a:srgbClr val="99A0AB"/>
                 </a:solidFill>
                 <a:latin typeface="Space Grotesk"/>
               </a:rPr>
-              <a:t>Demo real sobre el entorno desplegado en Azure — modo invitado y modo administrador</a:t>
-            </a:r>
-          </a:p>
-        </p:txBody>
-      </p:sp>
-      <p:sp>
-        <p:nvSpPr>
-          <p:cNvPr id="7" name="TextBox 6"/>
+              <a:t> cualquier visitante entra con “Continue as guest”, sin crear cuenta.</a:t>
+            </a:r>
+          </a:p>
+          <a:p>
+            <a:pPr>
+              <a:lnSpc>
+                <a:spcPct val="130000"/>
+              </a:lnSpc>
+              <a:spcAft>
+                <a:spcPts val="400"/>
+              </a:spcAft>
+            </a:pPr>
+            <a:r>
+              <a:rPr sz="1350" b="1">
+                <a:solidFill>
+                  <a:srgbClr val="C9A45C"/>
+                </a:solidFill>
+                <a:latin typeface="Space Grotesk"/>
+              </a:rPr>
+              <a:t>▪  </a:t>
+            </a:r>
+            <a:r>
+              <a:rPr sz="1350" b="1">
+                <a:solidFill>
+                  <a:srgbClr val="E7E9ED"/>
+                </a:solidFill>
+                <a:latin typeface="Space Grotesk"/>
+              </a:rPr>
+              <a:t>Usuario real del sistema.</a:t>
+            </a:r>
+            <a:r>
+              <a:rPr sz="1350">
+                <a:solidFill>
+                  <a:srgbClr val="99A0AB"/>
+                </a:solidFill>
+                <a:latin typeface="Space Grotesk"/>
+              </a:rPr>
+              <a:t> un guest recibe el rol Investor por defecto, con datos propios y aislados.</a:t>
+            </a:r>
+          </a:p>
+          <a:p>
+            <a:pPr>
+              <a:lnSpc>
+                <a:spcPct val="130000"/>
+              </a:lnSpc>
+              <a:spcAft>
+                <a:spcPts val="400"/>
+              </a:spcAft>
+            </a:pPr>
+            <a:r>
+              <a:rPr sz="1350" b="1">
+                <a:solidFill>
+                  <a:srgbClr val="C9A45C"/>
+                </a:solidFill>
+                <a:latin typeface="Space Grotesk"/>
+              </a:rPr>
+              <a:t>▪  </a:t>
+            </a:r>
+            <a:r>
+              <a:rPr sz="1350" b="1">
+                <a:solidFill>
+                  <a:srgbClr val="E7E9ED"/>
+                </a:solidFill>
+                <a:latin typeface="Space Grotesk"/>
+              </a:rPr>
+              <a:t>Uso previsto.</a:t>
+            </a:r>
+            <a:r>
+              <a:rPr sz="1350">
+                <a:solidFill>
+                  <a:srgbClr val="99A0AB"/>
+                </a:solidFill>
+                <a:latin typeface="Space Grotesk"/>
+              </a:rPr>
+              <a:t> demos, evaluación académica u onboarding sin fricción antes de registrarse.</a:t>
+            </a:r>
+          </a:p>
+        </p:txBody>
+      </p:sp>
+      <p:sp>
+        <p:nvSpPr>
+          <p:cNvPr id="9" name="TextBox 8"/>
           <p:cNvSpPr txBox="1"/>
           <p:nvPr/>
         </p:nvSpPr>
@@ -26117,7 +26197,7 @@
           <a:noFill/>
         </p:spPr>
         <p:txBody>
-          <a:bodyPr wrap="square" anchor="t" lIns="0" rIns="0" tIns="0" bIns="0">
+          <a:bodyPr wrap="square" lIns="0" tIns="0" rIns="0" bIns="0" anchor="t">
             <a:spAutoFit/>
           </a:bodyPr>
           <a:lstStyle/>
@@ -26141,7 +26221,7 @@
       </p:sp>
       <p:sp>
         <p:nvSpPr>
-          <p:cNvPr id="8" name="TextBox 7"/>
+          <p:cNvPr id="10" name="TextBox 9"/>
           <p:cNvSpPr txBox="1"/>
           <p:nvPr/>
         </p:nvSpPr>
@@ -26156,7 +26236,7 @@
           <a:noFill/>
         </p:spPr>
         <p:txBody>
-          <a:bodyPr wrap="square" anchor="t" lIns="0" rIns="0" tIns="0" bIns="0">
+          <a:bodyPr wrap="square" lIns="0" tIns="0" rIns="0" bIns="0" anchor="t">
             <a:spAutoFit/>
           </a:bodyPr>
           <a:lstStyle/>
@@ -26180,7 +26260,7 @@
       </p:sp>
       <p:sp>
         <p:nvSpPr>
-          <p:cNvPr id="9" name="TextBox 8"/>
+          <p:cNvPr id="11" name="TextBox 10"/>
           <p:cNvSpPr txBox="1"/>
           <p:nvPr/>
         </p:nvSpPr>
@@ -26195,7 +26275,7 @@
           <a:noFill/>
         </p:spPr>
         <p:txBody>
-          <a:bodyPr wrap="square" anchor="t" lIns="0" rIns="0" tIns="0" bIns="0">
+          <a:bodyPr wrap="square" lIns="0" tIns="0" rIns="0" bIns="0" anchor="t">
             <a:spAutoFit/>
           </a:bodyPr>
           <a:lstStyle/>
@@ -26212,14 +26292,14 @@
                 </a:solidFill>
                 <a:latin typeface="JetBrains Mono"/>
               </a:rPr>
-              <a:t>32</a:t>
-            </a:r>
-          </a:p>
-        </p:txBody>
-      </p:sp>
-      <p:sp>
-        <p:nvSpPr>
-          <p:cNvPr id="10" name="Rectangle 9"/>
+              <a:t>33</a:t>
+            </a:r>
+          </a:p>
+        </p:txBody>
+      </p:sp>
+      <p:sp>
+        <p:nvSpPr>
+          <p:cNvPr id="12" name="Rectangle 11"/>
           <p:cNvSpPr/>
           <p:nvPr/>
         </p:nvSpPr>
@@ -26258,6 +26338,7 @@
           <a:lstStyle/>
           <a:p>
             <a:pPr algn="ctr"/>
+            <a:endParaRPr/>
           </a:p>
         </p:txBody>
       </p:sp>
@@ -26270,7 +26351,7 @@
 </file>
 
 <file path=ppt/slides/slide34.xml><?xml version="1.0" encoding="utf-8"?>
-<p:sld xmlns:a="http://schemas.openxmlformats.org/drawingml/2006/main" xmlns:p="http://schemas.openxmlformats.org/presentationml/2006/main" xmlns:r="http://schemas.openxmlformats.org/officeDocument/2006/relationships">
+<p:sld xmlns:a="http://schemas.openxmlformats.org/drawingml/2006/main" xmlns:r="http://schemas.openxmlformats.org/officeDocument/2006/relationships" xmlns:p="http://schemas.openxmlformats.org/presentationml/2006/main">
   <p:cSld>
     <p:spTree>
       <p:nvGrpSpPr>
@@ -26278,7 +26359,14 @@
         <p:cNvGrpSpPr/>
         <p:nvPr/>
       </p:nvGrpSpPr>
-      <p:grpSpPr/>
+      <p:grpSpPr>
+        <a:xfrm>
+          <a:off x="0" y="0"/>
+          <a:ext cx="0" cy="0"/>
+          <a:chOff x="0" y="0"/>
+          <a:chExt cx="0" cy="0"/>
+        </a:xfrm>
+      </p:grpSpPr>
       <p:sp>
         <p:nvSpPr>
           <p:cNvPr id="2" name="Rectangle 1"/>
@@ -26320,6 +26408,7 @@
           <a:lstStyle/>
           <a:p>
             <a:pPr algn="ctr"/>
+            <a:endParaRPr/>
           </a:p>
         </p:txBody>
       </p:sp>
@@ -26340,7 +26429,7 @@
           <a:noFill/>
         </p:spPr>
         <p:txBody>
-          <a:bodyPr wrap="square" anchor="t" lIns="0" rIns="0" tIns="0" bIns="0">
+          <a:bodyPr wrap="square" lIns="0" tIns="0" rIns="0" bIns="0" anchor="t">
             <a:spAutoFit/>
           </a:bodyPr>
           <a:lstStyle/>
@@ -26379,7 +26468,7 @@
           <a:noFill/>
         </p:spPr>
         <p:txBody>
-          <a:bodyPr wrap="square" anchor="t" lIns="0" rIns="0" tIns="0" bIns="0">
+          <a:bodyPr wrap="square" lIns="0" tIns="0" rIns="0" bIns="0" anchor="t">
             <a:spAutoFit/>
           </a:bodyPr>
           <a:lstStyle/>
@@ -26396,7 +26485,7 @@
                 </a:solidFill>
                 <a:latin typeface="Space Grotesk"/>
               </a:rPr>
-              <a:t>Acceso sin fricción: modo invitado</a:t>
+              <a:t>Primera cartera en segundos</a:t>
             </a:r>
           </a:p>
         </p:txBody>
@@ -26442,6 +26531,7 @@
           <a:lstStyle/>
           <a:p>
             <a:pPr algn="ctr"/>
+            <a:endParaRPr/>
           </a:p>
         </p:txBody>
       </p:sp>
@@ -26453,8 +26543,8 @@
         </p:nvSpPr>
         <p:spPr>
           <a:xfrm>
-            <a:off x="609600" y="1267968"/>
-            <a:ext cx="6644640" cy="4210050"/>
+            <a:off x="696468" y="1267968"/>
+            <a:ext cx="5053584" cy="3215640"/>
           </a:xfrm>
           <a:prstGeom prst="roundRect">
             <a:avLst>
@@ -26490,12 +26580,13 @@
           <a:lstStyle/>
           <a:p>
             <a:pPr algn="ctr"/>
+            <a:endParaRPr/>
           </a:p>
         </p:txBody>
       </p:sp>
       <p:pic>
         <p:nvPicPr>
-          <p:cNvPr id="7" name="Picture 6" descr="01-login-invitado.png"/>
+          <p:cNvPr id="7" name="Picture 6" descr="03-crear-cartera-formulario.png"/>
           <p:cNvPicPr>
             <a:picLocks noChangeAspect="1"/>
           </p:cNvPicPr>
@@ -26509,8 +26600,8 @@
         </p:blipFill>
         <p:spPr>
           <a:xfrm>
-            <a:off x="685800" y="1344168"/>
-            <a:ext cx="6492240" cy="4057650"/>
+            <a:off x="772668" y="1344168"/>
+            <a:ext cx="4901184" cy="3063240"/>
           </a:xfrm>
           <a:prstGeom prst="rect">
             <a:avLst/>
@@ -26525,30 +26616,181 @@
         </p:nvSpPr>
         <p:spPr>
           <a:xfrm>
-            <a:off x="7543800" y="1344168"/>
-            <a:ext cx="3962095" cy="4206240"/>
-          </a:xfrm>
-          <a:prstGeom prst="rect">
-            <a:avLst/>
-          </a:prstGeom>
-          <a:noFill/>
-        </p:spPr>
-        <p:txBody>
-          <a:bodyPr wrap="square" lIns="0" rIns="0" tIns="0" bIns="0">
+            <a:off x="696468" y="4538472"/>
+            <a:ext cx="5053584" cy="274320"/>
+          </a:xfrm>
+          <a:prstGeom prst="rect">
+            <a:avLst/>
+          </a:prstGeom>
+          <a:noFill/>
+        </p:spPr>
+        <p:txBody>
+          <a:bodyPr wrap="square" lIns="0" tIns="0" rIns="0" bIns="0" anchor="t">
+            <a:spAutoFit/>
+          </a:bodyPr>
+          <a:lstStyle/>
+          <a:p>
+            <a:pPr algn="ctr">
+              <a:lnSpc>
+                <a:spcPct val="115000"/>
+              </a:lnSpc>
+            </a:pPr>
+            <a:r>
+              <a:rPr sz="1050" b="0" i="0">
+                <a:solidFill>
+                  <a:srgbClr val="5C6472"/>
+                </a:solidFill>
+                <a:latin typeface="JetBrains Mono"/>
+              </a:rPr>
+              <a:t>Crear cartera — nombre y moneda base</a:t>
+            </a:r>
+          </a:p>
+        </p:txBody>
+      </p:sp>
+      <p:sp>
+        <p:nvSpPr>
+          <p:cNvPr id="9" name="Rounded Rectangle 8"/>
+          <p:cNvSpPr/>
+          <p:nvPr/>
+        </p:nvSpPr>
+        <p:spPr>
+          <a:xfrm>
+            <a:off x="6091428" y="1267968"/>
+            <a:ext cx="5053584" cy="3215640"/>
+          </a:xfrm>
+          <a:prstGeom prst="roundRect">
+            <a:avLst>
+              <a:gd name="adj" fmla="val 3000"/>
+            </a:avLst>
+          </a:prstGeom>
+          <a:solidFill>
+            <a:srgbClr val="15191F"/>
+          </a:solidFill>
+          <a:ln w="15875">
+            <a:solidFill>
+              <a:srgbClr val="C9A45C"/>
+            </a:solidFill>
+          </a:ln>
+          <a:effectLst/>
+        </p:spPr>
+        <p:style>
+          <a:lnRef idx="1">
+            <a:schemeClr val="accent1"/>
+          </a:lnRef>
+          <a:fillRef idx="3">
+            <a:schemeClr val="accent1"/>
+          </a:fillRef>
+          <a:effectRef idx="2">
+            <a:schemeClr val="accent1"/>
+          </a:effectRef>
+          <a:fontRef idx="minor">
+            <a:schemeClr val="lt1"/>
+          </a:fontRef>
+        </p:style>
+        <p:txBody>
+          <a:bodyPr rtlCol="0" anchor="ctr"/>
+          <a:lstStyle/>
+          <a:p>
+            <a:pPr algn="ctr"/>
+            <a:endParaRPr/>
+          </a:p>
+        </p:txBody>
+      </p:sp>
+      <p:pic>
+        <p:nvPicPr>
+          <p:cNvPr id="10" name="Picture 9" descr="03-dashboard-vacio.png"/>
+          <p:cNvPicPr>
+            <a:picLocks noChangeAspect="1"/>
+          </p:cNvPicPr>
+          <p:nvPr/>
+        </p:nvPicPr>
+        <p:blipFill>
+          <a:blip r:embed="rId3"/>
+          <a:stretch>
+            <a:fillRect/>
+          </a:stretch>
+        </p:blipFill>
+        <p:spPr>
+          <a:xfrm>
+            <a:off x="6167628" y="1344168"/>
+            <a:ext cx="4901184" cy="3063240"/>
+          </a:xfrm>
+          <a:prstGeom prst="rect">
+            <a:avLst/>
+          </a:prstGeom>
+        </p:spPr>
+      </p:pic>
+      <p:sp>
+        <p:nvSpPr>
+          <p:cNvPr id="11" name="TextBox 10"/>
+          <p:cNvSpPr txBox="1"/>
+          <p:nvPr/>
+        </p:nvSpPr>
+        <p:spPr>
+          <a:xfrm>
+            <a:off x="6091428" y="4538472"/>
+            <a:ext cx="5053584" cy="274320"/>
+          </a:xfrm>
+          <a:prstGeom prst="rect">
+            <a:avLst/>
+          </a:prstGeom>
+          <a:noFill/>
+        </p:spPr>
+        <p:txBody>
+          <a:bodyPr wrap="square" lIns="0" tIns="0" rIns="0" bIns="0" anchor="t">
+            <a:spAutoFit/>
+          </a:bodyPr>
+          <a:lstStyle/>
+          <a:p>
+            <a:pPr algn="ctr">
+              <a:lnSpc>
+                <a:spcPct val="115000"/>
+              </a:lnSpc>
+            </a:pPr>
+            <a:r>
+              <a:rPr sz="1050" b="0" i="0">
+                <a:solidFill>
+                  <a:srgbClr val="5C6472"/>
+                </a:solidFill>
+                <a:latin typeface="JetBrains Mono"/>
+              </a:rPr>
+              <a:t>Dashboard vacío con KPIs a la espera del primer activo</a:t>
+            </a:r>
+          </a:p>
+        </p:txBody>
+      </p:sp>
+      <p:sp>
+        <p:nvSpPr>
+          <p:cNvPr id="12" name="TextBox 11"/>
+          <p:cNvSpPr txBox="1"/>
+          <p:nvPr/>
+        </p:nvSpPr>
+        <p:spPr>
+          <a:xfrm>
+            <a:off x="685800" y="5001768"/>
+            <a:ext cx="10607040" cy="1188720"/>
+          </a:xfrm>
+          <a:prstGeom prst="rect">
+            <a:avLst/>
+          </a:prstGeom>
+          <a:noFill/>
+        </p:spPr>
+        <p:txBody>
+          <a:bodyPr wrap="square" lIns="0" tIns="0" rIns="0" bIns="0">
             <a:spAutoFit/>
           </a:bodyPr>
           <a:lstStyle/>
           <a:p>
             <a:pPr>
               <a:lnSpc>
-                <a:spcPct val="130000"/>
+                <a:spcPct val="125000"/>
               </a:lnSpc>
               <a:spcAft>
                 <a:spcPts val="400"/>
               </a:spcAft>
             </a:pPr>
             <a:r>
-              <a:rPr sz="1350" b="1">
+              <a:rPr sz="1300" b="1">
                 <a:solidFill>
                   <a:srgbClr val="C9A45C"/>
                 </a:solidFill>
@@ -26557,35 +26799,35 @@
               <a:t>▪  </a:t>
             </a:r>
             <a:r>
-              <a:rPr sz="1350" b="1">
+              <a:rPr sz="1300" b="1">
                 <a:solidFill>
                   <a:srgbClr val="E7E9ED"/>
                 </a:solidFill>
                 <a:latin typeface="Space Grotesk"/>
               </a:rPr>
-              <a:t>Sin registro.</a:t>
-            </a:r>
-            <a:r>
-              <a:rPr sz="1350">
+              <a:t>Ruteo post-login inteligente.</a:t>
+            </a:r>
+            <a:r>
+              <a:rPr sz="1300">
                 <a:solidFill>
                   <a:srgbClr val="99A0AB"/>
                 </a:solidFill>
                 <a:latin typeface="Space Grotesk"/>
               </a:rPr>
-              <a:t> cualquier visitante entra con “Continue as guest”, sin crear cuenta.</a:t>
+              <a:t> 0 carteras → formulario de creación directo, sin pasos de más.</a:t>
             </a:r>
           </a:p>
           <a:p>
             <a:pPr>
               <a:lnSpc>
-                <a:spcPct val="130000"/>
+                <a:spcPct val="125000"/>
               </a:lnSpc>
               <a:spcAft>
                 <a:spcPts val="400"/>
               </a:spcAft>
             </a:pPr>
             <a:r>
-              <a:rPr sz="1350" b="1">
+              <a:rPr sz="1300" b="1">
                 <a:solidFill>
                   <a:srgbClr val="C9A45C"/>
                 </a:solidFill>
@@ -26594,35 +26836,35 @@
               <a:t>▪  </a:t>
             </a:r>
             <a:r>
-              <a:rPr sz="1350" b="1">
+              <a:rPr sz="1300" b="1">
                 <a:solidFill>
                   <a:srgbClr val="E7E9ED"/>
                 </a:solidFill>
                 <a:latin typeface="Space Grotesk"/>
               </a:rPr>
-              <a:t>Usuario real del sistema.</a:t>
-            </a:r>
-            <a:r>
-              <a:rPr sz="1350">
+              <a:t>Moneda base por cartera.</a:t>
+            </a:r>
+            <a:r>
+              <a:rPr sz="1300">
                 <a:solidFill>
                   <a:srgbClr val="99A0AB"/>
                 </a:solidFill>
                 <a:latin typeface="Space Grotesk"/>
               </a:rPr>
-              <a:t> un guest recibe el rol Investor por defecto (Spec D11) con datos propios y aislados.</a:t>
+              <a:t> aquí EUR; cada cartera puede tener la suya propia.</a:t>
             </a:r>
           </a:p>
           <a:p>
             <a:pPr>
               <a:lnSpc>
-                <a:spcPct val="130000"/>
+                <a:spcPct val="125000"/>
               </a:lnSpc>
               <a:spcAft>
                 <a:spcPts val="400"/>
               </a:spcAft>
             </a:pPr>
             <a:r>
-              <a:rPr sz="1350" b="1">
+              <a:rPr sz="1300" b="1">
                 <a:solidFill>
                   <a:srgbClr val="C9A45C"/>
                 </a:solidFill>
@@ -26631,29 +26873,29 @@
               <a:t>▪  </a:t>
             </a:r>
             <a:r>
-              <a:rPr sz="1350" b="1">
+              <a:rPr sz="1300" b="1">
                 <a:solidFill>
                   <a:srgbClr val="E7E9ED"/>
                 </a:solidFill>
                 <a:latin typeface="Space Grotesk"/>
               </a:rPr>
-              <a:t>Uso previsto.</a:t>
-            </a:r>
-            <a:r>
-              <a:rPr sz="1350">
+              <a:t>Estado honesto.</a:t>
+            </a:r>
+            <a:r>
+              <a:rPr sz="1300">
                 <a:solidFill>
                   <a:srgbClr val="99A0AB"/>
                 </a:solidFill>
                 <a:latin typeface="Space Grotesk"/>
               </a:rPr>
-              <a:t> demos, evaluación académica u onboarding sin fricción antes de registrarse.</a:t>
-            </a:r>
-          </a:p>
-        </p:txBody>
-      </p:sp>
-      <p:sp>
-        <p:nvSpPr>
-          <p:cNvPr id="9" name="TextBox 8"/>
+              <a:t> la franja de KPIs (TWR, CAGR, Drawdown, Volatilidad, Sharpe) muestra “se calculará al cierre” en vez de datos falsos.</a:t>
+            </a:r>
+          </a:p>
+        </p:txBody>
+      </p:sp>
+      <p:sp>
+        <p:nvSpPr>
+          <p:cNvPr id="13" name="TextBox 12"/>
           <p:cNvSpPr txBox="1"/>
           <p:nvPr/>
         </p:nvSpPr>
@@ -26668,7 +26910,7 @@
           <a:noFill/>
         </p:spPr>
         <p:txBody>
-          <a:bodyPr wrap="square" anchor="t" lIns="0" rIns="0" tIns="0" bIns="0">
+          <a:bodyPr wrap="square" lIns="0" tIns="0" rIns="0" bIns="0" anchor="t">
             <a:spAutoFit/>
           </a:bodyPr>
           <a:lstStyle/>
@@ -26692,7 +26934,7 @@
       </p:sp>
       <p:sp>
         <p:nvSpPr>
-          <p:cNvPr id="10" name="TextBox 9"/>
+          <p:cNvPr id="14" name="TextBox 13"/>
           <p:cNvSpPr txBox="1"/>
           <p:nvPr/>
         </p:nvSpPr>
@@ -26707,7 +26949,7 @@
           <a:noFill/>
         </p:spPr>
         <p:txBody>
-          <a:bodyPr wrap="square" anchor="t" lIns="0" rIns="0" tIns="0" bIns="0">
+          <a:bodyPr wrap="square" lIns="0" tIns="0" rIns="0" bIns="0" anchor="t">
             <a:spAutoFit/>
           </a:bodyPr>
           <a:lstStyle/>
@@ -26731,7 +26973,7 @@
       </p:sp>
       <p:sp>
         <p:nvSpPr>
-          <p:cNvPr id="11" name="TextBox 10"/>
+          <p:cNvPr id="15" name="TextBox 14"/>
           <p:cNvSpPr txBox="1"/>
           <p:nvPr/>
         </p:nvSpPr>
@@ -26746,7 +26988,7 @@
           <a:noFill/>
         </p:spPr>
         <p:txBody>
-          <a:bodyPr wrap="square" anchor="t" lIns="0" rIns="0" tIns="0" bIns="0">
+          <a:bodyPr wrap="square" lIns="0" tIns="0" rIns="0" bIns="0" anchor="t">
             <a:spAutoFit/>
           </a:bodyPr>
           <a:lstStyle/>
@@ -26763,14 +27005,14 @@
                 </a:solidFill>
                 <a:latin typeface="JetBrains Mono"/>
               </a:rPr>
-              <a:t>33</a:t>
-            </a:r>
-          </a:p>
-        </p:txBody>
-      </p:sp>
-      <p:sp>
-        <p:nvSpPr>
-          <p:cNvPr id="12" name="Rectangle 11"/>
+              <a:t>34</a:t>
+            </a:r>
+          </a:p>
+        </p:txBody>
+      </p:sp>
+      <p:sp>
+        <p:nvSpPr>
+          <p:cNvPr id="16" name="Rectangle 15"/>
           <p:cNvSpPr/>
           <p:nvPr/>
         </p:nvSpPr>
@@ -26809,6 +27051,7 @@
           <a:lstStyle/>
           <a:p>
             <a:pPr algn="ctr"/>
+            <a:endParaRPr/>
           </a:p>
         </p:txBody>
       </p:sp>
@@ -26821,7 +27064,7 @@
 </file>
 
 <file path=ppt/slides/slide35.xml><?xml version="1.0" encoding="utf-8"?>
-<p:sld xmlns:a="http://schemas.openxmlformats.org/drawingml/2006/main" xmlns:p="http://schemas.openxmlformats.org/presentationml/2006/main" xmlns:r="http://schemas.openxmlformats.org/officeDocument/2006/relationships">
+<p:sld xmlns:a="http://schemas.openxmlformats.org/drawingml/2006/main" xmlns:r="http://schemas.openxmlformats.org/officeDocument/2006/relationships" xmlns:p="http://schemas.openxmlformats.org/presentationml/2006/main">
   <p:cSld>
     <p:spTree>
       <p:nvGrpSpPr>
@@ -26829,7 +27072,14 @@
         <p:cNvGrpSpPr/>
         <p:nvPr/>
       </p:nvGrpSpPr>
-      <p:grpSpPr/>
+      <p:grpSpPr>
+        <a:xfrm>
+          <a:off x="0" y="0"/>
+          <a:ext cx="0" cy="0"/>
+          <a:chOff x="0" y="0"/>
+          <a:chExt cx="0" cy="0"/>
+        </a:xfrm>
+      </p:grpSpPr>
       <p:sp>
         <p:nvSpPr>
           <p:cNvPr id="2" name="Rectangle 1"/>
@@ -26871,6 +27121,7 @@
           <a:lstStyle/>
           <a:p>
             <a:pPr algn="ctr"/>
+            <a:endParaRPr/>
           </a:p>
         </p:txBody>
       </p:sp>
@@ -26891,7 +27142,7 @@
           <a:noFill/>
         </p:spPr>
         <p:txBody>
-          <a:bodyPr wrap="square" anchor="t" lIns="0" rIns="0" tIns="0" bIns="0">
+          <a:bodyPr wrap="square" lIns="0" tIns="0" rIns="0" bIns="0" anchor="t">
             <a:spAutoFit/>
           </a:bodyPr>
           <a:lstStyle/>
@@ -26930,7 +27181,7 @@
           <a:noFill/>
         </p:spPr>
         <p:txBody>
-          <a:bodyPr wrap="square" anchor="t" lIns="0" rIns="0" tIns="0" bIns="0">
+          <a:bodyPr wrap="square" lIns="0" tIns="0" rIns="0" bIns="0" anchor="t">
             <a:spAutoFit/>
           </a:bodyPr>
           <a:lstStyle/>
@@ -26947,7 +27198,7 @@
                 </a:solidFill>
                 <a:latin typeface="Space Grotesk"/>
               </a:rPr>
-              <a:t>Primera cartera en segundos</a:t>
+              <a:t>Añadir un activo con datos de mercado reales</a:t>
             </a:r>
           </a:p>
         </p:txBody>
@@ -26993,6 +27244,7 @@
           <a:lstStyle/>
           <a:p>
             <a:pPr algn="ctr"/>
+            <a:endParaRPr/>
           </a:p>
         </p:txBody>
       </p:sp>
@@ -27041,12 +27293,13 @@
           <a:lstStyle/>
           <a:p>
             <a:pPr algn="ctr"/>
+            <a:endParaRPr/>
           </a:p>
         </p:txBody>
       </p:sp>
       <p:pic>
         <p:nvPicPr>
-          <p:cNvPr id="7" name="Picture 6" descr="03-crear-cartera-formulario.png"/>
+          <p:cNvPr id="7" name="Picture 6" descr="04-anadir-activo-formulario.png"/>
           <p:cNvPicPr>
             <a:picLocks noChangeAspect="1"/>
           </p:cNvPicPr>
@@ -27085,7 +27338,7 @@
           <a:noFill/>
         </p:spPr>
         <p:txBody>
-          <a:bodyPr wrap="square" anchor="t" lIns="0" rIns="0" tIns="0" bIns="0">
+          <a:bodyPr wrap="square" lIns="0" tIns="0" rIns="0" bIns="0" anchor="t">
             <a:spAutoFit/>
           </a:bodyPr>
           <a:lstStyle/>
@@ -27102,7 +27355,7 @@
                 </a:solidFill>
                 <a:latin typeface="JetBrains Mono"/>
               </a:rPr>
-              <a:t>Crear cartera — nombre y moneda base</a:t>
+              <a:t>Formulario de alta con buscador de ticker</a:t>
             </a:r>
           </a:p>
         </p:txBody>
@@ -27152,12 +27405,13 @@
           <a:lstStyle/>
           <a:p>
             <a:pPr algn="ctr"/>
+            <a:endParaRPr/>
           </a:p>
         </p:txBody>
       </p:sp>
       <p:pic>
         <p:nvPicPr>
-          <p:cNvPr id="10" name="Picture 9" descr="03-dashboard-vacio.png"/>
+          <p:cNvPr id="10" name="Picture 9" descr="05-anadir-activo-busqueda.png"/>
           <p:cNvPicPr>
             <a:picLocks noChangeAspect="1"/>
           </p:cNvPicPr>
@@ -27196,7 +27450,7 @@
           <a:noFill/>
         </p:spPr>
         <p:txBody>
-          <a:bodyPr wrap="square" anchor="t" lIns="0" rIns="0" tIns="0" bIns="0">
+          <a:bodyPr wrap="square" lIns="0" tIns="0" rIns="0" bIns="0" anchor="t">
             <a:spAutoFit/>
           </a:bodyPr>
           <a:lstStyle/>
@@ -27213,7 +27467,7 @@
                 </a:solidFill>
                 <a:latin typeface="JetBrains Mono"/>
               </a:rPr>
-              <a:t>Dashboard vacío con KPIs a la espera del primer activo</a:t>
+              <a:t>Autocompletado en vivo contra la cascada de proveedores</a:t>
             </a:r>
           </a:p>
         </p:txBody>
@@ -27235,7 +27489,7 @@
           <a:noFill/>
         </p:spPr>
         <p:txBody>
-          <a:bodyPr wrap="square" lIns="0" rIns="0" tIns="0" bIns="0">
+          <a:bodyPr wrap="square" lIns="0" tIns="0" rIns="0" bIns="0">
             <a:spAutoFit/>
           </a:bodyPr>
           <a:lstStyle/>
@@ -27264,7 +27518,7 @@
                 </a:solidFill>
                 <a:latin typeface="Space Grotesk"/>
               </a:rPr>
-              <a:t>Ruteo post-login inteligente.</a:t>
+              <a:t>Búsqueda en vivo.</a:t>
             </a:r>
             <a:r>
               <a:rPr sz="1300">
@@ -27273,7 +27527,7 @@
                 </a:solidFill>
                 <a:latin typeface="Space Grotesk"/>
               </a:rPr>
-              <a:t> 0 carteras → formulario de creación directo (Spec D02 §10), sin pasos de más.</a:t>
+              <a:t> el campo de ticker llama al primer proveedor de la cascada (Twelve Data) en tiempo real.</a:t>
             </a:r>
           </a:p>
           <a:p>
@@ -27301,7 +27555,7 @@
                 </a:solidFill>
                 <a:latin typeface="Space Grotesk"/>
               </a:rPr>
-              <a:t>Moneda base por cartera.</a:t>
+              <a:t>Alta + primer lote en un solo paso.</a:t>
             </a:r>
             <a:r>
               <a:rPr sz="1300">
@@ -27310,7 +27564,7 @@
                 </a:solidFill>
                 <a:latin typeface="Space Grotesk"/>
               </a:rPr>
-              <a:t> aquí EUR; cada cartera puede tener la suya propia.</a:t>
+              <a:t> se registra el activo y su primera compra juntos.</a:t>
             </a:r>
           </a:p>
           <a:p>
@@ -27332,22 +27586,13 @@
               <a:t>▪  </a:t>
             </a:r>
             <a:r>
-              <a:rPr sz="1300" b="1">
-                <a:solidFill>
-                  <a:srgbClr val="E7E9ED"/>
-                </a:solidFill>
-                <a:latin typeface="Space Grotesk"/>
-              </a:rPr>
-              <a:t>Estado honesto.</a:t>
-            </a:r>
-            <a:r>
               <a:rPr sz="1300">
                 <a:solidFill>
                   <a:srgbClr val="99A0AB"/>
                 </a:solidFill>
                 <a:latin typeface="Space Grotesk"/>
               </a:rPr>
-              <a:t> la franja de KPIs (TWR, CAGR, Drawdown, Volatilidad, Sharpe) muestra “se calculará al cierre” en vez de datos falsos.</a:t>
+              <a:t>Esta captura corresponde al entorno de Azure en producción — no es un mock ni datos de prueba.</a:t>
             </a:r>
           </a:p>
         </p:txBody>
@@ -27369,7 +27614,7 @@
           <a:noFill/>
         </p:spPr>
         <p:txBody>
-          <a:bodyPr wrap="square" anchor="t" lIns="0" rIns="0" tIns="0" bIns="0">
+          <a:bodyPr wrap="square" lIns="0" tIns="0" rIns="0" bIns="0" anchor="t">
             <a:spAutoFit/>
           </a:bodyPr>
           <a:lstStyle/>
@@ -27408,7 +27653,7 @@
           <a:noFill/>
         </p:spPr>
         <p:txBody>
-          <a:bodyPr wrap="square" anchor="t" lIns="0" rIns="0" tIns="0" bIns="0">
+          <a:bodyPr wrap="square" lIns="0" tIns="0" rIns="0" bIns="0" anchor="t">
             <a:spAutoFit/>
           </a:bodyPr>
           <a:lstStyle/>
@@ -27447,7 +27692,7 @@
           <a:noFill/>
         </p:spPr>
         <p:txBody>
-          <a:bodyPr wrap="square" anchor="t" lIns="0" rIns="0" tIns="0" bIns="0">
+          <a:bodyPr wrap="square" lIns="0" tIns="0" rIns="0" bIns="0" anchor="t">
             <a:spAutoFit/>
           </a:bodyPr>
           <a:lstStyle/>
@@ -27464,7 +27709,7 @@
                 </a:solidFill>
                 <a:latin typeface="JetBrains Mono"/>
               </a:rPr>
-              <a:t>34</a:t>
+              <a:t>35</a:t>
             </a:r>
           </a:p>
         </p:txBody>
@@ -27510,6 +27755,7 @@
           <a:lstStyle/>
           <a:p>
             <a:pPr algn="ctr"/>
+            <a:endParaRPr/>
           </a:p>
         </p:txBody>
       </p:sp>
@@ -27522,7 +27768,7 @@
 </file>
 
 <file path=ppt/slides/slide36.xml><?xml version="1.0" encoding="utf-8"?>
-<p:sld xmlns:a="http://schemas.openxmlformats.org/drawingml/2006/main" xmlns:p="http://schemas.openxmlformats.org/presentationml/2006/main" xmlns:r="http://schemas.openxmlformats.org/officeDocument/2006/relationships">
+<p:sld xmlns:a="http://schemas.openxmlformats.org/drawingml/2006/main" xmlns:r="http://schemas.openxmlformats.org/officeDocument/2006/relationships" xmlns:p="http://schemas.openxmlformats.org/presentationml/2006/main">
   <p:cSld>
     <p:spTree>
       <p:nvGrpSpPr>
@@ -27530,7 +27776,14 @@
         <p:cNvGrpSpPr/>
         <p:nvPr/>
       </p:nvGrpSpPr>
-      <p:grpSpPr/>
+      <p:grpSpPr>
+        <a:xfrm>
+          <a:off x="0" y="0"/>
+          <a:ext cx="0" cy="0"/>
+          <a:chOff x="0" y="0"/>
+          <a:chExt cx="0" cy="0"/>
+        </a:xfrm>
+      </p:grpSpPr>
       <p:sp>
         <p:nvSpPr>
           <p:cNvPr id="2" name="Rectangle 1"/>
@@ -27572,6 +27825,7 @@
           <a:lstStyle/>
           <a:p>
             <a:pPr algn="ctr"/>
+            <a:endParaRPr/>
           </a:p>
         </p:txBody>
       </p:sp>
@@ -27592,7 +27846,7 @@
           <a:noFill/>
         </p:spPr>
         <p:txBody>
-          <a:bodyPr wrap="square" anchor="t" lIns="0" rIns="0" tIns="0" bIns="0">
+          <a:bodyPr wrap="square" lIns="0" tIns="0" rIns="0" bIns="0" anchor="t">
             <a:spAutoFit/>
           </a:bodyPr>
           <a:lstStyle/>
@@ -27631,7 +27885,7 @@
           <a:noFill/>
         </p:spPr>
         <p:txBody>
-          <a:bodyPr wrap="square" anchor="t" lIns="0" rIns="0" tIns="0" bIns="0">
+          <a:bodyPr wrap="square" lIns="0" tIns="0" rIns="0" bIns="0" anchor="t">
             <a:spAutoFit/>
           </a:bodyPr>
           <a:lstStyle/>
@@ -27648,7 +27902,7 @@
                 </a:solidFill>
                 <a:latin typeface="Space Grotesk"/>
               </a:rPr>
-              <a:t>Añadir un activo con datos de mercado reales</a:t>
+              <a:t>Activo dado de alta: AAPL con precio de mercado real</a:t>
             </a:r>
           </a:p>
         </p:txBody>
@@ -27694,6 +27948,7 @@
           <a:lstStyle/>
           <a:p>
             <a:pPr algn="ctr"/>
+            <a:endParaRPr/>
           </a:p>
         </p:txBody>
       </p:sp>
@@ -27705,8 +27960,8 @@
         </p:nvSpPr>
         <p:spPr>
           <a:xfrm>
-            <a:off x="696468" y="1267968"/>
-            <a:ext cx="5053584" cy="3215640"/>
+            <a:off x="609600" y="1267968"/>
+            <a:ext cx="6644640" cy="4210050"/>
           </a:xfrm>
           <a:prstGeom prst="roundRect">
             <a:avLst>
@@ -27742,12 +27997,13 @@
           <a:lstStyle/>
           <a:p>
             <a:pPr algn="ctr"/>
+            <a:endParaRPr/>
           </a:p>
         </p:txBody>
       </p:sp>
       <p:pic>
         <p:nvPicPr>
-          <p:cNvPr id="7" name="Picture 6" descr="04-anadir-activo-formulario.png"/>
+          <p:cNvPr id="7" name="Picture 6" descr="07-dashboard-con-activo.png"/>
           <p:cNvPicPr>
             <a:picLocks noChangeAspect="1"/>
           </p:cNvPicPr>
@@ -27761,8 +28017,8 @@
         </p:blipFill>
         <p:spPr>
           <a:xfrm>
-            <a:off x="772668" y="1344168"/>
-            <a:ext cx="4901184" cy="3063240"/>
+            <a:off x="685800" y="1344168"/>
+            <a:ext cx="6492240" cy="4057650"/>
           </a:xfrm>
           <a:prstGeom prst="rect">
             <a:avLst/>
@@ -27777,47 +28033,470 @@
         </p:nvSpPr>
         <p:spPr>
           <a:xfrm>
-            <a:off x="696468" y="4538472"/>
-            <a:ext cx="5053584" cy="274320"/>
-          </a:xfrm>
-          <a:prstGeom prst="rect">
-            <a:avLst/>
-          </a:prstGeom>
-          <a:noFill/>
-        </p:spPr>
-        <p:txBody>
-          <a:bodyPr wrap="square" anchor="t" lIns="0" rIns="0" tIns="0" bIns="0">
-            <a:spAutoFit/>
-          </a:bodyPr>
-          <a:lstStyle/>
-          <a:p>
-            <a:pPr algn="ctr">
+            <a:off x="7543800" y="1344168"/>
+            <a:ext cx="3962095" cy="4206240"/>
+          </a:xfrm>
+          <a:prstGeom prst="rect">
+            <a:avLst/>
+          </a:prstGeom>
+          <a:noFill/>
+        </p:spPr>
+        <p:txBody>
+          <a:bodyPr wrap="square" lIns="0" tIns="0" rIns="0" bIns="0">
+            <a:spAutoFit/>
+          </a:bodyPr>
+          <a:lstStyle/>
+          <a:p>
+            <a:pPr>
+              <a:lnSpc>
+                <a:spcPct val="130000"/>
+              </a:lnSpc>
+              <a:spcAft>
+                <a:spcPts val="400"/>
+              </a:spcAft>
+            </a:pPr>
+            <a:r>
+              <a:rPr sz="1350" b="1">
+                <a:solidFill>
+                  <a:srgbClr val="C9A45C"/>
+                </a:solidFill>
+                <a:latin typeface="Space Grotesk"/>
+              </a:rPr>
+              <a:t>▪  </a:t>
+            </a:r>
+            <a:r>
+              <a:rPr sz="1350">
+                <a:solidFill>
+                  <a:srgbClr val="99A0AB"/>
+                </a:solidFill>
+                <a:latin typeface="Space Grotesk"/>
+              </a:rPr>
+              <a:t>Apple Inc. (NASDAQ) añadido con 10 unidades a 150 USD/unidad</a:t>
+            </a:r>
+          </a:p>
+          <a:p>
+            <a:pPr>
+              <a:lnSpc>
+                <a:spcPct val="130000"/>
+              </a:lnSpc>
+              <a:spcAft>
+                <a:spcPts val="400"/>
+              </a:spcAft>
+            </a:pPr>
+            <a:r>
+              <a:rPr sz="1350" b="1">
+                <a:solidFill>
+                  <a:srgbClr val="C9A45C"/>
+                </a:solidFill>
+                <a:latin typeface="Space Grotesk"/>
+              </a:rPr>
+              <a:t>▪  </a:t>
+            </a:r>
+            <a:r>
+              <a:rPr sz="1350">
+                <a:solidFill>
+                  <a:srgbClr val="99A0AB"/>
+                </a:solidFill>
+                <a:latin typeface="Space Grotesk"/>
+              </a:rPr>
+              <a:t>El valor de mercado y el P&amp;L se recalculan con el precio vivo obtenido de la cascada</a:t>
+            </a:r>
+          </a:p>
+          <a:p>
+            <a:pPr>
+              <a:lnSpc>
+                <a:spcPct val="130000"/>
+              </a:lnSpc>
+              <a:spcAft>
+                <a:spcPts val="400"/>
+              </a:spcAft>
+            </a:pPr>
+            <a:r>
+              <a:rPr sz="1350" b="1">
+                <a:solidFill>
+                  <a:srgbClr val="C9A45C"/>
+                </a:solidFill>
+                <a:latin typeface="Space Grotesk"/>
+              </a:rPr>
+              <a:t>▪  </a:t>
+            </a:r>
+            <a:r>
+              <a:rPr sz="1350">
+                <a:solidFill>
+                  <a:srgbClr val="99A0AB"/>
+                </a:solidFill>
+                <a:latin typeface="Space Grotesk"/>
+              </a:rPr>
+              <a:t>Holdings listados en formato monoespaciado — herencia visual del tema Terminal</a:t>
+            </a:r>
+          </a:p>
+        </p:txBody>
+      </p:sp>
+      <p:sp>
+        <p:nvSpPr>
+          <p:cNvPr id="9" name="TextBox 8"/>
+          <p:cNvSpPr txBox="1"/>
+          <p:nvPr/>
+        </p:nvSpPr>
+        <p:spPr>
+          <a:xfrm>
+            <a:off x="685800" y="6473952"/>
+            <a:ext cx="5486400" cy="274320"/>
+          </a:xfrm>
+          <a:prstGeom prst="rect">
+            <a:avLst/>
+          </a:prstGeom>
+          <a:noFill/>
+        </p:spPr>
+        <p:txBody>
+          <a:bodyPr wrap="square" lIns="0" tIns="0" rIns="0" bIns="0" anchor="t">
+            <a:spAutoFit/>
+          </a:bodyPr>
+          <a:lstStyle/>
+          <a:p>
+            <a:pPr algn="l">
               <a:lnSpc>
                 <a:spcPct val="115000"/>
               </a:lnSpc>
             </a:pPr>
             <a:r>
-              <a:rPr sz="1050" b="0" i="0">
+              <a:rPr sz="850" b="0" i="0">
                 <a:solidFill>
                   <a:srgbClr val="5C6472"/>
                 </a:solidFill>
                 <a:latin typeface="JetBrains Mono"/>
               </a:rPr>
-              <a:t>Formulario de alta con buscador de ticker</a:t>
-            </a:r>
-          </a:p>
-        </p:txBody>
-      </p:sp>
-      <p:sp>
-        <p:nvSpPr>
-          <p:cNvPr id="9" name="Rounded Rectangle 8"/>
+              <a:t>TFM BIGSCHOOL · GESTIÓN DE CARTERA FINANCIERA CON IA</a:t>
+            </a:r>
+          </a:p>
+        </p:txBody>
+      </p:sp>
+      <p:sp>
+        <p:nvSpPr>
+          <p:cNvPr id="10" name="TextBox 9"/>
+          <p:cNvSpPr txBox="1"/>
+          <p:nvPr/>
+        </p:nvSpPr>
+        <p:spPr>
+          <a:xfrm>
+            <a:off x="5943600" y="6473952"/>
+            <a:ext cx="4389120" cy="274320"/>
+          </a:xfrm>
+          <a:prstGeom prst="rect">
+            <a:avLst/>
+          </a:prstGeom>
+          <a:noFill/>
+        </p:spPr>
+        <p:txBody>
+          <a:bodyPr wrap="square" lIns="0" tIns="0" rIns="0" bIns="0" anchor="t">
+            <a:spAutoFit/>
+          </a:bodyPr>
+          <a:lstStyle/>
+          <a:p>
+            <a:pPr algn="r">
+              <a:lnSpc>
+                <a:spcPct val="115000"/>
+              </a:lnSpc>
+            </a:pPr>
+            <a:r>
+              <a:rPr sz="850" b="0" i="0">
+                <a:solidFill>
+                  <a:srgbClr val="5C6472"/>
+                </a:solidFill>
+                <a:latin typeface="JetBrains Mono"/>
+              </a:rPr>
+              <a:t>09 · RECORRIDO — INVITADO</a:t>
+            </a:r>
+          </a:p>
+        </p:txBody>
+      </p:sp>
+      <p:sp>
+        <p:nvSpPr>
+          <p:cNvPr id="11" name="TextBox 10"/>
+          <p:cNvSpPr txBox="1"/>
+          <p:nvPr/>
+        </p:nvSpPr>
+        <p:spPr>
+          <a:xfrm>
+            <a:off x="11475720" y="6473952"/>
+            <a:ext cx="548640" cy="274320"/>
+          </a:xfrm>
+          <a:prstGeom prst="rect">
+            <a:avLst/>
+          </a:prstGeom>
+          <a:noFill/>
+        </p:spPr>
+        <p:txBody>
+          <a:bodyPr wrap="square" lIns="0" tIns="0" rIns="0" bIns="0" anchor="t">
+            <a:spAutoFit/>
+          </a:bodyPr>
+          <a:lstStyle/>
+          <a:p>
+            <a:pPr algn="r">
+              <a:lnSpc>
+                <a:spcPct val="115000"/>
+              </a:lnSpc>
+            </a:pPr>
+            <a:r>
+              <a:rPr sz="850" b="0" i="0">
+                <a:solidFill>
+                  <a:srgbClr val="C9A45C"/>
+                </a:solidFill>
+                <a:latin typeface="JetBrains Mono"/>
+              </a:rPr>
+              <a:t>36</a:t>
+            </a:r>
+          </a:p>
+        </p:txBody>
+      </p:sp>
+      <p:sp>
+        <p:nvSpPr>
+          <p:cNvPr id="12" name="Rectangle 11"/>
           <p:cNvSpPr/>
           <p:nvPr/>
         </p:nvSpPr>
         <p:spPr>
           <a:xfrm>
-            <a:off x="6091428" y="1267968"/>
-            <a:ext cx="5053584" cy="3215640"/>
+            <a:off x="685800" y="6400800"/>
+            <a:ext cx="10817352" cy="9525"/>
+          </a:xfrm>
+          <a:prstGeom prst="rect">
+            <a:avLst/>
+          </a:prstGeom>
+          <a:solidFill>
+            <a:srgbClr val="1D222B"/>
+          </a:solidFill>
+          <a:ln>
+            <a:noFill/>
+          </a:ln>
+          <a:effectLst/>
+        </p:spPr>
+        <p:style>
+          <a:lnRef idx="1">
+            <a:schemeClr val="accent1"/>
+          </a:lnRef>
+          <a:fillRef idx="3">
+            <a:schemeClr val="accent1"/>
+          </a:fillRef>
+          <a:effectRef idx="2">
+            <a:schemeClr val="accent1"/>
+          </a:effectRef>
+          <a:fontRef idx="minor">
+            <a:schemeClr val="lt1"/>
+          </a:fontRef>
+        </p:style>
+        <p:txBody>
+          <a:bodyPr rtlCol="0" anchor="ctr"/>
+          <a:lstStyle/>
+          <a:p>
+            <a:pPr algn="ctr"/>
+            <a:endParaRPr/>
+          </a:p>
+        </p:txBody>
+      </p:sp>
+    </p:spTree>
+  </p:cSld>
+  <p:clrMapOvr>
+    <a:masterClrMapping/>
+  </p:clrMapOvr>
+</p:sld>
+</file>
+
+<file path=ppt/slides/slide37.xml><?xml version="1.0" encoding="utf-8"?>
+<p:sld xmlns:a="http://schemas.openxmlformats.org/drawingml/2006/main" xmlns:r="http://schemas.openxmlformats.org/officeDocument/2006/relationships" xmlns:p="http://schemas.openxmlformats.org/presentationml/2006/main">
+  <p:cSld>
+    <p:spTree>
+      <p:nvGrpSpPr>
+        <p:cNvPr id="1" name=""/>
+        <p:cNvGrpSpPr/>
+        <p:nvPr/>
+      </p:nvGrpSpPr>
+      <p:grpSpPr>
+        <a:xfrm>
+          <a:off x="0" y="0"/>
+          <a:ext cx="0" cy="0"/>
+          <a:chOff x="0" y="0"/>
+          <a:chExt cx="0" cy="0"/>
+        </a:xfrm>
+      </p:grpSpPr>
+      <p:sp>
+        <p:nvSpPr>
+          <p:cNvPr id="2" name="Rectangle 1"/>
+          <p:cNvSpPr/>
+          <p:nvPr/>
+        </p:nvSpPr>
+        <p:spPr>
+          <a:xfrm>
+            <a:off x="0" y="0"/>
+            <a:ext cx="12191695" cy="6858000"/>
+          </a:xfrm>
+          <a:prstGeom prst="rect">
+            <a:avLst/>
+          </a:prstGeom>
+          <a:solidFill>
+            <a:srgbClr val="08090B"/>
+          </a:solidFill>
+          <a:ln>
+            <a:noFill/>
+          </a:ln>
+          <a:effectLst/>
+        </p:spPr>
+        <p:style>
+          <a:lnRef idx="1">
+            <a:schemeClr val="accent1"/>
+          </a:lnRef>
+          <a:fillRef idx="3">
+            <a:schemeClr val="accent1"/>
+          </a:fillRef>
+          <a:effectRef idx="2">
+            <a:schemeClr val="accent1"/>
+          </a:effectRef>
+          <a:fontRef idx="minor">
+            <a:schemeClr val="lt1"/>
+          </a:fontRef>
+        </p:style>
+        <p:txBody>
+          <a:bodyPr rtlCol="0" anchor="ctr"/>
+          <a:lstStyle/>
+          <a:p>
+            <a:pPr algn="ctr"/>
+            <a:endParaRPr/>
+          </a:p>
+        </p:txBody>
+      </p:sp>
+      <p:sp>
+        <p:nvSpPr>
+          <p:cNvPr id="3" name="TextBox 2"/>
+          <p:cNvSpPr txBox="1"/>
+          <p:nvPr/>
+        </p:nvSpPr>
+        <p:spPr>
+          <a:xfrm>
+            <a:off x="685800" y="411480"/>
+            <a:ext cx="10789920" cy="320040"/>
+          </a:xfrm>
+          <a:prstGeom prst="rect">
+            <a:avLst/>
+          </a:prstGeom>
+          <a:noFill/>
+        </p:spPr>
+        <p:txBody>
+          <a:bodyPr wrap="square" lIns="0" tIns="0" rIns="0" bIns="0" anchor="t">
+            <a:spAutoFit/>
+          </a:bodyPr>
+          <a:lstStyle/>
+          <a:p>
+            <a:pPr algn="l">
+              <a:lnSpc>
+                <a:spcPct val="115000"/>
+              </a:lnSpc>
+            </a:pPr>
+            <a:r>
+              <a:rPr sz="1250" b="1" i="0">
+                <a:solidFill>
+                  <a:srgbClr val="C9A45C"/>
+                </a:solidFill>
+                <a:latin typeface="JetBrains Mono"/>
+              </a:rPr>
+              <a:t>09 · RECORRIDO — INVITADO</a:t>
+            </a:r>
+          </a:p>
+        </p:txBody>
+      </p:sp>
+      <p:sp>
+        <p:nvSpPr>
+          <p:cNvPr id="4" name="TextBox 3"/>
+          <p:cNvSpPr txBox="1"/>
+          <p:nvPr/>
+        </p:nvSpPr>
+        <p:spPr>
+          <a:xfrm>
+            <a:off x="685800" y="704088"/>
+            <a:ext cx="10789920" cy="548640"/>
+          </a:xfrm>
+          <a:prstGeom prst="rect">
+            <a:avLst/>
+          </a:prstGeom>
+          <a:noFill/>
+        </p:spPr>
+        <p:txBody>
+          <a:bodyPr wrap="square" lIns="0" tIns="0" rIns="0" bIns="0" anchor="t">
+            <a:spAutoFit/>
+          </a:bodyPr>
+          <a:lstStyle/>
+          <a:p>
+            <a:pPr algn="l">
+              <a:lnSpc>
+                <a:spcPct val="115000"/>
+              </a:lnSpc>
+            </a:pPr>
+            <a:r>
+              <a:rPr sz="2400" b="1" i="0">
+                <a:solidFill>
+                  <a:srgbClr val="E7E9ED"/>
+                </a:solidFill>
+                <a:latin typeface="Space Grotesk"/>
+              </a:rPr>
+              <a:t>Ficha del activo: indicadores técnicos y fundamentales</a:t>
+            </a:r>
+          </a:p>
+        </p:txBody>
+      </p:sp>
+      <p:sp>
+        <p:nvSpPr>
+          <p:cNvPr id="5" name="Rectangle 4"/>
+          <p:cNvSpPr/>
+          <p:nvPr/>
+        </p:nvSpPr>
+        <p:spPr>
+          <a:xfrm>
+            <a:off x="685800" y="1197864"/>
+            <a:ext cx="457200" cy="38100"/>
+          </a:xfrm>
+          <a:prstGeom prst="rect">
+            <a:avLst/>
+          </a:prstGeom>
+          <a:solidFill>
+            <a:srgbClr val="C9A45C"/>
+          </a:solidFill>
+          <a:ln>
+            <a:noFill/>
+          </a:ln>
+          <a:effectLst/>
+        </p:spPr>
+        <p:style>
+          <a:lnRef idx="1">
+            <a:schemeClr val="accent1"/>
+          </a:lnRef>
+          <a:fillRef idx="3">
+            <a:schemeClr val="accent1"/>
+          </a:fillRef>
+          <a:effectRef idx="2">
+            <a:schemeClr val="accent1"/>
+          </a:effectRef>
+          <a:fontRef idx="minor">
+            <a:schemeClr val="lt1"/>
+          </a:fontRef>
+        </p:style>
+        <p:txBody>
+          <a:bodyPr rtlCol="0" anchor="ctr"/>
+          <a:lstStyle/>
+          <a:p>
+            <a:pPr algn="ctr"/>
+            <a:endParaRPr/>
+          </a:p>
+        </p:txBody>
+      </p:sp>
+      <p:sp>
+        <p:nvSpPr>
+          <p:cNvPr id="6" name="Rounded Rectangle 5"/>
+          <p:cNvSpPr/>
+          <p:nvPr/>
+        </p:nvSpPr>
+        <p:spPr>
+          <a:xfrm>
+            <a:off x="609600" y="1267968"/>
+            <a:ext cx="6644640" cy="4210050"/>
           </a:xfrm>
           <a:prstGeom prst="roundRect">
             <a:avLst>
@@ -27853,12 +28532,13 @@
           <a:lstStyle/>
           <a:p>
             <a:pPr algn="ctr"/>
+            <a:endParaRPr/>
           </a:p>
         </p:txBody>
       </p:sp>
       <p:pic>
         <p:nvPicPr>
-          <p:cNvPr id="10" name="Picture 9" descr="05-anadir-activo-busqueda.png"/>
+          <p:cNvPr id="7" name="Picture 6" descr="08-detalle-activo.png"/>
           <p:cNvPicPr>
             <a:picLocks noChangeAspect="1"/>
           </p:cNvPicPr>
@@ -27872,8 +28552,8 @@
         </p:blipFill>
         <p:spPr>
           <a:xfrm>
-            <a:off x="6167628" y="1344168"/>
-            <a:ext cx="4901184" cy="3063240"/>
+            <a:off x="685800" y="1344168"/>
+            <a:ext cx="6492240" cy="4057650"/>
           </a:xfrm>
           <a:prstGeom prst="rect">
             <a:avLst/>
@@ -27882,75 +28562,36 @@
       </p:pic>
       <p:sp>
         <p:nvSpPr>
-          <p:cNvPr id="11" name="TextBox 10"/>
-          <p:cNvSpPr txBox="1"/>
-          <p:nvPr/>
-        </p:nvSpPr>
-        <p:spPr>
-          <a:xfrm>
-            <a:off x="6091428" y="4538472"/>
-            <a:ext cx="5053584" cy="274320"/>
-          </a:xfrm>
-          <a:prstGeom prst="rect">
-            <a:avLst/>
-          </a:prstGeom>
-          <a:noFill/>
-        </p:spPr>
-        <p:txBody>
-          <a:bodyPr wrap="square" anchor="t" lIns="0" rIns="0" tIns="0" bIns="0">
-            <a:spAutoFit/>
-          </a:bodyPr>
-          <a:lstStyle/>
-          <a:p>
-            <a:pPr algn="ctr">
-              <a:lnSpc>
-                <a:spcPct val="115000"/>
-              </a:lnSpc>
-            </a:pPr>
-            <a:r>
-              <a:rPr sz="1050" b="0" i="0">
-                <a:solidFill>
-                  <a:srgbClr val="5C6472"/>
-                </a:solidFill>
-                <a:latin typeface="JetBrains Mono"/>
-              </a:rPr>
-              <a:t>Autocompletado en vivo contra la cascada de proveedores</a:t>
-            </a:r>
-          </a:p>
-        </p:txBody>
-      </p:sp>
-      <p:sp>
-        <p:nvSpPr>
-          <p:cNvPr id="12" name="TextBox 11"/>
-          <p:cNvSpPr txBox="1"/>
-          <p:nvPr/>
-        </p:nvSpPr>
-        <p:spPr>
-          <a:xfrm>
-            <a:off x="685800" y="5001768"/>
-            <a:ext cx="10607040" cy="1188720"/>
-          </a:xfrm>
-          <a:prstGeom prst="rect">
-            <a:avLst/>
-          </a:prstGeom>
-          <a:noFill/>
-        </p:spPr>
-        <p:txBody>
-          <a:bodyPr wrap="square" lIns="0" rIns="0" tIns="0" bIns="0">
+          <p:cNvPr id="8" name="TextBox 7"/>
+          <p:cNvSpPr txBox="1"/>
+          <p:nvPr/>
+        </p:nvSpPr>
+        <p:spPr>
+          <a:xfrm>
+            <a:off x="7543800" y="1344168"/>
+            <a:ext cx="3962095" cy="4206240"/>
+          </a:xfrm>
+          <a:prstGeom prst="rect">
+            <a:avLst/>
+          </a:prstGeom>
+          <a:noFill/>
+        </p:spPr>
+        <p:txBody>
+          <a:bodyPr wrap="square" lIns="0" tIns="0" rIns="0" bIns="0">
             <a:spAutoFit/>
           </a:bodyPr>
           <a:lstStyle/>
           <a:p>
             <a:pPr>
               <a:lnSpc>
-                <a:spcPct val="125000"/>
+                <a:spcPct val="130000"/>
               </a:lnSpc>
               <a:spcAft>
                 <a:spcPts val="400"/>
               </a:spcAft>
             </a:pPr>
             <a:r>
-              <a:rPr sz="1300" b="1">
+              <a:rPr sz="1350" b="1">
                 <a:solidFill>
                   <a:srgbClr val="C9A45C"/>
                 </a:solidFill>
@@ -27959,35 +28600,35 @@
               <a:t>▪  </a:t>
             </a:r>
             <a:r>
-              <a:rPr sz="1300" b="1">
+              <a:rPr sz="1350" b="1">
                 <a:solidFill>
                   <a:srgbClr val="E7E9ED"/>
                 </a:solidFill>
                 <a:latin typeface="Space Grotesk"/>
               </a:rPr>
-              <a:t>Búsqueda en vivo.</a:t>
-            </a:r>
-            <a:r>
-              <a:rPr sz="1300">
+              <a:t>Precio real en vivo.</a:t>
+            </a:r>
+            <a:r>
+              <a:rPr sz="1350">
                 <a:solidFill>
                   <a:srgbClr val="99A0AB"/>
                 </a:solidFill>
                 <a:latin typeface="Space Grotesk"/>
               </a:rPr>
-              <a:t> el campo de ticker llama al primer proveedor de la cascada (Twelve Data) en tiempo real (Spec D12 §5.5).</a:t>
+              <a:t> 310,66 USD → +107,11% de plusvalía no realizada sobre el coste.</a:t>
             </a:r>
           </a:p>
           <a:p>
             <a:pPr>
               <a:lnSpc>
-                <a:spcPct val="125000"/>
+                <a:spcPct val="130000"/>
               </a:lnSpc>
               <a:spcAft>
                 <a:spcPts val="400"/>
               </a:spcAft>
             </a:pPr>
             <a:r>
-              <a:rPr sz="1300" b="1">
+              <a:rPr sz="1350" b="1">
                 <a:solidFill>
                   <a:srgbClr val="C9A45C"/>
                 </a:solidFill>
@@ -27996,35 +28637,35 @@
               <a:t>▪  </a:t>
             </a:r>
             <a:r>
-              <a:rPr sz="1300" b="1">
+              <a:rPr sz="1350" b="1">
                 <a:solidFill>
                   <a:srgbClr val="E7E9ED"/>
                 </a:solidFill>
                 <a:latin typeface="Space Grotesk"/>
               </a:rPr>
-              <a:t>Alta + primer lote en un solo paso.</a:t>
-            </a:r>
-            <a:r>
-              <a:rPr sz="1300">
+              <a:t>Catálogo completo.</a:t>
+            </a:r>
+            <a:r>
+              <a:rPr sz="1350">
                 <a:solidFill>
                   <a:srgbClr val="99A0AB"/>
                 </a:solidFill>
                 <a:latin typeface="Space Grotesk"/>
               </a:rPr>
-              <a:t> se registra el activo y su primera compra juntos.</a:t>
+              <a:t> 9 indicadores (MA200, Cruce MA50/200, MACD, RSI14, RVOL, PER, ROE, Deuda/EBITDA, Crecimiento).</a:t>
             </a:r>
           </a:p>
           <a:p>
             <a:pPr>
               <a:lnSpc>
-                <a:spcPct val="125000"/>
+                <a:spcPct val="130000"/>
               </a:lnSpc>
               <a:spcAft>
                 <a:spcPts val="400"/>
               </a:spcAft>
             </a:pPr>
             <a:r>
-              <a:rPr sz="1300" b="1">
+              <a:rPr sz="1350" b="1">
                 <a:solidFill>
                   <a:srgbClr val="C9A45C"/>
                 </a:solidFill>
@@ -28033,20 +28674,57 @@
               <a:t>▪  </a:t>
             </a:r>
             <a:r>
-              <a:rPr sz="1300">
+              <a:rPr sz="1350" b="1">
+                <a:solidFill>
+                  <a:srgbClr val="E7E9ED"/>
+                </a:solidFill>
+                <a:latin typeface="Space Grotesk"/>
+              </a:rPr>
+              <a:t>Estado honesto.</a:t>
+            </a:r>
+            <a:r>
+              <a:rPr sz="1350">
                 <a:solidFill>
                   <a:srgbClr val="99A0AB"/>
                 </a:solidFill>
                 <a:latin typeface="Space Grotesk"/>
               </a:rPr>
-              <a:t>Esta captura corresponde al entorno de Azure en producción — no es un mock ni datos de prueba.</a:t>
-            </a:r>
-          </a:p>
-        </p:txBody>
-      </p:sp>
-      <p:sp>
-        <p:nvSpPr>
-          <p:cNvPr id="13" name="TextBox 12"/>
+              <a:t> marcados con “—” hasta el próximo cierre diario, nunca un valor inventado.</a:t>
+            </a:r>
+          </a:p>
+          <a:p>
+            <a:pPr>
+              <a:lnSpc>
+                <a:spcPct val="130000"/>
+              </a:lnSpc>
+              <a:spcAft>
+                <a:spcPts val="400"/>
+              </a:spcAft>
+            </a:pPr>
+            <a:r>
+              <a:rPr sz="1350" b="1">
+                <a:solidFill>
+                  <a:srgbClr val="C9A45C"/>
+                </a:solidFill>
+                <a:latin typeface="Space Grotesk"/>
+              </a:rPr>
+              <a:t>▪  </a:t>
+            </a:r>
+            <a:r>
+              <a:rPr sz="1350">
+                <a:solidFill>
+                  <a:srgbClr val="99A0AB"/>
+                </a:solidFill>
+                <a:latin typeface="Space Grotesk"/>
+              </a:rPr>
+              <a:t>Acceso directo a lotes, niveles de precio y análisis IA desde la misma pantalla</a:t>
+            </a:r>
+          </a:p>
+        </p:txBody>
+      </p:sp>
+      <p:sp>
+        <p:nvSpPr>
+          <p:cNvPr id="9" name="TextBox 8"/>
           <p:cNvSpPr txBox="1"/>
           <p:nvPr/>
         </p:nvSpPr>
@@ -28061,7 +28739,7 @@
           <a:noFill/>
         </p:spPr>
         <p:txBody>
-          <a:bodyPr wrap="square" anchor="t" lIns="0" rIns="0" tIns="0" bIns="0">
+          <a:bodyPr wrap="square" lIns="0" tIns="0" rIns="0" bIns="0" anchor="t">
             <a:spAutoFit/>
           </a:bodyPr>
           <a:lstStyle/>
@@ -28085,7 +28763,7 @@
       </p:sp>
       <p:sp>
         <p:nvSpPr>
-          <p:cNvPr id="14" name="TextBox 13"/>
+          <p:cNvPr id="10" name="TextBox 9"/>
           <p:cNvSpPr txBox="1"/>
           <p:nvPr/>
         </p:nvSpPr>
@@ -28100,7 +28778,7 @@
           <a:noFill/>
         </p:spPr>
         <p:txBody>
-          <a:bodyPr wrap="square" anchor="t" lIns="0" rIns="0" tIns="0" bIns="0">
+          <a:bodyPr wrap="square" lIns="0" tIns="0" rIns="0" bIns="0" anchor="t">
             <a:spAutoFit/>
           </a:bodyPr>
           <a:lstStyle/>
@@ -28124,7 +28802,7 @@
       </p:sp>
       <p:sp>
         <p:nvSpPr>
-          <p:cNvPr id="15" name="TextBox 14"/>
+          <p:cNvPr id="11" name="TextBox 10"/>
           <p:cNvSpPr txBox="1"/>
           <p:nvPr/>
         </p:nvSpPr>
@@ -28139,7 +28817,7 @@
           <a:noFill/>
         </p:spPr>
         <p:txBody>
-          <a:bodyPr wrap="square" anchor="t" lIns="0" rIns="0" tIns="0" bIns="0">
+          <a:bodyPr wrap="square" lIns="0" tIns="0" rIns="0" bIns="0" anchor="t">
             <a:spAutoFit/>
           </a:bodyPr>
           <a:lstStyle/>
@@ -28156,14 +28834,14 @@
                 </a:solidFill>
                 <a:latin typeface="JetBrains Mono"/>
               </a:rPr>
-              <a:t>35</a:t>
-            </a:r>
-          </a:p>
-        </p:txBody>
-      </p:sp>
-      <p:sp>
-        <p:nvSpPr>
-          <p:cNvPr id="16" name="Rectangle 15"/>
+              <a:t>37</a:t>
+            </a:r>
+          </a:p>
+        </p:txBody>
+      </p:sp>
+      <p:sp>
+        <p:nvSpPr>
+          <p:cNvPr id="12" name="Rectangle 11"/>
           <p:cNvSpPr/>
           <p:nvPr/>
         </p:nvSpPr>
@@ -28202,6 +28880,7 @@
           <a:lstStyle/>
           <a:p>
             <a:pPr algn="ctr"/>
+            <a:endParaRPr/>
           </a:p>
         </p:txBody>
       </p:sp>
@@ -28213,8 +28892,8 @@
 </p:sld>
 </file>
 
-<file path=ppt/slides/slide37.xml><?xml version="1.0" encoding="utf-8"?>
-<p:sld xmlns:a="http://schemas.openxmlformats.org/drawingml/2006/main" xmlns:p="http://schemas.openxmlformats.org/presentationml/2006/main" xmlns:r="http://schemas.openxmlformats.org/officeDocument/2006/relationships">
+<file path=ppt/slides/slide38.xml><?xml version="1.0" encoding="utf-8"?>
+<p:sld xmlns:a="http://schemas.openxmlformats.org/drawingml/2006/main" xmlns:r="http://schemas.openxmlformats.org/officeDocument/2006/relationships" xmlns:p="http://schemas.openxmlformats.org/presentationml/2006/main">
   <p:cSld>
     <p:spTree>
       <p:nvGrpSpPr>
@@ -28222,7 +28901,14 @@
         <p:cNvGrpSpPr/>
         <p:nvPr/>
       </p:nvGrpSpPr>
-      <p:grpSpPr/>
+      <p:grpSpPr>
+        <a:xfrm>
+          <a:off x="0" y="0"/>
+          <a:ext cx="0" cy="0"/>
+          <a:chOff x="0" y="0"/>
+          <a:chExt cx="0" cy="0"/>
+        </a:xfrm>
+      </p:grpSpPr>
       <p:sp>
         <p:nvSpPr>
           <p:cNvPr id="2" name="Rectangle 1"/>
@@ -28264,6 +28950,7 @@
           <a:lstStyle/>
           <a:p>
             <a:pPr algn="ctr"/>
+            <a:endParaRPr/>
           </a:p>
         </p:txBody>
       </p:sp>
@@ -28284,7 +28971,7 @@
           <a:noFill/>
         </p:spPr>
         <p:txBody>
-          <a:bodyPr wrap="square" anchor="t" lIns="0" rIns="0" tIns="0" bIns="0">
+          <a:bodyPr wrap="square" lIns="0" tIns="0" rIns="0" bIns="0" anchor="t">
             <a:spAutoFit/>
           </a:bodyPr>
           <a:lstStyle/>
@@ -28323,7 +29010,7 @@
           <a:noFill/>
         </p:spPr>
         <p:txBody>
-          <a:bodyPr wrap="square" anchor="t" lIns="0" rIns="0" tIns="0" bIns="0">
+          <a:bodyPr wrap="square" lIns="0" tIns="0" rIns="0" bIns="0" anchor="t">
             <a:spAutoFit/>
           </a:bodyPr>
           <a:lstStyle/>
@@ -28340,7 +29027,7 @@
                 </a:solidFill>
                 <a:latin typeface="Space Grotesk"/>
               </a:rPr>
-              <a:t>Activo dado de alta: AAPL con precio de mercado real</a:t>
+              <a:t>Definir un nivel de precio objetivo</a:t>
             </a:r>
           </a:p>
         </p:txBody>
@@ -28386,6 +29073,7 @@
           <a:lstStyle/>
           <a:p>
             <a:pPr algn="ctr"/>
+            <a:endParaRPr/>
           </a:p>
         </p:txBody>
       </p:sp>
@@ -28397,8 +29085,8 @@
         </p:nvSpPr>
         <p:spPr>
           <a:xfrm>
-            <a:off x="609600" y="1267968"/>
-            <a:ext cx="6644640" cy="4210050"/>
+            <a:off x="696468" y="1267968"/>
+            <a:ext cx="5053584" cy="3215640"/>
           </a:xfrm>
           <a:prstGeom prst="roundRect">
             <a:avLst>
@@ -28434,12 +29122,13 @@
           <a:lstStyle/>
           <a:p>
             <a:pPr algn="ctr"/>
+            <a:endParaRPr/>
           </a:p>
         </p:txBody>
       </p:sp>
       <p:pic>
         <p:nvPicPr>
-          <p:cNvPr id="7" name="Picture 6" descr="07-dashboard-con-activo.png"/>
+          <p:cNvPr id="7" name="Picture 6" descr="10-niveles-precio-completo.png"/>
           <p:cNvPicPr>
             <a:picLocks noChangeAspect="1"/>
           </p:cNvPicPr>
@@ -28453,8 +29142,8 @@
         </p:blipFill>
         <p:spPr>
           <a:xfrm>
-            <a:off x="685800" y="1344168"/>
-            <a:ext cx="6492240" cy="4057650"/>
+            <a:off x="772668" y="1344168"/>
+            <a:ext cx="4901184" cy="3063240"/>
           </a:xfrm>
           <a:prstGeom prst="rect">
             <a:avLst/>
@@ -28469,460 +29158,47 @@
         </p:nvSpPr>
         <p:spPr>
           <a:xfrm>
-            <a:off x="7543800" y="1344168"/>
-            <a:ext cx="3962095" cy="4206240"/>
-          </a:xfrm>
-          <a:prstGeom prst="rect">
-            <a:avLst/>
-          </a:prstGeom>
-          <a:noFill/>
-        </p:spPr>
-        <p:txBody>
-          <a:bodyPr wrap="square" lIns="0" rIns="0" tIns="0" bIns="0">
-            <a:spAutoFit/>
-          </a:bodyPr>
-          <a:lstStyle/>
-          <a:p>
-            <a:pPr>
-              <a:lnSpc>
-                <a:spcPct val="130000"/>
-              </a:lnSpc>
-              <a:spcAft>
-                <a:spcPts val="400"/>
-              </a:spcAft>
-            </a:pPr>
-            <a:r>
-              <a:rPr sz="1350" b="1">
-                <a:solidFill>
-                  <a:srgbClr val="C9A45C"/>
-                </a:solidFill>
-                <a:latin typeface="Space Grotesk"/>
-              </a:rPr>
-              <a:t>▪  </a:t>
-            </a:r>
-            <a:r>
-              <a:rPr sz="1350">
-                <a:solidFill>
-                  <a:srgbClr val="99A0AB"/>
-                </a:solidFill>
-                <a:latin typeface="Space Grotesk"/>
-              </a:rPr>
-              <a:t>Apple Inc. (NASDAQ) añadido con 10 unidades a 150 USD/unidad</a:t>
-            </a:r>
-          </a:p>
-          <a:p>
-            <a:pPr>
-              <a:lnSpc>
-                <a:spcPct val="130000"/>
-              </a:lnSpc>
-              <a:spcAft>
-                <a:spcPts val="400"/>
-              </a:spcAft>
-            </a:pPr>
-            <a:r>
-              <a:rPr sz="1350" b="1">
-                <a:solidFill>
-                  <a:srgbClr val="C9A45C"/>
-                </a:solidFill>
-                <a:latin typeface="Space Grotesk"/>
-              </a:rPr>
-              <a:t>▪  </a:t>
-            </a:r>
-            <a:r>
-              <a:rPr sz="1350">
-                <a:solidFill>
-                  <a:srgbClr val="99A0AB"/>
-                </a:solidFill>
-                <a:latin typeface="Space Grotesk"/>
-              </a:rPr>
-              <a:t>El valor de mercado y el P&amp;L se recalculan con el precio vivo obtenido de la cascada</a:t>
-            </a:r>
-          </a:p>
-          <a:p>
-            <a:pPr>
-              <a:lnSpc>
-                <a:spcPct val="130000"/>
-              </a:lnSpc>
-              <a:spcAft>
-                <a:spcPts val="400"/>
-              </a:spcAft>
-            </a:pPr>
-            <a:r>
-              <a:rPr sz="1350" b="1">
-                <a:solidFill>
-                  <a:srgbClr val="C9A45C"/>
-                </a:solidFill>
-                <a:latin typeface="Space Grotesk"/>
-              </a:rPr>
-              <a:t>▪  </a:t>
-            </a:r>
-            <a:r>
-              <a:rPr sz="1350">
-                <a:solidFill>
-                  <a:srgbClr val="99A0AB"/>
-                </a:solidFill>
-                <a:latin typeface="Space Grotesk"/>
-              </a:rPr>
-              <a:t>Holdings listados en formato monoespaciado — herencia visual del tema Terminal</a:t>
-            </a:r>
-          </a:p>
-        </p:txBody>
-      </p:sp>
-      <p:sp>
-        <p:nvSpPr>
-          <p:cNvPr id="9" name="TextBox 8"/>
-          <p:cNvSpPr txBox="1"/>
-          <p:nvPr/>
-        </p:nvSpPr>
-        <p:spPr>
-          <a:xfrm>
-            <a:off x="685800" y="6473952"/>
-            <a:ext cx="5486400" cy="274320"/>
-          </a:xfrm>
-          <a:prstGeom prst="rect">
-            <a:avLst/>
-          </a:prstGeom>
-          <a:noFill/>
-        </p:spPr>
-        <p:txBody>
-          <a:bodyPr wrap="square" anchor="t" lIns="0" rIns="0" tIns="0" bIns="0">
-            <a:spAutoFit/>
-          </a:bodyPr>
-          <a:lstStyle/>
-          <a:p>
-            <a:pPr algn="l">
+            <a:off x="696468" y="4538472"/>
+            <a:ext cx="5053584" cy="274320"/>
+          </a:xfrm>
+          <a:prstGeom prst="rect">
+            <a:avLst/>
+          </a:prstGeom>
+          <a:noFill/>
+        </p:spPr>
+        <p:txBody>
+          <a:bodyPr wrap="square" lIns="0" tIns="0" rIns="0" bIns="0" anchor="t">
+            <a:spAutoFit/>
+          </a:bodyPr>
+          <a:lstStyle/>
+          <a:p>
+            <a:pPr algn="ctr">
               <a:lnSpc>
                 <a:spcPct val="115000"/>
               </a:lnSpc>
             </a:pPr>
             <a:r>
-              <a:rPr sz="850" b="0" i="0">
+              <a:rPr sz="1050" b="0" i="0">
                 <a:solidFill>
                   <a:srgbClr val="5C6472"/>
                 </a:solidFill>
                 <a:latin typeface="JetBrains Mono"/>
               </a:rPr>
-              <a:t>TFM BIGSCHOOL · GESTIÓN DE CARTERA FINANCIERA CON IA</a:t>
-            </a:r>
-          </a:p>
-        </p:txBody>
-      </p:sp>
-      <p:sp>
-        <p:nvSpPr>
-          <p:cNvPr id="10" name="TextBox 9"/>
-          <p:cNvSpPr txBox="1"/>
-          <p:nvPr/>
-        </p:nvSpPr>
-        <p:spPr>
-          <a:xfrm>
-            <a:off x="5943600" y="6473952"/>
-            <a:ext cx="4389120" cy="274320"/>
-          </a:xfrm>
-          <a:prstGeom prst="rect">
-            <a:avLst/>
-          </a:prstGeom>
-          <a:noFill/>
-        </p:spPr>
-        <p:txBody>
-          <a:bodyPr wrap="square" anchor="t" lIns="0" rIns="0" tIns="0" bIns="0">
-            <a:spAutoFit/>
-          </a:bodyPr>
-          <a:lstStyle/>
-          <a:p>
-            <a:pPr algn="r">
-              <a:lnSpc>
-                <a:spcPct val="115000"/>
-              </a:lnSpc>
-            </a:pPr>
-            <a:r>
-              <a:rPr sz="850" b="0" i="0">
-                <a:solidFill>
-                  <a:srgbClr val="5C6472"/>
-                </a:solidFill>
-                <a:latin typeface="JetBrains Mono"/>
-              </a:rPr>
-              <a:t>09 · RECORRIDO — INVITADO</a:t>
-            </a:r>
-          </a:p>
-        </p:txBody>
-      </p:sp>
-      <p:sp>
-        <p:nvSpPr>
-          <p:cNvPr id="11" name="TextBox 10"/>
-          <p:cNvSpPr txBox="1"/>
-          <p:nvPr/>
-        </p:nvSpPr>
-        <p:spPr>
-          <a:xfrm>
-            <a:off x="11475720" y="6473952"/>
-            <a:ext cx="548640" cy="274320"/>
-          </a:xfrm>
-          <a:prstGeom prst="rect">
-            <a:avLst/>
-          </a:prstGeom>
-          <a:noFill/>
-        </p:spPr>
-        <p:txBody>
-          <a:bodyPr wrap="square" anchor="t" lIns="0" rIns="0" tIns="0" bIns="0">
-            <a:spAutoFit/>
-          </a:bodyPr>
-          <a:lstStyle/>
-          <a:p>
-            <a:pPr algn="r">
-              <a:lnSpc>
-                <a:spcPct val="115000"/>
-              </a:lnSpc>
-            </a:pPr>
-            <a:r>
-              <a:rPr sz="850" b="0" i="0">
-                <a:solidFill>
-                  <a:srgbClr val="C9A45C"/>
-                </a:solidFill>
-                <a:latin typeface="JetBrains Mono"/>
-              </a:rPr>
-              <a:t>36</a:t>
-            </a:r>
-          </a:p>
-        </p:txBody>
-      </p:sp>
-      <p:sp>
-        <p:nvSpPr>
-          <p:cNvPr id="12" name="Rectangle 11"/>
+              <a:t>Formulario: precio objetivo, dirección, notas</a:t>
+            </a:r>
+          </a:p>
+        </p:txBody>
+      </p:sp>
+      <p:sp>
+        <p:nvSpPr>
+          <p:cNvPr id="9" name="Rounded Rectangle 8"/>
           <p:cNvSpPr/>
           <p:nvPr/>
         </p:nvSpPr>
         <p:spPr>
           <a:xfrm>
-            <a:off x="685800" y="6400800"/>
-            <a:ext cx="10817352" cy="9525"/>
-          </a:xfrm>
-          <a:prstGeom prst="rect">
-            <a:avLst/>
-          </a:prstGeom>
-          <a:solidFill>
-            <a:srgbClr val="1D222B"/>
-          </a:solidFill>
-          <a:ln>
-            <a:noFill/>
-          </a:ln>
-          <a:effectLst/>
-        </p:spPr>
-        <p:style>
-          <a:lnRef idx="1">
-            <a:schemeClr val="accent1"/>
-          </a:lnRef>
-          <a:fillRef idx="3">
-            <a:schemeClr val="accent1"/>
-          </a:fillRef>
-          <a:effectRef idx="2">
-            <a:schemeClr val="accent1"/>
-          </a:effectRef>
-          <a:fontRef idx="minor">
-            <a:schemeClr val="lt1"/>
-          </a:fontRef>
-        </p:style>
-        <p:txBody>
-          <a:bodyPr rtlCol="0" anchor="ctr"/>
-          <a:lstStyle/>
-          <a:p>
-            <a:pPr algn="ctr"/>
-          </a:p>
-        </p:txBody>
-      </p:sp>
-    </p:spTree>
-  </p:cSld>
-  <p:clrMapOvr>
-    <a:masterClrMapping/>
-  </p:clrMapOvr>
-</p:sld>
-</file>
-
-<file path=ppt/slides/slide38.xml><?xml version="1.0" encoding="utf-8"?>
-<p:sld xmlns:a="http://schemas.openxmlformats.org/drawingml/2006/main" xmlns:p="http://schemas.openxmlformats.org/presentationml/2006/main" xmlns:r="http://schemas.openxmlformats.org/officeDocument/2006/relationships">
-  <p:cSld>
-    <p:spTree>
-      <p:nvGrpSpPr>
-        <p:cNvPr id="1" name=""/>
-        <p:cNvGrpSpPr/>
-        <p:nvPr/>
-      </p:nvGrpSpPr>
-      <p:grpSpPr/>
-      <p:sp>
-        <p:nvSpPr>
-          <p:cNvPr id="2" name="Rectangle 1"/>
-          <p:cNvSpPr/>
-          <p:nvPr/>
-        </p:nvSpPr>
-        <p:spPr>
-          <a:xfrm>
-            <a:off x="0" y="0"/>
-            <a:ext cx="12191695" cy="6858000"/>
-          </a:xfrm>
-          <a:prstGeom prst="rect">
-            <a:avLst/>
-          </a:prstGeom>
-          <a:solidFill>
-            <a:srgbClr val="08090B"/>
-          </a:solidFill>
-          <a:ln>
-            <a:noFill/>
-          </a:ln>
-          <a:effectLst/>
-        </p:spPr>
-        <p:style>
-          <a:lnRef idx="1">
-            <a:schemeClr val="accent1"/>
-          </a:lnRef>
-          <a:fillRef idx="3">
-            <a:schemeClr val="accent1"/>
-          </a:fillRef>
-          <a:effectRef idx="2">
-            <a:schemeClr val="accent1"/>
-          </a:effectRef>
-          <a:fontRef idx="minor">
-            <a:schemeClr val="lt1"/>
-          </a:fontRef>
-        </p:style>
-        <p:txBody>
-          <a:bodyPr rtlCol="0" anchor="ctr"/>
-          <a:lstStyle/>
-          <a:p>
-            <a:pPr algn="ctr"/>
-          </a:p>
-        </p:txBody>
-      </p:sp>
-      <p:sp>
-        <p:nvSpPr>
-          <p:cNvPr id="3" name="TextBox 2"/>
-          <p:cNvSpPr txBox="1"/>
-          <p:nvPr/>
-        </p:nvSpPr>
-        <p:spPr>
-          <a:xfrm>
-            <a:off x="685800" y="411480"/>
-            <a:ext cx="10789920" cy="320040"/>
-          </a:xfrm>
-          <a:prstGeom prst="rect">
-            <a:avLst/>
-          </a:prstGeom>
-          <a:noFill/>
-        </p:spPr>
-        <p:txBody>
-          <a:bodyPr wrap="square" anchor="t" lIns="0" rIns="0" tIns="0" bIns="0">
-            <a:spAutoFit/>
-          </a:bodyPr>
-          <a:lstStyle/>
-          <a:p>
-            <a:pPr algn="l">
-              <a:lnSpc>
-                <a:spcPct val="115000"/>
-              </a:lnSpc>
-            </a:pPr>
-            <a:r>
-              <a:rPr sz="1250" b="1" i="0">
-                <a:solidFill>
-                  <a:srgbClr val="C9A45C"/>
-                </a:solidFill>
-                <a:latin typeface="JetBrains Mono"/>
-              </a:rPr>
-              <a:t>09 · RECORRIDO — INVITADO</a:t>
-            </a:r>
-          </a:p>
-        </p:txBody>
-      </p:sp>
-      <p:sp>
-        <p:nvSpPr>
-          <p:cNvPr id="4" name="TextBox 3"/>
-          <p:cNvSpPr txBox="1"/>
-          <p:nvPr/>
-        </p:nvSpPr>
-        <p:spPr>
-          <a:xfrm>
-            <a:off x="685800" y="704088"/>
-            <a:ext cx="10789920" cy="548640"/>
-          </a:xfrm>
-          <a:prstGeom prst="rect">
-            <a:avLst/>
-          </a:prstGeom>
-          <a:noFill/>
-        </p:spPr>
-        <p:txBody>
-          <a:bodyPr wrap="square" anchor="t" lIns="0" rIns="0" tIns="0" bIns="0">
-            <a:spAutoFit/>
-          </a:bodyPr>
-          <a:lstStyle/>
-          <a:p>
-            <a:pPr algn="l">
-              <a:lnSpc>
-                <a:spcPct val="115000"/>
-              </a:lnSpc>
-            </a:pPr>
-            <a:r>
-              <a:rPr sz="2400" b="1" i="0">
-                <a:solidFill>
-                  <a:srgbClr val="E7E9ED"/>
-                </a:solidFill>
-                <a:latin typeface="Space Grotesk"/>
-              </a:rPr>
-              <a:t>Ficha del activo: indicadores técnicos y fundamentales</a:t>
-            </a:r>
-          </a:p>
-        </p:txBody>
-      </p:sp>
-      <p:sp>
-        <p:nvSpPr>
-          <p:cNvPr id="5" name="Rectangle 4"/>
-          <p:cNvSpPr/>
-          <p:nvPr/>
-        </p:nvSpPr>
-        <p:spPr>
-          <a:xfrm>
-            <a:off x="685800" y="1197864"/>
-            <a:ext cx="457200" cy="38100"/>
-          </a:xfrm>
-          <a:prstGeom prst="rect">
-            <a:avLst/>
-          </a:prstGeom>
-          <a:solidFill>
-            <a:srgbClr val="C9A45C"/>
-          </a:solidFill>
-          <a:ln>
-            <a:noFill/>
-          </a:ln>
-          <a:effectLst/>
-        </p:spPr>
-        <p:style>
-          <a:lnRef idx="1">
-            <a:schemeClr val="accent1"/>
-          </a:lnRef>
-          <a:fillRef idx="3">
-            <a:schemeClr val="accent1"/>
-          </a:fillRef>
-          <a:effectRef idx="2">
-            <a:schemeClr val="accent1"/>
-          </a:effectRef>
-          <a:fontRef idx="minor">
-            <a:schemeClr val="lt1"/>
-          </a:fontRef>
-        </p:style>
-        <p:txBody>
-          <a:bodyPr rtlCol="0" anchor="ctr"/>
-          <a:lstStyle/>
-          <a:p>
-            <a:pPr algn="ctr"/>
-          </a:p>
-        </p:txBody>
-      </p:sp>
-      <p:sp>
-        <p:nvSpPr>
-          <p:cNvPr id="6" name="Rounded Rectangle 5"/>
-          <p:cNvSpPr/>
-          <p:nvPr/>
-        </p:nvSpPr>
-        <p:spPr>
-          <a:xfrm>
-            <a:off x="609600" y="1267968"/>
-            <a:ext cx="6644640" cy="4210050"/>
+            <a:off x="6091428" y="1267968"/>
+            <a:ext cx="5053584" cy="3215640"/>
           </a:xfrm>
           <a:prstGeom prst="roundRect">
             <a:avLst>
@@ -28958,27 +29234,28 @@
           <a:lstStyle/>
           <a:p>
             <a:pPr algn="ctr"/>
+            <a:endParaRPr/>
           </a:p>
         </p:txBody>
       </p:sp>
       <p:pic>
         <p:nvPicPr>
-          <p:cNvPr id="7" name="Picture 6" descr="08-detalle-activo.png"/>
+          <p:cNvPr id="10" name="Picture 9" descr="11-niveles-precio-guardado.png"/>
           <p:cNvPicPr>
             <a:picLocks noChangeAspect="1"/>
           </p:cNvPicPr>
           <p:nvPr/>
         </p:nvPicPr>
         <p:blipFill>
-          <a:blip r:embed="rId2"/>
+          <a:blip r:embed="rId3"/>
           <a:stretch>
             <a:fillRect/>
           </a:stretch>
         </p:blipFill>
         <p:spPr>
           <a:xfrm>
-            <a:off x="685800" y="1344168"/>
-            <a:ext cx="6492240" cy="4057650"/>
+            <a:off x="6167628" y="1344168"/>
+            <a:ext cx="4901184" cy="3063240"/>
           </a:xfrm>
           <a:prstGeom prst="rect">
             <a:avLst/>
@@ -28987,36 +29264,75 @@
       </p:pic>
       <p:sp>
         <p:nvSpPr>
-          <p:cNvPr id="8" name="TextBox 7"/>
-          <p:cNvSpPr txBox="1"/>
-          <p:nvPr/>
-        </p:nvSpPr>
-        <p:spPr>
-          <a:xfrm>
-            <a:off x="7543800" y="1344168"/>
-            <a:ext cx="3962095" cy="4206240"/>
-          </a:xfrm>
-          <a:prstGeom prst="rect">
-            <a:avLst/>
-          </a:prstGeom>
-          <a:noFill/>
-        </p:spPr>
-        <p:txBody>
-          <a:bodyPr wrap="square" lIns="0" rIns="0" tIns="0" bIns="0">
+          <p:cNvPr id="11" name="TextBox 10"/>
+          <p:cNvSpPr txBox="1"/>
+          <p:nvPr/>
+        </p:nvSpPr>
+        <p:spPr>
+          <a:xfrm>
+            <a:off x="6091428" y="4538472"/>
+            <a:ext cx="5053584" cy="274320"/>
+          </a:xfrm>
+          <a:prstGeom prst="rect">
+            <a:avLst/>
+          </a:prstGeom>
+          <a:noFill/>
+        </p:spPr>
+        <p:txBody>
+          <a:bodyPr wrap="square" lIns="0" tIns="0" rIns="0" bIns="0" anchor="t">
+            <a:spAutoFit/>
+          </a:bodyPr>
+          <a:lstStyle/>
+          <a:p>
+            <a:pPr algn="ctr">
+              <a:lnSpc>
+                <a:spcPct val="115000"/>
+              </a:lnSpc>
+            </a:pPr>
+            <a:r>
+              <a:rPr sz="1050" b="0" i="0">
+                <a:solidFill>
+                  <a:srgbClr val="5C6472"/>
+                </a:solidFill>
+                <a:latin typeface="JetBrains Mono"/>
+              </a:rPr>
+              <a:t>Nivel guardado — estado Active</a:t>
+            </a:r>
+          </a:p>
+        </p:txBody>
+      </p:sp>
+      <p:sp>
+        <p:nvSpPr>
+          <p:cNvPr id="12" name="TextBox 11"/>
+          <p:cNvSpPr txBox="1"/>
+          <p:nvPr/>
+        </p:nvSpPr>
+        <p:spPr>
+          <a:xfrm>
+            <a:off x="685800" y="5001768"/>
+            <a:ext cx="10607040" cy="1188720"/>
+          </a:xfrm>
+          <a:prstGeom prst="rect">
+            <a:avLst/>
+          </a:prstGeom>
+          <a:noFill/>
+        </p:spPr>
+        <p:txBody>
+          <a:bodyPr wrap="square" lIns="0" tIns="0" rIns="0" bIns="0">
             <a:spAutoFit/>
           </a:bodyPr>
           <a:lstStyle/>
           <a:p>
             <a:pPr>
               <a:lnSpc>
-                <a:spcPct val="130000"/>
+                <a:spcPct val="125000"/>
               </a:lnSpc>
               <a:spcAft>
                 <a:spcPts val="400"/>
               </a:spcAft>
             </a:pPr>
             <a:r>
-              <a:rPr sz="1350" b="1">
+              <a:rPr sz="1300" b="1">
                 <a:solidFill>
                   <a:srgbClr val="C9A45C"/>
                 </a:solidFill>
@@ -29025,35 +29341,35 @@
               <a:t>▪  </a:t>
             </a:r>
             <a:r>
-              <a:rPr sz="1350" b="1">
+              <a:rPr sz="1300" b="1">
                 <a:solidFill>
                   <a:srgbClr val="E7E9ED"/>
                 </a:solidFill>
                 <a:latin typeface="Space Grotesk"/>
               </a:rPr>
-              <a:t>Precio real en vivo.</a:t>
-            </a:r>
-            <a:r>
-              <a:rPr sz="1350">
+              <a:t>Nivel de compra en 140 USD</a:t>
+            </a:r>
+            <a:r>
+              <a:rPr sz="1300">
                 <a:solidFill>
                   <a:srgbClr val="99A0AB"/>
                 </a:solidFill>
                 <a:latin typeface="Space Grotesk"/>
               </a:rPr>
-              <a:t> 310,66 USD → +107,11% de plusvalía no realizada sobre el coste.</a:t>
+              <a:t> con nota libre del usuario.</a:t>
             </a:r>
           </a:p>
           <a:p>
             <a:pPr>
               <a:lnSpc>
-                <a:spcPct val="130000"/>
+                <a:spcPct val="125000"/>
               </a:lnSpc>
               <a:spcAft>
                 <a:spcPts val="400"/>
               </a:spcAft>
             </a:pPr>
             <a:r>
-              <a:rPr sz="1350" b="1">
+              <a:rPr sz="1300" b="1">
                 <a:solidFill>
                   <a:srgbClr val="C9A45C"/>
                 </a:solidFill>
@@ -29062,35 +29378,35 @@
               <a:t>▪  </a:t>
             </a:r>
             <a:r>
-              <a:rPr sz="1350" b="1">
+              <a:rPr sz="1300" b="1">
                 <a:solidFill>
                   <a:srgbClr val="E7E9ED"/>
                 </a:solidFill>
                 <a:latin typeface="Space Grotesk"/>
               </a:rPr>
-              <a:t>Catálogo completo.</a:t>
-            </a:r>
-            <a:r>
-              <a:rPr sz="1350">
+              <a:t>Historial inmutable.</a:t>
+            </a:r>
+            <a:r>
+              <a:rPr sz="1300">
                 <a:solidFill>
                   <a:srgbClr val="99A0AB"/>
                 </a:solidFill>
                 <a:latin typeface="Space Grotesk"/>
               </a:rPr>
-              <a:t> 9 indicadores (MA200, Cruce MA50/200, MACD, RSI14, RVOL, PER, ROE, Deuda/EBITDA, Crecimiento).</a:t>
+              <a:t> Cada nivel definido queda registrado; no se sobrescribe.</a:t>
             </a:r>
           </a:p>
           <a:p>
             <a:pPr>
               <a:lnSpc>
-                <a:spcPct val="130000"/>
+                <a:spcPct val="125000"/>
               </a:lnSpc>
               <a:spcAft>
                 <a:spcPts val="400"/>
               </a:spcAft>
             </a:pPr>
             <a:r>
-              <a:rPr sz="1350" b="1">
+              <a:rPr sz="1300" b="1">
                 <a:solidFill>
                   <a:srgbClr val="C9A45C"/>
                 </a:solidFill>
@@ -29099,57 +29415,20 @@
               <a:t>▪  </a:t>
             </a:r>
             <a:r>
-              <a:rPr sz="1350" b="1">
-                <a:solidFill>
-                  <a:srgbClr val="E7E9ED"/>
-                </a:solidFill>
-                <a:latin typeface="Space Grotesk"/>
-              </a:rPr>
-              <a:t>Estado honesto.</a:t>
-            </a:r>
-            <a:r>
-              <a:rPr sz="1350">
+              <a:rPr sz="1300">
                 <a:solidFill>
                   <a:srgbClr val="99A0AB"/>
                 </a:solidFill>
                 <a:latin typeface="Space Grotesk"/>
               </a:rPr>
-              <a:t> marcados con “—” hasta el próximo cierre diario, nunca un valor inventado.</a:t>
-            </a:r>
-          </a:p>
-          <a:p>
-            <a:pPr>
-              <a:lnSpc>
-                <a:spcPct val="130000"/>
-              </a:lnSpc>
-              <a:spcAft>
-                <a:spcPts val="400"/>
-              </a:spcAft>
-            </a:pPr>
-            <a:r>
-              <a:rPr sz="1350" b="1">
-                <a:solidFill>
-                  <a:srgbClr val="C9A45C"/>
-                </a:solidFill>
-                <a:latin typeface="Space Grotesk"/>
-              </a:rPr>
-              <a:t>▪  </a:t>
-            </a:r>
-            <a:r>
-              <a:rPr sz="1350">
-                <a:solidFill>
-                  <a:srgbClr val="99A0AB"/>
-                </a:solidFill>
-                <a:latin typeface="Space Grotesk"/>
-              </a:rPr>
-              <a:t>Acceso directo a lotes, niveles de precio y análisis IA desde la misma pantalla</a:t>
-            </a:r>
-          </a:p>
-        </p:txBody>
-      </p:sp>
-      <p:sp>
-        <p:nvSpPr>
-          <p:cNvPr id="9" name="TextBox 8"/>
+              <a:t>El motor de alertas evaluará el cruce automáticamente en cada actualización de precio</a:t>
+            </a:r>
+          </a:p>
+        </p:txBody>
+      </p:sp>
+      <p:sp>
+        <p:nvSpPr>
+          <p:cNvPr id="13" name="TextBox 12"/>
           <p:cNvSpPr txBox="1"/>
           <p:nvPr/>
         </p:nvSpPr>
@@ -29164,7 +29443,7 @@
           <a:noFill/>
         </p:spPr>
         <p:txBody>
-          <a:bodyPr wrap="square" anchor="t" lIns="0" rIns="0" tIns="0" bIns="0">
+          <a:bodyPr wrap="square" lIns="0" tIns="0" rIns="0" bIns="0" anchor="t">
             <a:spAutoFit/>
           </a:bodyPr>
           <a:lstStyle/>
@@ -29188,7 +29467,7 @@
       </p:sp>
       <p:sp>
         <p:nvSpPr>
-          <p:cNvPr id="10" name="TextBox 9"/>
+          <p:cNvPr id="14" name="TextBox 13"/>
           <p:cNvSpPr txBox="1"/>
           <p:nvPr/>
         </p:nvSpPr>
@@ -29203,7 +29482,7 @@
           <a:noFill/>
         </p:spPr>
         <p:txBody>
-          <a:bodyPr wrap="square" anchor="t" lIns="0" rIns="0" tIns="0" bIns="0">
+          <a:bodyPr wrap="square" lIns="0" tIns="0" rIns="0" bIns="0" anchor="t">
             <a:spAutoFit/>
           </a:bodyPr>
           <a:lstStyle/>
@@ -29227,7 +29506,7 @@
       </p:sp>
       <p:sp>
         <p:nvSpPr>
-          <p:cNvPr id="11" name="TextBox 10"/>
+          <p:cNvPr id="15" name="TextBox 14"/>
           <p:cNvSpPr txBox="1"/>
           <p:nvPr/>
         </p:nvSpPr>
@@ -29242,7 +29521,7 @@
           <a:noFill/>
         </p:spPr>
         <p:txBody>
-          <a:bodyPr wrap="square" anchor="t" lIns="0" rIns="0" tIns="0" bIns="0">
+          <a:bodyPr wrap="square" lIns="0" tIns="0" rIns="0" bIns="0" anchor="t">
             <a:spAutoFit/>
           </a:bodyPr>
           <a:lstStyle/>
@@ -29259,14 +29538,14 @@
                 </a:solidFill>
                 <a:latin typeface="JetBrains Mono"/>
               </a:rPr>
-              <a:t>37</a:t>
-            </a:r>
-          </a:p>
-        </p:txBody>
-      </p:sp>
-      <p:sp>
-        <p:nvSpPr>
-          <p:cNvPr id="12" name="Rectangle 11"/>
+              <a:t>38</a:t>
+            </a:r>
+          </a:p>
+        </p:txBody>
+      </p:sp>
+      <p:sp>
+        <p:nvSpPr>
+          <p:cNvPr id="16" name="Rectangle 15"/>
           <p:cNvSpPr/>
           <p:nvPr/>
         </p:nvSpPr>
@@ -29305,6 +29584,7 @@
           <a:lstStyle/>
           <a:p>
             <a:pPr algn="ctr"/>
+            <a:endParaRPr/>
           </a:p>
         </p:txBody>
       </p:sp>
@@ -29317,7 +29597,7 @@
 </file>
 
 <file path=ppt/slides/slide39.xml><?xml version="1.0" encoding="utf-8"?>
-<p:sld xmlns:a="http://schemas.openxmlformats.org/drawingml/2006/main" xmlns:p="http://schemas.openxmlformats.org/presentationml/2006/main" xmlns:r="http://schemas.openxmlformats.org/officeDocument/2006/relationships">
+<p:sld xmlns:a="http://schemas.openxmlformats.org/drawingml/2006/main" xmlns:r="http://schemas.openxmlformats.org/officeDocument/2006/relationships" xmlns:p="http://schemas.openxmlformats.org/presentationml/2006/main">
   <p:cSld>
     <p:spTree>
       <p:nvGrpSpPr>
@@ -29325,7 +29605,14 @@
         <p:cNvGrpSpPr/>
         <p:nvPr/>
       </p:nvGrpSpPr>
-      <p:grpSpPr/>
+      <p:grpSpPr>
+        <a:xfrm>
+          <a:off x="0" y="0"/>
+          <a:ext cx="0" cy="0"/>
+          <a:chOff x="0" y="0"/>
+          <a:chExt cx="0" cy="0"/>
+        </a:xfrm>
+      </p:grpSpPr>
       <p:sp>
         <p:nvSpPr>
           <p:cNvPr id="2" name="Rectangle 1"/>
@@ -29367,6 +29654,7 @@
           <a:lstStyle/>
           <a:p>
             <a:pPr algn="ctr"/>
+            <a:endParaRPr/>
           </a:p>
         </p:txBody>
       </p:sp>
@@ -29387,7 +29675,7 @@
           <a:noFill/>
         </p:spPr>
         <p:txBody>
-          <a:bodyPr wrap="square" anchor="t" lIns="0" rIns="0" tIns="0" bIns="0">
+          <a:bodyPr wrap="square" lIns="0" tIns="0" rIns="0" bIns="0" anchor="t">
             <a:spAutoFit/>
           </a:bodyPr>
           <a:lstStyle/>
@@ -29426,7 +29714,7 @@
           <a:noFill/>
         </p:spPr>
         <p:txBody>
-          <a:bodyPr wrap="square" anchor="t" lIns="0" rIns="0" tIns="0" bIns="0">
+          <a:bodyPr wrap="square" lIns="0" tIns="0" rIns="0" bIns="0" anchor="t">
             <a:spAutoFit/>
           </a:bodyPr>
           <a:lstStyle/>
@@ -29443,7 +29731,7 @@
                 </a:solidFill>
                 <a:latin typeface="Space Grotesk"/>
               </a:rPr>
-              <a:t>Definir un nivel de precio objetivo</a:t>
+              <a:t>Guía de indicadores y análisis con IA</a:t>
             </a:r>
           </a:p>
         </p:txBody>
@@ -29489,6 +29777,7 @@
           <a:lstStyle/>
           <a:p>
             <a:pPr algn="ctr"/>
+            <a:endParaRPr/>
           </a:p>
         </p:txBody>
       </p:sp>
@@ -29537,12 +29826,13 @@
           <a:lstStyle/>
           <a:p>
             <a:pPr algn="ctr"/>
+            <a:endParaRPr/>
           </a:p>
         </p:txBody>
       </p:sp>
       <p:pic>
         <p:nvPicPr>
-          <p:cNvPr id="7" name="Picture 6" descr="10-niveles-precio-completo.png"/>
+          <p:cNvPr id="7" name="Picture 6" descr="13-guia-indicadores.png"/>
           <p:cNvPicPr>
             <a:picLocks noChangeAspect="1"/>
           </p:cNvPicPr>
@@ -29581,7 +29871,7 @@
           <a:noFill/>
         </p:spPr>
         <p:txBody>
-          <a:bodyPr wrap="square" anchor="t" lIns="0" rIns="0" tIns="0" bIns="0">
+          <a:bodyPr wrap="square" lIns="0" tIns="0" rIns="0" bIns="0" anchor="t">
             <a:spAutoFit/>
           </a:bodyPr>
           <a:lstStyle/>
@@ -29598,7 +29888,7 @@
                 </a:solidFill>
                 <a:latin typeface="JetBrains Mono"/>
               </a:rPr>
-              <a:t>Formulario: precio objetivo, dirección, notas</a:t>
+              <a:t>Catálogo de indicadores con rangos y semáforo</a:t>
             </a:r>
           </a:p>
         </p:txBody>
@@ -29648,12 +29938,13 @@
           <a:lstStyle/>
           <a:p>
             <a:pPr algn="ctr"/>
+            <a:endParaRPr/>
           </a:p>
         </p:txBody>
       </p:sp>
       <p:pic>
         <p:nvPicPr>
-          <p:cNvPr id="10" name="Picture 9" descr="11-niveles-precio-guardado.png"/>
+          <p:cNvPr id="10" name="Picture 9" descr="12-analisis-ia.png"/>
           <p:cNvPicPr>
             <a:picLocks noChangeAspect="1"/>
           </p:cNvPicPr>
@@ -29692,7 +29983,7 @@
           <a:noFill/>
         </p:spPr>
         <p:txBody>
-          <a:bodyPr wrap="square" anchor="t" lIns="0" rIns="0" tIns="0" bIns="0">
+          <a:bodyPr wrap="square" lIns="0" tIns="0" rIns="0" bIns="0" anchor="t">
             <a:spAutoFit/>
           </a:bodyPr>
           <a:lstStyle/>
@@ -29709,7 +30000,7 @@
                 </a:solidFill>
                 <a:latin typeface="JetBrains Mono"/>
               </a:rPr>
-              <a:t>Nivel guardado — estado Active</a:t>
+              <a:t>Zona de subida de informes en PDF</a:t>
             </a:r>
           </a:p>
         </p:txBody>
@@ -29731,7 +30022,7 @@
           <a:noFill/>
         </p:spPr>
         <p:txBody>
-          <a:bodyPr wrap="square" lIns="0" rIns="0" tIns="0" bIns="0">
+          <a:bodyPr wrap="square" lIns="0" tIns="0" rIns="0" bIns="0">
             <a:spAutoFit/>
           </a:bodyPr>
           <a:lstStyle/>
@@ -29760,7 +30051,7 @@
                 </a:solidFill>
                 <a:latin typeface="Space Grotesk"/>
               </a:rPr>
-              <a:t>Nivel de compra en 140 USD</a:t>
+              <a:t>Guía 100% data-driven.</a:t>
             </a:r>
             <a:r>
               <a:rPr sz="1300">
@@ -29769,7 +30060,7 @@
                 </a:solidFill>
                 <a:latin typeface="Space Grotesk"/>
               </a:rPr>
-              <a:t> con nota libre del usuario.</a:t>
+              <a:t> fórmulas y rangos verde/amarillo/rojo por indicador, cero texto embebido en código.</a:t>
             </a:r>
           </a:p>
           <a:p>
@@ -29797,7 +30088,7 @@
                 </a:solidFill>
                 <a:latin typeface="Space Grotesk"/>
               </a:rPr>
-              <a:t>Historial inmutable (Spec D06).</a:t>
+              <a:t>Análisis IA.</a:t>
             </a:r>
             <a:r>
               <a:rPr sz="1300">
@@ -29806,7 +30097,7 @@
                 </a:solidFill>
                 <a:latin typeface="Space Grotesk"/>
               </a:rPr>
-              <a:t> cada nivel definido queda registrado; no se sobrescribe.</a:t>
+              <a:t> acepta PDF de hasta 20 MB; arranca vacío hasta la primera subida.</a:t>
             </a:r>
           </a:p>
           <a:p>
@@ -29834,7 +30125,7 @@
                 </a:solidFill>
                 <a:latin typeface="Space Grotesk"/>
               </a:rPr>
-              <a:t>El motor de alertas evaluará el cruce automáticamente en cada actualización de precio</a:t>
+              <a:t>Ambas pantallas comparten el mismo header y navegación consistente</a:t>
             </a:r>
           </a:p>
         </p:txBody>
@@ -29856,7 +30147,7 @@
           <a:noFill/>
         </p:spPr>
         <p:txBody>
-          <a:bodyPr wrap="square" anchor="t" lIns="0" rIns="0" tIns="0" bIns="0">
+          <a:bodyPr wrap="square" lIns="0" tIns="0" rIns="0" bIns="0" anchor="t">
             <a:spAutoFit/>
           </a:bodyPr>
           <a:lstStyle/>
@@ -29895,7 +30186,7 @@
           <a:noFill/>
         </p:spPr>
         <p:txBody>
-          <a:bodyPr wrap="square" anchor="t" lIns="0" rIns="0" tIns="0" bIns="0">
+          <a:bodyPr wrap="square" lIns="0" tIns="0" rIns="0" bIns="0" anchor="t">
             <a:spAutoFit/>
           </a:bodyPr>
           <a:lstStyle/>
@@ -29934,7 +30225,7 @@
           <a:noFill/>
         </p:spPr>
         <p:txBody>
-          <a:bodyPr wrap="square" anchor="t" lIns="0" rIns="0" tIns="0" bIns="0">
+          <a:bodyPr wrap="square" lIns="0" tIns="0" rIns="0" bIns="0" anchor="t">
             <a:spAutoFit/>
           </a:bodyPr>
           <a:lstStyle/>
@@ -29951,7 +30242,7 @@
                 </a:solidFill>
                 <a:latin typeface="JetBrains Mono"/>
               </a:rPr>
-              <a:t>38</a:t>
+              <a:t>39</a:t>
             </a:r>
           </a:p>
         </p:txBody>
@@ -29997,6 +30288,7 @@
           <a:lstStyle/>
           <a:p>
             <a:pPr algn="ctr"/>
+            <a:endParaRPr/>
           </a:p>
         </p:txBody>
       </p:sp>
@@ -31385,7 +31677,7 @@
 </file>
 
 <file path=ppt/slides/slide40.xml><?xml version="1.0" encoding="utf-8"?>
-<p:sld xmlns:a="http://schemas.openxmlformats.org/drawingml/2006/main" xmlns:p="http://schemas.openxmlformats.org/presentationml/2006/main" xmlns:r="http://schemas.openxmlformats.org/officeDocument/2006/relationships">
+<p:sld xmlns:a="http://schemas.openxmlformats.org/drawingml/2006/main" xmlns:r="http://schemas.openxmlformats.org/officeDocument/2006/relationships" xmlns:p="http://schemas.openxmlformats.org/presentationml/2006/main">
   <p:cSld>
     <p:spTree>
       <p:nvGrpSpPr>
@@ -31393,7 +31685,14 @@
         <p:cNvGrpSpPr/>
         <p:nvPr/>
       </p:nvGrpSpPr>
-      <p:grpSpPr/>
+      <p:grpSpPr>
+        <a:xfrm>
+          <a:off x="0" y="0"/>
+          <a:ext cx="0" cy="0"/>
+          <a:chOff x="0" y="0"/>
+          <a:chExt cx="0" cy="0"/>
+        </a:xfrm>
+      </p:grpSpPr>
       <p:sp>
         <p:nvSpPr>
           <p:cNvPr id="2" name="Rectangle 1"/>
@@ -31435,6 +31734,7 @@
           <a:lstStyle/>
           <a:p>
             <a:pPr algn="ctr"/>
+            <a:endParaRPr/>
           </a:p>
         </p:txBody>
       </p:sp>
@@ -31455,7 +31755,7 @@
           <a:noFill/>
         </p:spPr>
         <p:txBody>
-          <a:bodyPr wrap="square" anchor="t" lIns="0" rIns="0" tIns="0" bIns="0">
+          <a:bodyPr wrap="square" lIns="0" tIns="0" rIns="0" bIns="0" anchor="t">
             <a:spAutoFit/>
           </a:bodyPr>
           <a:lstStyle/>
@@ -31494,7 +31794,7 @@
           <a:noFill/>
         </p:spPr>
         <p:txBody>
-          <a:bodyPr wrap="square" anchor="t" lIns="0" rIns="0" tIns="0" bIns="0">
+          <a:bodyPr wrap="square" lIns="0" tIns="0" rIns="0" bIns="0" anchor="t">
             <a:spAutoFit/>
           </a:bodyPr>
           <a:lstStyle/>
@@ -31511,7 +31811,7 @@
                 </a:solidFill>
                 <a:latin typeface="Space Grotesk"/>
               </a:rPr>
-              <a:t>Guía de indicadores y análisis con IA</a:t>
+              <a:t>Configuración: idioma, tema y datos de mercado</a:t>
             </a:r>
           </a:p>
         </p:txBody>
@@ -31557,6 +31857,7 @@
           <a:lstStyle/>
           <a:p>
             <a:pPr algn="ctr"/>
+            <a:endParaRPr/>
           </a:p>
         </p:txBody>
       </p:sp>
@@ -31605,12 +31906,13 @@
           <a:lstStyle/>
           <a:p>
             <a:pPr algn="ctr"/>
+            <a:endParaRPr/>
           </a:p>
         </p:txBody>
       </p:sp>
       <p:pic>
         <p:nvPicPr>
-          <p:cNvPr id="7" name="Picture 6" descr="13-guia-indicadores.png"/>
+          <p:cNvPr id="7" name="Picture 6" descr="15-configuracion.png"/>
           <p:cNvPicPr>
             <a:picLocks noChangeAspect="1"/>
           </p:cNvPicPr>
@@ -31649,7 +31951,7 @@
           <a:noFill/>
         </p:spPr>
         <p:txBody>
-          <a:bodyPr wrap="square" anchor="t" lIns="0" rIns="0" tIns="0" bIns="0">
+          <a:bodyPr wrap="square" lIns="0" tIns="0" rIns="0" bIns="0" anchor="t">
             <a:spAutoFit/>
           </a:bodyPr>
           <a:lstStyle/>
@@ -31666,7 +31968,7 @@
                 </a:solidFill>
                 <a:latin typeface="JetBrains Mono"/>
               </a:rPr>
-              <a:t>Catálogo de indicadores con rangos y semáforo</a:t>
+              <a:t>Panel de Configuración — tema Pastel (por defecto)</a:t>
             </a:r>
           </a:p>
         </p:txBody>
@@ -31716,12 +32018,13 @@
           <a:lstStyle/>
           <a:p>
             <a:pPr algn="ctr"/>
+            <a:endParaRPr/>
           </a:p>
         </p:txBody>
       </p:sp>
       <p:pic>
         <p:nvPicPr>
-          <p:cNvPr id="10" name="Picture 9" descr="12-analisis-ia.png"/>
+          <p:cNvPr id="10" name="Picture 9" descr="17-configuracion-tema-terminal.png"/>
           <p:cNvPicPr>
             <a:picLocks noChangeAspect="1"/>
           </p:cNvPicPr>
@@ -31760,7 +32063,7 @@
           <a:noFill/>
         </p:spPr>
         <p:txBody>
-          <a:bodyPr wrap="square" anchor="t" lIns="0" rIns="0" tIns="0" bIns="0">
+          <a:bodyPr wrap="square" lIns="0" tIns="0" rIns="0" bIns="0" anchor="t">
             <a:spAutoFit/>
           </a:bodyPr>
           <a:lstStyle/>
@@ -31777,7 +32080,7 @@
                 </a:solidFill>
                 <a:latin typeface="JetBrains Mono"/>
               </a:rPr>
-              <a:t>Zona de subida de informes en PDF</a:t>
+              <a:t>Mismo panel con el tema Terminal aplicado al instante</a:t>
             </a:r>
           </a:p>
         </p:txBody>
@@ -31799,7 +32102,7 @@
           <a:noFill/>
         </p:spPr>
         <p:txBody>
-          <a:bodyPr wrap="square" lIns="0" rIns="0" tIns="0" bIns="0">
+          <a:bodyPr wrap="square" lIns="0" tIns="0" rIns="0" bIns="0">
             <a:spAutoFit/>
           </a:bodyPr>
           <a:lstStyle/>
@@ -31828,7 +32131,7 @@
                 </a:solidFill>
                 <a:latin typeface="Space Grotesk"/>
               </a:rPr>
-              <a:t>Guía 100% data-driven.</a:t>
+              <a:t>7 temas visuales disponibles,</a:t>
             </a:r>
             <a:r>
               <a:rPr sz="1300">
@@ -31837,7 +32140,7 @@
                 </a:solidFill>
                 <a:latin typeface="Space Grotesk"/>
               </a:rPr>
-              <a:t> fórmulas y rangos verde/amarillo/rojo por indicador, cero texto embebido en código.</a:t>
+              <a:t> incluido el propio Terminal Premium de esta presentación.</a:t>
             </a:r>
           </a:p>
           <a:p>
@@ -31865,7 +32168,7 @@
                 </a:solidFill>
                 <a:latin typeface="Space Grotesk"/>
               </a:rPr>
-              <a:t>Análisis IA.</a:t>
+              <a:t>Cambio instantáneo.</a:t>
             </a:r>
             <a:r>
               <a:rPr sz="1300">
@@ -31874,7 +32177,7 @@
                 </a:solidFill>
                 <a:latin typeface="Space Grotesk"/>
               </a:rPr>
-              <a:t> acepta PDF de hasta 20 MB; arranca vacío hasta la primera subida.</a:t>
+              <a:t> se aplica y guarda sin recargar la página.</a:t>
             </a:r>
           </a:p>
           <a:p>
@@ -31902,7 +32205,7 @@
                 </a:solidFill>
                 <a:latin typeface="Space Grotesk"/>
               </a:rPr>
-              <a:t>Ambas pantallas comparten el mismo header y navegación consistente</a:t>
+              <a:t>La sección “Data providers” (cascada) permanece invisible para este usuario — solo administradores (bloque 06)</a:t>
             </a:r>
           </a:p>
         </p:txBody>
@@ -31924,7 +32227,7 @@
           <a:noFill/>
         </p:spPr>
         <p:txBody>
-          <a:bodyPr wrap="square" anchor="t" lIns="0" rIns="0" tIns="0" bIns="0">
+          <a:bodyPr wrap="square" lIns="0" tIns="0" rIns="0" bIns="0" anchor="t">
             <a:spAutoFit/>
           </a:bodyPr>
           <a:lstStyle/>
@@ -31963,7 +32266,7 @@
           <a:noFill/>
         </p:spPr>
         <p:txBody>
-          <a:bodyPr wrap="square" anchor="t" lIns="0" rIns="0" tIns="0" bIns="0">
+          <a:bodyPr wrap="square" lIns="0" tIns="0" rIns="0" bIns="0" anchor="t">
             <a:spAutoFit/>
           </a:bodyPr>
           <a:lstStyle/>
@@ -32002,7 +32305,7 @@
           <a:noFill/>
         </p:spPr>
         <p:txBody>
-          <a:bodyPr wrap="square" anchor="t" lIns="0" rIns="0" tIns="0" bIns="0">
+          <a:bodyPr wrap="square" lIns="0" tIns="0" rIns="0" bIns="0" anchor="t">
             <a:spAutoFit/>
           </a:bodyPr>
           <a:lstStyle/>
@@ -32019,7 +32322,7 @@
                 </a:solidFill>
                 <a:latin typeface="JetBrains Mono"/>
               </a:rPr>
-              <a:t>39</a:t>
+              <a:t>40</a:t>
             </a:r>
           </a:p>
         </p:txBody>
@@ -32065,6 +32368,7 @@
           <a:lstStyle/>
           <a:p>
             <a:pPr algn="ctr"/>
+            <a:endParaRPr/>
           </a:p>
         </p:txBody>
       </p:sp>
@@ -32077,7 +32381,7 @@
 </file>
 
 <file path=ppt/slides/slide41.xml><?xml version="1.0" encoding="utf-8"?>
-<p:sld xmlns:a="http://schemas.openxmlformats.org/drawingml/2006/main" xmlns:p="http://schemas.openxmlformats.org/presentationml/2006/main" xmlns:r="http://schemas.openxmlformats.org/officeDocument/2006/relationships">
+<p:sld xmlns:a="http://schemas.openxmlformats.org/drawingml/2006/main" xmlns:r="http://schemas.openxmlformats.org/officeDocument/2006/relationships" xmlns:p="http://schemas.openxmlformats.org/presentationml/2006/main">
   <p:cSld>
     <p:spTree>
       <p:nvGrpSpPr>
@@ -32085,7 +32389,14 @@
         <p:cNvGrpSpPr/>
         <p:nvPr/>
       </p:nvGrpSpPr>
-      <p:grpSpPr/>
+      <p:grpSpPr>
+        <a:xfrm>
+          <a:off x="0" y="0"/>
+          <a:ext cx="0" cy="0"/>
+          <a:chOff x="0" y="0"/>
+          <a:chExt cx="0" cy="0"/>
+        </a:xfrm>
+      </p:grpSpPr>
       <p:sp>
         <p:nvSpPr>
           <p:cNvPr id="2" name="Rectangle 1"/>
@@ -32127,6 +32438,7 @@
           <a:lstStyle/>
           <a:p>
             <a:pPr algn="ctr"/>
+            <a:endParaRPr/>
           </a:p>
         </p:txBody>
       </p:sp>
@@ -32147,7 +32459,7 @@
           <a:noFill/>
         </p:spPr>
         <p:txBody>
-          <a:bodyPr wrap="square" anchor="t" lIns="0" rIns="0" tIns="0" bIns="0">
+          <a:bodyPr wrap="square" lIns="0" tIns="0" rIns="0" bIns="0" anchor="t">
             <a:spAutoFit/>
           </a:bodyPr>
           <a:lstStyle/>
@@ -32186,7 +32498,7 @@
           <a:noFill/>
         </p:spPr>
         <p:txBody>
-          <a:bodyPr wrap="square" anchor="t" lIns="0" rIns="0" tIns="0" bIns="0">
+          <a:bodyPr wrap="square" lIns="0" tIns="0" rIns="0" bIns="0" anchor="t">
             <a:spAutoFit/>
           </a:bodyPr>
           <a:lstStyle/>
@@ -32203,7 +32515,7 @@
                 </a:solidFill>
                 <a:latin typeface="Space Grotesk"/>
               </a:rPr>
-              <a:t>Configuración: idioma, tema y datos de mercado</a:t>
+              <a:t>RBAC en acción: el invitado no puede forzar la cascada</a:t>
             </a:r>
           </a:p>
         </p:txBody>
@@ -32249,6 +32561,7 @@
           <a:lstStyle/>
           <a:p>
             <a:pPr algn="ctr"/>
+            <a:endParaRPr/>
           </a:p>
         </p:txBody>
       </p:sp>
@@ -32260,8 +32573,8 @@
         </p:nvSpPr>
         <p:spPr>
           <a:xfrm>
-            <a:off x="696468" y="1267968"/>
-            <a:ext cx="5053584" cy="3215640"/>
+            <a:off x="609600" y="1267968"/>
+            <a:ext cx="6644640" cy="4210050"/>
           </a:xfrm>
           <a:prstGeom prst="roundRect">
             <a:avLst>
@@ -32297,27 +32610,28 @@
           <a:lstStyle/>
           <a:p>
             <a:pPr algn="ctr"/>
+            <a:endParaRPr/>
           </a:p>
         </p:txBody>
       </p:sp>
       <p:pic>
         <p:nvPicPr>
-          <p:cNvPr id="7" name="Picture 6" descr="15-configuracion.png"/>
+          <p:cNvPr id="7" name="Picture 6" descr="19-actualizacion-diaria-resultado.png"/>
           <p:cNvPicPr>
             <a:picLocks noChangeAspect="1"/>
           </p:cNvPicPr>
           <p:nvPr/>
         </p:nvPicPr>
         <p:blipFill>
-          <a:blip r:embed="rId2"/>
+          <a:blip r:embed="rId3"/>
           <a:stretch>
             <a:fillRect/>
           </a:stretch>
         </p:blipFill>
         <p:spPr>
           <a:xfrm>
-            <a:off x="772668" y="1344168"/>
-            <a:ext cx="4901184" cy="3063240"/>
+            <a:off x="685800" y="1344168"/>
+            <a:ext cx="6492240" cy="4057650"/>
           </a:xfrm>
           <a:prstGeom prst="rect">
             <a:avLst/>
@@ -32332,46 +32646,487 @@
         </p:nvSpPr>
         <p:spPr>
           <a:xfrm>
-            <a:off x="696468" y="4538472"/>
-            <a:ext cx="5053584" cy="274320"/>
-          </a:xfrm>
-          <a:prstGeom prst="rect">
-            <a:avLst/>
-          </a:prstGeom>
-          <a:noFill/>
-        </p:spPr>
-        <p:txBody>
-          <a:bodyPr wrap="square" anchor="t" lIns="0" rIns="0" tIns="0" bIns="0">
-            <a:spAutoFit/>
-          </a:bodyPr>
-          <a:lstStyle/>
-          <a:p>
-            <a:pPr algn="ctr">
+            <a:off x="7543800" y="1344168"/>
+            <a:ext cx="3962095" cy="4206240"/>
+          </a:xfrm>
+          <a:prstGeom prst="rect">
+            <a:avLst/>
+          </a:prstGeom>
+          <a:noFill/>
+        </p:spPr>
+        <p:txBody>
+          <a:bodyPr wrap="square" lIns="0" tIns="0" rIns="0" bIns="0">
+            <a:spAutoFit/>
+          </a:bodyPr>
+          <a:lstStyle/>
+          <a:p>
+            <a:pPr>
+              <a:lnSpc>
+                <a:spcPct val="130000"/>
+              </a:lnSpc>
+              <a:spcAft>
+                <a:spcPts val="400"/>
+              </a:spcAft>
+            </a:pPr>
+            <a:r>
+              <a:rPr sz="1350" b="1">
+                <a:solidFill>
+                  <a:srgbClr val="C9A45C"/>
+                </a:solidFill>
+                <a:latin typeface="Space Grotesk"/>
+              </a:rPr>
+              <a:t>▪  </a:t>
+            </a:r>
+            <a:r>
+              <a:rPr sz="1350" b="1">
+                <a:solidFill>
+                  <a:srgbClr val="E7E9ED"/>
+                </a:solidFill>
+                <a:latin typeface="Space Grotesk"/>
+              </a:rPr>
+              <a:t>El botón “Run daily update” es visible</a:t>
+            </a:r>
+            <a:r>
+              <a:rPr sz="1350">
+                <a:solidFill>
+                  <a:srgbClr val="99A0AB"/>
+                </a:solidFill>
+                <a:latin typeface="Space Grotesk"/>
+              </a:rPr>
+              <a:t> para cualquier usuario autenticado…</a:t>
+            </a:r>
+          </a:p>
+          <a:p>
+            <a:pPr>
+              <a:lnSpc>
+                <a:spcPct val="130000"/>
+              </a:lnSpc>
+              <a:spcAft>
+                <a:spcPts val="400"/>
+              </a:spcAft>
+            </a:pPr>
+            <a:r>
+              <a:rPr sz="1350" b="1">
+                <a:solidFill>
+                  <a:srgbClr val="C9A45C"/>
+                </a:solidFill>
+                <a:latin typeface="Space Grotesk"/>
+              </a:rPr>
+              <a:t>▪  </a:t>
+            </a:r>
+            <a:r>
+              <a:rPr sz="1350" b="1">
+                <a:solidFill>
+                  <a:srgbClr val="E7E9ED"/>
+                </a:solidFill>
+                <a:latin typeface="Space Grotesk"/>
+              </a:rPr>
+              <a:t>…pero el backend responde 403:</a:t>
+            </a:r>
+            <a:r>
+              <a:rPr sz="1350">
+                <a:solidFill>
+                  <a:srgbClr val="99A0AB"/>
+                </a:solidFill>
+                <a:latin typeface="Space Grotesk"/>
+              </a:rPr>
+              <a:t> “No tienes permisos para esta operación”.</a:t>
+            </a:r>
+          </a:p>
+          <a:p>
+            <a:pPr>
+              <a:lnSpc>
+                <a:spcPct val="130000"/>
+              </a:lnSpc>
+              <a:spcAft>
+                <a:spcPts val="400"/>
+              </a:spcAft>
+            </a:pPr>
+            <a:r>
+              <a:rPr sz="1350" b="1">
+                <a:solidFill>
+                  <a:srgbClr val="C9A45C"/>
+                </a:solidFill>
+                <a:latin typeface="Space Grotesk"/>
+              </a:rPr>
+              <a:t>▪  </a:t>
+            </a:r>
+            <a:r>
+              <a:rPr sz="1350">
+                <a:solidFill>
+                  <a:srgbClr val="99A0AB"/>
+                </a:solidFill>
+                <a:latin typeface="Space Grotesk"/>
+              </a:rPr>
+              <a:t>Prueba en vivo del patrón de defensa en profundidad del bloque 07: la interfaz no oculta el botón, el backend igual rechaza la operación</a:t>
+            </a:r>
+          </a:p>
+        </p:txBody>
+      </p:sp>
+      <p:sp>
+        <p:nvSpPr>
+          <p:cNvPr id="9" name="TextBox 8"/>
+          <p:cNvSpPr txBox="1"/>
+          <p:nvPr/>
+        </p:nvSpPr>
+        <p:spPr>
+          <a:xfrm>
+            <a:off x="685800" y="6473952"/>
+            <a:ext cx="5486400" cy="274320"/>
+          </a:xfrm>
+          <a:prstGeom prst="rect">
+            <a:avLst/>
+          </a:prstGeom>
+          <a:noFill/>
+        </p:spPr>
+        <p:txBody>
+          <a:bodyPr wrap="square" lIns="0" tIns="0" rIns="0" bIns="0" anchor="t">
+            <a:spAutoFit/>
+          </a:bodyPr>
+          <a:lstStyle/>
+          <a:p>
+            <a:pPr algn="l">
               <a:lnSpc>
                 <a:spcPct val="115000"/>
               </a:lnSpc>
             </a:pPr>
             <a:r>
-              <a:rPr sz="1050" b="0" i="0">
+              <a:rPr sz="850" b="0" i="0">
                 <a:solidFill>
                   <a:srgbClr val="5C6472"/>
                 </a:solidFill>
                 <a:latin typeface="JetBrains Mono"/>
               </a:rPr>
-              <a:t>Panel de Configuración — tema Pastel (por defecto)</a:t>
-            </a:r>
-          </a:p>
-        </p:txBody>
-      </p:sp>
-      <p:sp>
-        <p:nvSpPr>
-          <p:cNvPr id="9" name="Rounded Rectangle 8"/>
+              <a:t>TFM BIGSCHOOL · GESTIÓN DE CARTERA FINANCIERA CON IA</a:t>
+            </a:r>
+          </a:p>
+        </p:txBody>
+      </p:sp>
+      <p:sp>
+        <p:nvSpPr>
+          <p:cNvPr id="10" name="TextBox 9"/>
+          <p:cNvSpPr txBox="1"/>
+          <p:nvPr/>
+        </p:nvSpPr>
+        <p:spPr>
+          <a:xfrm>
+            <a:off x="5943600" y="6473952"/>
+            <a:ext cx="4389120" cy="274320"/>
+          </a:xfrm>
+          <a:prstGeom prst="rect">
+            <a:avLst/>
+          </a:prstGeom>
+          <a:noFill/>
+        </p:spPr>
+        <p:txBody>
+          <a:bodyPr wrap="square" lIns="0" tIns="0" rIns="0" bIns="0" anchor="t">
+            <a:spAutoFit/>
+          </a:bodyPr>
+          <a:lstStyle/>
+          <a:p>
+            <a:pPr algn="r">
+              <a:lnSpc>
+                <a:spcPct val="115000"/>
+              </a:lnSpc>
+            </a:pPr>
+            <a:r>
+              <a:rPr sz="850" b="0" i="0">
+                <a:solidFill>
+                  <a:srgbClr val="5C6472"/>
+                </a:solidFill>
+                <a:latin typeface="JetBrains Mono"/>
+              </a:rPr>
+              <a:t>09 · RECORRIDO — INVITADO</a:t>
+            </a:r>
+          </a:p>
+        </p:txBody>
+      </p:sp>
+      <p:sp>
+        <p:nvSpPr>
+          <p:cNvPr id="11" name="TextBox 10"/>
+          <p:cNvSpPr txBox="1"/>
+          <p:nvPr/>
+        </p:nvSpPr>
+        <p:spPr>
+          <a:xfrm>
+            <a:off x="11475720" y="6473952"/>
+            <a:ext cx="548640" cy="274320"/>
+          </a:xfrm>
+          <a:prstGeom prst="rect">
+            <a:avLst/>
+          </a:prstGeom>
+          <a:noFill/>
+        </p:spPr>
+        <p:txBody>
+          <a:bodyPr wrap="square" lIns="0" tIns="0" rIns="0" bIns="0" anchor="t">
+            <a:spAutoFit/>
+          </a:bodyPr>
+          <a:lstStyle/>
+          <a:p>
+            <a:pPr algn="r">
+              <a:lnSpc>
+                <a:spcPct val="115000"/>
+              </a:lnSpc>
+            </a:pPr>
+            <a:r>
+              <a:rPr sz="850" b="0" i="0">
+                <a:solidFill>
+                  <a:srgbClr val="C9A45C"/>
+                </a:solidFill>
+                <a:latin typeface="JetBrains Mono"/>
+              </a:rPr>
+              <a:t>41</a:t>
+            </a:r>
+          </a:p>
+        </p:txBody>
+      </p:sp>
+      <p:sp>
+        <p:nvSpPr>
+          <p:cNvPr id="12" name="Rectangle 11"/>
           <p:cNvSpPr/>
           <p:nvPr/>
         </p:nvSpPr>
         <p:spPr>
           <a:xfrm>
-            <a:off x="6091428" y="1267968"/>
+            <a:off x="685800" y="6400800"/>
+            <a:ext cx="10817352" cy="9525"/>
+          </a:xfrm>
+          <a:prstGeom prst="rect">
+            <a:avLst/>
+          </a:prstGeom>
+          <a:solidFill>
+            <a:srgbClr val="1D222B"/>
+          </a:solidFill>
+          <a:ln>
+            <a:noFill/>
+          </a:ln>
+          <a:effectLst/>
+        </p:spPr>
+        <p:style>
+          <a:lnRef idx="1">
+            <a:schemeClr val="accent1"/>
+          </a:lnRef>
+          <a:fillRef idx="3">
+            <a:schemeClr val="accent1"/>
+          </a:fillRef>
+          <a:effectRef idx="2">
+            <a:schemeClr val="accent1"/>
+          </a:effectRef>
+          <a:fontRef idx="minor">
+            <a:schemeClr val="lt1"/>
+          </a:fontRef>
+        </p:style>
+        <p:txBody>
+          <a:bodyPr rtlCol="0" anchor="ctr"/>
+          <a:lstStyle/>
+          <a:p>
+            <a:pPr algn="ctr"/>
+            <a:endParaRPr/>
+          </a:p>
+        </p:txBody>
+      </p:sp>
+    </p:spTree>
+  </p:cSld>
+  <p:clrMapOvr>
+    <a:masterClrMapping/>
+  </p:clrMapOvr>
+</p:sld>
+</file>
+
+<file path=ppt/slides/slide42.xml><?xml version="1.0" encoding="utf-8"?>
+<p:sld xmlns:a="http://schemas.openxmlformats.org/drawingml/2006/main" xmlns:r="http://schemas.openxmlformats.org/officeDocument/2006/relationships" xmlns:p="http://schemas.openxmlformats.org/presentationml/2006/main">
+  <p:cSld>
+    <p:spTree>
+      <p:nvGrpSpPr>
+        <p:cNvPr id="1" name=""/>
+        <p:cNvGrpSpPr/>
+        <p:nvPr/>
+      </p:nvGrpSpPr>
+      <p:grpSpPr>
+        <a:xfrm>
+          <a:off x="0" y="0"/>
+          <a:ext cx="0" cy="0"/>
+          <a:chOff x="0" y="0"/>
+          <a:chExt cx="0" cy="0"/>
+        </a:xfrm>
+      </p:grpSpPr>
+      <p:sp>
+        <p:nvSpPr>
+          <p:cNvPr id="2" name="Rectangle 1"/>
+          <p:cNvSpPr/>
+          <p:nvPr/>
+        </p:nvSpPr>
+        <p:spPr>
+          <a:xfrm>
+            <a:off x="0" y="0"/>
+            <a:ext cx="12191695" cy="6858000"/>
+          </a:xfrm>
+          <a:prstGeom prst="rect">
+            <a:avLst/>
+          </a:prstGeom>
+          <a:solidFill>
+            <a:srgbClr val="08090B"/>
+          </a:solidFill>
+          <a:ln>
+            <a:noFill/>
+          </a:ln>
+          <a:effectLst/>
+        </p:spPr>
+        <p:style>
+          <a:lnRef idx="1">
+            <a:schemeClr val="accent1"/>
+          </a:lnRef>
+          <a:fillRef idx="3">
+            <a:schemeClr val="accent1"/>
+          </a:fillRef>
+          <a:effectRef idx="2">
+            <a:schemeClr val="accent1"/>
+          </a:effectRef>
+          <a:fontRef idx="minor">
+            <a:schemeClr val="lt1"/>
+          </a:fontRef>
+        </p:style>
+        <p:txBody>
+          <a:bodyPr rtlCol="0" anchor="ctr"/>
+          <a:lstStyle/>
+          <a:p>
+            <a:pPr algn="ctr"/>
+            <a:endParaRPr/>
+          </a:p>
+        </p:txBody>
+      </p:sp>
+      <p:sp>
+        <p:nvSpPr>
+          <p:cNvPr id="3" name="TextBox 2"/>
+          <p:cNvSpPr txBox="1"/>
+          <p:nvPr/>
+        </p:nvSpPr>
+        <p:spPr>
+          <a:xfrm>
+            <a:off x="685800" y="411480"/>
+            <a:ext cx="10789920" cy="320040"/>
+          </a:xfrm>
+          <a:prstGeom prst="rect">
+            <a:avLst/>
+          </a:prstGeom>
+          <a:noFill/>
+        </p:spPr>
+        <p:txBody>
+          <a:bodyPr wrap="square" lIns="0" tIns="0" rIns="0" bIns="0" anchor="t">
+            <a:spAutoFit/>
+          </a:bodyPr>
+          <a:lstStyle/>
+          <a:p>
+            <a:pPr algn="l">
+              <a:lnSpc>
+                <a:spcPct val="115000"/>
+              </a:lnSpc>
+            </a:pPr>
+            <a:r>
+              <a:rPr sz="1250" b="1" i="0">
+                <a:solidFill>
+                  <a:srgbClr val="C9A45C"/>
+                </a:solidFill>
+                <a:latin typeface="JetBrains Mono"/>
+              </a:rPr>
+              <a:t>09 · RECORRIDO — INVITADO</a:t>
+            </a:r>
+          </a:p>
+        </p:txBody>
+      </p:sp>
+      <p:sp>
+        <p:nvSpPr>
+          <p:cNvPr id="4" name="TextBox 3"/>
+          <p:cNvSpPr txBox="1"/>
+          <p:nvPr/>
+        </p:nvSpPr>
+        <p:spPr>
+          <a:xfrm>
+            <a:off x="685800" y="704088"/>
+            <a:ext cx="10789920" cy="548640"/>
+          </a:xfrm>
+          <a:prstGeom prst="rect">
+            <a:avLst/>
+          </a:prstGeom>
+          <a:noFill/>
+        </p:spPr>
+        <p:txBody>
+          <a:bodyPr wrap="square" lIns="0" tIns="0" rIns="0" bIns="0" anchor="t">
+            <a:spAutoFit/>
+          </a:bodyPr>
+          <a:lstStyle/>
+          <a:p>
+            <a:pPr algn="l">
+              <a:lnSpc>
+                <a:spcPct val="115000"/>
+              </a:lnSpc>
+            </a:pPr>
+            <a:r>
+              <a:rPr sz="2400" b="1" i="0">
+                <a:solidFill>
+                  <a:srgbClr val="E7E9ED"/>
+                </a:solidFill>
+                <a:latin typeface="Space Grotesk"/>
+              </a:rPr>
+              <a:t>Panel de alertas y cierre de sesión</a:t>
+            </a:r>
+          </a:p>
+        </p:txBody>
+      </p:sp>
+      <p:sp>
+        <p:nvSpPr>
+          <p:cNvPr id="5" name="Rectangle 4"/>
+          <p:cNvSpPr/>
+          <p:nvPr/>
+        </p:nvSpPr>
+        <p:spPr>
+          <a:xfrm>
+            <a:off x="685800" y="1197864"/>
+            <a:ext cx="457200" cy="38100"/>
+          </a:xfrm>
+          <a:prstGeom prst="rect">
+            <a:avLst/>
+          </a:prstGeom>
+          <a:solidFill>
+            <a:srgbClr val="C9A45C"/>
+          </a:solidFill>
+          <a:ln>
+            <a:noFill/>
+          </a:ln>
+          <a:effectLst/>
+        </p:spPr>
+        <p:style>
+          <a:lnRef idx="1">
+            <a:schemeClr val="accent1"/>
+          </a:lnRef>
+          <a:fillRef idx="3">
+            <a:schemeClr val="accent1"/>
+          </a:fillRef>
+          <a:effectRef idx="2">
+            <a:schemeClr val="accent1"/>
+          </a:effectRef>
+          <a:fontRef idx="minor">
+            <a:schemeClr val="lt1"/>
+          </a:fontRef>
+        </p:style>
+        <p:txBody>
+          <a:bodyPr rtlCol="0" anchor="ctr"/>
+          <a:lstStyle/>
+          <a:p>
+            <a:pPr algn="ctr"/>
+            <a:endParaRPr/>
+          </a:p>
+        </p:txBody>
+      </p:sp>
+      <p:sp>
+        <p:nvSpPr>
+          <p:cNvPr id="6" name="Rounded Rectangle 5"/>
+          <p:cNvSpPr/>
+          <p:nvPr/>
+        </p:nvSpPr>
+        <p:spPr>
+          <a:xfrm>
+            <a:off x="696468" y="1267968"/>
             <a:ext cx="5053584" cy="3215640"/>
           </a:xfrm>
           <a:prstGeom prst="roundRect">
@@ -32408,26 +33163,27 @@
           <a:lstStyle/>
           <a:p>
             <a:pPr algn="ctr"/>
+            <a:endParaRPr/>
           </a:p>
         </p:txBody>
       </p:sp>
       <p:pic>
         <p:nvPicPr>
-          <p:cNvPr id="10" name="Picture 9" descr="17-configuracion-tema-terminal.png"/>
+          <p:cNvPr id="7" name="Picture 6" descr="14-panel-alertas.png"/>
           <p:cNvPicPr>
             <a:picLocks noChangeAspect="1"/>
           </p:cNvPicPr>
           <p:nvPr/>
         </p:nvPicPr>
         <p:blipFill>
-          <a:blip r:embed="rId3"/>
+          <a:blip r:embed="rId2"/>
           <a:stretch>
             <a:fillRect/>
           </a:stretch>
         </p:blipFill>
         <p:spPr>
           <a:xfrm>
-            <a:off x="6167628" y="1344168"/>
+            <a:off x="772668" y="1344168"/>
             <a:ext cx="4901184" cy="3063240"/>
           </a:xfrm>
           <a:prstGeom prst="rect">
@@ -32437,13 +33193,13 @@
       </p:pic>
       <p:sp>
         <p:nvSpPr>
-          <p:cNvPr id="11" name="TextBox 10"/>
-          <p:cNvSpPr txBox="1"/>
-          <p:nvPr/>
-        </p:nvSpPr>
-        <p:spPr>
-          <a:xfrm>
-            <a:off x="6091428" y="4538472"/>
+          <p:cNvPr id="8" name="TextBox 7"/>
+          <p:cNvSpPr txBox="1"/>
+          <p:nvPr/>
+        </p:nvSpPr>
+        <p:spPr>
+          <a:xfrm>
+            <a:off x="696468" y="4538472"/>
             <a:ext cx="5053584" cy="274320"/>
           </a:xfrm>
           <a:prstGeom prst="rect">
@@ -32452,7 +33208,7 @@
           <a:noFill/>
         </p:spPr>
         <p:txBody>
-          <a:bodyPr wrap="square" anchor="t" lIns="0" rIns="0" tIns="0" bIns="0">
+          <a:bodyPr wrap="square" lIns="0" tIns="0" rIns="0" bIns="0" anchor="t">
             <a:spAutoFit/>
           </a:bodyPr>
           <a:lstStyle/>
@@ -32469,491 +33225,21 @@
                 </a:solidFill>
                 <a:latin typeface="JetBrains Mono"/>
               </a:rPr>
-              <a:t>Mismo panel con el tema Terminal aplicado al instante</a:t>
-            </a:r>
-          </a:p>
-        </p:txBody>
-      </p:sp>
-      <p:sp>
-        <p:nvSpPr>
-          <p:cNvPr id="12" name="TextBox 11"/>
-          <p:cNvSpPr txBox="1"/>
-          <p:nvPr/>
-        </p:nvSpPr>
-        <p:spPr>
-          <a:xfrm>
-            <a:off x="685800" y="5001768"/>
-            <a:ext cx="10607040" cy="1188720"/>
-          </a:xfrm>
-          <a:prstGeom prst="rect">
-            <a:avLst/>
-          </a:prstGeom>
-          <a:noFill/>
-        </p:spPr>
-        <p:txBody>
-          <a:bodyPr wrap="square" lIns="0" rIns="0" tIns="0" bIns="0">
-            <a:spAutoFit/>
-          </a:bodyPr>
-          <a:lstStyle/>
-          <a:p>
-            <a:pPr>
-              <a:lnSpc>
-                <a:spcPct val="125000"/>
-              </a:lnSpc>
-              <a:spcAft>
-                <a:spcPts val="400"/>
-              </a:spcAft>
-            </a:pPr>
-            <a:r>
-              <a:rPr sz="1300" b="1">
-                <a:solidFill>
-                  <a:srgbClr val="C9A45C"/>
-                </a:solidFill>
-                <a:latin typeface="Space Grotesk"/>
-              </a:rPr>
-              <a:t>▪  </a:t>
-            </a:r>
-            <a:r>
-              <a:rPr sz="1300" b="1">
-                <a:solidFill>
-                  <a:srgbClr val="E7E9ED"/>
-                </a:solidFill>
-                <a:latin typeface="Space Grotesk"/>
-              </a:rPr>
-              <a:t>7 temas visuales disponibles,</a:t>
-            </a:r>
-            <a:r>
-              <a:rPr sz="1300">
-                <a:solidFill>
-                  <a:srgbClr val="99A0AB"/>
-                </a:solidFill>
-                <a:latin typeface="Space Grotesk"/>
-              </a:rPr>
-              <a:t> incluido el propio Terminal Premium de esta presentación.</a:t>
-            </a:r>
-          </a:p>
-          <a:p>
-            <a:pPr>
-              <a:lnSpc>
-                <a:spcPct val="125000"/>
-              </a:lnSpc>
-              <a:spcAft>
-                <a:spcPts val="400"/>
-              </a:spcAft>
-            </a:pPr>
-            <a:r>
-              <a:rPr sz="1300" b="1">
-                <a:solidFill>
-                  <a:srgbClr val="C9A45C"/>
-                </a:solidFill>
-                <a:latin typeface="Space Grotesk"/>
-              </a:rPr>
-              <a:t>▪  </a:t>
-            </a:r>
-            <a:r>
-              <a:rPr sz="1300" b="1">
-                <a:solidFill>
-                  <a:srgbClr val="E7E9ED"/>
-                </a:solidFill>
-                <a:latin typeface="Space Grotesk"/>
-              </a:rPr>
-              <a:t>Cambio instantáneo.</a:t>
-            </a:r>
-            <a:r>
-              <a:rPr sz="1300">
-                <a:solidFill>
-                  <a:srgbClr val="99A0AB"/>
-                </a:solidFill>
-                <a:latin typeface="Space Grotesk"/>
-              </a:rPr>
-              <a:t> se aplica y guarda sin recargar la página.</a:t>
-            </a:r>
-          </a:p>
-          <a:p>
-            <a:pPr>
-              <a:lnSpc>
-                <a:spcPct val="125000"/>
-              </a:lnSpc>
-              <a:spcAft>
-                <a:spcPts val="400"/>
-              </a:spcAft>
-            </a:pPr>
-            <a:r>
-              <a:rPr sz="1300" b="1">
-                <a:solidFill>
-                  <a:srgbClr val="C9A45C"/>
-                </a:solidFill>
-                <a:latin typeface="Space Grotesk"/>
-              </a:rPr>
-              <a:t>▪  </a:t>
-            </a:r>
-            <a:r>
-              <a:rPr sz="1300">
-                <a:solidFill>
-                  <a:srgbClr val="99A0AB"/>
-                </a:solidFill>
-                <a:latin typeface="Space Grotesk"/>
-              </a:rPr>
-              <a:t>La sección “Data providers” (cascada) permanece invisible para este usuario — solo administradores (bloque 06)</a:t>
-            </a:r>
-          </a:p>
-        </p:txBody>
-      </p:sp>
-      <p:sp>
-        <p:nvSpPr>
-          <p:cNvPr id="13" name="TextBox 12"/>
-          <p:cNvSpPr txBox="1"/>
-          <p:nvPr/>
-        </p:nvSpPr>
-        <p:spPr>
-          <a:xfrm>
-            <a:off x="685800" y="6473952"/>
-            <a:ext cx="5486400" cy="274320"/>
-          </a:xfrm>
-          <a:prstGeom prst="rect">
-            <a:avLst/>
-          </a:prstGeom>
-          <a:noFill/>
-        </p:spPr>
-        <p:txBody>
-          <a:bodyPr wrap="square" anchor="t" lIns="0" rIns="0" tIns="0" bIns="0">
-            <a:spAutoFit/>
-          </a:bodyPr>
-          <a:lstStyle/>
-          <a:p>
-            <a:pPr algn="l">
-              <a:lnSpc>
-                <a:spcPct val="115000"/>
-              </a:lnSpc>
-            </a:pPr>
-            <a:r>
-              <a:rPr sz="850" b="0" i="0">
-                <a:solidFill>
-                  <a:srgbClr val="5C6472"/>
-                </a:solidFill>
-                <a:latin typeface="JetBrains Mono"/>
-              </a:rPr>
-              <a:t>TFM BIGSCHOOL · GESTIÓN DE CARTERA FINANCIERA CON IA</a:t>
-            </a:r>
-          </a:p>
-        </p:txBody>
-      </p:sp>
-      <p:sp>
-        <p:nvSpPr>
-          <p:cNvPr id="14" name="TextBox 13"/>
-          <p:cNvSpPr txBox="1"/>
-          <p:nvPr/>
-        </p:nvSpPr>
-        <p:spPr>
-          <a:xfrm>
-            <a:off x="5943600" y="6473952"/>
-            <a:ext cx="4389120" cy="274320"/>
-          </a:xfrm>
-          <a:prstGeom prst="rect">
-            <a:avLst/>
-          </a:prstGeom>
-          <a:noFill/>
-        </p:spPr>
-        <p:txBody>
-          <a:bodyPr wrap="square" anchor="t" lIns="0" rIns="0" tIns="0" bIns="0">
-            <a:spAutoFit/>
-          </a:bodyPr>
-          <a:lstStyle/>
-          <a:p>
-            <a:pPr algn="r">
-              <a:lnSpc>
-                <a:spcPct val="115000"/>
-              </a:lnSpc>
-            </a:pPr>
-            <a:r>
-              <a:rPr sz="850" b="0" i="0">
-                <a:solidFill>
-                  <a:srgbClr val="5C6472"/>
-                </a:solidFill>
-                <a:latin typeface="JetBrains Mono"/>
-              </a:rPr>
-              <a:t>09 · RECORRIDO — INVITADO</a:t>
-            </a:r>
-          </a:p>
-        </p:txBody>
-      </p:sp>
-      <p:sp>
-        <p:nvSpPr>
-          <p:cNvPr id="15" name="TextBox 14"/>
-          <p:cNvSpPr txBox="1"/>
-          <p:nvPr/>
-        </p:nvSpPr>
-        <p:spPr>
-          <a:xfrm>
-            <a:off x="11475720" y="6473952"/>
-            <a:ext cx="548640" cy="274320"/>
-          </a:xfrm>
-          <a:prstGeom prst="rect">
-            <a:avLst/>
-          </a:prstGeom>
-          <a:noFill/>
-        </p:spPr>
-        <p:txBody>
-          <a:bodyPr wrap="square" anchor="t" lIns="0" rIns="0" tIns="0" bIns="0">
-            <a:spAutoFit/>
-          </a:bodyPr>
-          <a:lstStyle/>
-          <a:p>
-            <a:pPr algn="r">
-              <a:lnSpc>
-                <a:spcPct val="115000"/>
-              </a:lnSpc>
-            </a:pPr>
-            <a:r>
-              <a:rPr sz="850" b="0" i="0">
-                <a:solidFill>
-                  <a:srgbClr val="C9A45C"/>
-                </a:solidFill>
-                <a:latin typeface="JetBrains Mono"/>
-              </a:rPr>
-              <a:t>40</a:t>
-            </a:r>
-          </a:p>
-        </p:txBody>
-      </p:sp>
-      <p:sp>
-        <p:nvSpPr>
-          <p:cNvPr id="16" name="Rectangle 15"/>
+              <a:t>Panel de alertas — sin cruces activos todavía</a:t>
+            </a:r>
+          </a:p>
+        </p:txBody>
+      </p:sp>
+      <p:sp>
+        <p:nvSpPr>
+          <p:cNvPr id="9" name="Rounded Rectangle 8"/>
           <p:cNvSpPr/>
           <p:nvPr/>
         </p:nvSpPr>
         <p:spPr>
           <a:xfrm>
-            <a:off x="685800" y="6400800"/>
-            <a:ext cx="10817352" cy="9525"/>
-          </a:xfrm>
-          <a:prstGeom prst="rect">
-            <a:avLst/>
-          </a:prstGeom>
-          <a:solidFill>
-            <a:srgbClr val="1D222B"/>
-          </a:solidFill>
-          <a:ln>
-            <a:noFill/>
-          </a:ln>
-          <a:effectLst/>
-        </p:spPr>
-        <p:style>
-          <a:lnRef idx="1">
-            <a:schemeClr val="accent1"/>
-          </a:lnRef>
-          <a:fillRef idx="3">
-            <a:schemeClr val="accent1"/>
-          </a:fillRef>
-          <a:effectRef idx="2">
-            <a:schemeClr val="accent1"/>
-          </a:effectRef>
-          <a:fontRef idx="minor">
-            <a:schemeClr val="lt1"/>
-          </a:fontRef>
-        </p:style>
-        <p:txBody>
-          <a:bodyPr rtlCol="0" anchor="ctr"/>
-          <a:lstStyle/>
-          <a:p>
-            <a:pPr algn="ctr"/>
-          </a:p>
-        </p:txBody>
-      </p:sp>
-    </p:spTree>
-  </p:cSld>
-  <p:clrMapOvr>
-    <a:masterClrMapping/>
-  </p:clrMapOvr>
-</p:sld>
-</file>
-
-<file path=ppt/slides/slide42.xml><?xml version="1.0" encoding="utf-8"?>
-<p:sld xmlns:a="http://schemas.openxmlformats.org/drawingml/2006/main" xmlns:p="http://schemas.openxmlformats.org/presentationml/2006/main" xmlns:r="http://schemas.openxmlformats.org/officeDocument/2006/relationships">
-  <p:cSld>
-    <p:spTree>
-      <p:nvGrpSpPr>
-        <p:cNvPr id="1" name=""/>
-        <p:cNvGrpSpPr/>
-        <p:nvPr/>
-      </p:nvGrpSpPr>
-      <p:grpSpPr/>
-      <p:sp>
-        <p:nvSpPr>
-          <p:cNvPr id="2" name="Rectangle 1"/>
-          <p:cNvSpPr/>
-          <p:nvPr/>
-        </p:nvSpPr>
-        <p:spPr>
-          <a:xfrm>
-            <a:off x="0" y="0"/>
-            <a:ext cx="12191695" cy="6858000"/>
-          </a:xfrm>
-          <a:prstGeom prst="rect">
-            <a:avLst/>
-          </a:prstGeom>
-          <a:solidFill>
-            <a:srgbClr val="08090B"/>
-          </a:solidFill>
-          <a:ln>
-            <a:noFill/>
-          </a:ln>
-          <a:effectLst/>
-        </p:spPr>
-        <p:style>
-          <a:lnRef idx="1">
-            <a:schemeClr val="accent1"/>
-          </a:lnRef>
-          <a:fillRef idx="3">
-            <a:schemeClr val="accent1"/>
-          </a:fillRef>
-          <a:effectRef idx="2">
-            <a:schemeClr val="accent1"/>
-          </a:effectRef>
-          <a:fontRef idx="minor">
-            <a:schemeClr val="lt1"/>
-          </a:fontRef>
-        </p:style>
-        <p:txBody>
-          <a:bodyPr rtlCol="0" anchor="ctr"/>
-          <a:lstStyle/>
-          <a:p>
-            <a:pPr algn="ctr"/>
-          </a:p>
-        </p:txBody>
-      </p:sp>
-      <p:sp>
-        <p:nvSpPr>
-          <p:cNvPr id="3" name="TextBox 2"/>
-          <p:cNvSpPr txBox="1"/>
-          <p:nvPr/>
-        </p:nvSpPr>
-        <p:spPr>
-          <a:xfrm>
-            <a:off x="685800" y="411480"/>
-            <a:ext cx="10789920" cy="320040"/>
-          </a:xfrm>
-          <a:prstGeom prst="rect">
-            <a:avLst/>
-          </a:prstGeom>
-          <a:noFill/>
-        </p:spPr>
-        <p:txBody>
-          <a:bodyPr wrap="square" anchor="t" lIns="0" rIns="0" tIns="0" bIns="0">
-            <a:spAutoFit/>
-          </a:bodyPr>
-          <a:lstStyle/>
-          <a:p>
-            <a:pPr algn="l">
-              <a:lnSpc>
-                <a:spcPct val="115000"/>
-              </a:lnSpc>
-            </a:pPr>
-            <a:r>
-              <a:rPr sz="1250" b="1" i="0">
-                <a:solidFill>
-                  <a:srgbClr val="C9A45C"/>
-                </a:solidFill>
-                <a:latin typeface="JetBrains Mono"/>
-              </a:rPr>
-              <a:t>09 · RECORRIDO — INVITADO</a:t>
-            </a:r>
-          </a:p>
-        </p:txBody>
-      </p:sp>
-      <p:sp>
-        <p:nvSpPr>
-          <p:cNvPr id="4" name="TextBox 3"/>
-          <p:cNvSpPr txBox="1"/>
-          <p:nvPr/>
-        </p:nvSpPr>
-        <p:spPr>
-          <a:xfrm>
-            <a:off x="685800" y="704088"/>
-            <a:ext cx="10789920" cy="548640"/>
-          </a:xfrm>
-          <a:prstGeom prst="rect">
-            <a:avLst/>
-          </a:prstGeom>
-          <a:noFill/>
-        </p:spPr>
-        <p:txBody>
-          <a:bodyPr wrap="square" anchor="t" lIns="0" rIns="0" tIns="0" bIns="0">
-            <a:spAutoFit/>
-          </a:bodyPr>
-          <a:lstStyle/>
-          <a:p>
-            <a:pPr algn="l">
-              <a:lnSpc>
-                <a:spcPct val="115000"/>
-              </a:lnSpc>
-            </a:pPr>
-            <a:r>
-              <a:rPr sz="2400" b="1" i="0">
-                <a:solidFill>
-                  <a:srgbClr val="E7E9ED"/>
-                </a:solidFill>
-                <a:latin typeface="Space Grotesk"/>
-              </a:rPr>
-              <a:t>RBAC en acción: el invitado no puede forzar la cascada</a:t>
-            </a:r>
-          </a:p>
-        </p:txBody>
-      </p:sp>
-      <p:sp>
-        <p:nvSpPr>
-          <p:cNvPr id="5" name="Rectangle 4"/>
-          <p:cNvSpPr/>
-          <p:nvPr/>
-        </p:nvSpPr>
-        <p:spPr>
-          <a:xfrm>
-            <a:off x="685800" y="1197864"/>
-            <a:ext cx="457200" cy="38100"/>
-          </a:xfrm>
-          <a:prstGeom prst="rect">
-            <a:avLst/>
-          </a:prstGeom>
-          <a:solidFill>
-            <a:srgbClr val="C9A45C"/>
-          </a:solidFill>
-          <a:ln>
-            <a:noFill/>
-          </a:ln>
-          <a:effectLst/>
-        </p:spPr>
-        <p:style>
-          <a:lnRef idx="1">
-            <a:schemeClr val="accent1"/>
-          </a:lnRef>
-          <a:fillRef idx="3">
-            <a:schemeClr val="accent1"/>
-          </a:fillRef>
-          <a:effectRef idx="2">
-            <a:schemeClr val="accent1"/>
-          </a:effectRef>
-          <a:fontRef idx="minor">
-            <a:schemeClr val="lt1"/>
-          </a:fontRef>
-        </p:style>
-        <p:txBody>
-          <a:bodyPr rtlCol="0" anchor="ctr"/>
-          <a:lstStyle/>
-          <a:p>
-            <a:pPr algn="ctr"/>
-          </a:p>
-        </p:txBody>
-      </p:sp>
-      <p:sp>
-        <p:nvSpPr>
-          <p:cNvPr id="6" name="Rounded Rectangle 5"/>
-          <p:cNvSpPr/>
-          <p:nvPr/>
-        </p:nvSpPr>
-        <p:spPr>
-          <a:xfrm>
-            <a:off x="609600" y="1267968"/>
-            <a:ext cx="6644640" cy="4210050"/>
+            <a:off x="6091428" y="1267968"/>
+            <a:ext cx="5053584" cy="3215640"/>
           </a:xfrm>
           <a:prstGeom prst="roundRect">
             <a:avLst>
@@ -32989,27 +33275,28 @@
           <a:lstStyle/>
           <a:p>
             <a:pPr algn="ctr"/>
+            <a:endParaRPr/>
           </a:p>
         </p:txBody>
       </p:sp>
       <p:pic>
         <p:nvPicPr>
-          <p:cNvPr id="7" name="Picture 6" descr="19-actualizacion-diaria-resultado.png"/>
+          <p:cNvPr id="10" name="Picture 9" descr="16-logout-vuelta-a-login.png"/>
           <p:cNvPicPr>
             <a:picLocks noChangeAspect="1"/>
           </p:cNvPicPr>
           <p:nvPr/>
         </p:nvPicPr>
         <p:blipFill>
-          <a:blip r:embed="rId2"/>
+          <a:blip r:embed="rId3"/>
           <a:stretch>
             <a:fillRect/>
           </a:stretch>
         </p:blipFill>
         <p:spPr>
           <a:xfrm>
-            <a:off x="685800" y="1344168"/>
-            <a:ext cx="6492240" cy="4057650"/>
+            <a:off x="6167628" y="1344168"/>
+            <a:ext cx="4901184" cy="3063240"/>
           </a:xfrm>
           <a:prstGeom prst="rect">
             <a:avLst/>
@@ -33018,36 +33305,75 @@
       </p:pic>
       <p:sp>
         <p:nvSpPr>
-          <p:cNvPr id="8" name="TextBox 7"/>
-          <p:cNvSpPr txBox="1"/>
-          <p:nvPr/>
-        </p:nvSpPr>
-        <p:spPr>
-          <a:xfrm>
-            <a:off x="7543800" y="1344168"/>
-            <a:ext cx="3962095" cy="4206240"/>
-          </a:xfrm>
-          <a:prstGeom prst="rect">
-            <a:avLst/>
-          </a:prstGeom>
-          <a:noFill/>
-        </p:spPr>
-        <p:txBody>
-          <a:bodyPr wrap="square" lIns="0" rIns="0" tIns="0" bIns="0">
+          <p:cNvPr id="11" name="TextBox 10"/>
+          <p:cNvSpPr txBox="1"/>
+          <p:nvPr/>
+        </p:nvSpPr>
+        <p:spPr>
+          <a:xfrm>
+            <a:off x="6091428" y="4538472"/>
+            <a:ext cx="5053584" cy="274320"/>
+          </a:xfrm>
+          <a:prstGeom prst="rect">
+            <a:avLst/>
+          </a:prstGeom>
+          <a:noFill/>
+        </p:spPr>
+        <p:txBody>
+          <a:bodyPr wrap="square" lIns="0" tIns="0" rIns="0" bIns="0" anchor="t">
+            <a:spAutoFit/>
+          </a:bodyPr>
+          <a:lstStyle/>
+          <a:p>
+            <a:pPr algn="ctr">
+              <a:lnSpc>
+                <a:spcPct val="115000"/>
+              </a:lnSpc>
+            </a:pPr>
+            <a:r>
+              <a:rPr sz="1050" b="0" i="0">
+                <a:solidFill>
+                  <a:srgbClr val="5C6472"/>
+                </a:solidFill>
+                <a:latin typeface="JetBrains Mono"/>
+              </a:rPr>
+              <a:t>Logout — vuelta limpia a la pantalla de acceso</a:t>
+            </a:r>
+          </a:p>
+        </p:txBody>
+      </p:sp>
+      <p:sp>
+        <p:nvSpPr>
+          <p:cNvPr id="12" name="TextBox 11"/>
+          <p:cNvSpPr txBox="1"/>
+          <p:nvPr/>
+        </p:nvSpPr>
+        <p:spPr>
+          <a:xfrm>
+            <a:off x="685800" y="5001768"/>
+            <a:ext cx="10607040" cy="1188720"/>
+          </a:xfrm>
+          <a:prstGeom prst="rect">
+            <a:avLst/>
+          </a:prstGeom>
+          <a:noFill/>
+        </p:spPr>
+        <p:txBody>
+          <a:bodyPr wrap="square" lIns="0" tIns="0" rIns="0" bIns="0">
             <a:spAutoFit/>
           </a:bodyPr>
           <a:lstStyle/>
           <a:p>
             <a:pPr>
               <a:lnSpc>
-                <a:spcPct val="130000"/>
+                <a:spcPct val="125000"/>
               </a:lnSpc>
               <a:spcAft>
                 <a:spcPts val="400"/>
               </a:spcAft>
             </a:pPr>
             <a:r>
-              <a:rPr sz="1350" b="1">
+              <a:rPr sz="1300" b="1">
                 <a:solidFill>
                   <a:srgbClr val="C9A45C"/>
                 </a:solidFill>
@@ -33056,35 +33382,35 @@
               <a:t>▪  </a:t>
             </a:r>
             <a:r>
-              <a:rPr sz="1350" b="1">
+              <a:rPr sz="1300" b="1">
                 <a:solidFill>
                   <a:srgbClr val="E7E9ED"/>
                 </a:solidFill>
                 <a:latin typeface="Space Grotesk"/>
               </a:rPr>
-              <a:t>El botón “Run daily update” es visible</a:t>
-            </a:r>
-            <a:r>
-              <a:rPr sz="1350">
+              <a:t>El panel consolida todas las alertas activadas</a:t>
+            </a:r>
+            <a:r>
+              <a:rPr sz="1300">
                 <a:solidFill>
                   <a:srgbClr val="99A0AB"/>
                 </a:solidFill>
                 <a:latin typeface="Space Grotesk"/>
               </a:rPr>
-              <a:t> para cualquier usuario autenticado…</a:t>
+              <a:t> de la cartera completa, no solo de un activo.</a:t>
             </a:r>
           </a:p>
           <a:p>
             <a:pPr>
               <a:lnSpc>
-                <a:spcPct val="130000"/>
+                <a:spcPct val="125000"/>
               </a:lnSpc>
               <a:spcAft>
                 <a:spcPts val="400"/>
               </a:spcAft>
             </a:pPr>
             <a:r>
-              <a:rPr sz="1350" b="1">
+              <a:rPr sz="1300" b="1">
                 <a:solidFill>
                   <a:srgbClr val="C9A45C"/>
                 </a:solidFill>
@@ -33093,35 +33419,35 @@
               <a:t>▪  </a:t>
             </a:r>
             <a:r>
-              <a:rPr sz="1350" b="1">
+              <a:rPr sz="1300" b="1">
                 <a:solidFill>
                   <a:srgbClr val="E7E9ED"/>
                 </a:solidFill>
                 <a:latin typeface="Space Grotesk"/>
               </a:rPr>
-              <a:t>…pero el backend responde 403:</a:t>
-            </a:r>
-            <a:r>
-              <a:rPr sz="1350">
+              <a:t>Cerrar sesión limpia el estado en memoria</a:t>
+            </a:r>
+            <a:r>
+              <a:rPr sz="1300">
                 <a:solidFill>
                   <a:srgbClr val="99A0AB"/>
                 </a:solidFill>
                 <a:latin typeface="Space Grotesk"/>
               </a:rPr>
-              <a:t> “No tienes permisos para esta operación”.</a:t>
+              <a:t> y redirige a /login.</a:t>
             </a:r>
           </a:p>
           <a:p>
             <a:pPr>
               <a:lnSpc>
-                <a:spcPct val="130000"/>
+                <a:spcPct val="125000"/>
               </a:lnSpc>
               <a:spcAft>
                 <a:spcPts val="400"/>
               </a:spcAft>
             </a:pPr>
             <a:r>
-              <a:rPr sz="1350" b="1">
+              <a:rPr sz="1300" b="1">
                 <a:solidFill>
                   <a:srgbClr val="C9A45C"/>
                 </a:solidFill>
@@ -33130,20 +33456,20 @@
               <a:t>▪  </a:t>
             </a:r>
             <a:r>
-              <a:rPr sz="1350">
+              <a:rPr sz="1300">
                 <a:solidFill>
                   <a:srgbClr val="99A0AB"/>
                 </a:solidFill>
                 <a:latin typeface="Space Grotesk"/>
               </a:rPr>
-              <a:t>Prueba en vivo del patrón de defensa en profundidad del bloque 07: la interfaz no oculta el botón, el backend igual rechaza la operación</a:t>
-            </a:r>
-          </a:p>
-        </p:txBody>
-      </p:sp>
-      <p:sp>
-        <p:nvSpPr>
-          <p:cNvPr id="9" name="TextBox 8"/>
+              <a:t>Fin del recorrido en modo invitado — continúa con el recorrido de administrador</a:t>
+            </a:r>
+          </a:p>
+        </p:txBody>
+      </p:sp>
+      <p:sp>
+        <p:nvSpPr>
+          <p:cNvPr id="13" name="TextBox 12"/>
           <p:cNvSpPr txBox="1"/>
           <p:nvPr/>
         </p:nvSpPr>
@@ -33158,7 +33484,7 @@
           <a:noFill/>
         </p:spPr>
         <p:txBody>
-          <a:bodyPr wrap="square" anchor="t" lIns="0" rIns="0" tIns="0" bIns="0">
+          <a:bodyPr wrap="square" lIns="0" tIns="0" rIns="0" bIns="0" anchor="t">
             <a:spAutoFit/>
           </a:bodyPr>
           <a:lstStyle/>
@@ -33182,7 +33508,7 @@
       </p:sp>
       <p:sp>
         <p:nvSpPr>
-          <p:cNvPr id="10" name="TextBox 9"/>
+          <p:cNvPr id="14" name="TextBox 13"/>
           <p:cNvSpPr txBox="1"/>
           <p:nvPr/>
         </p:nvSpPr>
@@ -33197,7 +33523,7 @@
           <a:noFill/>
         </p:spPr>
         <p:txBody>
-          <a:bodyPr wrap="square" anchor="t" lIns="0" rIns="0" tIns="0" bIns="0">
+          <a:bodyPr wrap="square" lIns="0" tIns="0" rIns="0" bIns="0" anchor="t">
             <a:spAutoFit/>
           </a:bodyPr>
           <a:lstStyle/>
@@ -33221,7 +33547,7 @@
       </p:sp>
       <p:sp>
         <p:nvSpPr>
-          <p:cNvPr id="11" name="TextBox 10"/>
+          <p:cNvPr id="15" name="TextBox 14"/>
           <p:cNvSpPr txBox="1"/>
           <p:nvPr/>
         </p:nvSpPr>
@@ -33236,7 +33562,7 @@
           <a:noFill/>
         </p:spPr>
         <p:txBody>
-          <a:bodyPr wrap="square" anchor="t" lIns="0" rIns="0" tIns="0" bIns="0">
+          <a:bodyPr wrap="square" lIns="0" tIns="0" rIns="0" bIns="0" anchor="t">
             <a:spAutoFit/>
           </a:bodyPr>
           <a:lstStyle/>
@@ -33253,14 +33579,14 @@
                 </a:solidFill>
                 <a:latin typeface="JetBrains Mono"/>
               </a:rPr>
-              <a:t>41</a:t>
-            </a:r>
-          </a:p>
-        </p:txBody>
-      </p:sp>
-      <p:sp>
-        <p:nvSpPr>
-          <p:cNvPr id="12" name="Rectangle 11"/>
+              <a:t>42</a:t>
+            </a:r>
+          </a:p>
+        </p:txBody>
+      </p:sp>
+      <p:sp>
+        <p:nvSpPr>
+          <p:cNvPr id="16" name="Rectangle 15"/>
           <p:cNvSpPr/>
           <p:nvPr/>
         </p:nvSpPr>
@@ -33299,6 +33625,7 @@
           <a:lstStyle/>
           <a:p>
             <a:pPr algn="ctr"/>
+            <a:endParaRPr/>
           </a:p>
         </p:txBody>
       </p:sp>
@@ -33311,7 +33638,7 @@
 </file>
 
 <file path=ppt/slides/slide43.xml><?xml version="1.0" encoding="utf-8"?>
-<p:sld xmlns:a="http://schemas.openxmlformats.org/drawingml/2006/main" xmlns:p="http://schemas.openxmlformats.org/presentationml/2006/main" xmlns:r="http://schemas.openxmlformats.org/officeDocument/2006/relationships">
+<p:sld xmlns:a="http://schemas.openxmlformats.org/drawingml/2006/main" xmlns:r="http://schemas.openxmlformats.org/officeDocument/2006/relationships" xmlns:p="http://schemas.openxmlformats.org/presentationml/2006/main">
   <p:cSld>
     <p:spTree>
       <p:nvGrpSpPr>
@@ -33319,7 +33646,14 @@
         <p:cNvGrpSpPr/>
         <p:nvPr/>
       </p:nvGrpSpPr>
-      <p:grpSpPr/>
+      <p:grpSpPr>
+        <a:xfrm>
+          <a:off x="0" y="0"/>
+          <a:ext cx="0" cy="0"/>
+          <a:chOff x="0" y="0"/>
+          <a:chExt cx="0" cy="0"/>
+        </a:xfrm>
+      </p:grpSpPr>
       <p:sp>
         <p:nvSpPr>
           <p:cNvPr id="2" name="Rectangle 1"/>
@@ -33361,97 +33695,20 @@
           <a:lstStyle/>
           <a:p>
             <a:pPr algn="ctr"/>
-          </a:p>
-        </p:txBody>
-      </p:sp>
-      <p:sp>
-        <p:nvSpPr>
-          <p:cNvPr id="3" name="TextBox 2"/>
-          <p:cNvSpPr txBox="1"/>
-          <p:nvPr/>
-        </p:nvSpPr>
-        <p:spPr>
-          <a:xfrm>
-            <a:off x="685800" y="411480"/>
-            <a:ext cx="10789920" cy="320040"/>
-          </a:xfrm>
-          <a:prstGeom prst="rect">
-            <a:avLst/>
-          </a:prstGeom>
-          <a:noFill/>
-        </p:spPr>
-        <p:txBody>
-          <a:bodyPr wrap="square" anchor="t" lIns="0" rIns="0" tIns="0" bIns="0">
-            <a:spAutoFit/>
-          </a:bodyPr>
-          <a:lstStyle/>
-          <a:p>
-            <a:pPr algn="l">
-              <a:lnSpc>
-                <a:spcPct val="115000"/>
-              </a:lnSpc>
-            </a:pPr>
-            <a:r>
-              <a:rPr sz="1250" b="1" i="0">
-                <a:solidFill>
-                  <a:srgbClr val="C9A45C"/>
-                </a:solidFill>
-                <a:latin typeface="JetBrains Mono"/>
-              </a:rPr>
-              <a:t>09 · RECORRIDO — INVITADO</a:t>
-            </a:r>
-          </a:p>
-        </p:txBody>
-      </p:sp>
-      <p:sp>
-        <p:nvSpPr>
-          <p:cNvPr id="4" name="TextBox 3"/>
-          <p:cNvSpPr txBox="1"/>
-          <p:nvPr/>
-        </p:nvSpPr>
-        <p:spPr>
-          <a:xfrm>
-            <a:off x="685800" y="704088"/>
-            <a:ext cx="10789920" cy="548640"/>
-          </a:xfrm>
-          <a:prstGeom prst="rect">
-            <a:avLst/>
-          </a:prstGeom>
-          <a:noFill/>
-        </p:spPr>
-        <p:txBody>
-          <a:bodyPr wrap="square" anchor="t" lIns="0" rIns="0" tIns="0" bIns="0">
-            <a:spAutoFit/>
-          </a:bodyPr>
-          <a:lstStyle/>
-          <a:p>
-            <a:pPr algn="l">
-              <a:lnSpc>
-                <a:spcPct val="115000"/>
-              </a:lnSpc>
-            </a:pPr>
-            <a:r>
-              <a:rPr sz="2400" b="1" i="0">
-                <a:solidFill>
-                  <a:srgbClr val="E7E9ED"/>
-                </a:solidFill>
-                <a:latin typeface="Space Grotesk"/>
-              </a:rPr>
-              <a:t>Panel de alertas y cierre de sesión</a:t>
-            </a:r>
-          </a:p>
-        </p:txBody>
-      </p:sp>
-      <p:sp>
-        <p:nvSpPr>
-          <p:cNvPr id="5" name="Rectangle 4"/>
+            <a:endParaRPr/>
+          </a:p>
+        </p:txBody>
+      </p:sp>
+      <p:sp>
+        <p:nvSpPr>
+          <p:cNvPr id="3" name="Rectangle 2"/>
           <p:cNvSpPr/>
           <p:nvPr/>
         </p:nvSpPr>
         <p:spPr>
           <a:xfrm>
-            <a:off x="685800" y="1197864"/>
-            <a:ext cx="457200" cy="38100"/>
+            <a:off x="0" y="0"/>
+            <a:ext cx="164592" cy="6858000"/>
           </a:xfrm>
           <a:prstGeom prst="rect">
             <a:avLst/>
@@ -33483,32 +33740,68 @@
           <a:lstStyle/>
           <a:p>
             <a:pPr algn="ctr"/>
-          </a:p>
-        </p:txBody>
-      </p:sp>
-      <p:sp>
-        <p:nvSpPr>
-          <p:cNvPr id="6" name="Rounded Rectangle 5"/>
+            <a:endParaRPr/>
+          </a:p>
+        </p:txBody>
+      </p:sp>
+      <p:sp>
+        <p:nvSpPr>
+          <p:cNvPr id="4" name="TextBox 3"/>
+          <p:cNvSpPr txBox="1"/>
+          <p:nvPr/>
+        </p:nvSpPr>
+        <p:spPr>
+          <a:xfrm>
+            <a:off x="822960" y="2560320"/>
+            <a:ext cx="9144000" cy="1097280"/>
+          </a:xfrm>
+          <a:prstGeom prst="rect">
+            <a:avLst/>
+          </a:prstGeom>
+          <a:noFill/>
+        </p:spPr>
+        <p:txBody>
+          <a:bodyPr wrap="square" lIns="0" tIns="0" rIns="0" bIns="0" anchor="t">
+            <a:spAutoFit/>
+          </a:bodyPr>
+          <a:lstStyle/>
+          <a:p>
+            <a:pPr algn="l">
+              <a:lnSpc>
+                <a:spcPct val="115000"/>
+              </a:lnSpc>
+            </a:pPr>
+            <a:r>
+              <a:rPr sz="5400" b="1" i="0">
+                <a:solidFill>
+                  <a:srgbClr val="E7E9ED"/>
+                </a:solidFill>
+                <a:latin typeface="Space Grotesk"/>
+              </a:rPr>
+              <a:t>Gracias</a:t>
+            </a:r>
+          </a:p>
+        </p:txBody>
+      </p:sp>
+      <p:sp>
+        <p:nvSpPr>
+          <p:cNvPr id="5" name="Rectangle 4"/>
           <p:cNvSpPr/>
           <p:nvPr/>
         </p:nvSpPr>
         <p:spPr>
           <a:xfrm>
-            <a:off x="696468" y="1267968"/>
-            <a:ext cx="5053584" cy="3215640"/>
-          </a:xfrm>
-          <a:prstGeom prst="roundRect">
-            <a:avLst>
-              <a:gd name="adj" fmla="val 3000"/>
-            </a:avLst>
+            <a:off x="868680" y="3520440"/>
+            <a:ext cx="1005840" cy="38100"/>
+          </a:xfrm>
+          <a:prstGeom prst="rect">
+            <a:avLst/>
           </a:prstGeom>
           <a:solidFill>
-            <a:srgbClr val="15191F"/>
+            <a:srgbClr val="C9A45C"/>
           </a:solidFill>
-          <a:ln w="15875">
-            <a:solidFill>
-              <a:srgbClr val="C9A45C"/>
-            </a:solidFill>
+          <a:ln>
+            <a:noFill/>
           </a:ln>
           <a:effectLst/>
         </p:spPr>
@@ -33531,33 +33824,49 @@
           <a:lstStyle/>
           <a:p>
             <a:pPr algn="ctr"/>
-          </a:p>
-        </p:txBody>
-      </p:sp>
-      <p:pic>
-        <p:nvPicPr>
-          <p:cNvPr id="7" name="Picture 6" descr="14-panel-alertas.png"/>
-          <p:cNvPicPr>
-            <a:picLocks noChangeAspect="1"/>
-          </p:cNvPicPr>
-          <p:nvPr/>
-        </p:nvPicPr>
-        <p:blipFill>
-          <a:blip r:embed="rId2"/>
-          <a:stretch>
-            <a:fillRect/>
-          </a:stretch>
-        </p:blipFill>
-        <p:spPr>
-          <a:xfrm>
-            <a:off x="772668" y="1344168"/>
-            <a:ext cx="4901184" cy="3063240"/>
-          </a:xfrm>
-          <a:prstGeom prst="rect">
-            <a:avLst/>
-          </a:prstGeom>
-        </p:spPr>
-      </p:pic>
+            <a:endParaRPr/>
+          </a:p>
+        </p:txBody>
+      </p:sp>
+      <p:sp>
+        <p:nvSpPr>
+          <p:cNvPr id="7" name="TextBox 6"/>
+          <p:cNvSpPr txBox="1"/>
+          <p:nvPr/>
+        </p:nvSpPr>
+        <p:spPr>
+          <a:xfrm>
+            <a:off x="822960" y="5806440"/>
+            <a:ext cx="5486400" cy="365760"/>
+          </a:xfrm>
+          <a:prstGeom prst="rect">
+            <a:avLst/>
+          </a:prstGeom>
+          <a:noFill/>
+        </p:spPr>
+        <p:txBody>
+          <a:bodyPr wrap="square" lIns="0" tIns="0" rIns="0" bIns="0" anchor="t">
+            <a:spAutoFit/>
+          </a:bodyPr>
+          <a:lstStyle/>
+          <a:p>
+            <a:pPr algn="l">
+              <a:lnSpc>
+                <a:spcPct val="115000"/>
+              </a:lnSpc>
+            </a:pPr>
+            <a:r>
+              <a:rPr sz="1400" b="1" i="0">
+                <a:solidFill>
+                  <a:srgbClr val="E7E9ED"/>
+                </a:solidFill>
+                <a:latin typeface="Space Grotesk"/>
+              </a:rPr>
+              <a:t>Romer Cepeda</a:t>
+            </a:r>
+          </a:p>
+        </p:txBody>
+      </p:sp>
       <p:sp>
         <p:nvSpPr>
           <p:cNvPr id="8" name="TextBox 7"/>
@@ -33566,431 +33875,34 @@
         </p:nvSpPr>
         <p:spPr>
           <a:xfrm>
-            <a:off x="696468" y="4538472"/>
-            <a:ext cx="5053584" cy="274320"/>
-          </a:xfrm>
-          <a:prstGeom prst="rect">
-            <a:avLst/>
-          </a:prstGeom>
-          <a:noFill/>
-        </p:spPr>
-        <p:txBody>
-          <a:bodyPr wrap="square" anchor="t" lIns="0" rIns="0" tIns="0" bIns="0">
-            <a:spAutoFit/>
-          </a:bodyPr>
-          <a:lstStyle/>
-          <a:p>
-            <a:pPr algn="ctr">
+            <a:off x="822960" y="6108192"/>
+            <a:ext cx="5486400" cy="320040"/>
+          </a:xfrm>
+          <a:prstGeom prst="rect">
+            <a:avLst/>
+          </a:prstGeom>
+          <a:noFill/>
+        </p:spPr>
+        <p:txBody>
+          <a:bodyPr wrap="square" lIns="0" tIns="0" rIns="0" bIns="0" anchor="t">
+            <a:spAutoFit/>
+          </a:bodyPr>
+          <a:lstStyle/>
+          <a:p>
+            <a:pPr algn="l">
               <a:lnSpc>
                 <a:spcPct val="115000"/>
               </a:lnSpc>
             </a:pPr>
             <a:r>
-              <a:rPr sz="1050" b="0" i="0">
+              <a:rPr sz="1100" b="0" i="0">
                 <a:solidFill>
                   <a:srgbClr val="5C6472"/>
                 </a:solidFill>
                 <a:latin typeface="JetBrains Mono"/>
               </a:rPr>
-              <a:t>Panel de alertas — sin cruces activos todavía</a:t>
-            </a:r>
-          </a:p>
-        </p:txBody>
-      </p:sp>
-      <p:sp>
-        <p:nvSpPr>
-          <p:cNvPr id="9" name="Rounded Rectangle 8"/>
-          <p:cNvSpPr/>
-          <p:nvPr/>
-        </p:nvSpPr>
-        <p:spPr>
-          <a:xfrm>
-            <a:off x="6091428" y="1267968"/>
-            <a:ext cx="5053584" cy="3215640"/>
-          </a:xfrm>
-          <a:prstGeom prst="roundRect">
-            <a:avLst>
-              <a:gd name="adj" fmla="val 3000"/>
-            </a:avLst>
-          </a:prstGeom>
-          <a:solidFill>
-            <a:srgbClr val="15191F"/>
-          </a:solidFill>
-          <a:ln w="15875">
-            <a:solidFill>
-              <a:srgbClr val="C9A45C"/>
-            </a:solidFill>
-          </a:ln>
-          <a:effectLst/>
-        </p:spPr>
-        <p:style>
-          <a:lnRef idx="1">
-            <a:schemeClr val="accent1"/>
-          </a:lnRef>
-          <a:fillRef idx="3">
-            <a:schemeClr val="accent1"/>
-          </a:fillRef>
-          <a:effectRef idx="2">
-            <a:schemeClr val="accent1"/>
-          </a:effectRef>
-          <a:fontRef idx="minor">
-            <a:schemeClr val="lt1"/>
-          </a:fontRef>
-        </p:style>
-        <p:txBody>
-          <a:bodyPr rtlCol="0" anchor="ctr"/>
-          <a:lstStyle/>
-          <a:p>
-            <a:pPr algn="ctr"/>
-          </a:p>
-        </p:txBody>
-      </p:sp>
-      <p:pic>
-        <p:nvPicPr>
-          <p:cNvPr id="10" name="Picture 9" descr="16-logout-vuelta-a-login.png"/>
-          <p:cNvPicPr>
-            <a:picLocks noChangeAspect="1"/>
-          </p:cNvPicPr>
-          <p:nvPr/>
-        </p:nvPicPr>
-        <p:blipFill>
-          <a:blip r:embed="rId3"/>
-          <a:stretch>
-            <a:fillRect/>
-          </a:stretch>
-        </p:blipFill>
-        <p:spPr>
-          <a:xfrm>
-            <a:off x="6167628" y="1344168"/>
-            <a:ext cx="4901184" cy="3063240"/>
-          </a:xfrm>
-          <a:prstGeom prst="rect">
-            <a:avLst/>
-          </a:prstGeom>
-        </p:spPr>
-      </p:pic>
-      <p:sp>
-        <p:nvSpPr>
-          <p:cNvPr id="11" name="TextBox 10"/>
-          <p:cNvSpPr txBox="1"/>
-          <p:nvPr/>
-        </p:nvSpPr>
-        <p:spPr>
-          <a:xfrm>
-            <a:off x="6091428" y="4538472"/>
-            <a:ext cx="5053584" cy="274320"/>
-          </a:xfrm>
-          <a:prstGeom prst="rect">
-            <a:avLst/>
-          </a:prstGeom>
-          <a:noFill/>
-        </p:spPr>
-        <p:txBody>
-          <a:bodyPr wrap="square" anchor="t" lIns="0" rIns="0" tIns="0" bIns="0">
-            <a:spAutoFit/>
-          </a:bodyPr>
-          <a:lstStyle/>
-          <a:p>
-            <a:pPr algn="ctr">
-              <a:lnSpc>
-                <a:spcPct val="115000"/>
-              </a:lnSpc>
-            </a:pPr>
-            <a:r>
-              <a:rPr sz="1050" b="0" i="0">
-                <a:solidFill>
-                  <a:srgbClr val="5C6472"/>
-                </a:solidFill>
-                <a:latin typeface="JetBrains Mono"/>
-              </a:rPr>
-              <a:t>Logout — vuelta limpia a la pantalla de acceso</a:t>
-            </a:r>
-          </a:p>
-        </p:txBody>
-      </p:sp>
-      <p:sp>
-        <p:nvSpPr>
-          <p:cNvPr id="12" name="TextBox 11"/>
-          <p:cNvSpPr txBox="1"/>
-          <p:nvPr/>
-        </p:nvSpPr>
-        <p:spPr>
-          <a:xfrm>
-            <a:off x="685800" y="5001768"/>
-            <a:ext cx="10607040" cy="1188720"/>
-          </a:xfrm>
-          <a:prstGeom prst="rect">
-            <a:avLst/>
-          </a:prstGeom>
-          <a:noFill/>
-        </p:spPr>
-        <p:txBody>
-          <a:bodyPr wrap="square" lIns="0" rIns="0" tIns="0" bIns="0">
-            <a:spAutoFit/>
-          </a:bodyPr>
-          <a:lstStyle/>
-          <a:p>
-            <a:pPr>
-              <a:lnSpc>
-                <a:spcPct val="125000"/>
-              </a:lnSpc>
-              <a:spcAft>
-                <a:spcPts val="400"/>
-              </a:spcAft>
-            </a:pPr>
-            <a:r>
-              <a:rPr sz="1300" b="1">
-                <a:solidFill>
-                  <a:srgbClr val="C9A45C"/>
-                </a:solidFill>
-                <a:latin typeface="Space Grotesk"/>
-              </a:rPr>
-              <a:t>▪  </a:t>
-            </a:r>
-            <a:r>
-              <a:rPr sz="1300" b="1">
-                <a:solidFill>
-                  <a:srgbClr val="E7E9ED"/>
-                </a:solidFill>
-                <a:latin typeface="Space Grotesk"/>
-              </a:rPr>
-              <a:t>El panel consolida todas las alertas activadas</a:t>
-            </a:r>
-            <a:r>
-              <a:rPr sz="1300">
-                <a:solidFill>
-                  <a:srgbClr val="99A0AB"/>
-                </a:solidFill>
-                <a:latin typeface="Space Grotesk"/>
-              </a:rPr>
-              <a:t> de la cartera completa, no solo de un activo.</a:t>
-            </a:r>
-          </a:p>
-          <a:p>
-            <a:pPr>
-              <a:lnSpc>
-                <a:spcPct val="125000"/>
-              </a:lnSpc>
-              <a:spcAft>
-                <a:spcPts val="400"/>
-              </a:spcAft>
-            </a:pPr>
-            <a:r>
-              <a:rPr sz="1300" b="1">
-                <a:solidFill>
-                  <a:srgbClr val="C9A45C"/>
-                </a:solidFill>
-                <a:latin typeface="Space Grotesk"/>
-              </a:rPr>
-              <a:t>▪  </a:t>
-            </a:r>
-            <a:r>
-              <a:rPr sz="1300" b="1">
-                <a:solidFill>
-                  <a:srgbClr val="E7E9ED"/>
-                </a:solidFill>
-                <a:latin typeface="Space Grotesk"/>
-              </a:rPr>
-              <a:t>Cerrar sesión limpia el estado en memoria</a:t>
-            </a:r>
-            <a:r>
-              <a:rPr sz="1300">
-                <a:solidFill>
-                  <a:srgbClr val="99A0AB"/>
-                </a:solidFill>
-                <a:latin typeface="Space Grotesk"/>
-              </a:rPr>
-              <a:t> y redirige a /login.</a:t>
-            </a:r>
-          </a:p>
-          <a:p>
-            <a:pPr>
-              <a:lnSpc>
-                <a:spcPct val="125000"/>
-              </a:lnSpc>
-              <a:spcAft>
-                <a:spcPts val="400"/>
-              </a:spcAft>
-            </a:pPr>
-            <a:r>
-              <a:rPr sz="1300" b="1">
-                <a:solidFill>
-                  <a:srgbClr val="C9A45C"/>
-                </a:solidFill>
-                <a:latin typeface="Space Grotesk"/>
-              </a:rPr>
-              <a:t>▪  </a:t>
-            </a:r>
-            <a:r>
-              <a:rPr sz="1300">
-                <a:solidFill>
-                  <a:srgbClr val="99A0AB"/>
-                </a:solidFill>
-                <a:latin typeface="Space Grotesk"/>
-              </a:rPr>
-              <a:t>Fin del recorrido en modo invitado — continúa con el recorrido de administrador</a:t>
-            </a:r>
-          </a:p>
-        </p:txBody>
-      </p:sp>
-      <p:sp>
-        <p:nvSpPr>
-          <p:cNvPr id="13" name="TextBox 12"/>
-          <p:cNvSpPr txBox="1"/>
-          <p:nvPr/>
-        </p:nvSpPr>
-        <p:spPr>
-          <a:xfrm>
-            <a:off x="685800" y="6473952"/>
-            <a:ext cx="5486400" cy="274320"/>
-          </a:xfrm>
-          <a:prstGeom prst="rect">
-            <a:avLst/>
-          </a:prstGeom>
-          <a:noFill/>
-        </p:spPr>
-        <p:txBody>
-          <a:bodyPr wrap="square" anchor="t" lIns="0" rIns="0" tIns="0" bIns="0">
-            <a:spAutoFit/>
-          </a:bodyPr>
-          <a:lstStyle/>
-          <a:p>
-            <a:pPr algn="l">
-              <a:lnSpc>
-                <a:spcPct val="115000"/>
-              </a:lnSpc>
-            </a:pPr>
-            <a:r>
-              <a:rPr sz="850" b="0" i="0">
-                <a:solidFill>
-                  <a:srgbClr val="5C6472"/>
-                </a:solidFill>
-                <a:latin typeface="JetBrains Mono"/>
-              </a:rPr>
-              <a:t>TFM BIGSCHOOL · GESTIÓN DE CARTERA FINANCIERA CON IA</a:t>
-            </a:r>
-          </a:p>
-        </p:txBody>
-      </p:sp>
-      <p:sp>
-        <p:nvSpPr>
-          <p:cNvPr id="14" name="TextBox 13"/>
-          <p:cNvSpPr txBox="1"/>
-          <p:nvPr/>
-        </p:nvSpPr>
-        <p:spPr>
-          <a:xfrm>
-            <a:off x="5943600" y="6473952"/>
-            <a:ext cx="4389120" cy="274320"/>
-          </a:xfrm>
-          <a:prstGeom prst="rect">
-            <a:avLst/>
-          </a:prstGeom>
-          <a:noFill/>
-        </p:spPr>
-        <p:txBody>
-          <a:bodyPr wrap="square" anchor="t" lIns="0" rIns="0" tIns="0" bIns="0">
-            <a:spAutoFit/>
-          </a:bodyPr>
-          <a:lstStyle/>
-          <a:p>
-            <a:pPr algn="r">
-              <a:lnSpc>
-                <a:spcPct val="115000"/>
-              </a:lnSpc>
-            </a:pPr>
-            <a:r>
-              <a:rPr sz="850" b="0" i="0">
-                <a:solidFill>
-                  <a:srgbClr val="5C6472"/>
-                </a:solidFill>
-                <a:latin typeface="JetBrains Mono"/>
-              </a:rPr>
-              <a:t>09 · RECORRIDO — INVITADO</a:t>
-            </a:r>
-          </a:p>
-        </p:txBody>
-      </p:sp>
-      <p:sp>
-        <p:nvSpPr>
-          <p:cNvPr id="15" name="TextBox 14"/>
-          <p:cNvSpPr txBox="1"/>
-          <p:nvPr/>
-        </p:nvSpPr>
-        <p:spPr>
-          <a:xfrm>
-            <a:off x="11475720" y="6473952"/>
-            <a:ext cx="548640" cy="274320"/>
-          </a:xfrm>
-          <a:prstGeom prst="rect">
-            <a:avLst/>
-          </a:prstGeom>
-          <a:noFill/>
-        </p:spPr>
-        <p:txBody>
-          <a:bodyPr wrap="square" anchor="t" lIns="0" rIns="0" tIns="0" bIns="0">
-            <a:spAutoFit/>
-          </a:bodyPr>
-          <a:lstStyle/>
-          <a:p>
-            <a:pPr algn="r">
-              <a:lnSpc>
-                <a:spcPct val="115000"/>
-              </a:lnSpc>
-            </a:pPr>
-            <a:r>
-              <a:rPr sz="850" b="0" i="0">
-                <a:solidFill>
-                  <a:srgbClr val="C9A45C"/>
-                </a:solidFill>
-                <a:latin typeface="JetBrains Mono"/>
-              </a:rPr>
-              <a:t>42</a:t>
-            </a:r>
-          </a:p>
-        </p:txBody>
-      </p:sp>
-      <p:sp>
-        <p:nvSpPr>
-          <p:cNvPr id="16" name="Rectangle 15"/>
-          <p:cNvSpPr/>
-          <p:nvPr/>
-        </p:nvSpPr>
-        <p:spPr>
-          <a:xfrm>
-            <a:off x="685800" y="6400800"/>
-            <a:ext cx="10817352" cy="9525"/>
-          </a:xfrm>
-          <a:prstGeom prst="rect">
-            <a:avLst/>
-          </a:prstGeom>
-          <a:solidFill>
-            <a:srgbClr val="1D222B"/>
-          </a:solidFill>
-          <a:ln>
-            <a:noFill/>
-          </a:ln>
-          <a:effectLst/>
-        </p:spPr>
-        <p:style>
-          <a:lnRef idx="1">
-            <a:schemeClr val="accent1"/>
-          </a:lnRef>
-          <a:fillRef idx="3">
-            <a:schemeClr val="accent1"/>
-          </a:fillRef>
-          <a:effectRef idx="2">
-            <a:schemeClr val="accent1"/>
-          </a:effectRef>
-          <a:fontRef idx="minor">
-            <a:schemeClr val="lt1"/>
-          </a:fontRef>
-        </p:style>
-        <p:txBody>
-          <a:bodyPr rtlCol="0" anchor="ctr"/>
-          <a:lstStyle/>
-          <a:p>
-            <a:pPr algn="ctr"/>
+              <a:t>github.com/romercepeda/TFM_BigSchool</a:t>
+            </a:r>
           </a:p>
         </p:txBody>
       </p:sp>
@@ -37691,7 +37603,7 @@
         </p:nvSpPr>
         <p:spPr>
           <a:xfrm>
-            <a:off x="685800" y="1874519"/>
+            <a:off x="685800" y="1629039"/>
             <a:ext cx="10789919" cy="384048"/>
           </a:xfrm>
           <a:prstGeom prst="roundRect">
@@ -37740,7 +37652,7 @@
         </p:nvSpPr>
         <p:spPr>
           <a:xfrm>
-            <a:off x="914400" y="1938527"/>
+            <a:off x="914400" y="1693047"/>
             <a:ext cx="2331720" cy="274320"/>
           </a:xfrm>
           <a:prstGeom prst="rect">
@@ -37779,7 +37691,7 @@
         </p:nvSpPr>
         <p:spPr>
           <a:xfrm>
-            <a:off x="3291840" y="1938527"/>
+            <a:off x="3291840" y="1693047"/>
             <a:ext cx="7955279" cy="274320"/>
           </a:xfrm>
           <a:prstGeom prst="rect">
@@ -37818,7 +37730,7 @@
         </p:nvSpPr>
         <p:spPr>
           <a:xfrm>
-            <a:off x="685800" y="2258567"/>
+            <a:off x="685800" y="2013087"/>
             <a:ext cx="10789919" cy="434340"/>
           </a:xfrm>
           <a:prstGeom prst="roundRect">
@@ -37867,7 +37779,7 @@
         </p:nvSpPr>
         <p:spPr>
           <a:xfrm>
-            <a:off x="914400" y="2359151"/>
+            <a:off x="914400" y="2113671"/>
             <a:ext cx="2331720" cy="342900"/>
           </a:xfrm>
           <a:prstGeom prst="rect">
@@ -37906,7 +37818,7 @@
         </p:nvSpPr>
         <p:spPr>
           <a:xfrm>
-            <a:off x="3291840" y="2359151"/>
+            <a:off x="3291840" y="2113671"/>
             <a:ext cx="7955279" cy="342900"/>
           </a:xfrm>
           <a:prstGeom prst="rect">
@@ -37945,7 +37857,7 @@
         </p:nvSpPr>
         <p:spPr>
           <a:xfrm>
-            <a:off x="914400" y="2793491"/>
+            <a:off x="914400" y="2548011"/>
             <a:ext cx="2331720" cy="342900"/>
           </a:xfrm>
           <a:prstGeom prst="rect">
@@ -37984,7 +37896,7 @@
         </p:nvSpPr>
         <p:spPr>
           <a:xfrm>
-            <a:off x="3291840" y="2793491"/>
+            <a:off x="3291840" y="2548011"/>
             <a:ext cx="7955279" cy="342900"/>
           </a:xfrm>
           <a:prstGeom prst="rect">
@@ -38023,7 +37935,7 @@
         </p:nvSpPr>
         <p:spPr>
           <a:xfrm>
-            <a:off x="685800" y="3127247"/>
+            <a:off x="685800" y="2881767"/>
             <a:ext cx="10789919" cy="434340"/>
           </a:xfrm>
           <a:prstGeom prst="roundRect">
@@ -38072,7 +37984,7 @@
         </p:nvSpPr>
         <p:spPr>
           <a:xfrm>
-            <a:off x="914400" y="3227831"/>
+            <a:off x="914400" y="2982351"/>
             <a:ext cx="2331720" cy="342900"/>
           </a:xfrm>
           <a:prstGeom prst="rect">
@@ -38111,7 +38023,7 @@
         </p:nvSpPr>
         <p:spPr>
           <a:xfrm>
-            <a:off x="3291840" y="3227831"/>
+            <a:off x="3291840" y="2982351"/>
             <a:ext cx="7955279" cy="342900"/>
           </a:xfrm>
           <a:prstGeom prst="rect">
@@ -38150,7 +38062,7 @@
         </p:nvSpPr>
         <p:spPr>
           <a:xfrm>
-            <a:off x="914400" y="3662171"/>
+            <a:off x="914400" y="3416691"/>
             <a:ext cx="2331720" cy="342900"/>
           </a:xfrm>
           <a:prstGeom prst="rect">
@@ -38189,7 +38101,7 @@
         </p:nvSpPr>
         <p:spPr>
           <a:xfrm>
-            <a:off x="3291840" y="3662171"/>
+            <a:off x="3291840" y="3416691"/>
             <a:ext cx="7955279" cy="342900"/>
           </a:xfrm>
           <a:prstGeom prst="rect">
@@ -38228,7 +38140,7 @@
         </p:nvSpPr>
         <p:spPr>
           <a:xfrm>
-            <a:off x="685800" y="3995927"/>
+            <a:off x="685800" y="3750447"/>
             <a:ext cx="10789919" cy="434340"/>
           </a:xfrm>
           <a:prstGeom prst="roundRect">
@@ -38277,7 +38189,7 @@
         </p:nvSpPr>
         <p:spPr>
           <a:xfrm>
-            <a:off x="914400" y="4096511"/>
+            <a:off x="914400" y="3851031"/>
             <a:ext cx="2331720" cy="342900"/>
           </a:xfrm>
           <a:prstGeom prst="rect">
@@ -38316,7 +38228,7 @@
         </p:nvSpPr>
         <p:spPr>
           <a:xfrm>
-            <a:off x="3291840" y="4096511"/>
+            <a:off x="3291840" y="3851031"/>
             <a:ext cx="7955279" cy="342900"/>
           </a:xfrm>
           <a:prstGeom prst="rect">
@@ -38355,7 +38267,7 @@
         </p:nvSpPr>
         <p:spPr>
           <a:xfrm>
-            <a:off x="914400" y="4530851"/>
+            <a:off x="914400" y="4285371"/>
             <a:ext cx="2331720" cy="342900"/>
           </a:xfrm>
           <a:prstGeom prst="rect">
@@ -38394,7 +38306,7 @@
         </p:nvSpPr>
         <p:spPr>
           <a:xfrm>
-            <a:off x="3291840" y="4530851"/>
+            <a:off x="3291840" y="4285371"/>
             <a:ext cx="7955279" cy="342900"/>
           </a:xfrm>
           <a:prstGeom prst="rect">
@@ -38433,7 +38345,7 @@
         </p:nvSpPr>
         <p:spPr>
           <a:xfrm>
-            <a:off x="685800" y="4864607"/>
+            <a:off x="685800" y="4619127"/>
             <a:ext cx="10789919" cy="434340"/>
           </a:xfrm>
           <a:prstGeom prst="roundRect">
@@ -38482,7 +38394,7 @@
         </p:nvSpPr>
         <p:spPr>
           <a:xfrm>
-            <a:off x="914400" y="4965191"/>
+            <a:off x="914400" y="4719711"/>
             <a:ext cx="2331720" cy="342900"/>
           </a:xfrm>
           <a:prstGeom prst="rect">
@@ -38521,7 +38433,7 @@
         </p:nvSpPr>
         <p:spPr>
           <a:xfrm>
-            <a:off x="3291840" y="4965191"/>
+            <a:off x="3291840" y="4719711"/>
             <a:ext cx="7955279" cy="342900"/>
           </a:xfrm>
           <a:prstGeom prst="rect">
@@ -38560,7 +38472,7 @@
         </p:nvSpPr>
         <p:spPr>
           <a:xfrm>
-            <a:off x="914400" y="5399531"/>
+            <a:off x="914400" y="5154051"/>
             <a:ext cx="2331720" cy="342900"/>
           </a:xfrm>
           <a:prstGeom prst="rect">
@@ -38599,7 +38511,7 @@
         </p:nvSpPr>
         <p:spPr>
           <a:xfrm>
-            <a:off x="3291840" y="5399531"/>
+            <a:off x="3291840" y="5154051"/>
             <a:ext cx="7955279" cy="342900"/>
           </a:xfrm>
           <a:prstGeom prst="rect">
@@ -38638,7 +38550,7 @@
         </p:nvSpPr>
         <p:spPr>
           <a:xfrm>
-            <a:off x="685800" y="5733287"/>
+            <a:off x="685800" y="5487807"/>
             <a:ext cx="10789919" cy="434340"/>
           </a:xfrm>
           <a:prstGeom prst="roundRect">
@@ -38687,7 +38599,7 @@
         </p:nvSpPr>
         <p:spPr>
           <a:xfrm>
-            <a:off x="914400" y="5833871"/>
+            <a:off x="914400" y="5588391"/>
             <a:ext cx="2331720" cy="342900"/>
           </a:xfrm>
           <a:prstGeom prst="rect">
@@ -38726,7 +38638,7 @@
         </p:nvSpPr>
         <p:spPr>
           <a:xfrm>
-            <a:off x="3291840" y="5833871"/>
+            <a:off x="3291840" y="5588391"/>
             <a:ext cx="7955279" cy="342900"/>
           </a:xfrm>
           <a:prstGeom prst="rect">
@@ -38765,7 +38677,7 @@
         </p:nvSpPr>
         <p:spPr>
           <a:xfrm>
-            <a:off x="914400" y="6268211"/>
+            <a:off x="914400" y="6022731"/>
             <a:ext cx="2331720" cy="342900"/>
           </a:xfrm>
           <a:prstGeom prst="rect">
@@ -38804,7 +38716,7 @@
         </p:nvSpPr>
         <p:spPr>
           <a:xfrm>
-            <a:off x="3291840" y="6268211"/>
+            <a:off x="3291840" y="6022731"/>
             <a:ext cx="7955279" cy="342900"/>
           </a:xfrm>
           <a:prstGeom prst="rect">
